--- a/presentations/CANTOS_PPT.pptx
+++ b/presentations/CANTOS_PPT.pptx
@@ -5,13 +5,17 @@
     <p:sldMasterId id="2147483672" r:id="rId4"/>
   </p:sldMasterIdLst>
   <p:notesMasterIdLst>
-    <p:notesMasterId r:id="rId9"/>
+    <p:notesMasterId r:id="rId13"/>
   </p:notesMasterIdLst>
   <p:sldIdLst>
     <p:sldId id="256" r:id="rId5"/>
     <p:sldId id="257" r:id="rId6"/>
-    <p:sldId id="259" r:id="rId7"/>
-    <p:sldId id="258" r:id="rId8"/>
+    <p:sldId id="260" r:id="rId7"/>
+    <p:sldId id="261" r:id="rId8"/>
+    <p:sldId id="262" r:id="rId9"/>
+    <p:sldId id="263" r:id="rId10"/>
+    <p:sldId id="259" r:id="rId11"/>
+    <p:sldId id="258" r:id="rId12"/>
   </p:sldIdLst>
   <p:sldSz cx="12192000" cy="6858000"/>
   <p:notesSz cx="6858000" cy="9144000"/>
@@ -1766,33 +1770,190 @@
           </a:p>
         </p:txBody>
       </p:sp>
-      <p:sp>
-        <p:nvSpPr>
-          <p:cNvPr id="6" name="Content Placeholder 5">
-            <a:extLst>
-              <a:ext uri="{FF2B5EF4-FFF2-40B4-BE49-F238E27FC236}">
-                <a16:creationId xmlns:a16="http://schemas.microsoft.com/office/drawing/2014/main" id="{E5195350-C016-8384-FB0B-8AF85C4CBBB8}"/>
-              </a:ext>
-            </a:extLst>
-          </p:cNvPr>
-          <p:cNvSpPr>
-            <a:spLocks noGrp="1"/>
-          </p:cNvSpPr>
+      <p:pic>
+        <p:nvPicPr>
+          <p:cNvPr id="7" name="Picture 6" descr="A blue and black logo&#10;&#10;Description automatically generated">
+            <a:extLst>
+              <a:ext uri="{FF2B5EF4-FFF2-40B4-BE49-F238E27FC236}">
+                <a16:creationId xmlns:a16="http://schemas.microsoft.com/office/drawing/2014/main" id="{AA18857C-B046-09F1-9416-720821612124}"/>
+              </a:ext>
+            </a:extLst>
+          </p:cNvPr>
+          <p:cNvPicPr>
+            <a:picLocks noChangeAspect="1"/>
+          </p:cNvPicPr>
+          <p:nvPr/>
+        </p:nvPicPr>
+        <p:blipFill>
+          <a:blip r:embed="rId2"/>
+          <a:stretch>
+            <a:fillRect/>
+          </a:stretch>
+        </p:blipFill>
+        <p:spPr>
+          <a:xfrm>
+            <a:off x="395039" y="48364021"/>
+            <a:ext cx="3640413" cy="2928450"/>
+          </a:xfrm>
+          <a:prstGeom prst="rect">
+            <a:avLst/>
+          </a:prstGeom>
+        </p:spPr>
+      </p:pic>
+      <p:pic>
+        <p:nvPicPr>
+          <p:cNvPr id="8" name="Picture 7" descr="A blue and black logo&#10;&#10;Description automatically generated">
+            <a:extLst>
+              <a:ext uri="{FF2B5EF4-FFF2-40B4-BE49-F238E27FC236}">
+                <a16:creationId xmlns:a16="http://schemas.microsoft.com/office/drawing/2014/main" id="{3007CFA9-434F-8970-63DB-3BEDE685070B}"/>
+              </a:ext>
+            </a:extLst>
+          </p:cNvPr>
+          <p:cNvPicPr>
+            <a:picLocks noChangeAspect="1"/>
+          </p:cNvPicPr>
+          <p:nvPr/>
+        </p:nvPicPr>
+        <p:blipFill>
+          <a:blip r:embed="rId2"/>
+          <a:stretch>
+            <a:fillRect/>
+          </a:stretch>
+        </p:blipFill>
+        <p:spPr>
+          <a:xfrm>
+            <a:off x="547439" y="48516421"/>
+            <a:ext cx="3640413" cy="2928450"/>
+          </a:xfrm>
+          <a:prstGeom prst="rect">
+            <a:avLst/>
+          </a:prstGeom>
+        </p:spPr>
+      </p:pic>
+      <p:pic>
+        <p:nvPicPr>
+          <p:cNvPr id="9" name="Content Placeholder 8" descr="A blue and black logo&#10;&#10;Description automatically generated">
+            <a:extLst>
+              <a:ext uri="{FF2B5EF4-FFF2-40B4-BE49-F238E27FC236}">
+                <a16:creationId xmlns:a16="http://schemas.microsoft.com/office/drawing/2014/main" id="{2F43AB81-9950-65C5-AE75-3C6ED7B101BD}"/>
+              </a:ext>
+            </a:extLst>
+          </p:cNvPr>
+          <p:cNvPicPr>
+            <a:picLocks noGrp="1" noChangeAspect="1"/>
+          </p:cNvPicPr>
           <p:nvPr>
             <p:ph idx="1"/>
           </p:nvPr>
-        </p:nvSpPr>
-        <p:spPr>
-          <a:xfrm>
-            <a:off x="165984" y="989256"/>
-            <a:ext cx="11010595" cy="3895344"/>
-          </a:xfrm>
-        </p:spPr>
-        <p:txBody>
-          <a:bodyPr/>
-          <a:lstStyle/>
-          <a:p>
-            <a:endParaRPr lang="en-US" dirty="0"/>
+        </p:nvPicPr>
+        <p:blipFill>
+          <a:blip r:embed="rId2"/>
+          <a:stretch>
+            <a:fillRect/>
+          </a:stretch>
+        </p:blipFill>
+        <p:spPr>
+          <a:xfrm>
+            <a:off x="547439" y="1517867"/>
+            <a:ext cx="1782457" cy="1433858"/>
+          </a:xfrm>
+          <a:prstGeom prst="rect">
+            <a:avLst/>
+          </a:prstGeom>
+        </p:spPr>
+      </p:pic>
+      <p:sp>
+        <p:nvSpPr>
+          <p:cNvPr id="13" name="Rectangle 12">
+            <a:extLst>
+              <a:ext uri="{FF2B5EF4-FFF2-40B4-BE49-F238E27FC236}">
+                <a16:creationId xmlns:a16="http://schemas.microsoft.com/office/drawing/2014/main" id="{B3B92896-E57F-5C6E-81D3-86816D039FB4}"/>
+              </a:ext>
+            </a:extLst>
+          </p:cNvPr>
+          <p:cNvSpPr/>
+          <p:nvPr/>
+        </p:nvSpPr>
+        <p:spPr>
+          <a:xfrm>
+            <a:off x="3743847" y="1596510"/>
+            <a:ext cx="2123552" cy="1052167"/>
+          </a:xfrm>
+          <a:prstGeom prst="rect">
+            <a:avLst/>
+          </a:prstGeom>
+        </p:spPr>
+        <p:style>
+          <a:lnRef idx="2">
+            <a:schemeClr val="accent1">
+              <a:shade val="15000"/>
+            </a:schemeClr>
+          </a:lnRef>
+          <a:fillRef idx="1">
+            <a:schemeClr val="accent1"/>
+          </a:fillRef>
+          <a:effectRef idx="0">
+            <a:schemeClr val="accent1"/>
+          </a:effectRef>
+          <a:fontRef idx="minor">
+            <a:schemeClr val="lt1"/>
+          </a:fontRef>
+        </p:style>
+        <p:txBody>
+          <a:bodyPr rtlCol="0" anchor="ctr"/>
+          <a:lstStyle/>
+          <a:p>
+            <a:pPr algn="ctr"/>
+            <a:r>
+              <a:rPr lang="en-US" dirty="0"/>
+              <a:t>Approx 500k studies, all 50 US states and 223 countries</a:t>
+            </a:r>
+          </a:p>
+        </p:txBody>
+      </p:sp>
+      <p:sp>
+        <p:nvSpPr>
+          <p:cNvPr id="23" name="Right Arrow 22">
+            <a:extLst>
+              <a:ext uri="{FF2B5EF4-FFF2-40B4-BE49-F238E27FC236}">
+                <a16:creationId xmlns:a16="http://schemas.microsoft.com/office/drawing/2014/main" id="{379600C1-4BE1-99D6-DA05-2F684F20672C}"/>
+              </a:ext>
+            </a:extLst>
+          </p:cNvPr>
+          <p:cNvSpPr/>
+          <p:nvPr/>
+        </p:nvSpPr>
+        <p:spPr>
+          <a:xfrm>
+            <a:off x="2524124" y="1825019"/>
+            <a:ext cx="1025495" cy="529839"/>
+          </a:xfrm>
+          <a:prstGeom prst="rightArrow">
+            <a:avLst/>
+          </a:prstGeom>
+        </p:spPr>
+        <p:style>
+          <a:lnRef idx="2">
+            <a:schemeClr val="accent1">
+              <a:shade val="15000"/>
+            </a:schemeClr>
+          </a:lnRef>
+          <a:fillRef idx="1">
+            <a:schemeClr val="accent1"/>
+          </a:fillRef>
+          <a:effectRef idx="0">
+            <a:schemeClr val="accent1"/>
+          </a:effectRef>
+          <a:fontRef idx="minor">
+            <a:schemeClr val="lt1"/>
+          </a:fontRef>
+        </p:style>
+        <p:txBody>
+          <a:bodyPr rtlCol="0" anchor="ctr"/>
+          <a:lstStyle/>
+          <a:p>
+            <a:pPr algn="ctr"/>
+            <a:endParaRPr lang="en-US"/>
           </a:p>
         </p:txBody>
       </p:sp>
@@ -1810,6 +1971,2496 @@
 </file>
 
 <file path=ppt/slides/slide3.xml><?xml version="1.0" encoding="utf-8"?>
+<p:sld xmlns:a="http://schemas.openxmlformats.org/drawingml/2006/main" xmlns:r="http://schemas.openxmlformats.org/officeDocument/2006/relationships" xmlns:p="http://schemas.openxmlformats.org/presentationml/2006/main">
+  <p:cSld>
+    <p:spTree>
+      <p:nvGrpSpPr>
+        <p:cNvPr id="1" name="">
+          <a:extLst>
+            <a:ext uri="{FF2B5EF4-FFF2-40B4-BE49-F238E27FC236}">
+              <a16:creationId xmlns:a16="http://schemas.microsoft.com/office/drawing/2014/main" id="{2792652D-5529-680B-A167-1C44C4A42A17}"/>
+            </a:ext>
+          </a:extLst>
+        </p:cNvPr>
+        <p:cNvGrpSpPr/>
+        <p:nvPr/>
+      </p:nvGrpSpPr>
+      <p:grpSpPr>
+        <a:xfrm>
+          <a:off x="0" y="0"/>
+          <a:ext cx="0" cy="0"/>
+          <a:chOff x="0" y="0"/>
+          <a:chExt cx="0" cy="0"/>
+        </a:xfrm>
+      </p:grpSpPr>
+      <p:sp>
+        <p:nvSpPr>
+          <p:cNvPr id="2" name="Title 1">
+            <a:extLst>
+              <a:ext uri="{FF2B5EF4-FFF2-40B4-BE49-F238E27FC236}">
+                <a16:creationId xmlns:a16="http://schemas.microsoft.com/office/drawing/2014/main" id="{2F510EA6-7D6C-7E19-1CD8-E54A6787B37B}"/>
+              </a:ext>
+            </a:extLst>
+          </p:cNvPr>
+          <p:cNvSpPr>
+            <a:spLocks noGrp="1"/>
+          </p:cNvSpPr>
+          <p:nvPr>
+            <p:ph type="title"/>
+          </p:nvPr>
+        </p:nvSpPr>
+        <p:spPr>
+          <a:xfrm>
+            <a:off x="165984" y="-12879"/>
+            <a:ext cx="10651402" cy="1143000"/>
+          </a:xfrm>
+        </p:spPr>
+        <p:txBody>
+          <a:bodyPr/>
+          <a:lstStyle/>
+          <a:p>
+            <a:r>
+              <a:rPr lang="en-US" dirty="0"/>
+              <a:t>Background		</a:t>
+            </a:r>
+          </a:p>
+        </p:txBody>
+      </p:sp>
+      <p:sp>
+        <p:nvSpPr>
+          <p:cNvPr id="4" name="Slide Number Placeholder 3">
+            <a:extLst>
+              <a:ext uri="{FF2B5EF4-FFF2-40B4-BE49-F238E27FC236}">
+                <a16:creationId xmlns:a16="http://schemas.microsoft.com/office/drawing/2014/main" id="{9043F883-275D-4544-F0B9-E35E9067DC80}"/>
+              </a:ext>
+            </a:extLst>
+          </p:cNvPr>
+          <p:cNvSpPr>
+            <a:spLocks noGrp="1"/>
+          </p:cNvSpPr>
+          <p:nvPr>
+            <p:ph type="sldNum" sz="quarter" idx="12"/>
+          </p:nvPr>
+        </p:nvSpPr>
+        <p:spPr/>
+        <p:txBody>
+          <a:bodyPr/>
+          <a:lstStyle/>
+          <a:p>
+            <a:fld id="{AD40181A-01B0-4CB8-8614-1473649F6741}" type="slidenum">
+              <a:rPr lang="en-US" smtClean="0">
+                <a:solidFill>
+                  <a:schemeClr val="bg1"/>
+                </a:solidFill>
+              </a:rPr>
+              <a:t>3</a:t>
+            </a:fld>
+            <a:endParaRPr lang="en-US" dirty="0">
+              <a:solidFill>
+                <a:schemeClr val="bg1"/>
+              </a:solidFill>
+            </a:endParaRPr>
+          </a:p>
+        </p:txBody>
+      </p:sp>
+      <p:pic>
+        <p:nvPicPr>
+          <p:cNvPr id="7" name="Picture 6" descr="A blue and black logo&#10;&#10;Description automatically generated">
+            <a:extLst>
+              <a:ext uri="{FF2B5EF4-FFF2-40B4-BE49-F238E27FC236}">
+                <a16:creationId xmlns:a16="http://schemas.microsoft.com/office/drawing/2014/main" id="{40DC8898-86B4-57BF-1948-1FEE81AD7CB1}"/>
+              </a:ext>
+            </a:extLst>
+          </p:cNvPr>
+          <p:cNvPicPr>
+            <a:picLocks noChangeAspect="1"/>
+          </p:cNvPicPr>
+          <p:nvPr/>
+        </p:nvPicPr>
+        <p:blipFill>
+          <a:blip r:embed="rId2"/>
+          <a:stretch>
+            <a:fillRect/>
+          </a:stretch>
+        </p:blipFill>
+        <p:spPr>
+          <a:xfrm>
+            <a:off x="395039" y="48364021"/>
+            <a:ext cx="3640413" cy="2928450"/>
+          </a:xfrm>
+          <a:prstGeom prst="rect">
+            <a:avLst/>
+          </a:prstGeom>
+        </p:spPr>
+      </p:pic>
+      <p:pic>
+        <p:nvPicPr>
+          <p:cNvPr id="8" name="Picture 7" descr="A blue and black logo&#10;&#10;Description automatically generated">
+            <a:extLst>
+              <a:ext uri="{FF2B5EF4-FFF2-40B4-BE49-F238E27FC236}">
+                <a16:creationId xmlns:a16="http://schemas.microsoft.com/office/drawing/2014/main" id="{DDAC97F1-143B-0FFF-28AB-F39804DAA7F0}"/>
+              </a:ext>
+            </a:extLst>
+          </p:cNvPr>
+          <p:cNvPicPr>
+            <a:picLocks noChangeAspect="1"/>
+          </p:cNvPicPr>
+          <p:nvPr/>
+        </p:nvPicPr>
+        <p:blipFill>
+          <a:blip r:embed="rId2"/>
+          <a:stretch>
+            <a:fillRect/>
+          </a:stretch>
+        </p:blipFill>
+        <p:spPr>
+          <a:xfrm>
+            <a:off x="547439" y="48516421"/>
+            <a:ext cx="3640413" cy="2928450"/>
+          </a:xfrm>
+          <a:prstGeom prst="rect">
+            <a:avLst/>
+          </a:prstGeom>
+        </p:spPr>
+      </p:pic>
+      <p:pic>
+        <p:nvPicPr>
+          <p:cNvPr id="9" name="Content Placeholder 8" descr="A blue and black logo&#10;&#10;Description automatically generated">
+            <a:extLst>
+              <a:ext uri="{FF2B5EF4-FFF2-40B4-BE49-F238E27FC236}">
+                <a16:creationId xmlns:a16="http://schemas.microsoft.com/office/drawing/2014/main" id="{8A1724EC-1264-943A-5FE8-A03AEF194515}"/>
+              </a:ext>
+            </a:extLst>
+          </p:cNvPr>
+          <p:cNvPicPr>
+            <a:picLocks noGrp="1" noChangeAspect="1"/>
+          </p:cNvPicPr>
+          <p:nvPr>
+            <p:ph idx="1"/>
+          </p:nvPr>
+        </p:nvPicPr>
+        <p:blipFill>
+          <a:blip r:embed="rId2"/>
+          <a:stretch>
+            <a:fillRect/>
+          </a:stretch>
+        </p:blipFill>
+        <p:spPr>
+          <a:xfrm>
+            <a:off x="547439" y="1517867"/>
+            <a:ext cx="1782457" cy="1433858"/>
+          </a:xfrm>
+          <a:prstGeom prst="rect">
+            <a:avLst/>
+          </a:prstGeom>
+        </p:spPr>
+      </p:pic>
+      <p:sp>
+        <p:nvSpPr>
+          <p:cNvPr id="10" name="Rectangle 9">
+            <a:extLst>
+              <a:ext uri="{FF2B5EF4-FFF2-40B4-BE49-F238E27FC236}">
+                <a16:creationId xmlns:a16="http://schemas.microsoft.com/office/drawing/2014/main" id="{DD656638-5CDC-27E2-7B42-F66CAD1B7302}"/>
+              </a:ext>
+            </a:extLst>
+          </p:cNvPr>
+          <p:cNvSpPr/>
+          <p:nvPr/>
+        </p:nvSpPr>
+        <p:spPr>
+          <a:xfrm>
+            <a:off x="7322604" y="1596510"/>
+            <a:ext cx="2345271" cy="1001724"/>
+          </a:xfrm>
+          <a:prstGeom prst="rect">
+            <a:avLst/>
+          </a:prstGeom>
+        </p:spPr>
+        <p:style>
+          <a:lnRef idx="2">
+            <a:schemeClr val="accent1">
+              <a:shade val="15000"/>
+            </a:schemeClr>
+          </a:lnRef>
+          <a:fillRef idx="1">
+            <a:schemeClr val="accent1"/>
+          </a:fillRef>
+          <a:effectRef idx="0">
+            <a:schemeClr val="accent1"/>
+          </a:effectRef>
+          <a:fontRef idx="minor">
+            <a:schemeClr val="lt1"/>
+          </a:fontRef>
+        </p:style>
+        <p:txBody>
+          <a:bodyPr rtlCol="0" anchor="ctr"/>
+          <a:lstStyle/>
+          <a:p>
+            <a:pPr algn="ctr"/>
+            <a:r>
+              <a:rPr lang="en-US" dirty="0"/>
+              <a:t>Drug-Disease Relationships</a:t>
+            </a:r>
+          </a:p>
+        </p:txBody>
+      </p:sp>
+      <p:sp>
+        <p:nvSpPr>
+          <p:cNvPr id="13" name="Rectangle 12">
+            <a:extLst>
+              <a:ext uri="{FF2B5EF4-FFF2-40B4-BE49-F238E27FC236}">
+                <a16:creationId xmlns:a16="http://schemas.microsoft.com/office/drawing/2014/main" id="{1552BA12-BCB8-162A-9F27-466BC0C5BD57}"/>
+              </a:ext>
+            </a:extLst>
+          </p:cNvPr>
+          <p:cNvSpPr/>
+          <p:nvPr/>
+        </p:nvSpPr>
+        <p:spPr>
+          <a:xfrm>
+            <a:off x="3743847" y="1596510"/>
+            <a:ext cx="2123552" cy="1052167"/>
+          </a:xfrm>
+          <a:prstGeom prst="rect">
+            <a:avLst/>
+          </a:prstGeom>
+        </p:spPr>
+        <p:style>
+          <a:lnRef idx="2">
+            <a:schemeClr val="accent1">
+              <a:shade val="15000"/>
+            </a:schemeClr>
+          </a:lnRef>
+          <a:fillRef idx="1">
+            <a:schemeClr val="accent1"/>
+          </a:fillRef>
+          <a:effectRef idx="0">
+            <a:schemeClr val="accent1"/>
+          </a:effectRef>
+          <a:fontRef idx="minor">
+            <a:schemeClr val="lt1"/>
+          </a:fontRef>
+        </p:style>
+        <p:txBody>
+          <a:bodyPr rtlCol="0" anchor="ctr"/>
+          <a:lstStyle/>
+          <a:p>
+            <a:pPr algn="ctr"/>
+            <a:r>
+              <a:rPr lang="en-US" dirty="0"/>
+              <a:t>Approx 500k studies, all 50 US states and 223 countries</a:t>
+            </a:r>
+          </a:p>
+        </p:txBody>
+      </p:sp>
+      <p:sp>
+        <p:nvSpPr>
+          <p:cNvPr id="22" name="Right Arrow 21">
+            <a:extLst>
+              <a:ext uri="{FF2B5EF4-FFF2-40B4-BE49-F238E27FC236}">
+                <a16:creationId xmlns:a16="http://schemas.microsoft.com/office/drawing/2014/main" id="{877111A2-86D6-BD1C-0EA3-959DC8F720B8}"/>
+              </a:ext>
+            </a:extLst>
+          </p:cNvPr>
+          <p:cNvSpPr/>
+          <p:nvPr/>
+        </p:nvSpPr>
+        <p:spPr>
+          <a:xfrm>
+            <a:off x="6061627" y="1857673"/>
+            <a:ext cx="1025495" cy="529839"/>
+          </a:xfrm>
+          <a:prstGeom prst="rightArrow">
+            <a:avLst/>
+          </a:prstGeom>
+        </p:spPr>
+        <p:style>
+          <a:lnRef idx="2">
+            <a:schemeClr val="accent1">
+              <a:shade val="15000"/>
+            </a:schemeClr>
+          </a:lnRef>
+          <a:fillRef idx="1">
+            <a:schemeClr val="accent1"/>
+          </a:fillRef>
+          <a:effectRef idx="0">
+            <a:schemeClr val="accent1"/>
+          </a:effectRef>
+          <a:fontRef idx="minor">
+            <a:schemeClr val="lt1"/>
+          </a:fontRef>
+        </p:style>
+        <p:txBody>
+          <a:bodyPr rtlCol="0" anchor="ctr"/>
+          <a:lstStyle/>
+          <a:p>
+            <a:pPr algn="ctr"/>
+            <a:endParaRPr lang="en-US"/>
+          </a:p>
+        </p:txBody>
+      </p:sp>
+      <p:sp>
+        <p:nvSpPr>
+          <p:cNvPr id="23" name="Right Arrow 22">
+            <a:extLst>
+              <a:ext uri="{FF2B5EF4-FFF2-40B4-BE49-F238E27FC236}">
+                <a16:creationId xmlns:a16="http://schemas.microsoft.com/office/drawing/2014/main" id="{2D5791DC-CF64-996C-DD47-DC43E8C1C89B}"/>
+              </a:ext>
+            </a:extLst>
+          </p:cNvPr>
+          <p:cNvSpPr/>
+          <p:nvPr/>
+        </p:nvSpPr>
+        <p:spPr>
+          <a:xfrm>
+            <a:off x="2524124" y="1825019"/>
+            <a:ext cx="1025495" cy="529839"/>
+          </a:xfrm>
+          <a:prstGeom prst="rightArrow">
+            <a:avLst/>
+          </a:prstGeom>
+        </p:spPr>
+        <p:style>
+          <a:lnRef idx="2">
+            <a:schemeClr val="accent1">
+              <a:shade val="15000"/>
+            </a:schemeClr>
+          </a:lnRef>
+          <a:fillRef idx="1">
+            <a:schemeClr val="accent1"/>
+          </a:fillRef>
+          <a:effectRef idx="0">
+            <a:schemeClr val="accent1"/>
+          </a:effectRef>
+          <a:fontRef idx="minor">
+            <a:schemeClr val="lt1"/>
+          </a:fontRef>
+        </p:style>
+        <p:txBody>
+          <a:bodyPr rtlCol="0" anchor="ctr"/>
+          <a:lstStyle/>
+          <a:p>
+            <a:pPr algn="ctr"/>
+            <a:endParaRPr lang="en-US"/>
+          </a:p>
+        </p:txBody>
+      </p:sp>
+    </p:spTree>
+    <p:extLst>
+      <p:ext uri="{BB962C8B-B14F-4D97-AF65-F5344CB8AC3E}">
+        <p14:creationId xmlns:p14="http://schemas.microsoft.com/office/powerpoint/2010/main" val="828482840"/>
+      </p:ext>
+    </p:extLst>
+  </p:cSld>
+  <p:clrMapOvr>
+    <a:masterClrMapping/>
+  </p:clrMapOvr>
+</p:sld>
+</file>
+
+<file path=ppt/slides/slide4.xml><?xml version="1.0" encoding="utf-8"?>
+<p:sld xmlns:a="http://schemas.openxmlformats.org/drawingml/2006/main" xmlns:r="http://schemas.openxmlformats.org/officeDocument/2006/relationships" xmlns:p="http://schemas.openxmlformats.org/presentationml/2006/main">
+  <p:cSld>
+    <p:spTree>
+      <p:nvGrpSpPr>
+        <p:cNvPr id="1" name="">
+          <a:extLst>
+            <a:ext uri="{FF2B5EF4-FFF2-40B4-BE49-F238E27FC236}">
+              <a16:creationId xmlns:a16="http://schemas.microsoft.com/office/drawing/2014/main" id="{AC09C0FB-6016-6F0F-EB3E-4B438E475F4F}"/>
+            </a:ext>
+          </a:extLst>
+        </p:cNvPr>
+        <p:cNvGrpSpPr/>
+        <p:nvPr/>
+      </p:nvGrpSpPr>
+      <p:grpSpPr>
+        <a:xfrm>
+          <a:off x="0" y="0"/>
+          <a:ext cx="0" cy="0"/>
+          <a:chOff x="0" y="0"/>
+          <a:chExt cx="0" cy="0"/>
+        </a:xfrm>
+      </p:grpSpPr>
+      <p:sp>
+        <p:nvSpPr>
+          <p:cNvPr id="2" name="Title 1">
+            <a:extLst>
+              <a:ext uri="{FF2B5EF4-FFF2-40B4-BE49-F238E27FC236}">
+                <a16:creationId xmlns:a16="http://schemas.microsoft.com/office/drawing/2014/main" id="{3B2C9B35-B9B8-FB5A-B6AC-AFE889852AE9}"/>
+              </a:ext>
+            </a:extLst>
+          </p:cNvPr>
+          <p:cNvSpPr>
+            <a:spLocks noGrp="1"/>
+          </p:cNvSpPr>
+          <p:nvPr>
+            <p:ph type="title"/>
+          </p:nvPr>
+        </p:nvSpPr>
+        <p:spPr>
+          <a:xfrm>
+            <a:off x="165984" y="-12879"/>
+            <a:ext cx="10651402" cy="1143000"/>
+          </a:xfrm>
+        </p:spPr>
+        <p:txBody>
+          <a:bodyPr/>
+          <a:lstStyle/>
+          <a:p>
+            <a:r>
+              <a:rPr lang="en-US" dirty="0"/>
+              <a:t>Background		</a:t>
+            </a:r>
+          </a:p>
+        </p:txBody>
+      </p:sp>
+      <p:sp>
+        <p:nvSpPr>
+          <p:cNvPr id="4" name="Slide Number Placeholder 3">
+            <a:extLst>
+              <a:ext uri="{FF2B5EF4-FFF2-40B4-BE49-F238E27FC236}">
+                <a16:creationId xmlns:a16="http://schemas.microsoft.com/office/drawing/2014/main" id="{B689177F-49C3-DF0A-09BB-F7255201DC99}"/>
+              </a:ext>
+            </a:extLst>
+          </p:cNvPr>
+          <p:cNvSpPr>
+            <a:spLocks noGrp="1"/>
+          </p:cNvSpPr>
+          <p:nvPr>
+            <p:ph type="sldNum" sz="quarter" idx="12"/>
+          </p:nvPr>
+        </p:nvSpPr>
+        <p:spPr/>
+        <p:txBody>
+          <a:bodyPr/>
+          <a:lstStyle/>
+          <a:p>
+            <a:fld id="{AD40181A-01B0-4CB8-8614-1473649F6741}" type="slidenum">
+              <a:rPr lang="en-US" smtClean="0">
+                <a:solidFill>
+                  <a:schemeClr val="bg1"/>
+                </a:solidFill>
+              </a:rPr>
+              <a:t>4</a:t>
+            </a:fld>
+            <a:endParaRPr lang="en-US" dirty="0">
+              <a:solidFill>
+                <a:schemeClr val="bg1"/>
+              </a:solidFill>
+            </a:endParaRPr>
+          </a:p>
+        </p:txBody>
+      </p:sp>
+      <p:pic>
+        <p:nvPicPr>
+          <p:cNvPr id="7" name="Picture 6" descr="A blue and black logo&#10;&#10;Description automatically generated">
+            <a:extLst>
+              <a:ext uri="{FF2B5EF4-FFF2-40B4-BE49-F238E27FC236}">
+                <a16:creationId xmlns:a16="http://schemas.microsoft.com/office/drawing/2014/main" id="{A47F5C01-DA34-79F5-CB9E-3E6DCCF42C0C}"/>
+              </a:ext>
+            </a:extLst>
+          </p:cNvPr>
+          <p:cNvPicPr>
+            <a:picLocks noChangeAspect="1"/>
+          </p:cNvPicPr>
+          <p:nvPr/>
+        </p:nvPicPr>
+        <p:blipFill>
+          <a:blip r:embed="rId2"/>
+          <a:stretch>
+            <a:fillRect/>
+          </a:stretch>
+        </p:blipFill>
+        <p:spPr>
+          <a:xfrm>
+            <a:off x="395039" y="48364021"/>
+            <a:ext cx="3640413" cy="2928450"/>
+          </a:xfrm>
+          <a:prstGeom prst="rect">
+            <a:avLst/>
+          </a:prstGeom>
+        </p:spPr>
+      </p:pic>
+      <p:pic>
+        <p:nvPicPr>
+          <p:cNvPr id="8" name="Picture 7" descr="A blue and black logo&#10;&#10;Description automatically generated">
+            <a:extLst>
+              <a:ext uri="{FF2B5EF4-FFF2-40B4-BE49-F238E27FC236}">
+                <a16:creationId xmlns:a16="http://schemas.microsoft.com/office/drawing/2014/main" id="{7C17AAD4-0BBC-7EDF-DCDB-CC6D21F946CE}"/>
+              </a:ext>
+            </a:extLst>
+          </p:cNvPr>
+          <p:cNvPicPr>
+            <a:picLocks noChangeAspect="1"/>
+          </p:cNvPicPr>
+          <p:nvPr/>
+        </p:nvPicPr>
+        <p:blipFill>
+          <a:blip r:embed="rId2"/>
+          <a:stretch>
+            <a:fillRect/>
+          </a:stretch>
+        </p:blipFill>
+        <p:spPr>
+          <a:xfrm>
+            <a:off x="547439" y="48516421"/>
+            <a:ext cx="3640413" cy="2928450"/>
+          </a:xfrm>
+          <a:prstGeom prst="rect">
+            <a:avLst/>
+          </a:prstGeom>
+        </p:spPr>
+      </p:pic>
+      <p:pic>
+        <p:nvPicPr>
+          <p:cNvPr id="9" name="Content Placeholder 8" descr="A blue and black logo&#10;&#10;Description automatically generated">
+            <a:extLst>
+              <a:ext uri="{FF2B5EF4-FFF2-40B4-BE49-F238E27FC236}">
+                <a16:creationId xmlns:a16="http://schemas.microsoft.com/office/drawing/2014/main" id="{C9DB618C-07FF-8DC4-E3CC-A2420C3DA134}"/>
+              </a:ext>
+            </a:extLst>
+          </p:cNvPr>
+          <p:cNvPicPr>
+            <a:picLocks noGrp="1" noChangeAspect="1"/>
+          </p:cNvPicPr>
+          <p:nvPr>
+            <p:ph idx="1"/>
+          </p:nvPr>
+        </p:nvPicPr>
+        <p:blipFill>
+          <a:blip r:embed="rId2"/>
+          <a:stretch>
+            <a:fillRect/>
+          </a:stretch>
+        </p:blipFill>
+        <p:spPr>
+          <a:xfrm>
+            <a:off x="547439" y="1517867"/>
+            <a:ext cx="1782457" cy="1433858"/>
+          </a:xfrm>
+          <a:prstGeom prst="rect">
+            <a:avLst/>
+          </a:prstGeom>
+        </p:spPr>
+      </p:pic>
+      <p:sp>
+        <p:nvSpPr>
+          <p:cNvPr id="10" name="Rectangle 9">
+            <a:extLst>
+              <a:ext uri="{FF2B5EF4-FFF2-40B4-BE49-F238E27FC236}">
+                <a16:creationId xmlns:a16="http://schemas.microsoft.com/office/drawing/2014/main" id="{FC3833CC-00C9-7E9A-51E4-59643EE30BFD}"/>
+              </a:ext>
+            </a:extLst>
+          </p:cNvPr>
+          <p:cNvSpPr/>
+          <p:nvPr/>
+        </p:nvSpPr>
+        <p:spPr>
+          <a:xfrm>
+            <a:off x="7322604" y="1596510"/>
+            <a:ext cx="2345271" cy="1001724"/>
+          </a:xfrm>
+          <a:prstGeom prst="rect">
+            <a:avLst/>
+          </a:prstGeom>
+        </p:spPr>
+        <p:style>
+          <a:lnRef idx="2">
+            <a:schemeClr val="accent1">
+              <a:shade val="15000"/>
+            </a:schemeClr>
+          </a:lnRef>
+          <a:fillRef idx="1">
+            <a:schemeClr val="accent1"/>
+          </a:fillRef>
+          <a:effectRef idx="0">
+            <a:schemeClr val="accent1"/>
+          </a:effectRef>
+          <a:fontRef idx="minor">
+            <a:schemeClr val="lt1"/>
+          </a:fontRef>
+        </p:style>
+        <p:txBody>
+          <a:bodyPr rtlCol="0" anchor="ctr"/>
+          <a:lstStyle/>
+          <a:p>
+            <a:pPr algn="ctr"/>
+            <a:r>
+              <a:rPr lang="en-US" dirty="0"/>
+              <a:t>Drug-Disease Relationships</a:t>
+            </a:r>
+          </a:p>
+        </p:txBody>
+      </p:sp>
+      <p:sp>
+        <p:nvSpPr>
+          <p:cNvPr id="13" name="Rectangle 12">
+            <a:extLst>
+              <a:ext uri="{FF2B5EF4-FFF2-40B4-BE49-F238E27FC236}">
+                <a16:creationId xmlns:a16="http://schemas.microsoft.com/office/drawing/2014/main" id="{D2291399-4D19-928E-060C-7505B313DE27}"/>
+              </a:ext>
+            </a:extLst>
+          </p:cNvPr>
+          <p:cNvSpPr/>
+          <p:nvPr/>
+        </p:nvSpPr>
+        <p:spPr>
+          <a:xfrm>
+            <a:off x="3743847" y="1596510"/>
+            <a:ext cx="2123552" cy="1052167"/>
+          </a:xfrm>
+          <a:prstGeom prst="rect">
+            <a:avLst/>
+          </a:prstGeom>
+        </p:spPr>
+        <p:style>
+          <a:lnRef idx="2">
+            <a:schemeClr val="accent1">
+              <a:shade val="15000"/>
+            </a:schemeClr>
+          </a:lnRef>
+          <a:fillRef idx="1">
+            <a:schemeClr val="accent1"/>
+          </a:fillRef>
+          <a:effectRef idx="0">
+            <a:schemeClr val="accent1"/>
+          </a:effectRef>
+          <a:fontRef idx="minor">
+            <a:schemeClr val="lt1"/>
+          </a:fontRef>
+        </p:style>
+        <p:txBody>
+          <a:bodyPr rtlCol="0" anchor="ctr"/>
+          <a:lstStyle/>
+          <a:p>
+            <a:pPr algn="ctr"/>
+            <a:r>
+              <a:rPr lang="en-US" dirty="0"/>
+              <a:t>Approx 500k studies, all 50 US states and 223 countries</a:t>
+            </a:r>
+          </a:p>
+        </p:txBody>
+      </p:sp>
+      <p:pic>
+        <p:nvPicPr>
+          <p:cNvPr id="15" name="Graphic 14" descr="Document outline">
+            <a:extLst>
+              <a:ext uri="{FF2B5EF4-FFF2-40B4-BE49-F238E27FC236}">
+                <a16:creationId xmlns:a16="http://schemas.microsoft.com/office/drawing/2014/main" id="{49AE5A82-F779-1D63-60FC-7C2D62B9EE3E}"/>
+              </a:ext>
+            </a:extLst>
+          </p:cNvPr>
+          <p:cNvPicPr>
+            <a:picLocks noChangeAspect="1"/>
+          </p:cNvPicPr>
+          <p:nvPr/>
+        </p:nvPicPr>
+        <p:blipFill>
+          <a:blip r:embed="rId3">
+            <a:extLst>
+              <a:ext uri="{96DAC541-7B7A-43D3-8B79-37D633B846F1}">
+                <asvg:svgBlip xmlns:asvg="http://schemas.microsoft.com/office/drawing/2016/SVG/main" r:embed="rId4"/>
+              </a:ext>
+            </a:extLst>
+          </a:blip>
+          <a:stretch>
+            <a:fillRect/>
+          </a:stretch>
+        </p:blipFill>
+        <p:spPr>
+          <a:xfrm>
+            <a:off x="7195382" y="3395236"/>
+            <a:ext cx="914400" cy="914400"/>
+          </a:xfrm>
+          <a:prstGeom prst="rect">
+            <a:avLst/>
+          </a:prstGeom>
+        </p:spPr>
+      </p:pic>
+      <p:pic>
+        <p:nvPicPr>
+          <p:cNvPr id="16" name="Graphic 15" descr="Document outline">
+            <a:extLst>
+              <a:ext uri="{FF2B5EF4-FFF2-40B4-BE49-F238E27FC236}">
+                <a16:creationId xmlns:a16="http://schemas.microsoft.com/office/drawing/2014/main" id="{9884AF72-6ECF-62D9-ECD6-78F560860630}"/>
+              </a:ext>
+            </a:extLst>
+          </p:cNvPr>
+          <p:cNvPicPr>
+            <a:picLocks noChangeAspect="1"/>
+          </p:cNvPicPr>
+          <p:nvPr/>
+        </p:nvPicPr>
+        <p:blipFill>
+          <a:blip r:embed="rId3">
+            <a:extLst>
+              <a:ext uri="{96DAC541-7B7A-43D3-8B79-37D633B846F1}">
+                <asvg:svgBlip xmlns:asvg="http://schemas.microsoft.com/office/drawing/2016/SVG/main" r:embed="rId4"/>
+              </a:ext>
+            </a:extLst>
+          </a:blip>
+          <a:stretch>
+            <a:fillRect/>
+          </a:stretch>
+        </p:blipFill>
+        <p:spPr>
+          <a:xfrm>
+            <a:off x="9175805" y="3377810"/>
+            <a:ext cx="914400" cy="914400"/>
+          </a:xfrm>
+          <a:prstGeom prst="rect">
+            <a:avLst/>
+          </a:prstGeom>
+        </p:spPr>
+      </p:pic>
+      <p:sp>
+        <p:nvSpPr>
+          <p:cNvPr id="17" name="TextBox 16">
+            <a:extLst>
+              <a:ext uri="{FF2B5EF4-FFF2-40B4-BE49-F238E27FC236}">
+                <a16:creationId xmlns:a16="http://schemas.microsoft.com/office/drawing/2014/main" id="{0AF9611E-21E1-21C7-6536-4B9F85B47D3E}"/>
+              </a:ext>
+            </a:extLst>
+          </p:cNvPr>
+          <p:cNvSpPr txBox="1"/>
+          <p:nvPr/>
+        </p:nvSpPr>
+        <p:spPr>
+          <a:xfrm>
+            <a:off x="9175805" y="4343715"/>
+            <a:ext cx="1598515" cy="369332"/>
+          </a:xfrm>
+          <a:prstGeom prst="rect">
+            <a:avLst/>
+          </a:prstGeom>
+          <a:noFill/>
+        </p:spPr>
+        <p:txBody>
+          <a:bodyPr wrap="none" rtlCol="0">
+            <a:spAutoFit/>
+          </a:bodyPr>
+          <a:lstStyle/>
+          <a:p>
+            <a:r>
+              <a:rPr lang="en-US" dirty="0" err="1"/>
+              <a:t>conditions.txt</a:t>
+            </a:r>
+            <a:endParaRPr lang="en-US" dirty="0"/>
+          </a:p>
+        </p:txBody>
+      </p:sp>
+      <p:sp>
+        <p:nvSpPr>
+          <p:cNvPr id="19" name="TextBox 18">
+            <a:extLst>
+              <a:ext uri="{FF2B5EF4-FFF2-40B4-BE49-F238E27FC236}">
+                <a16:creationId xmlns:a16="http://schemas.microsoft.com/office/drawing/2014/main" id="{1BE8C055-881B-3E4A-A5AF-623B32C8416A}"/>
+              </a:ext>
+            </a:extLst>
+          </p:cNvPr>
+          <p:cNvSpPr txBox="1"/>
+          <p:nvPr/>
+        </p:nvSpPr>
+        <p:spPr>
+          <a:xfrm>
+            <a:off x="6777271" y="4343715"/>
+            <a:ext cx="1887055" cy="369332"/>
+          </a:xfrm>
+          <a:prstGeom prst="rect">
+            <a:avLst/>
+          </a:prstGeom>
+          <a:noFill/>
+        </p:spPr>
+        <p:txBody>
+          <a:bodyPr wrap="square" rtlCol="0">
+            <a:spAutoFit/>
+          </a:bodyPr>
+          <a:lstStyle/>
+          <a:p>
+            <a:r>
+              <a:rPr lang="en-US" dirty="0" err="1"/>
+              <a:t>interventions.txt</a:t>
+            </a:r>
+            <a:endParaRPr lang="en-US" dirty="0"/>
+          </a:p>
+        </p:txBody>
+      </p:sp>
+      <p:sp>
+        <p:nvSpPr>
+          <p:cNvPr id="22" name="Right Arrow 21">
+            <a:extLst>
+              <a:ext uri="{FF2B5EF4-FFF2-40B4-BE49-F238E27FC236}">
+                <a16:creationId xmlns:a16="http://schemas.microsoft.com/office/drawing/2014/main" id="{C615022A-6D21-C710-823C-CCA668F88C7D}"/>
+              </a:ext>
+            </a:extLst>
+          </p:cNvPr>
+          <p:cNvSpPr/>
+          <p:nvPr/>
+        </p:nvSpPr>
+        <p:spPr>
+          <a:xfrm>
+            <a:off x="6061627" y="1857673"/>
+            <a:ext cx="1025495" cy="529839"/>
+          </a:xfrm>
+          <a:prstGeom prst="rightArrow">
+            <a:avLst/>
+          </a:prstGeom>
+        </p:spPr>
+        <p:style>
+          <a:lnRef idx="2">
+            <a:schemeClr val="accent1">
+              <a:shade val="15000"/>
+            </a:schemeClr>
+          </a:lnRef>
+          <a:fillRef idx="1">
+            <a:schemeClr val="accent1"/>
+          </a:fillRef>
+          <a:effectRef idx="0">
+            <a:schemeClr val="accent1"/>
+          </a:effectRef>
+          <a:fontRef idx="minor">
+            <a:schemeClr val="lt1"/>
+          </a:fontRef>
+        </p:style>
+        <p:txBody>
+          <a:bodyPr rtlCol="0" anchor="ctr"/>
+          <a:lstStyle/>
+          <a:p>
+            <a:pPr algn="ctr"/>
+            <a:endParaRPr lang="en-US"/>
+          </a:p>
+        </p:txBody>
+      </p:sp>
+      <p:sp>
+        <p:nvSpPr>
+          <p:cNvPr id="23" name="Right Arrow 22">
+            <a:extLst>
+              <a:ext uri="{FF2B5EF4-FFF2-40B4-BE49-F238E27FC236}">
+                <a16:creationId xmlns:a16="http://schemas.microsoft.com/office/drawing/2014/main" id="{5BAFB85F-CC33-935C-1B6B-8492F34F6D40}"/>
+              </a:ext>
+            </a:extLst>
+          </p:cNvPr>
+          <p:cNvSpPr/>
+          <p:nvPr/>
+        </p:nvSpPr>
+        <p:spPr>
+          <a:xfrm>
+            <a:off x="2524124" y="1825019"/>
+            <a:ext cx="1025495" cy="529839"/>
+          </a:xfrm>
+          <a:prstGeom prst="rightArrow">
+            <a:avLst/>
+          </a:prstGeom>
+        </p:spPr>
+        <p:style>
+          <a:lnRef idx="2">
+            <a:schemeClr val="accent1">
+              <a:shade val="15000"/>
+            </a:schemeClr>
+          </a:lnRef>
+          <a:fillRef idx="1">
+            <a:schemeClr val="accent1"/>
+          </a:fillRef>
+          <a:effectRef idx="0">
+            <a:schemeClr val="accent1"/>
+          </a:effectRef>
+          <a:fontRef idx="minor">
+            <a:schemeClr val="lt1"/>
+          </a:fontRef>
+        </p:style>
+        <p:txBody>
+          <a:bodyPr rtlCol="0" anchor="ctr"/>
+          <a:lstStyle/>
+          <a:p>
+            <a:pPr algn="ctr"/>
+            <a:endParaRPr lang="en-US"/>
+          </a:p>
+        </p:txBody>
+      </p:sp>
+      <p:sp>
+        <p:nvSpPr>
+          <p:cNvPr id="24" name="Down Arrow 23">
+            <a:extLst>
+              <a:ext uri="{FF2B5EF4-FFF2-40B4-BE49-F238E27FC236}">
+                <a16:creationId xmlns:a16="http://schemas.microsoft.com/office/drawing/2014/main" id="{A06CBE06-71A1-9A82-031E-18DDD8E6CE15}"/>
+              </a:ext>
+            </a:extLst>
+          </p:cNvPr>
+          <p:cNvSpPr/>
+          <p:nvPr/>
+        </p:nvSpPr>
+        <p:spPr>
+          <a:xfrm>
+            <a:off x="7482799" y="2738973"/>
+            <a:ext cx="444381" cy="648656"/>
+          </a:xfrm>
+          <a:prstGeom prst="downArrow">
+            <a:avLst/>
+          </a:prstGeom>
+        </p:spPr>
+        <p:style>
+          <a:lnRef idx="2">
+            <a:schemeClr val="accent1">
+              <a:shade val="15000"/>
+            </a:schemeClr>
+          </a:lnRef>
+          <a:fillRef idx="1">
+            <a:schemeClr val="accent1"/>
+          </a:fillRef>
+          <a:effectRef idx="0">
+            <a:schemeClr val="accent1"/>
+          </a:effectRef>
+          <a:fontRef idx="minor">
+            <a:schemeClr val="lt1"/>
+          </a:fontRef>
+        </p:style>
+        <p:txBody>
+          <a:bodyPr rtlCol="0" anchor="ctr"/>
+          <a:lstStyle/>
+          <a:p>
+            <a:pPr algn="ctr"/>
+            <a:endParaRPr lang="en-US"/>
+          </a:p>
+        </p:txBody>
+      </p:sp>
+      <p:sp>
+        <p:nvSpPr>
+          <p:cNvPr id="26" name="Down Arrow 25">
+            <a:extLst>
+              <a:ext uri="{FF2B5EF4-FFF2-40B4-BE49-F238E27FC236}">
+                <a16:creationId xmlns:a16="http://schemas.microsoft.com/office/drawing/2014/main" id="{1AF1282B-94D5-EAE4-BD50-6438B9B04157}"/>
+              </a:ext>
+            </a:extLst>
+          </p:cNvPr>
+          <p:cNvSpPr/>
+          <p:nvPr/>
+        </p:nvSpPr>
+        <p:spPr>
+          <a:xfrm>
+            <a:off x="9261176" y="2699570"/>
+            <a:ext cx="444381" cy="648656"/>
+          </a:xfrm>
+          <a:prstGeom prst="downArrow">
+            <a:avLst/>
+          </a:prstGeom>
+        </p:spPr>
+        <p:style>
+          <a:lnRef idx="2">
+            <a:schemeClr val="accent1">
+              <a:shade val="15000"/>
+            </a:schemeClr>
+          </a:lnRef>
+          <a:fillRef idx="1">
+            <a:schemeClr val="accent1"/>
+          </a:fillRef>
+          <a:effectRef idx="0">
+            <a:schemeClr val="accent1"/>
+          </a:effectRef>
+          <a:fontRef idx="minor">
+            <a:schemeClr val="lt1"/>
+          </a:fontRef>
+        </p:style>
+        <p:txBody>
+          <a:bodyPr rtlCol="0" anchor="ctr"/>
+          <a:lstStyle/>
+          <a:p>
+            <a:pPr algn="ctr"/>
+            <a:endParaRPr lang="en-US"/>
+          </a:p>
+        </p:txBody>
+      </p:sp>
+    </p:spTree>
+    <p:extLst>
+      <p:ext uri="{BB962C8B-B14F-4D97-AF65-F5344CB8AC3E}">
+        <p14:creationId xmlns:p14="http://schemas.microsoft.com/office/powerpoint/2010/main" val="2632035536"/>
+      </p:ext>
+    </p:extLst>
+  </p:cSld>
+  <p:clrMapOvr>
+    <a:masterClrMapping/>
+  </p:clrMapOvr>
+</p:sld>
+</file>
+
+<file path=ppt/slides/slide5.xml><?xml version="1.0" encoding="utf-8"?>
+<p:sld xmlns:a="http://schemas.openxmlformats.org/drawingml/2006/main" xmlns:r="http://schemas.openxmlformats.org/officeDocument/2006/relationships" xmlns:p="http://schemas.openxmlformats.org/presentationml/2006/main">
+  <p:cSld>
+    <p:spTree>
+      <p:nvGrpSpPr>
+        <p:cNvPr id="1" name="">
+          <a:extLst>
+            <a:ext uri="{FF2B5EF4-FFF2-40B4-BE49-F238E27FC236}">
+              <a16:creationId xmlns:a16="http://schemas.microsoft.com/office/drawing/2014/main" id="{6108BF6D-3FB8-90FA-4141-3CD29B447981}"/>
+            </a:ext>
+          </a:extLst>
+        </p:cNvPr>
+        <p:cNvGrpSpPr/>
+        <p:nvPr/>
+      </p:nvGrpSpPr>
+      <p:grpSpPr>
+        <a:xfrm>
+          <a:off x="0" y="0"/>
+          <a:ext cx="0" cy="0"/>
+          <a:chOff x="0" y="0"/>
+          <a:chExt cx="0" cy="0"/>
+        </a:xfrm>
+      </p:grpSpPr>
+      <p:sp>
+        <p:nvSpPr>
+          <p:cNvPr id="2" name="Title 1">
+            <a:extLst>
+              <a:ext uri="{FF2B5EF4-FFF2-40B4-BE49-F238E27FC236}">
+                <a16:creationId xmlns:a16="http://schemas.microsoft.com/office/drawing/2014/main" id="{8B220A40-AED4-E4A1-01EA-264D8273E7B6}"/>
+              </a:ext>
+            </a:extLst>
+          </p:cNvPr>
+          <p:cNvSpPr>
+            <a:spLocks noGrp="1"/>
+          </p:cNvSpPr>
+          <p:nvPr>
+            <p:ph type="title"/>
+          </p:nvPr>
+        </p:nvSpPr>
+        <p:spPr>
+          <a:xfrm>
+            <a:off x="165984" y="-12879"/>
+            <a:ext cx="10651402" cy="1143000"/>
+          </a:xfrm>
+        </p:spPr>
+        <p:txBody>
+          <a:bodyPr/>
+          <a:lstStyle/>
+          <a:p>
+            <a:r>
+              <a:rPr lang="en-US" dirty="0"/>
+              <a:t>Background		</a:t>
+            </a:r>
+          </a:p>
+        </p:txBody>
+      </p:sp>
+      <p:sp>
+        <p:nvSpPr>
+          <p:cNvPr id="4" name="Slide Number Placeholder 3">
+            <a:extLst>
+              <a:ext uri="{FF2B5EF4-FFF2-40B4-BE49-F238E27FC236}">
+                <a16:creationId xmlns:a16="http://schemas.microsoft.com/office/drawing/2014/main" id="{CFF0B9FA-34FC-82EF-09AE-B01ED83114EB}"/>
+              </a:ext>
+            </a:extLst>
+          </p:cNvPr>
+          <p:cNvSpPr>
+            <a:spLocks noGrp="1"/>
+          </p:cNvSpPr>
+          <p:nvPr>
+            <p:ph type="sldNum" sz="quarter" idx="12"/>
+          </p:nvPr>
+        </p:nvSpPr>
+        <p:spPr/>
+        <p:txBody>
+          <a:bodyPr/>
+          <a:lstStyle/>
+          <a:p>
+            <a:fld id="{AD40181A-01B0-4CB8-8614-1473649F6741}" type="slidenum">
+              <a:rPr lang="en-US" smtClean="0">
+                <a:solidFill>
+                  <a:schemeClr val="bg1"/>
+                </a:solidFill>
+              </a:rPr>
+              <a:t>5</a:t>
+            </a:fld>
+            <a:endParaRPr lang="en-US" dirty="0">
+              <a:solidFill>
+                <a:schemeClr val="bg1"/>
+              </a:solidFill>
+            </a:endParaRPr>
+          </a:p>
+        </p:txBody>
+      </p:sp>
+      <p:pic>
+        <p:nvPicPr>
+          <p:cNvPr id="7" name="Picture 6" descr="A blue and black logo&#10;&#10;Description automatically generated">
+            <a:extLst>
+              <a:ext uri="{FF2B5EF4-FFF2-40B4-BE49-F238E27FC236}">
+                <a16:creationId xmlns:a16="http://schemas.microsoft.com/office/drawing/2014/main" id="{D63BD362-5AED-C364-624A-40906A8FFA6B}"/>
+              </a:ext>
+            </a:extLst>
+          </p:cNvPr>
+          <p:cNvPicPr>
+            <a:picLocks noChangeAspect="1"/>
+          </p:cNvPicPr>
+          <p:nvPr/>
+        </p:nvPicPr>
+        <p:blipFill>
+          <a:blip r:embed="rId2"/>
+          <a:stretch>
+            <a:fillRect/>
+          </a:stretch>
+        </p:blipFill>
+        <p:spPr>
+          <a:xfrm>
+            <a:off x="395039" y="48364021"/>
+            <a:ext cx="3640413" cy="2928450"/>
+          </a:xfrm>
+          <a:prstGeom prst="rect">
+            <a:avLst/>
+          </a:prstGeom>
+        </p:spPr>
+      </p:pic>
+      <p:pic>
+        <p:nvPicPr>
+          <p:cNvPr id="8" name="Picture 7" descr="A blue and black logo&#10;&#10;Description automatically generated">
+            <a:extLst>
+              <a:ext uri="{FF2B5EF4-FFF2-40B4-BE49-F238E27FC236}">
+                <a16:creationId xmlns:a16="http://schemas.microsoft.com/office/drawing/2014/main" id="{8497C344-3249-D0DD-C4A2-A8077B66C7E7}"/>
+              </a:ext>
+            </a:extLst>
+          </p:cNvPr>
+          <p:cNvPicPr>
+            <a:picLocks noChangeAspect="1"/>
+          </p:cNvPicPr>
+          <p:nvPr/>
+        </p:nvPicPr>
+        <p:blipFill>
+          <a:blip r:embed="rId2"/>
+          <a:stretch>
+            <a:fillRect/>
+          </a:stretch>
+        </p:blipFill>
+        <p:spPr>
+          <a:xfrm>
+            <a:off x="547439" y="48516421"/>
+            <a:ext cx="3640413" cy="2928450"/>
+          </a:xfrm>
+          <a:prstGeom prst="rect">
+            <a:avLst/>
+          </a:prstGeom>
+        </p:spPr>
+      </p:pic>
+      <p:pic>
+        <p:nvPicPr>
+          <p:cNvPr id="9" name="Content Placeholder 8" descr="A blue and black logo&#10;&#10;Description automatically generated">
+            <a:extLst>
+              <a:ext uri="{FF2B5EF4-FFF2-40B4-BE49-F238E27FC236}">
+                <a16:creationId xmlns:a16="http://schemas.microsoft.com/office/drawing/2014/main" id="{C544F9AE-89A5-3A9D-F314-F823395F98A6}"/>
+              </a:ext>
+            </a:extLst>
+          </p:cNvPr>
+          <p:cNvPicPr>
+            <a:picLocks noGrp="1" noChangeAspect="1"/>
+          </p:cNvPicPr>
+          <p:nvPr>
+            <p:ph idx="1"/>
+          </p:nvPr>
+        </p:nvPicPr>
+        <p:blipFill>
+          <a:blip r:embed="rId2"/>
+          <a:stretch>
+            <a:fillRect/>
+          </a:stretch>
+        </p:blipFill>
+        <p:spPr>
+          <a:xfrm>
+            <a:off x="547439" y="1517867"/>
+            <a:ext cx="1782457" cy="1433858"/>
+          </a:xfrm>
+          <a:prstGeom prst="rect">
+            <a:avLst/>
+          </a:prstGeom>
+        </p:spPr>
+      </p:pic>
+      <p:sp>
+        <p:nvSpPr>
+          <p:cNvPr id="10" name="Rectangle 9">
+            <a:extLst>
+              <a:ext uri="{FF2B5EF4-FFF2-40B4-BE49-F238E27FC236}">
+                <a16:creationId xmlns:a16="http://schemas.microsoft.com/office/drawing/2014/main" id="{5A7229DE-3FD2-E978-17A2-29C130CB899B}"/>
+              </a:ext>
+            </a:extLst>
+          </p:cNvPr>
+          <p:cNvSpPr/>
+          <p:nvPr/>
+        </p:nvSpPr>
+        <p:spPr>
+          <a:xfrm>
+            <a:off x="7322604" y="1596510"/>
+            <a:ext cx="2345271" cy="1001724"/>
+          </a:xfrm>
+          <a:prstGeom prst="rect">
+            <a:avLst/>
+          </a:prstGeom>
+        </p:spPr>
+        <p:style>
+          <a:lnRef idx="2">
+            <a:schemeClr val="accent1">
+              <a:shade val="15000"/>
+            </a:schemeClr>
+          </a:lnRef>
+          <a:fillRef idx="1">
+            <a:schemeClr val="accent1"/>
+          </a:fillRef>
+          <a:effectRef idx="0">
+            <a:schemeClr val="accent1"/>
+          </a:effectRef>
+          <a:fontRef idx="minor">
+            <a:schemeClr val="lt1"/>
+          </a:fontRef>
+        </p:style>
+        <p:txBody>
+          <a:bodyPr rtlCol="0" anchor="ctr"/>
+          <a:lstStyle/>
+          <a:p>
+            <a:pPr algn="ctr"/>
+            <a:r>
+              <a:rPr lang="en-US" dirty="0"/>
+              <a:t>Drug-Disease Relationships</a:t>
+            </a:r>
+          </a:p>
+        </p:txBody>
+      </p:sp>
+      <p:sp>
+        <p:nvSpPr>
+          <p:cNvPr id="13" name="Rectangle 12">
+            <a:extLst>
+              <a:ext uri="{FF2B5EF4-FFF2-40B4-BE49-F238E27FC236}">
+                <a16:creationId xmlns:a16="http://schemas.microsoft.com/office/drawing/2014/main" id="{F47E2FB5-CF89-06C0-D04B-A15A3CAFADA4}"/>
+              </a:ext>
+            </a:extLst>
+          </p:cNvPr>
+          <p:cNvSpPr/>
+          <p:nvPr/>
+        </p:nvSpPr>
+        <p:spPr>
+          <a:xfrm>
+            <a:off x="3743847" y="1596510"/>
+            <a:ext cx="2123552" cy="1052167"/>
+          </a:xfrm>
+          <a:prstGeom prst="rect">
+            <a:avLst/>
+          </a:prstGeom>
+        </p:spPr>
+        <p:style>
+          <a:lnRef idx="2">
+            <a:schemeClr val="accent1">
+              <a:shade val="15000"/>
+            </a:schemeClr>
+          </a:lnRef>
+          <a:fillRef idx="1">
+            <a:schemeClr val="accent1"/>
+          </a:fillRef>
+          <a:effectRef idx="0">
+            <a:schemeClr val="accent1"/>
+          </a:effectRef>
+          <a:fontRef idx="minor">
+            <a:schemeClr val="lt1"/>
+          </a:fontRef>
+        </p:style>
+        <p:txBody>
+          <a:bodyPr rtlCol="0" anchor="ctr"/>
+          <a:lstStyle/>
+          <a:p>
+            <a:pPr algn="ctr"/>
+            <a:r>
+              <a:rPr lang="en-US" dirty="0"/>
+              <a:t>Approx 500k studies, all 50 US states and 223 countries</a:t>
+            </a:r>
+          </a:p>
+        </p:txBody>
+      </p:sp>
+      <p:pic>
+        <p:nvPicPr>
+          <p:cNvPr id="15" name="Graphic 14" descr="Document outline">
+            <a:extLst>
+              <a:ext uri="{FF2B5EF4-FFF2-40B4-BE49-F238E27FC236}">
+                <a16:creationId xmlns:a16="http://schemas.microsoft.com/office/drawing/2014/main" id="{8D7507A1-E35C-F63B-4A00-DB3A52AC5A20}"/>
+              </a:ext>
+            </a:extLst>
+          </p:cNvPr>
+          <p:cNvPicPr>
+            <a:picLocks noChangeAspect="1"/>
+          </p:cNvPicPr>
+          <p:nvPr/>
+        </p:nvPicPr>
+        <p:blipFill>
+          <a:blip r:embed="rId3">
+            <a:extLst>
+              <a:ext uri="{96DAC541-7B7A-43D3-8B79-37D633B846F1}">
+                <asvg:svgBlip xmlns:asvg="http://schemas.microsoft.com/office/drawing/2016/SVG/main" r:embed="rId4"/>
+              </a:ext>
+            </a:extLst>
+          </a:blip>
+          <a:stretch>
+            <a:fillRect/>
+          </a:stretch>
+        </p:blipFill>
+        <p:spPr>
+          <a:xfrm>
+            <a:off x="7195382" y="3395236"/>
+            <a:ext cx="914400" cy="914400"/>
+          </a:xfrm>
+          <a:prstGeom prst="rect">
+            <a:avLst/>
+          </a:prstGeom>
+        </p:spPr>
+      </p:pic>
+      <p:pic>
+        <p:nvPicPr>
+          <p:cNvPr id="16" name="Graphic 15" descr="Document outline">
+            <a:extLst>
+              <a:ext uri="{FF2B5EF4-FFF2-40B4-BE49-F238E27FC236}">
+                <a16:creationId xmlns:a16="http://schemas.microsoft.com/office/drawing/2014/main" id="{9AD80547-62CB-C387-5F6C-EA1FB84A2554}"/>
+              </a:ext>
+            </a:extLst>
+          </p:cNvPr>
+          <p:cNvPicPr>
+            <a:picLocks noChangeAspect="1"/>
+          </p:cNvPicPr>
+          <p:nvPr/>
+        </p:nvPicPr>
+        <p:blipFill>
+          <a:blip r:embed="rId3">
+            <a:extLst>
+              <a:ext uri="{96DAC541-7B7A-43D3-8B79-37D633B846F1}">
+                <asvg:svgBlip xmlns:asvg="http://schemas.microsoft.com/office/drawing/2016/SVG/main" r:embed="rId4"/>
+              </a:ext>
+            </a:extLst>
+          </a:blip>
+          <a:stretch>
+            <a:fillRect/>
+          </a:stretch>
+        </p:blipFill>
+        <p:spPr>
+          <a:xfrm>
+            <a:off x="9175805" y="3377810"/>
+            <a:ext cx="914400" cy="914400"/>
+          </a:xfrm>
+          <a:prstGeom prst="rect">
+            <a:avLst/>
+          </a:prstGeom>
+        </p:spPr>
+      </p:pic>
+      <p:sp>
+        <p:nvSpPr>
+          <p:cNvPr id="17" name="TextBox 16">
+            <a:extLst>
+              <a:ext uri="{FF2B5EF4-FFF2-40B4-BE49-F238E27FC236}">
+                <a16:creationId xmlns:a16="http://schemas.microsoft.com/office/drawing/2014/main" id="{10C10235-7C96-47E0-6762-0ED491BA63B9}"/>
+              </a:ext>
+            </a:extLst>
+          </p:cNvPr>
+          <p:cNvSpPr txBox="1"/>
+          <p:nvPr/>
+        </p:nvSpPr>
+        <p:spPr>
+          <a:xfrm>
+            <a:off x="9175805" y="4343715"/>
+            <a:ext cx="1598515" cy="369332"/>
+          </a:xfrm>
+          <a:prstGeom prst="rect">
+            <a:avLst/>
+          </a:prstGeom>
+          <a:noFill/>
+        </p:spPr>
+        <p:txBody>
+          <a:bodyPr wrap="none" rtlCol="0">
+            <a:spAutoFit/>
+          </a:bodyPr>
+          <a:lstStyle/>
+          <a:p>
+            <a:r>
+              <a:rPr lang="en-US" dirty="0" err="1"/>
+              <a:t>conditions.txt</a:t>
+            </a:r>
+            <a:endParaRPr lang="en-US" dirty="0"/>
+          </a:p>
+        </p:txBody>
+      </p:sp>
+      <p:sp>
+        <p:nvSpPr>
+          <p:cNvPr id="19" name="TextBox 18">
+            <a:extLst>
+              <a:ext uri="{FF2B5EF4-FFF2-40B4-BE49-F238E27FC236}">
+                <a16:creationId xmlns:a16="http://schemas.microsoft.com/office/drawing/2014/main" id="{5A4812B3-4259-0897-3B4F-EB88DBBF3093}"/>
+              </a:ext>
+            </a:extLst>
+          </p:cNvPr>
+          <p:cNvSpPr txBox="1"/>
+          <p:nvPr/>
+        </p:nvSpPr>
+        <p:spPr>
+          <a:xfrm>
+            <a:off x="6777271" y="4343715"/>
+            <a:ext cx="1887055" cy="369332"/>
+          </a:xfrm>
+          <a:prstGeom prst="rect">
+            <a:avLst/>
+          </a:prstGeom>
+          <a:noFill/>
+        </p:spPr>
+        <p:txBody>
+          <a:bodyPr wrap="square" rtlCol="0">
+            <a:spAutoFit/>
+          </a:bodyPr>
+          <a:lstStyle/>
+          <a:p>
+            <a:r>
+              <a:rPr lang="en-US" dirty="0" err="1"/>
+              <a:t>interventions.txt</a:t>
+            </a:r>
+            <a:endParaRPr lang="en-US" dirty="0"/>
+          </a:p>
+        </p:txBody>
+      </p:sp>
+      <p:sp>
+        <p:nvSpPr>
+          <p:cNvPr id="22" name="Right Arrow 21">
+            <a:extLst>
+              <a:ext uri="{FF2B5EF4-FFF2-40B4-BE49-F238E27FC236}">
+                <a16:creationId xmlns:a16="http://schemas.microsoft.com/office/drawing/2014/main" id="{8E28767B-45ED-C362-32C4-169FCF4F21B3}"/>
+              </a:ext>
+            </a:extLst>
+          </p:cNvPr>
+          <p:cNvSpPr/>
+          <p:nvPr/>
+        </p:nvSpPr>
+        <p:spPr>
+          <a:xfrm>
+            <a:off x="6061627" y="1857673"/>
+            <a:ext cx="1025495" cy="529839"/>
+          </a:xfrm>
+          <a:prstGeom prst="rightArrow">
+            <a:avLst/>
+          </a:prstGeom>
+        </p:spPr>
+        <p:style>
+          <a:lnRef idx="2">
+            <a:schemeClr val="accent1">
+              <a:shade val="15000"/>
+            </a:schemeClr>
+          </a:lnRef>
+          <a:fillRef idx="1">
+            <a:schemeClr val="accent1"/>
+          </a:fillRef>
+          <a:effectRef idx="0">
+            <a:schemeClr val="accent1"/>
+          </a:effectRef>
+          <a:fontRef idx="minor">
+            <a:schemeClr val="lt1"/>
+          </a:fontRef>
+        </p:style>
+        <p:txBody>
+          <a:bodyPr rtlCol="0" anchor="ctr"/>
+          <a:lstStyle/>
+          <a:p>
+            <a:pPr algn="ctr"/>
+            <a:endParaRPr lang="en-US"/>
+          </a:p>
+        </p:txBody>
+      </p:sp>
+      <p:sp>
+        <p:nvSpPr>
+          <p:cNvPr id="23" name="Right Arrow 22">
+            <a:extLst>
+              <a:ext uri="{FF2B5EF4-FFF2-40B4-BE49-F238E27FC236}">
+                <a16:creationId xmlns:a16="http://schemas.microsoft.com/office/drawing/2014/main" id="{3654F060-6E8A-1D0A-E818-9B123E78C5C0}"/>
+              </a:ext>
+            </a:extLst>
+          </p:cNvPr>
+          <p:cNvSpPr/>
+          <p:nvPr/>
+        </p:nvSpPr>
+        <p:spPr>
+          <a:xfrm>
+            <a:off x="2524124" y="1825019"/>
+            <a:ext cx="1025495" cy="529839"/>
+          </a:xfrm>
+          <a:prstGeom prst="rightArrow">
+            <a:avLst/>
+          </a:prstGeom>
+        </p:spPr>
+        <p:style>
+          <a:lnRef idx="2">
+            <a:schemeClr val="accent1">
+              <a:shade val="15000"/>
+            </a:schemeClr>
+          </a:lnRef>
+          <a:fillRef idx="1">
+            <a:schemeClr val="accent1"/>
+          </a:fillRef>
+          <a:effectRef idx="0">
+            <a:schemeClr val="accent1"/>
+          </a:effectRef>
+          <a:fontRef idx="minor">
+            <a:schemeClr val="lt1"/>
+          </a:fontRef>
+        </p:style>
+        <p:txBody>
+          <a:bodyPr rtlCol="0" anchor="ctr"/>
+          <a:lstStyle/>
+          <a:p>
+            <a:pPr algn="ctr"/>
+            <a:endParaRPr lang="en-US"/>
+          </a:p>
+        </p:txBody>
+      </p:sp>
+      <p:sp>
+        <p:nvSpPr>
+          <p:cNvPr id="24" name="Down Arrow 23">
+            <a:extLst>
+              <a:ext uri="{FF2B5EF4-FFF2-40B4-BE49-F238E27FC236}">
+                <a16:creationId xmlns:a16="http://schemas.microsoft.com/office/drawing/2014/main" id="{F0A84076-01BC-8A90-4D91-34DBC1C808D6}"/>
+              </a:ext>
+            </a:extLst>
+          </p:cNvPr>
+          <p:cNvSpPr/>
+          <p:nvPr/>
+        </p:nvSpPr>
+        <p:spPr>
+          <a:xfrm>
+            <a:off x="7482799" y="2738973"/>
+            <a:ext cx="444381" cy="648656"/>
+          </a:xfrm>
+          <a:prstGeom prst="downArrow">
+            <a:avLst/>
+          </a:prstGeom>
+        </p:spPr>
+        <p:style>
+          <a:lnRef idx="2">
+            <a:schemeClr val="accent1">
+              <a:shade val="15000"/>
+            </a:schemeClr>
+          </a:lnRef>
+          <a:fillRef idx="1">
+            <a:schemeClr val="accent1"/>
+          </a:fillRef>
+          <a:effectRef idx="0">
+            <a:schemeClr val="accent1"/>
+          </a:effectRef>
+          <a:fontRef idx="minor">
+            <a:schemeClr val="lt1"/>
+          </a:fontRef>
+        </p:style>
+        <p:txBody>
+          <a:bodyPr rtlCol="0" anchor="ctr"/>
+          <a:lstStyle/>
+          <a:p>
+            <a:pPr algn="ctr"/>
+            <a:endParaRPr lang="en-US"/>
+          </a:p>
+        </p:txBody>
+      </p:sp>
+      <p:sp>
+        <p:nvSpPr>
+          <p:cNvPr id="25" name="Left-Right Arrow 24">
+            <a:extLst>
+              <a:ext uri="{FF2B5EF4-FFF2-40B4-BE49-F238E27FC236}">
+                <a16:creationId xmlns:a16="http://schemas.microsoft.com/office/drawing/2014/main" id="{CB42DA62-D4C0-D004-92A7-E0137DA777DF}"/>
+              </a:ext>
+            </a:extLst>
+          </p:cNvPr>
+          <p:cNvSpPr/>
+          <p:nvPr/>
+        </p:nvSpPr>
+        <p:spPr>
+          <a:xfrm>
+            <a:off x="8043214" y="3554320"/>
+            <a:ext cx="1175657" cy="457200"/>
+          </a:xfrm>
+          <a:prstGeom prst="leftRightArrow">
+            <a:avLst/>
+          </a:prstGeom>
+        </p:spPr>
+        <p:style>
+          <a:lnRef idx="2">
+            <a:schemeClr val="accent1">
+              <a:shade val="15000"/>
+            </a:schemeClr>
+          </a:lnRef>
+          <a:fillRef idx="1">
+            <a:schemeClr val="accent1"/>
+          </a:fillRef>
+          <a:effectRef idx="0">
+            <a:schemeClr val="accent1"/>
+          </a:effectRef>
+          <a:fontRef idx="minor">
+            <a:schemeClr val="lt1"/>
+          </a:fontRef>
+        </p:style>
+        <p:txBody>
+          <a:bodyPr rtlCol="0" anchor="ctr"/>
+          <a:lstStyle/>
+          <a:p>
+            <a:pPr algn="ctr"/>
+            <a:endParaRPr lang="en-US"/>
+          </a:p>
+        </p:txBody>
+      </p:sp>
+      <p:sp>
+        <p:nvSpPr>
+          <p:cNvPr id="26" name="Down Arrow 25">
+            <a:extLst>
+              <a:ext uri="{FF2B5EF4-FFF2-40B4-BE49-F238E27FC236}">
+                <a16:creationId xmlns:a16="http://schemas.microsoft.com/office/drawing/2014/main" id="{ACDA329E-BDF2-2F24-CF1E-96E0A8EA33C9}"/>
+              </a:ext>
+            </a:extLst>
+          </p:cNvPr>
+          <p:cNvSpPr/>
+          <p:nvPr/>
+        </p:nvSpPr>
+        <p:spPr>
+          <a:xfrm>
+            <a:off x="9261176" y="2699570"/>
+            <a:ext cx="444381" cy="648656"/>
+          </a:xfrm>
+          <a:prstGeom prst="downArrow">
+            <a:avLst/>
+          </a:prstGeom>
+        </p:spPr>
+        <p:style>
+          <a:lnRef idx="2">
+            <a:schemeClr val="accent1">
+              <a:shade val="15000"/>
+            </a:schemeClr>
+          </a:lnRef>
+          <a:fillRef idx="1">
+            <a:schemeClr val="accent1"/>
+          </a:fillRef>
+          <a:effectRef idx="0">
+            <a:schemeClr val="accent1"/>
+          </a:effectRef>
+          <a:fontRef idx="minor">
+            <a:schemeClr val="lt1"/>
+          </a:fontRef>
+        </p:style>
+        <p:txBody>
+          <a:bodyPr rtlCol="0" anchor="ctr"/>
+          <a:lstStyle/>
+          <a:p>
+            <a:pPr algn="ctr"/>
+            <a:endParaRPr lang="en-US"/>
+          </a:p>
+        </p:txBody>
+      </p:sp>
+      <p:sp>
+        <p:nvSpPr>
+          <p:cNvPr id="27" name="TextBox 26">
+            <a:extLst>
+              <a:ext uri="{FF2B5EF4-FFF2-40B4-BE49-F238E27FC236}">
+                <a16:creationId xmlns:a16="http://schemas.microsoft.com/office/drawing/2014/main" id="{21DD0282-8814-22A4-9728-6E528C8EBCC9}"/>
+              </a:ext>
+            </a:extLst>
+          </p:cNvPr>
+          <p:cNvSpPr txBox="1"/>
+          <p:nvPr/>
+        </p:nvSpPr>
+        <p:spPr>
+          <a:xfrm>
+            <a:off x="8175210" y="3254538"/>
+            <a:ext cx="1000595" cy="369332"/>
+          </a:xfrm>
+          <a:prstGeom prst="rect">
+            <a:avLst/>
+          </a:prstGeom>
+          <a:noFill/>
+        </p:spPr>
+        <p:txBody>
+          <a:bodyPr wrap="none" rtlCol="0">
+            <a:spAutoFit/>
+          </a:bodyPr>
+          <a:lstStyle/>
+          <a:p>
+            <a:r>
+              <a:rPr lang="en-US" dirty="0"/>
+              <a:t>NCT-ID</a:t>
+            </a:r>
+          </a:p>
+        </p:txBody>
+      </p:sp>
+    </p:spTree>
+    <p:extLst>
+      <p:ext uri="{BB962C8B-B14F-4D97-AF65-F5344CB8AC3E}">
+        <p14:creationId xmlns:p14="http://schemas.microsoft.com/office/powerpoint/2010/main" val="74268746"/>
+      </p:ext>
+    </p:extLst>
+  </p:cSld>
+  <p:clrMapOvr>
+    <a:masterClrMapping/>
+  </p:clrMapOvr>
+</p:sld>
+</file>
+
+<file path=ppt/slides/slide6.xml><?xml version="1.0" encoding="utf-8"?>
+<p:sld xmlns:a="http://schemas.openxmlformats.org/drawingml/2006/main" xmlns:r="http://schemas.openxmlformats.org/officeDocument/2006/relationships" xmlns:p="http://schemas.openxmlformats.org/presentationml/2006/main">
+  <p:cSld>
+    <p:spTree>
+      <p:nvGrpSpPr>
+        <p:cNvPr id="1" name="">
+          <a:extLst>
+            <a:ext uri="{FF2B5EF4-FFF2-40B4-BE49-F238E27FC236}">
+              <a16:creationId xmlns:a16="http://schemas.microsoft.com/office/drawing/2014/main" id="{D3A00A5F-458B-B24E-E0B7-C65E2AC772AA}"/>
+            </a:ext>
+          </a:extLst>
+        </p:cNvPr>
+        <p:cNvGrpSpPr/>
+        <p:nvPr/>
+      </p:nvGrpSpPr>
+      <p:grpSpPr>
+        <a:xfrm>
+          <a:off x="0" y="0"/>
+          <a:ext cx="0" cy="0"/>
+          <a:chOff x="0" y="0"/>
+          <a:chExt cx="0" cy="0"/>
+        </a:xfrm>
+      </p:grpSpPr>
+      <p:sp>
+        <p:nvSpPr>
+          <p:cNvPr id="2" name="Title 1">
+            <a:extLst>
+              <a:ext uri="{FF2B5EF4-FFF2-40B4-BE49-F238E27FC236}">
+                <a16:creationId xmlns:a16="http://schemas.microsoft.com/office/drawing/2014/main" id="{BCAC8C67-29C8-EA43-6689-5B7F972B2F06}"/>
+              </a:ext>
+            </a:extLst>
+          </p:cNvPr>
+          <p:cNvSpPr>
+            <a:spLocks noGrp="1"/>
+          </p:cNvSpPr>
+          <p:nvPr>
+            <p:ph type="title"/>
+          </p:nvPr>
+        </p:nvSpPr>
+        <p:spPr>
+          <a:xfrm>
+            <a:off x="165984" y="-12879"/>
+            <a:ext cx="10651402" cy="1143000"/>
+          </a:xfrm>
+        </p:spPr>
+        <p:txBody>
+          <a:bodyPr/>
+          <a:lstStyle/>
+          <a:p>
+            <a:r>
+              <a:rPr lang="en-US" dirty="0"/>
+              <a:t>Background		</a:t>
+            </a:r>
+          </a:p>
+        </p:txBody>
+      </p:sp>
+      <p:sp>
+        <p:nvSpPr>
+          <p:cNvPr id="4" name="Slide Number Placeholder 3">
+            <a:extLst>
+              <a:ext uri="{FF2B5EF4-FFF2-40B4-BE49-F238E27FC236}">
+                <a16:creationId xmlns:a16="http://schemas.microsoft.com/office/drawing/2014/main" id="{5F7CCCEA-AE59-D3A6-CB52-199E43F54A92}"/>
+              </a:ext>
+            </a:extLst>
+          </p:cNvPr>
+          <p:cNvSpPr>
+            <a:spLocks noGrp="1"/>
+          </p:cNvSpPr>
+          <p:nvPr>
+            <p:ph type="sldNum" sz="quarter" idx="12"/>
+          </p:nvPr>
+        </p:nvSpPr>
+        <p:spPr/>
+        <p:txBody>
+          <a:bodyPr/>
+          <a:lstStyle/>
+          <a:p>
+            <a:fld id="{AD40181A-01B0-4CB8-8614-1473649F6741}" type="slidenum">
+              <a:rPr lang="en-US" smtClean="0">
+                <a:solidFill>
+                  <a:schemeClr val="bg1"/>
+                </a:solidFill>
+              </a:rPr>
+              <a:t>6</a:t>
+            </a:fld>
+            <a:endParaRPr lang="en-US" dirty="0">
+              <a:solidFill>
+                <a:schemeClr val="bg1"/>
+              </a:solidFill>
+            </a:endParaRPr>
+          </a:p>
+        </p:txBody>
+      </p:sp>
+      <p:pic>
+        <p:nvPicPr>
+          <p:cNvPr id="7" name="Picture 6" descr="A blue and black logo&#10;&#10;Description automatically generated">
+            <a:extLst>
+              <a:ext uri="{FF2B5EF4-FFF2-40B4-BE49-F238E27FC236}">
+                <a16:creationId xmlns:a16="http://schemas.microsoft.com/office/drawing/2014/main" id="{A6EDB998-68E1-AD17-716A-78FAED898F7A}"/>
+              </a:ext>
+            </a:extLst>
+          </p:cNvPr>
+          <p:cNvPicPr>
+            <a:picLocks noChangeAspect="1"/>
+          </p:cNvPicPr>
+          <p:nvPr/>
+        </p:nvPicPr>
+        <p:blipFill>
+          <a:blip r:embed="rId2"/>
+          <a:stretch>
+            <a:fillRect/>
+          </a:stretch>
+        </p:blipFill>
+        <p:spPr>
+          <a:xfrm>
+            <a:off x="395039" y="48364021"/>
+            <a:ext cx="3640413" cy="2928450"/>
+          </a:xfrm>
+          <a:prstGeom prst="rect">
+            <a:avLst/>
+          </a:prstGeom>
+        </p:spPr>
+      </p:pic>
+      <p:pic>
+        <p:nvPicPr>
+          <p:cNvPr id="8" name="Picture 7" descr="A blue and black logo&#10;&#10;Description automatically generated">
+            <a:extLst>
+              <a:ext uri="{FF2B5EF4-FFF2-40B4-BE49-F238E27FC236}">
+                <a16:creationId xmlns:a16="http://schemas.microsoft.com/office/drawing/2014/main" id="{C5B46770-B05D-D544-EBA1-BA836127AA2A}"/>
+              </a:ext>
+            </a:extLst>
+          </p:cNvPr>
+          <p:cNvPicPr>
+            <a:picLocks noChangeAspect="1"/>
+          </p:cNvPicPr>
+          <p:nvPr/>
+        </p:nvPicPr>
+        <p:blipFill>
+          <a:blip r:embed="rId2"/>
+          <a:stretch>
+            <a:fillRect/>
+          </a:stretch>
+        </p:blipFill>
+        <p:spPr>
+          <a:xfrm>
+            <a:off x="547439" y="48516421"/>
+            <a:ext cx="3640413" cy="2928450"/>
+          </a:xfrm>
+          <a:prstGeom prst="rect">
+            <a:avLst/>
+          </a:prstGeom>
+        </p:spPr>
+      </p:pic>
+      <p:pic>
+        <p:nvPicPr>
+          <p:cNvPr id="9" name="Content Placeholder 8" descr="A blue and black logo&#10;&#10;Description automatically generated">
+            <a:extLst>
+              <a:ext uri="{FF2B5EF4-FFF2-40B4-BE49-F238E27FC236}">
+                <a16:creationId xmlns:a16="http://schemas.microsoft.com/office/drawing/2014/main" id="{2B68742D-1F7E-9CD1-6BA4-7DD7BC91FC9F}"/>
+              </a:ext>
+            </a:extLst>
+          </p:cNvPr>
+          <p:cNvPicPr>
+            <a:picLocks noGrp="1" noChangeAspect="1"/>
+          </p:cNvPicPr>
+          <p:nvPr>
+            <p:ph idx="1"/>
+          </p:nvPr>
+        </p:nvPicPr>
+        <p:blipFill>
+          <a:blip r:embed="rId2"/>
+          <a:stretch>
+            <a:fillRect/>
+          </a:stretch>
+        </p:blipFill>
+        <p:spPr>
+          <a:xfrm>
+            <a:off x="547439" y="1517867"/>
+            <a:ext cx="1782457" cy="1433858"/>
+          </a:xfrm>
+          <a:prstGeom prst="rect">
+            <a:avLst/>
+          </a:prstGeom>
+        </p:spPr>
+      </p:pic>
+      <p:sp>
+        <p:nvSpPr>
+          <p:cNvPr id="10" name="Rectangle 9">
+            <a:extLst>
+              <a:ext uri="{FF2B5EF4-FFF2-40B4-BE49-F238E27FC236}">
+                <a16:creationId xmlns:a16="http://schemas.microsoft.com/office/drawing/2014/main" id="{6245BBB5-4661-7EC5-62C2-3AD7E197C4B0}"/>
+              </a:ext>
+            </a:extLst>
+          </p:cNvPr>
+          <p:cNvSpPr/>
+          <p:nvPr/>
+        </p:nvSpPr>
+        <p:spPr>
+          <a:xfrm>
+            <a:off x="7322604" y="1596510"/>
+            <a:ext cx="2345271" cy="1001724"/>
+          </a:xfrm>
+          <a:prstGeom prst="rect">
+            <a:avLst/>
+          </a:prstGeom>
+        </p:spPr>
+        <p:style>
+          <a:lnRef idx="2">
+            <a:schemeClr val="accent1">
+              <a:shade val="15000"/>
+            </a:schemeClr>
+          </a:lnRef>
+          <a:fillRef idx="1">
+            <a:schemeClr val="accent1"/>
+          </a:fillRef>
+          <a:effectRef idx="0">
+            <a:schemeClr val="accent1"/>
+          </a:effectRef>
+          <a:fontRef idx="minor">
+            <a:schemeClr val="lt1"/>
+          </a:fontRef>
+        </p:style>
+        <p:txBody>
+          <a:bodyPr rtlCol="0" anchor="ctr"/>
+          <a:lstStyle/>
+          <a:p>
+            <a:pPr algn="ctr"/>
+            <a:r>
+              <a:rPr lang="en-US" dirty="0"/>
+              <a:t>Drug-Disease Relationships</a:t>
+            </a:r>
+          </a:p>
+        </p:txBody>
+      </p:sp>
+      <p:sp>
+        <p:nvSpPr>
+          <p:cNvPr id="13" name="Rectangle 12">
+            <a:extLst>
+              <a:ext uri="{FF2B5EF4-FFF2-40B4-BE49-F238E27FC236}">
+                <a16:creationId xmlns:a16="http://schemas.microsoft.com/office/drawing/2014/main" id="{C130E80D-F761-C46B-0B74-D83E0D4D6F45}"/>
+              </a:ext>
+            </a:extLst>
+          </p:cNvPr>
+          <p:cNvSpPr/>
+          <p:nvPr/>
+        </p:nvSpPr>
+        <p:spPr>
+          <a:xfrm>
+            <a:off x="3743847" y="1596510"/>
+            <a:ext cx="2123552" cy="1052167"/>
+          </a:xfrm>
+          <a:prstGeom prst="rect">
+            <a:avLst/>
+          </a:prstGeom>
+        </p:spPr>
+        <p:style>
+          <a:lnRef idx="2">
+            <a:schemeClr val="accent1">
+              <a:shade val="15000"/>
+            </a:schemeClr>
+          </a:lnRef>
+          <a:fillRef idx="1">
+            <a:schemeClr val="accent1"/>
+          </a:fillRef>
+          <a:effectRef idx="0">
+            <a:schemeClr val="accent1"/>
+          </a:effectRef>
+          <a:fontRef idx="minor">
+            <a:schemeClr val="lt1"/>
+          </a:fontRef>
+        </p:style>
+        <p:txBody>
+          <a:bodyPr rtlCol="0" anchor="ctr"/>
+          <a:lstStyle/>
+          <a:p>
+            <a:pPr algn="ctr"/>
+            <a:r>
+              <a:rPr lang="en-US" dirty="0"/>
+              <a:t>Approx 500k studies, all 50 US states and 223 countries</a:t>
+            </a:r>
+          </a:p>
+        </p:txBody>
+      </p:sp>
+      <p:pic>
+        <p:nvPicPr>
+          <p:cNvPr id="15" name="Graphic 14" descr="Document outline">
+            <a:extLst>
+              <a:ext uri="{FF2B5EF4-FFF2-40B4-BE49-F238E27FC236}">
+                <a16:creationId xmlns:a16="http://schemas.microsoft.com/office/drawing/2014/main" id="{D9813EFA-86CD-823E-3D84-28C37F21B606}"/>
+              </a:ext>
+            </a:extLst>
+          </p:cNvPr>
+          <p:cNvPicPr>
+            <a:picLocks noChangeAspect="1"/>
+          </p:cNvPicPr>
+          <p:nvPr/>
+        </p:nvPicPr>
+        <p:blipFill>
+          <a:blip r:embed="rId3">
+            <a:extLst>
+              <a:ext uri="{96DAC541-7B7A-43D3-8B79-37D633B846F1}">
+                <asvg:svgBlip xmlns:asvg="http://schemas.microsoft.com/office/drawing/2016/SVG/main" r:embed="rId4"/>
+              </a:ext>
+            </a:extLst>
+          </a:blip>
+          <a:stretch>
+            <a:fillRect/>
+          </a:stretch>
+        </p:blipFill>
+        <p:spPr>
+          <a:xfrm>
+            <a:off x="7195382" y="3395236"/>
+            <a:ext cx="914400" cy="914400"/>
+          </a:xfrm>
+          <a:prstGeom prst="rect">
+            <a:avLst/>
+          </a:prstGeom>
+        </p:spPr>
+      </p:pic>
+      <p:pic>
+        <p:nvPicPr>
+          <p:cNvPr id="16" name="Graphic 15" descr="Document outline">
+            <a:extLst>
+              <a:ext uri="{FF2B5EF4-FFF2-40B4-BE49-F238E27FC236}">
+                <a16:creationId xmlns:a16="http://schemas.microsoft.com/office/drawing/2014/main" id="{55446897-A0ED-1E2C-0F08-6C2D4BE10E2A}"/>
+              </a:ext>
+            </a:extLst>
+          </p:cNvPr>
+          <p:cNvPicPr>
+            <a:picLocks noChangeAspect="1"/>
+          </p:cNvPicPr>
+          <p:nvPr/>
+        </p:nvPicPr>
+        <p:blipFill>
+          <a:blip r:embed="rId3">
+            <a:extLst>
+              <a:ext uri="{96DAC541-7B7A-43D3-8B79-37D633B846F1}">
+                <asvg:svgBlip xmlns:asvg="http://schemas.microsoft.com/office/drawing/2016/SVG/main" r:embed="rId4"/>
+              </a:ext>
+            </a:extLst>
+          </a:blip>
+          <a:stretch>
+            <a:fillRect/>
+          </a:stretch>
+        </p:blipFill>
+        <p:spPr>
+          <a:xfrm>
+            <a:off x="9175805" y="3377810"/>
+            <a:ext cx="914400" cy="914400"/>
+          </a:xfrm>
+          <a:prstGeom prst="rect">
+            <a:avLst/>
+          </a:prstGeom>
+        </p:spPr>
+      </p:pic>
+      <p:sp>
+        <p:nvSpPr>
+          <p:cNvPr id="17" name="TextBox 16">
+            <a:extLst>
+              <a:ext uri="{FF2B5EF4-FFF2-40B4-BE49-F238E27FC236}">
+                <a16:creationId xmlns:a16="http://schemas.microsoft.com/office/drawing/2014/main" id="{D834A011-45D1-4ABC-8A32-8A00898C8A8A}"/>
+              </a:ext>
+            </a:extLst>
+          </p:cNvPr>
+          <p:cNvSpPr txBox="1"/>
+          <p:nvPr/>
+        </p:nvSpPr>
+        <p:spPr>
+          <a:xfrm>
+            <a:off x="9175805" y="4343715"/>
+            <a:ext cx="1598515" cy="369332"/>
+          </a:xfrm>
+          <a:prstGeom prst="rect">
+            <a:avLst/>
+          </a:prstGeom>
+          <a:noFill/>
+        </p:spPr>
+        <p:txBody>
+          <a:bodyPr wrap="none" rtlCol="0">
+            <a:spAutoFit/>
+          </a:bodyPr>
+          <a:lstStyle/>
+          <a:p>
+            <a:r>
+              <a:rPr lang="en-US" dirty="0" err="1">
+                <a:solidFill>
+                  <a:schemeClr val="bg2">
+                    <a:lumMod val="50000"/>
+                  </a:schemeClr>
+                </a:solidFill>
+              </a:rPr>
+              <a:t>conditions.txt</a:t>
+            </a:r>
+            <a:endParaRPr lang="en-US" dirty="0">
+              <a:solidFill>
+                <a:schemeClr val="bg2">
+                  <a:lumMod val="50000"/>
+                </a:schemeClr>
+              </a:solidFill>
+            </a:endParaRPr>
+          </a:p>
+        </p:txBody>
+      </p:sp>
+      <p:sp>
+        <p:nvSpPr>
+          <p:cNvPr id="19" name="TextBox 18">
+            <a:extLst>
+              <a:ext uri="{FF2B5EF4-FFF2-40B4-BE49-F238E27FC236}">
+                <a16:creationId xmlns:a16="http://schemas.microsoft.com/office/drawing/2014/main" id="{76356B19-6B3F-7B2F-7558-4A06C6A26305}"/>
+              </a:ext>
+            </a:extLst>
+          </p:cNvPr>
+          <p:cNvSpPr txBox="1"/>
+          <p:nvPr/>
+        </p:nvSpPr>
+        <p:spPr>
+          <a:xfrm>
+            <a:off x="6777271" y="4343715"/>
+            <a:ext cx="1887055" cy="369332"/>
+          </a:xfrm>
+          <a:prstGeom prst="rect">
+            <a:avLst/>
+          </a:prstGeom>
+          <a:noFill/>
+        </p:spPr>
+        <p:txBody>
+          <a:bodyPr wrap="square" rtlCol="0">
+            <a:spAutoFit/>
+          </a:bodyPr>
+          <a:lstStyle/>
+          <a:p>
+            <a:r>
+              <a:rPr lang="en-US" dirty="0" err="1">
+                <a:solidFill>
+                  <a:schemeClr val="bg2">
+                    <a:lumMod val="50000"/>
+                  </a:schemeClr>
+                </a:solidFill>
+              </a:rPr>
+              <a:t>interventions.txt</a:t>
+            </a:r>
+            <a:endParaRPr lang="en-US" dirty="0">
+              <a:solidFill>
+                <a:schemeClr val="bg2">
+                  <a:lumMod val="50000"/>
+                </a:schemeClr>
+              </a:solidFill>
+            </a:endParaRPr>
+          </a:p>
+        </p:txBody>
+      </p:sp>
+      <p:sp>
+        <p:nvSpPr>
+          <p:cNvPr id="22" name="Right Arrow 21">
+            <a:extLst>
+              <a:ext uri="{FF2B5EF4-FFF2-40B4-BE49-F238E27FC236}">
+                <a16:creationId xmlns:a16="http://schemas.microsoft.com/office/drawing/2014/main" id="{883A785D-3ED7-645C-5D7B-5ED5E9EC15B7}"/>
+              </a:ext>
+            </a:extLst>
+          </p:cNvPr>
+          <p:cNvSpPr/>
+          <p:nvPr/>
+        </p:nvSpPr>
+        <p:spPr>
+          <a:xfrm>
+            <a:off x="6061627" y="1857673"/>
+            <a:ext cx="1025495" cy="529839"/>
+          </a:xfrm>
+          <a:prstGeom prst="rightArrow">
+            <a:avLst/>
+          </a:prstGeom>
+        </p:spPr>
+        <p:style>
+          <a:lnRef idx="2">
+            <a:schemeClr val="accent1">
+              <a:shade val="15000"/>
+            </a:schemeClr>
+          </a:lnRef>
+          <a:fillRef idx="1">
+            <a:schemeClr val="accent1"/>
+          </a:fillRef>
+          <a:effectRef idx="0">
+            <a:schemeClr val="accent1"/>
+          </a:effectRef>
+          <a:fontRef idx="minor">
+            <a:schemeClr val="lt1"/>
+          </a:fontRef>
+        </p:style>
+        <p:txBody>
+          <a:bodyPr rtlCol="0" anchor="ctr"/>
+          <a:lstStyle/>
+          <a:p>
+            <a:pPr algn="ctr"/>
+            <a:endParaRPr lang="en-US"/>
+          </a:p>
+        </p:txBody>
+      </p:sp>
+      <p:sp>
+        <p:nvSpPr>
+          <p:cNvPr id="23" name="Right Arrow 22">
+            <a:extLst>
+              <a:ext uri="{FF2B5EF4-FFF2-40B4-BE49-F238E27FC236}">
+                <a16:creationId xmlns:a16="http://schemas.microsoft.com/office/drawing/2014/main" id="{4FFC6DBB-025C-FFDB-6CF7-190EC5E3073D}"/>
+              </a:ext>
+            </a:extLst>
+          </p:cNvPr>
+          <p:cNvSpPr/>
+          <p:nvPr/>
+        </p:nvSpPr>
+        <p:spPr>
+          <a:xfrm>
+            <a:off x="2524124" y="1825019"/>
+            <a:ext cx="1025495" cy="529839"/>
+          </a:xfrm>
+          <a:prstGeom prst="rightArrow">
+            <a:avLst/>
+          </a:prstGeom>
+        </p:spPr>
+        <p:style>
+          <a:lnRef idx="2">
+            <a:schemeClr val="accent1">
+              <a:shade val="15000"/>
+            </a:schemeClr>
+          </a:lnRef>
+          <a:fillRef idx="1">
+            <a:schemeClr val="accent1"/>
+          </a:fillRef>
+          <a:effectRef idx="0">
+            <a:schemeClr val="accent1"/>
+          </a:effectRef>
+          <a:fontRef idx="minor">
+            <a:schemeClr val="lt1"/>
+          </a:fontRef>
+        </p:style>
+        <p:txBody>
+          <a:bodyPr rtlCol="0" anchor="ctr"/>
+          <a:lstStyle/>
+          <a:p>
+            <a:pPr algn="ctr"/>
+            <a:endParaRPr lang="en-US"/>
+          </a:p>
+        </p:txBody>
+      </p:sp>
+      <p:sp>
+        <p:nvSpPr>
+          <p:cNvPr id="24" name="Down Arrow 23">
+            <a:extLst>
+              <a:ext uri="{FF2B5EF4-FFF2-40B4-BE49-F238E27FC236}">
+                <a16:creationId xmlns:a16="http://schemas.microsoft.com/office/drawing/2014/main" id="{06CF1118-B838-CDEF-F620-D15A3D1288E8}"/>
+              </a:ext>
+            </a:extLst>
+          </p:cNvPr>
+          <p:cNvSpPr/>
+          <p:nvPr/>
+        </p:nvSpPr>
+        <p:spPr>
+          <a:xfrm>
+            <a:off x="7482799" y="2738973"/>
+            <a:ext cx="444381" cy="648656"/>
+          </a:xfrm>
+          <a:prstGeom prst="downArrow">
+            <a:avLst/>
+          </a:prstGeom>
+        </p:spPr>
+        <p:style>
+          <a:lnRef idx="2">
+            <a:schemeClr val="accent1">
+              <a:shade val="15000"/>
+            </a:schemeClr>
+          </a:lnRef>
+          <a:fillRef idx="1">
+            <a:schemeClr val="accent1"/>
+          </a:fillRef>
+          <a:effectRef idx="0">
+            <a:schemeClr val="accent1"/>
+          </a:effectRef>
+          <a:fontRef idx="minor">
+            <a:schemeClr val="lt1"/>
+          </a:fontRef>
+        </p:style>
+        <p:txBody>
+          <a:bodyPr rtlCol="0" anchor="ctr"/>
+          <a:lstStyle/>
+          <a:p>
+            <a:pPr algn="ctr"/>
+            <a:endParaRPr lang="en-US"/>
+          </a:p>
+        </p:txBody>
+      </p:sp>
+      <p:sp>
+        <p:nvSpPr>
+          <p:cNvPr id="25" name="Left-Right Arrow 24">
+            <a:extLst>
+              <a:ext uri="{FF2B5EF4-FFF2-40B4-BE49-F238E27FC236}">
+                <a16:creationId xmlns:a16="http://schemas.microsoft.com/office/drawing/2014/main" id="{70096815-009D-BEF4-DCB6-E8F9D649D0AE}"/>
+              </a:ext>
+            </a:extLst>
+          </p:cNvPr>
+          <p:cNvSpPr/>
+          <p:nvPr/>
+        </p:nvSpPr>
+        <p:spPr>
+          <a:xfrm>
+            <a:off x="8043214" y="3554320"/>
+            <a:ext cx="1175657" cy="457200"/>
+          </a:xfrm>
+          <a:prstGeom prst="leftRightArrow">
+            <a:avLst/>
+          </a:prstGeom>
+        </p:spPr>
+        <p:style>
+          <a:lnRef idx="2">
+            <a:schemeClr val="accent1">
+              <a:shade val="15000"/>
+            </a:schemeClr>
+          </a:lnRef>
+          <a:fillRef idx="1">
+            <a:schemeClr val="accent1"/>
+          </a:fillRef>
+          <a:effectRef idx="0">
+            <a:schemeClr val="accent1"/>
+          </a:effectRef>
+          <a:fontRef idx="minor">
+            <a:schemeClr val="lt1"/>
+          </a:fontRef>
+        </p:style>
+        <p:txBody>
+          <a:bodyPr rtlCol="0" anchor="ctr"/>
+          <a:lstStyle/>
+          <a:p>
+            <a:pPr algn="ctr"/>
+            <a:endParaRPr lang="en-US"/>
+          </a:p>
+        </p:txBody>
+      </p:sp>
+      <p:sp>
+        <p:nvSpPr>
+          <p:cNvPr id="26" name="Down Arrow 25">
+            <a:extLst>
+              <a:ext uri="{FF2B5EF4-FFF2-40B4-BE49-F238E27FC236}">
+                <a16:creationId xmlns:a16="http://schemas.microsoft.com/office/drawing/2014/main" id="{B71E8DA3-F389-9793-F689-9B21E8ECEEB2}"/>
+              </a:ext>
+            </a:extLst>
+          </p:cNvPr>
+          <p:cNvSpPr/>
+          <p:nvPr/>
+        </p:nvSpPr>
+        <p:spPr>
+          <a:xfrm>
+            <a:off x="9261176" y="2699570"/>
+            <a:ext cx="444381" cy="648656"/>
+          </a:xfrm>
+          <a:prstGeom prst="downArrow">
+            <a:avLst/>
+          </a:prstGeom>
+        </p:spPr>
+        <p:style>
+          <a:lnRef idx="2">
+            <a:schemeClr val="accent1">
+              <a:shade val="15000"/>
+            </a:schemeClr>
+          </a:lnRef>
+          <a:fillRef idx="1">
+            <a:schemeClr val="accent1"/>
+          </a:fillRef>
+          <a:effectRef idx="0">
+            <a:schemeClr val="accent1"/>
+          </a:effectRef>
+          <a:fontRef idx="minor">
+            <a:schemeClr val="lt1"/>
+          </a:fontRef>
+        </p:style>
+        <p:txBody>
+          <a:bodyPr rtlCol="0" anchor="ctr"/>
+          <a:lstStyle/>
+          <a:p>
+            <a:pPr algn="ctr"/>
+            <a:endParaRPr lang="en-US"/>
+          </a:p>
+        </p:txBody>
+      </p:sp>
+      <p:sp>
+        <p:nvSpPr>
+          <p:cNvPr id="27" name="TextBox 26">
+            <a:extLst>
+              <a:ext uri="{FF2B5EF4-FFF2-40B4-BE49-F238E27FC236}">
+                <a16:creationId xmlns:a16="http://schemas.microsoft.com/office/drawing/2014/main" id="{7FCF9D19-5B91-8E26-D5FC-EC12367CB2B8}"/>
+              </a:ext>
+            </a:extLst>
+          </p:cNvPr>
+          <p:cNvSpPr txBox="1"/>
+          <p:nvPr/>
+        </p:nvSpPr>
+        <p:spPr>
+          <a:xfrm>
+            <a:off x="8175210" y="3254538"/>
+            <a:ext cx="1000595" cy="369332"/>
+          </a:xfrm>
+          <a:prstGeom prst="rect">
+            <a:avLst/>
+          </a:prstGeom>
+          <a:noFill/>
+        </p:spPr>
+        <p:txBody>
+          <a:bodyPr wrap="none" rtlCol="0">
+            <a:spAutoFit/>
+          </a:bodyPr>
+          <a:lstStyle/>
+          <a:p>
+            <a:r>
+              <a:rPr lang="en-US" dirty="0">
+                <a:solidFill>
+                  <a:schemeClr val="bg2">
+                    <a:lumMod val="50000"/>
+                  </a:schemeClr>
+                </a:solidFill>
+              </a:rPr>
+              <a:t>NCT-ID</a:t>
+            </a:r>
+          </a:p>
+        </p:txBody>
+      </p:sp>
+      <p:sp>
+        <p:nvSpPr>
+          <p:cNvPr id="11" name="TextBox 10">
+            <a:extLst>
+              <a:ext uri="{FF2B5EF4-FFF2-40B4-BE49-F238E27FC236}">
+                <a16:creationId xmlns:a16="http://schemas.microsoft.com/office/drawing/2014/main" id="{574E9C16-68E9-B059-7BAB-8D0153960D46}"/>
+              </a:ext>
+            </a:extLst>
+          </p:cNvPr>
+          <p:cNvSpPr txBox="1"/>
+          <p:nvPr/>
+        </p:nvSpPr>
+        <p:spPr>
+          <a:xfrm>
+            <a:off x="547439" y="4845456"/>
+            <a:ext cx="10060481" cy="1200329"/>
+          </a:xfrm>
+          <a:prstGeom prst="rect">
+            <a:avLst/>
+          </a:prstGeom>
+          <a:noFill/>
+        </p:spPr>
+        <p:txBody>
+          <a:bodyPr wrap="square" rtlCol="0">
+            <a:spAutoFit/>
+          </a:bodyPr>
+          <a:lstStyle/>
+          <a:p>
+            <a:r>
+              <a:rPr lang="en-US" dirty="0"/>
+              <a:t>Challenge: disease names in clinical trials registry  contain extraneous information, typographical errors, missing values, non-standard nomenclature and other inconsistencies which create barriers for data integration and downstream analysis of the CTR data.</a:t>
+            </a:r>
+          </a:p>
+          <a:p>
+            <a:endParaRPr lang="en-US" dirty="0"/>
+          </a:p>
+        </p:txBody>
+      </p:sp>
+    </p:spTree>
+    <p:extLst>
+      <p:ext uri="{BB962C8B-B14F-4D97-AF65-F5344CB8AC3E}">
+        <p14:creationId xmlns:p14="http://schemas.microsoft.com/office/powerpoint/2010/main" val="1240283276"/>
+      </p:ext>
+    </p:extLst>
+  </p:cSld>
+  <p:clrMapOvr>
+    <a:masterClrMapping/>
+  </p:clrMapOvr>
+</p:sld>
+</file>
+
+<file path=ppt/slides/slide7.xml><?xml version="1.0" encoding="utf-8"?>
 <p:sld xmlns:a="http://schemas.openxmlformats.org/drawingml/2006/main" xmlns:r="http://schemas.openxmlformats.org/officeDocument/2006/relationships" xmlns:p="http://schemas.openxmlformats.org/presentationml/2006/main">
   <p:cSld>
     <p:spTree>
@@ -1892,7 +4543,7 @@
                   <a:schemeClr val="bg1"/>
                 </a:solidFill>
               </a:rPr>
-              <a:t>3</a:t>
+              <a:t>7</a:t>
             </a:fld>
             <a:endParaRPr lang="en-US" dirty="0">
               <a:solidFill>
@@ -1940,7 +4591,7 @@
 </p:sld>
 </file>
 
-<file path=ppt/slides/slide4.xml><?xml version="1.0" encoding="utf-8"?>
+<file path=ppt/slides/slide8.xml><?xml version="1.0" encoding="utf-8"?>
 <p:sld xmlns:a="http://schemas.openxmlformats.org/drawingml/2006/main" xmlns:r="http://schemas.openxmlformats.org/officeDocument/2006/relationships" xmlns:p="http://schemas.openxmlformats.org/presentationml/2006/main">
   <p:cSld>
     <p:spTree>
@@ -1978,7 +4629,7 @@
                   <a:srgbClr val="FFFFFE"/>
                 </a:solidFill>
               </a:rPr>
-              <a:t>4</a:t>
+              <a:t>8</a:t>
             </a:fld>
             <a:endParaRPr lang="en-US" dirty="0">
               <a:solidFill>

--- a/presentations/CANTOS_PPT.pptx
+++ b/presentations/CANTOS_PPT.pptx
@@ -5,7 +5,7 @@
     <p:sldMasterId id="2147483672" r:id="rId4"/>
   </p:sldMasterIdLst>
   <p:notesMasterIdLst>
-    <p:notesMasterId r:id="rId13"/>
+    <p:notesMasterId r:id="rId14"/>
   </p:notesMasterIdLst>
   <p:sldIdLst>
     <p:sldId id="256" r:id="rId5"/>
@@ -15,7 +15,8 @@
     <p:sldId id="262" r:id="rId9"/>
     <p:sldId id="263" r:id="rId10"/>
     <p:sldId id="259" r:id="rId11"/>
-    <p:sldId id="258" r:id="rId12"/>
+    <p:sldId id="264" r:id="rId12"/>
+    <p:sldId id="258" r:id="rId13"/>
   </p:sldIdLst>
   <p:sldSz cx="12192000" cy="6858000"/>
   <p:notesSz cx="6858000" cy="9144000"/>
@@ -4423,8 +4424,8 @@
         </p:nvSpPr>
         <p:spPr>
           <a:xfrm>
-            <a:off x="547439" y="4845456"/>
-            <a:ext cx="10060481" cy="1200329"/>
+            <a:off x="547439" y="4863349"/>
+            <a:ext cx="11176475" cy="1200329"/>
           </a:xfrm>
           <a:prstGeom prst="rect">
             <a:avLst/>
@@ -4437,9 +4438,10 @@
           </a:bodyPr>
           <a:lstStyle/>
           <a:p>
+            <a:pPr algn="just"/>
             <a:r>
               <a:rPr lang="en-US" dirty="0"/>
-              <a:t>Challenge: disease names in clinical trials registry  contain extraneous information, typographical errors, missing values, non-standard nomenclature and other inconsistencies which create barriers for data integration and downstream analysis of the CTR data.</a:t>
+              <a:t>Challenge: disease names, including tumor names in clinical trials registry  contain extraneous information, typographical errors, missing values, non-standard nomenclature and other inconsistencies which create barriers for data integration and downstream analysis of the CTR data.</a:t>
             </a:r>
           </a:p>
           <a:p>
@@ -4501,7 +4503,7 @@
         </p:nvSpPr>
         <p:spPr>
           <a:xfrm>
-            <a:off x="1222053" y="320156"/>
+            <a:off x="79054" y="0"/>
             <a:ext cx="10651402" cy="1143000"/>
           </a:xfrm>
         </p:spPr>
@@ -4511,7 +4513,7 @@
           <a:p>
             <a:r>
               <a:rPr lang="en-US" dirty="0"/>
-              <a:t>Tumor Name Standardization		</a:t>
+              <a:t>Unstandardized tumor names</a:t>
             </a:r>
           </a:p>
         </p:txBody>
@@ -4553,31 +4555,442 @@
           </a:p>
         </p:txBody>
       </p:sp>
-      <p:sp>
-        <p:nvSpPr>
-          <p:cNvPr id="6" name="Content Placeholder 5">
-            <a:extLst>
-              <a:ext uri="{FF2B5EF4-FFF2-40B4-BE49-F238E27FC236}">
-                <a16:creationId xmlns:a16="http://schemas.microsoft.com/office/drawing/2014/main" id="{69E5054C-30A8-2747-5DB5-31260516A80B}"/>
-              </a:ext>
-            </a:extLst>
-          </p:cNvPr>
-          <p:cNvSpPr>
-            <a:spLocks noGrp="1"/>
-          </p:cNvSpPr>
+      <p:graphicFrame>
+        <p:nvGraphicFramePr>
+          <p:cNvPr id="7" name="Table 6">
+            <a:extLst>
+              <a:ext uri="{FF2B5EF4-FFF2-40B4-BE49-F238E27FC236}">
+                <a16:creationId xmlns:a16="http://schemas.microsoft.com/office/drawing/2014/main" id="{1782C44F-99F5-A0A7-BC97-FD48AD99745C}"/>
+              </a:ext>
+            </a:extLst>
+          </p:cNvPr>
+          <p:cNvGraphicFramePr>
+            <a:graphicFrameLocks noGrp="1"/>
+          </p:cNvGraphicFramePr>
           <p:nvPr>
-            <p:ph idx="1"/>
+            <p:extLst>
+              <p:ext uri="{D42A27DB-BD31-4B8C-83A1-F6EECF244321}">
+                <p14:modId xmlns:p14="http://schemas.microsoft.com/office/powerpoint/2010/main" val="1719294777"/>
+              </p:ext>
+            </p:extLst>
           </p:nvPr>
-        </p:nvSpPr>
-        <p:spPr/>
-        <p:txBody>
-          <a:bodyPr/>
-          <a:lstStyle/>
-          <a:p>
-            <a:endParaRPr lang="en-US"/>
-          </a:p>
-        </p:txBody>
-      </p:sp>
+        </p:nvGraphicFramePr>
+        <p:xfrm>
+          <a:off x="1461544" y="1143000"/>
+          <a:ext cx="8994814" cy="3655156"/>
+        </p:xfrm>
+        <a:graphic>
+          <a:graphicData uri="http://schemas.openxmlformats.org/drawingml/2006/table">
+            <a:tbl>
+              <a:tblPr firstRow="1" bandRow="1">
+                <a:tableStyleId>{5C22544A-7EE6-4342-B048-85BDC9FD1C3A}</a:tableStyleId>
+              </a:tblPr>
+              <a:tblGrid>
+                <a:gridCol w="3087617">
+                  <a:extLst>
+                    <a:ext uri="{9D8B030D-6E8A-4147-A177-3AD203B41FA5}">
+                      <a16:colId xmlns:a16="http://schemas.microsoft.com/office/drawing/2014/main" val="1106209466"/>
+                    </a:ext>
+                  </a:extLst>
+                </a:gridCol>
+                <a:gridCol w="3019280">
+                  <a:extLst>
+                    <a:ext uri="{9D8B030D-6E8A-4147-A177-3AD203B41FA5}">
+                      <a16:colId xmlns:a16="http://schemas.microsoft.com/office/drawing/2014/main" val="1462595529"/>
+                    </a:ext>
+                  </a:extLst>
+                </a:gridCol>
+                <a:gridCol w="2887917">
+                  <a:extLst>
+                    <a:ext uri="{9D8B030D-6E8A-4147-A177-3AD203B41FA5}">
+                      <a16:colId xmlns:a16="http://schemas.microsoft.com/office/drawing/2014/main" val="242162575"/>
+                    </a:ext>
+                  </a:extLst>
+                </a:gridCol>
+              </a:tblGrid>
+              <a:tr h="472978">
+                <a:tc>
+                  <a:txBody>
+                    <a:bodyPr/>
+                    <a:lstStyle/>
+                    <a:p>
+                      <a:r>
+                        <a:rPr lang="en-US" dirty="0"/>
+                        <a:t>CT Tumor Names</a:t>
+                      </a:r>
+                    </a:p>
+                  </a:txBody>
+                  <a:tcPr/>
+                </a:tc>
+                <a:tc>
+                  <a:txBody>
+                    <a:bodyPr/>
+                    <a:lstStyle/>
+                    <a:p>
+                      <a:r>
+                        <a:rPr lang="en-US" dirty="0"/>
+                        <a:t>Issues</a:t>
+                      </a:r>
+                    </a:p>
+                  </a:txBody>
+                  <a:tcPr/>
+                </a:tc>
+                <a:tc>
+                  <a:txBody>
+                    <a:bodyPr/>
+                    <a:lstStyle/>
+                    <a:p>
+                      <a:r>
+                        <a:rPr lang="en-US" dirty="0"/>
+                        <a:t>WHO Standard Names</a:t>
+                      </a:r>
+                    </a:p>
+                  </a:txBody>
+                  <a:tcPr/>
+                </a:tc>
+                <a:extLst>
+                  <a:ext uri="{0D108BD9-81ED-4DB2-BD59-A6C34878D82A}">
+                    <a16:rowId xmlns:a16="http://schemas.microsoft.com/office/drawing/2014/main" val="1751357925"/>
+                  </a:ext>
+                </a:extLst>
+              </a:tr>
+              <a:tr h="457554">
+                <a:tc>
+                  <a:txBody>
+                    <a:bodyPr/>
+                    <a:lstStyle/>
+                    <a:p>
+                      <a:r>
+                        <a:rPr lang="en-US" sz="1400" dirty="0"/>
+                        <a:t>acute myeloid </a:t>
+                      </a:r>
+                      <a:r>
+                        <a:rPr lang="en-US" sz="1400" dirty="0" err="1"/>
+                        <a:t>leucaemia</a:t>
+                      </a:r>
+                      <a:endParaRPr lang="en-US" sz="1400" dirty="0"/>
+                    </a:p>
+                  </a:txBody>
+                  <a:tcPr/>
+                </a:tc>
+                <a:tc>
+                  <a:txBody>
+                    <a:bodyPr/>
+                    <a:lstStyle/>
+                    <a:p>
+                      <a:r>
+                        <a:rPr lang="en-US" sz="1400" dirty="0" err="1"/>
+                        <a:t>Leukaemia</a:t>
+                      </a:r>
+                      <a:r>
+                        <a:rPr lang="en-US" sz="1400" dirty="0"/>
+                        <a:t> not spelled correctly </a:t>
+                      </a:r>
+                    </a:p>
+                  </a:txBody>
+                  <a:tcPr/>
+                </a:tc>
+                <a:tc>
+                  <a:txBody>
+                    <a:bodyPr/>
+                    <a:lstStyle/>
+                    <a:p>
+                      <a:r>
+                        <a:rPr lang="en-US" sz="1400" dirty="0">
+                          <a:effectLst/>
+                        </a:rPr>
+                        <a:t>acute myeloid </a:t>
+                      </a:r>
+                      <a:r>
+                        <a:rPr lang="en-US" sz="1400" dirty="0" err="1">
+                          <a:effectLst/>
+                        </a:rPr>
+                        <a:t>leukaemia</a:t>
+                      </a:r>
+                      <a:endParaRPr lang="en-US" sz="1400" dirty="0">
+                        <a:effectLst/>
+                      </a:endParaRPr>
+                    </a:p>
+                  </a:txBody>
+                  <a:tcPr marL="47625" marR="47625" marT="38100" marB="38100" anchor="ctr"/>
+                </a:tc>
+                <a:extLst>
+                  <a:ext uri="{0D108BD9-81ED-4DB2-BD59-A6C34878D82A}">
+                    <a16:rowId xmlns:a16="http://schemas.microsoft.com/office/drawing/2014/main" val="65510083"/>
+                  </a:ext>
+                </a:extLst>
+              </a:tr>
+              <a:tr h="708487">
+                <a:tc>
+                  <a:txBody>
+                    <a:bodyPr/>
+                    <a:lstStyle/>
+                    <a:p>
+                      <a:r>
+                        <a:rPr lang="en-US" sz="1400" dirty="0"/>
+                        <a:t>glioblastoma or solid tumors, epidermal growth factor receptor (</a:t>
+                      </a:r>
+                      <a:r>
+                        <a:rPr lang="en-US" sz="1400" dirty="0" err="1"/>
+                        <a:t>egfr</a:t>
+                      </a:r>
+                      <a:r>
+                        <a:rPr lang="en-US" sz="1400" dirty="0"/>
+                        <a:t>) diagnosis</a:t>
+                      </a:r>
+                    </a:p>
+                    <a:p>
+                      <a:endParaRPr lang="en-US" sz="1400" dirty="0"/>
+                    </a:p>
+                  </a:txBody>
+                  <a:tcPr/>
+                </a:tc>
+                <a:tc>
+                  <a:txBody>
+                    <a:bodyPr/>
+                    <a:lstStyle/>
+                    <a:p>
+                      <a:r>
+                        <a:rPr lang="en-US" sz="1400" dirty="0"/>
+                        <a:t>Has two types of tumor: glioblastoma and solid tumors, extra information on  EGFR</a:t>
+                      </a:r>
+                    </a:p>
+                  </a:txBody>
+                  <a:tcPr/>
+                </a:tc>
+                <a:tc>
+                  <a:txBody>
+                    <a:bodyPr/>
+                    <a:lstStyle/>
+                    <a:p>
+                      <a:r>
+                        <a:rPr lang="en-US" sz="1400" dirty="0"/>
+                        <a:t>glioblastoma, </a:t>
+                      </a:r>
+                      <a:r>
+                        <a:rPr lang="en-US" sz="1400" dirty="0" err="1"/>
+                        <a:t>idh</a:t>
+                      </a:r>
+                      <a:r>
+                        <a:rPr lang="en-US" sz="1400" dirty="0"/>
+                        <a:t>-wildtype</a:t>
+                      </a:r>
+                    </a:p>
+                  </a:txBody>
+                  <a:tcPr/>
+                </a:tc>
+                <a:extLst>
+                  <a:ext uri="{0D108BD9-81ED-4DB2-BD59-A6C34878D82A}">
+                    <a16:rowId xmlns:a16="http://schemas.microsoft.com/office/drawing/2014/main" val="1041037533"/>
+                  </a:ext>
+                </a:extLst>
+              </a:tr>
+              <a:tr h="500866">
+                <a:tc>
+                  <a:txBody>
+                    <a:bodyPr/>
+                    <a:lstStyle/>
+                    <a:p>
+                      <a:r>
+                        <a:rPr lang="en-US" sz="1400" dirty="0">
+                          <a:effectLst/>
+                        </a:rPr>
+                        <a:t>pathologic stage </a:t>
+                      </a:r>
+                      <a:r>
+                        <a:rPr lang="en-US" sz="1400" dirty="0" err="1">
+                          <a:effectLst/>
+                        </a:rPr>
+                        <a:t>i</a:t>
+                      </a:r>
+                      <a:r>
+                        <a:rPr lang="en-US" sz="1400" dirty="0">
+                          <a:effectLst/>
+                        </a:rPr>
+                        <a:t> </a:t>
+                      </a:r>
+                      <a:r>
+                        <a:rPr lang="en-US" sz="1400" dirty="0" err="1">
+                          <a:effectLst/>
+                        </a:rPr>
+                        <a:t>merkel</a:t>
+                      </a:r>
+                      <a:r>
+                        <a:rPr lang="en-US" sz="1400" dirty="0">
+                          <a:effectLst/>
+                        </a:rPr>
+                        <a:t> cell carcinoma </a:t>
+                      </a:r>
+                      <a:r>
+                        <a:rPr lang="en-US" sz="1400" dirty="0" err="1">
+                          <a:effectLst/>
+                        </a:rPr>
+                        <a:t>ajcc</a:t>
+                      </a:r>
+                      <a:r>
+                        <a:rPr lang="en-US" sz="1400" dirty="0">
+                          <a:effectLst/>
+                        </a:rPr>
+                        <a:t> v8</a:t>
+                      </a:r>
+                    </a:p>
+                  </a:txBody>
+                  <a:tcPr marL="47625" marR="47625" marT="38100" marB="38100" anchor="ctr"/>
+                </a:tc>
+                <a:tc>
+                  <a:txBody>
+                    <a:bodyPr/>
+                    <a:lstStyle/>
+                    <a:p>
+                      <a:r>
+                        <a:rPr lang="en-US" sz="1400" dirty="0">
+                          <a:effectLst/>
+                        </a:rPr>
+                        <a:t>extra information on staging</a:t>
+                      </a:r>
+                    </a:p>
+                  </a:txBody>
+                  <a:tcPr marL="47625" marR="47625" marT="38100" marB="38100" anchor="ctr"/>
+                </a:tc>
+                <a:tc>
+                  <a:txBody>
+                    <a:bodyPr/>
+                    <a:lstStyle/>
+                    <a:p>
+                      <a:r>
+                        <a:rPr lang="en-US" sz="1400" dirty="0" err="1">
+                          <a:effectLst/>
+                        </a:rPr>
+                        <a:t>merkel</a:t>
+                      </a:r>
+                      <a:r>
+                        <a:rPr lang="en-US" sz="1400" dirty="0">
+                          <a:effectLst/>
+                        </a:rPr>
+                        <a:t> cell carcinoma</a:t>
+                      </a:r>
+                    </a:p>
+                  </a:txBody>
+                  <a:tcPr marL="47625" marR="47625" marT="38100" marB="38100" anchor="ctr"/>
+                </a:tc>
+                <a:extLst>
+                  <a:ext uri="{0D108BD9-81ED-4DB2-BD59-A6C34878D82A}">
+                    <a16:rowId xmlns:a16="http://schemas.microsoft.com/office/drawing/2014/main" val="3070337974"/>
+                  </a:ext>
+                </a:extLst>
+              </a:tr>
+              <a:tr h="545304">
+                <a:tc>
+                  <a:txBody>
+                    <a:bodyPr/>
+                    <a:lstStyle/>
+                    <a:p>
+                      <a:r>
+                        <a:rPr lang="en-US" sz="1400" dirty="0">
+                          <a:effectLst/>
+                        </a:rPr>
+                        <a:t>adrenocortical carcinoma (part g)</a:t>
+                      </a:r>
+                    </a:p>
+                  </a:txBody>
+                  <a:tcPr marL="47625" marR="47625" marT="38100" marB="38100" anchor="ctr"/>
+                </a:tc>
+                <a:tc>
+                  <a:txBody>
+                    <a:bodyPr/>
+                    <a:lstStyle/>
+                    <a:p>
+                      <a:r>
+                        <a:rPr lang="en-US" sz="1400" dirty="0">
+                          <a:effectLst/>
+                        </a:rPr>
+                        <a:t> Extra information in bracket</a:t>
+                      </a:r>
+                    </a:p>
+                  </a:txBody>
+                  <a:tcPr marL="47625" marR="47625" marT="38100" marB="38100" anchor="ctr"/>
+                </a:tc>
+                <a:tc>
+                  <a:txBody>
+                    <a:bodyPr/>
+                    <a:lstStyle/>
+                    <a:p>
+                      <a:r>
+                        <a:rPr lang="en-US" sz="1400" dirty="0">
+                          <a:effectLst/>
+                        </a:rPr>
+                        <a:t> adrenal cortical carcinoma</a:t>
+                      </a:r>
+                    </a:p>
+                  </a:txBody>
+                  <a:tcPr marL="47625" marR="47625" marT="38100" marB="38100" anchor="ctr"/>
+                </a:tc>
+                <a:extLst>
+                  <a:ext uri="{0D108BD9-81ED-4DB2-BD59-A6C34878D82A}">
+                    <a16:rowId xmlns:a16="http://schemas.microsoft.com/office/drawing/2014/main" val="2004295928"/>
+                  </a:ext>
+                </a:extLst>
+              </a:tr>
+              <a:tr h="708487">
+                <a:tc>
+                  <a:txBody>
+                    <a:bodyPr/>
+                    <a:lstStyle/>
+                    <a:p>
+                      <a:r>
+                        <a:rPr lang="en-US" sz="1400" dirty="0" err="1"/>
+                        <a:t>ann</a:t>
+                      </a:r>
+                      <a:r>
+                        <a:rPr lang="en-US" sz="1400" dirty="0"/>
+                        <a:t> arbor stage iii diffuse large b-cell lymphoma</a:t>
+                      </a:r>
+                    </a:p>
+                    <a:p>
+                      <a:endParaRPr lang="en-US" sz="1400" dirty="0"/>
+                    </a:p>
+                  </a:txBody>
+                  <a:tcPr/>
+                </a:tc>
+                <a:tc>
+                  <a:txBody>
+                    <a:bodyPr/>
+                    <a:lstStyle/>
+                    <a:p>
+                      <a:r>
+                        <a:rPr lang="en-US" sz="1400" dirty="0"/>
+                        <a:t> extra information on staging </a:t>
+                      </a:r>
+                    </a:p>
+                  </a:txBody>
+                  <a:tcPr/>
+                </a:tc>
+                <a:tc>
+                  <a:txBody>
+                    <a:bodyPr/>
+                    <a:lstStyle/>
+                    <a:p>
+                      <a:r>
+                        <a:rPr lang="en-US" sz="1400" dirty="0"/>
+                        <a:t>diffuse large b-cell lymphoma</a:t>
+                      </a:r>
+                    </a:p>
+                    <a:p>
+                      <a:endParaRPr lang="en-US" sz="1400" dirty="0"/>
+                    </a:p>
+                  </a:txBody>
+                  <a:tcPr/>
+                </a:tc>
+                <a:extLst>
+                  <a:ext uri="{0D108BD9-81ED-4DB2-BD59-A6C34878D82A}">
+                    <a16:rowId xmlns:a16="http://schemas.microsoft.com/office/drawing/2014/main" val="3939223885"/>
+                  </a:ext>
+                </a:extLst>
+              </a:tr>
+            </a:tbl>
+          </a:graphicData>
+        </a:graphic>
+      </p:graphicFrame>
     </p:spTree>
     <p:extLst>
       <p:ext uri="{BB962C8B-B14F-4D97-AF65-F5344CB8AC3E}">
@@ -4596,6 +5009,291 @@
   <p:cSld>
     <p:spTree>
       <p:nvGrpSpPr>
+        <p:cNvPr id="1" name="">
+          <a:extLst>
+            <a:ext uri="{FF2B5EF4-FFF2-40B4-BE49-F238E27FC236}">
+              <a16:creationId xmlns:a16="http://schemas.microsoft.com/office/drawing/2014/main" id="{2A01996C-AEFF-C3A9-751E-CB258B5285F7}"/>
+            </a:ext>
+          </a:extLst>
+        </p:cNvPr>
+        <p:cNvGrpSpPr/>
+        <p:nvPr/>
+      </p:nvGrpSpPr>
+      <p:grpSpPr>
+        <a:xfrm>
+          <a:off x="0" y="0"/>
+          <a:ext cx="0" cy="0"/>
+          <a:chOff x="0" y="0"/>
+          <a:chExt cx="0" cy="0"/>
+        </a:xfrm>
+      </p:grpSpPr>
+      <p:sp>
+        <p:nvSpPr>
+          <p:cNvPr id="2" name="Title 1">
+            <a:extLst>
+              <a:ext uri="{FF2B5EF4-FFF2-40B4-BE49-F238E27FC236}">
+                <a16:creationId xmlns:a16="http://schemas.microsoft.com/office/drawing/2014/main" id="{273A313D-6D6A-BE2B-263D-27E5BA15AEB2}"/>
+              </a:ext>
+            </a:extLst>
+          </p:cNvPr>
+          <p:cNvSpPr>
+            <a:spLocks noGrp="1"/>
+          </p:cNvSpPr>
+          <p:nvPr>
+            <p:ph type="title"/>
+          </p:nvPr>
+        </p:nvSpPr>
+        <p:spPr>
+          <a:xfrm>
+            <a:off x="87086" y="21771"/>
+            <a:ext cx="10651402" cy="1143000"/>
+          </a:xfrm>
+        </p:spPr>
+        <p:txBody>
+          <a:bodyPr/>
+          <a:lstStyle/>
+          <a:p>
+            <a:r>
+              <a:rPr lang="en-US" dirty="0"/>
+              <a:t>Tumor Name Standardization		</a:t>
+            </a:r>
+          </a:p>
+        </p:txBody>
+      </p:sp>
+      <p:sp>
+        <p:nvSpPr>
+          <p:cNvPr id="3" name="Content Placeholder 2">
+            <a:extLst>
+              <a:ext uri="{FF2B5EF4-FFF2-40B4-BE49-F238E27FC236}">
+                <a16:creationId xmlns:a16="http://schemas.microsoft.com/office/drawing/2014/main" id="{7D082753-632D-7BBE-C9E9-F9AE285F5C75}"/>
+              </a:ext>
+            </a:extLst>
+          </p:cNvPr>
+          <p:cNvSpPr>
+            <a:spLocks noGrp="1"/>
+          </p:cNvSpPr>
+          <p:nvPr>
+            <p:ph idx="1"/>
+          </p:nvPr>
+        </p:nvSpPr>
+        <p:spPr>
+          <a:xfrm>
+            <a:off x="179670" y="1164771"/>
+            <a:ext cx="11261215" cy="4484914"/>
+          </a:xfrm>
+        </p:spPr>
+        <p:txBody>
+          <a:bodyPr>
+            <a:normAutofit/>
+          </a:bodyPr>
+          <a:lstStyle/>
+          <a:p>
+            <a:pPr algn="just"/>
+            <a:r>
+              <a:rPr lang="en-US" sz="1800" dirty="0">
+                <a:solidFill>
+                  <a:schemeClr val="tx1"/>
+                </a:solidFill>
+                <a:latin typeface="+mn-lt"/>
+                <a:cs typeface="+mn-cs"/>
+              </a:rPr>
+              <a:t> We aimed to standardize tumor names contained in CTR. Tumor names represent a significant proportion of condition names in CTR.</a:t>
+            </a:r>
+          </a:p>
+          <a:p>
+            <a:pPr algn="just"/>
+            <a:endParaRPr lang="en-US" sz="1800" dirty="0">
+              <a:solidFill>
+                <a:schemeClr val="tx1"/>
+              </a:solidFill>
+              <a:latin typeface="+mn-lt"/>
+              <a:cs typeface="+mn-cs"/>
+            </a:endParaRPr>
+          </a:p>
+          <a:p>
+            <a:pPr algn="just"/>
+            <a:r>
+              <a:rPr lang="en-US" sz="1800" dirty="0">
+                <a:solidFill>
+                  <a:schemeClr val="tx1"/>
+                </a:solidFill>
+                <a:latin typeface="+mn-lt"/>
+                <a:cs typeface="+mn-cs"/>
+              </a:rPr>
+              <a:t>Unlike other condition names, for tumor names , we have the WHO tumor classification system which is accepted as the gold standard for tumor nomenclature among clinicians. Also, other databases such as the </a:t>
+            </a:r>
+            <a:r>
+              <a:rPr lang="en-US" sz="1800" dirty="0" err="1">
+                <a:solidFill>
+                  <a:schemeClr val="tx1"/>
+                </a:solidFill>
+                <a:latin typeface="+mn-lt"/>
+                <a:cs typeface="+mn-cs"/>
+              </a:rPr>
+              <a:t>NCIt</a:t>
+            </a:r>
+            <a:r>
+              <a:rPr lang="en-US" sz="1800" dirty="0">
+                <a:solidFill>
+                  <a:schemeClr val="tx1"/>
+                </a:solidFill>
+                <a:latin typeface="+mn-lt"/>
+                <a:cs typeface="+mn-cs"/>
+              </a:rPr>
+              <a:t> (National Cancer Institute Thesaurus) have standardized tumor nomenclature. </a:t>
+            </a:r>
+          </a:p>
+          <a:p>
+            <a:pPr algn="just"/>
+            <a:endParaRPr lang="en-US" sz="1800" dirty="0">
+              <a:solidFill>
+                <a:schemeClr val="tx1"/>
+              </a:solidFill>
+              <a:latin typeface="+mn-lt"/>
+              <a:cs typeface="+mn-cs"/>
+            </a:endParaRPr>
+          </a:p>
+          <a:p>
+            <a:pPr algn="just"/>
+            <a:r>
+              <a:rPr lang="en-US" sz="1800" dirty="0">
+                <a:solidFill>
+                  <a:schemeClr val="tx1"/>
+                </a:solidFill>
+                <a:latin typeface="+mn-lt"/>
+                <a:cs typeface="+mn-cs"/>
+              </a:rPr>
+              <a:t>A standardized system for tumor nomenclature provides us with a reference for mapping unstandardized tumor names from CTR and a basis for evaluating any method that performs this mapping.</a:t>
+            </a:r>
+          </a:p>
+          <a:p>
+            <a:pPr algn="just"/>
+            <a:endParaRPr lang="en-US" sz="1800" dirty="0">
+              <a:solidFill>
+                <a:schemeClr val="tx1"/>
+              </a:solidFill>
+              <a:latin typeface="+mn-lt"/>
+              <a:cs typeface="+mn-cs"/>
+            </a:endParaRPr>
+          </a:p>
+          <a:p>
+            <a:pPr algn="just"/>
+            <a:r>
+              <a:rPr lang="en-US" sz="1800" dirty="0">
+                <a:solidFill>
+                  <a:schemeClr val="tx1"/>
+                </a:solidFill>
+                <a:latin typeface="+mn-lt"/>
+                <a:cs typeface="+mn-cs"/>
+              </a:rPr>
+              <a:t>To this end, we developed the CANTOS (Clinical trials Automated Nomenclature and Tumor Ontology Standardization) pipeline to extract tumor names from CTR and standardize them with respect to the WHO tumor classification system and </a:t>
+            </a:r>
+            <a:r>
+              <a:rPr lang="en-US" sz="1800" dirty="0" err="1">
+                <a:solidFill>
+                  <a:schemeClr val="tx1"/>
+                </a:solidFill>
+                <a:latin typeface="+mn-lt"/>
+                <a:cs typeface="+mn-cs"/>
+              </a:rPr>
+              <a:t>NCIt</a:t>
+            </a:r>
+            <a:r>
+              <a:rPr lang="en-US" sz="1800" dirty="0">
+                <a:solidFill>
+                  <a:schemeClr val="tx1"/>
+                </a:solidFill>
+                <a:latin typeface="+mn-lt"/>
+                <a:cs typeface="+mn-cs"/>
+              </a:rPr>
+              <a:t> database</a:t>
+            </a:r>
+            <a:r>
+              <a:rPr lang="en-US" sz="1800" dirty="0">
+                <a:solidFill>
+                  <a:srgbClr val="000000"/>
+                </a:solidFill>
+                <a:latin typeface="Times New Roman" panose="02020603050405020304" pitchFamily="18" charset="0"/>
+              </a:rPr>
+              <a:t>. </a:t>
+            </a:r>
+          </a:p>
+          <a:p>
+            <a:endParaRPr lang="en-US" sz="1800" dirty="0">
+              <a:solidFill>
+                <a:srgbClr val="000000"/>
+              </a:solidFill>
+              <a:latin typeface="Times New Roman" panose="02020603050405020304" pitchFamily="18" charset="0"/>
+            </a:endParaRPr>
+          </a:p>
+          <a:p>
+            <a:endParaRPr lang="en-US" sz="1800" dirty="0">
+              <a:solidFill>
+                <a:srgbClr val="000000"/>
+              </a:solidFill>
+              <a:latin typeface="Times New Roman" panose="02020603050405020304" pitchFamily="18" charset="0"/>
+            </a:endParaRPr>
+          </a:p>
+          <a:p>
+            <a:endParaRPr lang="en-US" dirty="0"/>
+          </a:p>
+        </p:txBody>
+      </p:sp>
+      <p:sp>
+        <p:nvSpPr>
+          <p:cNvPr id="4" name="Slide Number Placeholder 3">
+            <a:extLst>
+              <a:ext uri="{FF2B5EF4-FFF2-40B4-BE49-F238E27FC236}">
+                <a16:creationId xmlns:a16="http://schemas.microsoft.com/office/drawing/2014/main" id="{874865C2-BF25-6030-3F39-CD518B0D06B9}"/>
+              </a:ext>
+            </a:extLst>
+          </p:cNvPr>
+          <p:cNvSpPr>
+            <a:spLocks noGrp="1"/>
+          </p:cNvSpPr>
+          <p:nvPr>
+            <p:ph type="sldNum" sz="quarter" idx="12"/>
+          </p:nvPr>
+        </p:nvSpPr>
+        <p:spPr/>
+        <p:txBody>
+          <a:bodyPr/>
+          <a:lstStyle/>
+          <a:p>
+            <a:fld id="{AD40181A-01B0-4CB8-8614-1473649F6741}" type="slidenum">
+              <a:rPr lang="en-US" smtClean="0">
+                <a:solidFill>
+                  <a:schemeClr val="bg1"/>
+                </a:solidFill>
+              </a:rPr>
+              <a:t>8</a:t>
+            </a:fld>
+            <a:endParaRPr lang="en-US" dirty="0">
+              <a:solidFill>
+                <a:schemeClr val="bg1"/>
+              </a:solidFill>
+            </a:endParaRPr>
+          </a:p>
+        </p:txBody>
+      </p:sp>
+    </p:spTree>
+    <p:extLst>
+      <p:ext uri="{BB962C8B-B14F-4D97-AF65-F5344CB8AC3E}">
+        <p14:creationId xmlns:p14="http://schemas.microsoft.com/office/powerpoint/2010/main" val="579408319"/>
+      </p:ext>
+    </p:extLst>
+  </p:cSld>
+  <p:clrMapOvr>
+    <a:masterClrMapping/>
+  </p:clrMapOvr>
+</p:sld>
+</file>
+
+<file path=ppt/slides/slide9.xml><?xml version="1.0" encoding="utf-8"?>
+<p:sld xmlns:a="http://schemas.openxmlformats.org/drawingml/2006/main" xmlns:r="http://schemas.openxmlformats.org/officeDocument/2006/relationships" xmlns:p="http://schemas.openxmlformats.org/presentationml/2006/main">
+  <p:cSld>
+    <p:spTree>
+      <p:nvGrpSpPr>
         <p:cNvPr id="1" name=""/>
         <p:cNvGrpSpPr/>
         <p:nvPr/>
@@ -4629,7 +5327,7 @@
                   <a:srgbClr val="FFFFFE"/>
                 </a:solidFill>
               </a:rPr>
-              <a:t>8</a:t>
+              <a:t>9</a:t>
             </a:fld>
             <a:endParaRPr lang="en-US" dirty="0">
               <a:solidFill>
@@ -4651,14 +5349,613 @@
         </p:nvSpPr>
         <p:spPr>
           <a:xfrm>
-            <a:off x="118101" y="99178"/>
-            <a:ext cx="9753600" cy="1444752"/>
+            <a:off x="0" y="-294409"/>
+            <a:ext cx="11660242" cy="1272422"/>
           </a:xfrm>
         </p:spPr>
         <p:txBody>
           <a:bodyPr/>
           <a:lstStyle/>
           <a:p>
+            <a:r>
+              <a:rPr lang="en-US" dirty="0"/>
+              <a:t>CANTOS : Tumor identification phase</a:t>
+            </a:r>
+          </a:p>
+        </p:txBody>
+      </p:sp>
+      <p:pic>
+        <p:nvPicPr>
+          <p:cNvPr id="4" name="Content Placeholder 8" descr="A blue and black logo&#10;&#10;Description automatically generated">
+            <a:extLst>
+              <a:ext uri="{FF2B5EF4-FFF2-40B4-BE49-F238E27FC236}">
+                <a16:creationId xmlns:a16="http://schemas.microsoft.com/office/drawing/2014/main" id="{19C3A9C1-93F1-99D1-8570-48F0B1D01BD1}"/>
+              </a:ext>
+            </a:extLst>
+          </p:cNvPr>
+          <p:cNvPicPr>
+            <a:picLocks noChangeAspect="1"/>
+          </p:cNvPicPr>
+          <p:nvPr/>
+        </p:nvPicPr>
+        <p:blipFill>
+          <a:blip r:embed="rId2"/>
+          <a:stretch>
+            <a:fillRect/>
+          </a:stretch>
+        </p:blipFill>
+        <p:spPr>
+          <a:xfrm>
+            <a:off x="307654" y="2337770"/>
+            <a:ext cx="1782457" cy="1433858"/>
+          </a:xfrm>
+          <a:prstGeom prst="rect">
+            <a:avLst/>
+          </a:prstGeom>
+        </p:spPr>
+      </p:pic>
+      <p:pic>
+        <p:nvPicPr>
+          <p:cNvPr id="5" name="Graphic 4" descr="Document outline">
+            <a:extLst>
+              <a:ext uri="{FF2B5EF4-FFF2-40B4-BE49-F238E27FC236}">
+                <a16:creationId xmlns:a16="http://schemas.microsoft.com/office/drawing/2014/main" id="{35DFDB22-5FF4-65DD-75A8-BA8476C1E73C}"/>
+              </a:ext>
+            </a:extLst>
+          </p:cNvPr>
+          <p:cNvPicPr>
+            <a:picLocks noChangeAspect="1"/>
+          </p:cNvPicPr>
+          <p:nvPr/>
+        </p:nvPicPr>
+        <p:blipFill>
+          <a:blip r:embed="rId3">
+            <a:extLst>
+              <a:ext uri="{96DAC541-7B7A-43D3-8B79-37D633B846F1}">
+                <asvg:svgBlip xmlns:asvg="http://schemas.microsoft.com/office/drawing/2016/SVG/main" r:embed="rId4"/>
+              </a:ext>
+            </a:extLst>
+          </a:blip>
+          <a:stretch>
+            <a:fillRect/>
+          </a:stretch>
+        </p:blipFill>
+        <p:spPr>
+          <a:xfrm>
+            <a:off x="3361564" y="2241763"/>
+            <a:ext cx="1122081" cy="1122081"/>
+          </a:xfrm>
+          <a:prstGeom prst="rect">
+            <a:avLst/>
+          </a:prstGeom>
+        </p:spPr>
+      </p:pic>
+      <p:sp>
+        <p:nvSpPr>
+          <p:cNvPr id="7" name="TextBox 6">
+            <a:extLst>
+              <a:ext uri="{FF2B5EF4-FFF2-40B4-BE49-F238E27FC236}">
+                <a16:creationId xmlns:a16="http://schemas.microsoft.com/office/drawing/2014/main" id="{679CA8DB-EE78-BB29-19B5-1FAA56F5D1ED}"/>
+              </a:ext>
+            </a:extLst>
+          </p:cNvPr>
+          <p:cNvSpPr txBox="1"/>
+          <p:nvPr/>
+        </p:nvSpPr>
+        <p:spPr>
+          <a:xfrm>
+            <a:off x="3238585" y="3316516"/>
+            <a:ext cx="1598515" cy="369332"/>
+          </a:xfrm>
+          <a:prstGeom prst="rect">
+            <a:avLst/>
+          </a:prstGeom>
+          <a:noFill/>
+        </p:spPr>
+        <p:txBody>
+          <a:bodyPr wrap="none" rtlCol="0">
+            <a:spAutoFit/>
+          </a:bodyPr>
+          <a:lstStyle/>
+          <a:p>
+            <a:r>
+              <a:rPr lang="en-US" dirty="0" err="1">
+                <a:solidFill>
+                  <a:schemeClr val="bg2">
+                    <a:lumMod val="50000"/>
+                  </a:schemeClr>
+                </a:solidFill>
+              </a:rPr>
+              <a:t>conditions.txt</a:t>
+            </a:r>
+            <a:endParaRPr lang="en-US" dirty="0">
+              <a:solidFill>
+                <a:schemeClr val="bg2">
+                  <a:lumMod val="50000"/>
+                </a:schemeClr>
+              </a:solidFill>
+            </a:endParaRPr>
+          </a:p>
+        </p:txBody>
+      </p:sp>
+      <p:sp>
+        <p:nvSpPr>
+          <p:cNvPr id="8" name="Right Arrow 7">
+            <a:extLst>
+              <a:ext uri="{FF2B5EF4-FFF2-40B4-BE49-F238E27FC236}">
+                <a16:creationId xmlns:a16="http://schemas.microsoft.com/office/drawing/2014/main" id="{9F1004FD-3068-A67A-3EC2-49B333972427}"/>
+              </a:ext>
+            </a:extLst>
+          </p:cNvPr>
+          <p:cNvSpPr/>
+          <p:nvPr/>
+        </p:nvSpPr>
+        <p:spPr>
+          <a:xfrm>
+            <a:off x="2213090" y="2642314"/>
+            <a:ext cx="1025495" cy="529839"/>
+          </a:xfrm>
+          <a:prstGeom prst="rightArrow">
+            <a:avLst/>
+          </a:prstGeom>
+        </p:spPr>
+        <p:style>
+          <a:lnRef idx="2">
+            <a:schemeClr val="accent1">
+              <a:shade val="15000"/>
+            </a:schemeClr>
+          </a:lnRef>
+          <a:fillRef idx="1">
+            <a:schemeClr val="accent1"/>
+          </a:fillRef>
+          <a:effectRef idx="0">
+            <a:schemeClr val="accent1"/>
+          </a:effectRef>
+          <a:fontRef idx="minor">
+            <a:schemeClr val="lt1"/>
+          </a:fontRef>
+        </p:style>
+        <p:txBody>
+          <a:bodyPr rtlCol="0" anchor="ctr"/>
+          <a:lstStyle/>
+          <a:p>
+            <a:pPr algn="ctr"/>
+            <a:endParaRPr lang="en-US"/>
+          </a:p>
+        </p:txBody>
+      </p:sp>
+      <p:sp>
+        <p:nvSpPr>
+          <p:cNvPr id="11" name="Rectangle 10">
+            <a:extLst>
+              <a:ext uri="{FF2B5EF4-FFF2-40B4-BE49-F238E27FC236}">
+                <a16:creationId xmlns:a16="http://schemas.microsoft.com/office/drawing/2014/main" id="{88D1C32A-F598-2AFF-5354-C13FA1267869}"/>
+              </a:ext>
+            </a:extLst>
+          </p:cNvPr>
+          <p:cNvSpPr/>
+          <p:nvPr/>
+        </p:nvSpPr>
+        <p:spPr>
+          <a:xfrm>
+            <a:off x="5605054" y="2455978"/>
+            <a:ext cx="2284729" cy="930097"/>
+          </a:xfrm>
+          <a:prstGeom prst="rect">
+            <a:avLst/>
+          </a:prstGeom>
+        </p:spPr>
+        <p:style>
+          <a:lnRef idx="2">
+            <a:schemeClr val="accent1">
+              <a:shade val="15000"/>
+            </a:schemeClr>
+          </a:lnRef>
+          <a:fillRef idx="1">
+            <a:schemeClr val="accent1"/>
+          </a:fillRef>
+          <a:effectRef idx="0">
+            <a:schemeClr val="accent1"/>
+          </a:effectRef>
+          <a:fontRef idx="minor">
+            <a:schemeClr val="lt1"/>
+          </a:fontRef>
+        </p:style>
+        <p:txBody>
+          <a:bodyPr rtlCol="0" anchor="ctr"/>
+          <a:lstStyle/>
+          <a:p>
+            <a:pPr algn="ctr"/>
+            <a:r>
+              <a:rPr lang="en-US" dirty="0"/>
+              <a:t>Fuzzy String Match</a:t>
+            </a:r>
+          </a:p>
+        </p:txBody>
+      </p:sp>
+      <p:pic>
+        <p:nvPicPr>
+          <p:cNvPr id="13" name="Graphic 12" descr="Database outline">
+            <a:extLst>
+              <a:ext uri="{FF2B5EF4-FFF2-40B4-BE49-F238E27FC236}">
+                <a16:creationId xmlns:a16="http://schemas.microsoft.com/office/drawing/2014/main" id="{CA8A991E-041C-F9B3-E255-517A56F31760}"/>
+              </a:ext>
+            </a:extLst>
+          </p:cNvPr>
+          <p:cNvPicPr>
+            <a:picLocks noChangeAspect="1"/>
+          </p:cNvPicPr>
+          <p:nvPr/>
+        </p:nvPicPr>
+        <p:blipFill>
+          <a:blip r:embed="rId5">
+            <a:extLst>
+              <a:ext uri="{96DAC541-7B7A-43D3-8B79-37D633B846F1}">
+                <asvg:svgBlip xmlns:asvg="http://schemas.microsoft.com/office/drawing/2016/SVG/main" r:embed="rId6"/>
+              </a:ext>
+            </a:extLst>
+          </a:blip>
+          <a:stretch>
+            <a:fillRect/>
+          </a:stretch>
+        </p:blipFill>
+        <p:spPr>
+          <a:xfrm>
+            <a:off x="6223666" y="3972217"/>
+            <a:ext cx="1244416" cy="1244416"/>
+          </a:xfrm>
+          <a:prstGeom prst="rect">
+            <a:avLst/>
+          </a:prstGeom>
+        </p:spPr>
+      </p:pic>
+      <p:pic>
+        <p:nvPicPr>
+          <p:cNvPr id="14" name="Graphic 13" descr="Database outline">
+            <a:extLst>
+              <a:ext uri="{FF2B5EF4-FFF2-40B4-BE49-F238E27FC236}">
+                <a16:creationId xmlns:a16="http://schemas.microsoft.com/office/drawing/2014/main" id="{301F0597-96AD-7EFF-38C3-B4AFFAB602E6}"/>
+              </a:ext>
+            </a:extLst>
+          </p:cNvPr>
+          <p:cNvPicPr>
+            <a:picLocks noChangeAspect="1"/>
+          </p:cNvPicPr>
+          <p:nvPr/>
+        </p:nvPicPr>
+        <p:blipFill>
+          <a:blip r:embed="rId5">
+            <a:extLst>
+              <a:ext uri="{96DAC541-7B7A-43D3-8B79-37D633B846F1}">
+                <asvg:svgBlip xmlns:asvg="http://schemas.microsoft.com/office/drawing/2016/SVG/main" r:embed="rId6"/>
+              </a:ext>
+            </a:extLst>
+          </a:blip>
+          <a:stretch>
+            <a:fillRect/>
+          </a:stretch>
+        </p:blipFill>
+        <p:spPr>
+          <a:xfrm>
+            <a:off x="6125211" y="862584"/>
+            <a:ext cx="1244416" cy="1244416"/>
+          </a:xfrm>
+          <a:prstGeom prst="rect">
+            <a:avLst/>
+          </a:prstGeom>
+        </p:spPr>
+      </p:pic>
+      <p:sp>
+        <p:nvSpPr>
+          <p:cNvPr id="16" name="TextBox 15">
+            <a:extLst>
+              <a:ext uri="{FF2B5EF4-FFF2-40B4-BE49-F238E27FC236}">
+                <a16:creationId xmlns:a16="http://schemas.microsoft.com/office/drawing/2014/main" id="{0DB0385E-F451-CD90-1DAF-EBD6E13D3162}"/>
+              </a:ext>
+            </a:extLst>
+          </p:cNvPr>
+          <p:cNvSpPr txBox="1"/>
+          <p:nvPr/>
+        </p:nvSpPr>
+        <p:spPr>
+          <a:xfrm>
+            <a:off x="5258608" y="5094863"/>
+            <a:ext cx="4034478" cy="369332"/>
+          </a:xfrm>
+          <a:prstGeom prst="rect">
+            <a:avLst/>
+          </a:prstGeom>
+          <a:noFill/>
+        </p:spPr>
+        <p:txBody>
+          <a:bodyPr wrap="square" rtlCol="0">
+            <a:spAutoFit/>
+          </a:bodyPr>
+          <a:lstStyle/>
+          <a:p>
+            <a:r>
+              <a:rPr lang="en-US" dirty="0">
+                <a:solidFill>
+                  <a:schemeClr val="bg2">
+                    <a:lumMod val="50000"/>
+                  </a:schemeClr>
+                </a:solidFill>
+              </a:rPr>
+              <a:t>WHO Tumor Classification System</a:t>
+            </a:r>
+          </a:p>
+        </p:txBody>
+      </p:sp>
+      <p:sp>
+        <p:nvSpPr>
+          <p:cNvPr id="17" name="TextBox 16">
+            <a:extLst>
+              <a:ext uri="{FF2B5EF4-FFF2-40B4-BE49-F238E27FC236}">
+                <a16:creationId xmlns:a16="http://schemas.microsoft.com/office/drawing/2014/main" id="{A8E0CCAA-3593-6500-6D5D-A0A1FB7B2BCD}"/>
+              </a:ext>
+            </a:extLst>
+          </p:cNvPr>
+          <p:cNvSpPr txBox="1"/>
+          <p:nvPr/>
+        </p:nvSpPr>
+        <p:spPr>
+          <a:xfrm>
+            <a:off x="5830121" y="616009"/>
+            <a:ext cx="2031506" cy="369332"/>
+          </a:xfrm>
+          <a:prstGeom prst="rect">
+            <a:avLst/>
+          </a:prstGeom>
+          <a:noFill/>
+        </p:spPr>
+        <p:txBody>
+          <a:bodyPr wrap="square" rtlCol="0">
+            <a:spAutoFit/>
+          </a:bodyPr>
+          <a:lstStyle/>
+          <a:p>
+            <a:r>
+              <a:rPr lang="en-US" dirty="0">
+                <a:solidFill>
+                  <a:schemeClr val="bg2">
+                    <a:lumMod val="50000"/>
+                  </a:schemeClr>
+                </a:solidFill>
+              </a:rPr>
+              <a:t>Tumor key words</a:t>
+            </a:r>
+          </a:p>
+        </p:txBody>
+      </p:sp>
+      <p:sp>
+        <p:nvSpPr>
+          <p:cNvPr id="18" name="Right Arrow 17">
+            <a:extLst>
+              <a:ext uri="{FF2B5EF4-FFF2-40B4-BE49-F238E27FC236}">
+                <a16:creationId xmlns:a16="http://schemas.microsoft.com/office/drawing/2014/main" id="{2B39A889-FCA5-B400-E8D3-B49F754BEE2E}"/>
+              </a:ext>
+            </a:extLst>
+          </p:cNvPr>
+          <p:cNvSpPr/>
+          <p:nvPr/>
+        </p:nvSpPr>
+        <p:spPr>
+          <a:xfrm>
+            <a:off x="4385513" y="2616592"/>
+            <a:ext cx="1025495" cy="529839"/>
+          </a:xfrm>
+          <a:prstGeom prst="rightArrow">
+            <a:avLst/>
+          </a:prstGeom>
+        </p:spPr>
+        <p:style>
+          <a:lnRef idx="2">
+            <a:schemeClr val="accent1">
+              <a:shade val="15000"/>
+            </a:schemeClr>
+          </a:lnRef>
+          <a:fillRef idx="1">
+            <a:schemeClr val="accent1"/>
+          </a:fillRef>
+          <a:effectRef idx="0">
+            <a:schemeClr val="accent1"/>
+          </a:effectRef>
+          <a:fontRef idx="minor">
+            <a:schemeClr val="lt1"/>
+          </a:fontRef>
+        </p:style>
+        <p:txBody>
+          <a:bodyPr rtlCol="0" anchor="ctr"/>
+          <a:lstStyle/>
+          <a:p>
+            <a:pPr algn="ctr"/>
+            <a:endParaRPr lang="en-US"/>
+          </a:p>
+        </p:txBody>
+      </p:sp>
+      <p:sp>
+        <p:nvSpPr>
+          <p:cNvPr id="19" name="Down Arrow 18">
+            <a:extLst>
+              <a:ext uri="{FF2B5EF4-FFF2-40B4-BE49-F238E27FC236}">
+                <a16:creationId xmlns:a16="http://schemas.microsoft.com/office/drawing/2014/main" id="{9B216ECB-C5A2-8803-328E-44CE7D138A72}"/>
+              </a:ext>
+            </a:extLst>
+          </p:cNvPr>
+          <p:cNvSpPr/>
+          <p:nvPr/>
+        </p:nvSpPr>
+        <p:spPr>
+          <a:xfrm>
+            <a:off x="6595019" y="2023084"/>
+            <a:ext cx="304800" cy="369333"/>
+          </a:xfrm>
+          <a:prstGeom prst="downArrow">
+            <a:avLst/>
+          </a:prstGeom>
+        </p:spPr>
+        <p:style>
+          <a:lnRef idx="2">
+            <a:schemeClr val="accent1">
+              <a:shade val="15000"/>
+            </a:schemeClr>
+          </a:lnRef>
+          <a:fillRef idx="1">
+            <a:schemeClr val="accent1"/>
+          </a:fillRef>
+          <a:effectRef idx="0">
+            <a:schemeClr val="accent1"/>
+          </a:effectRef>
+          <a:fontRef idx="minor">
+            <a:schemeClr val="lt1"/>
+          </a:fontRef>
+        </p:style>
+        <p:txBody>
+          <a:bodyPr rtlCol="0" anchor="ctr"/>
+          <a:lstStyle/>
+          <a:p>
+            <a:pPr algn="ctr"/>
+            <a:endParaRPr lang="en-US"/>
+          </a:p>
+        </p:txBody>
+      </p:sp>
+      <p:sp>
+        <p:nvSpPr>
+          <p:cNvPr id="20" name="Up Arrow 19">
+            <a:extLst>
+              <a:ext uri="{FF2B5EF4-FFF2-40B4-BE49-F238E27FC236}">
+                <a16:creationId xmlns:a16="http://schemas.microsoft.com/office/drawing/2014/main" id="{73310A80-86DB-204B-8D96-19402D444123}"/>
+              </a:ext>
+            </a:extLst>
+          </p:cNvPr>
+          <p:cNvSpPr/>
+          <p:nvPr/>
+        </p:nvSpPr>
+        <p:spPr>
+          <a:xfrm>
+            <a:off x="6589500" y="3443485"/>
+            <a:ext cx="512747" cy="562340"/>
+          </a:xfrm>
+          <a:prstGeom prst="upArrow">
+            <a:avLst/>
+          </a:prstGeom>
+        </p:spPr>
+        <p:style>
+          <a:lnRef idx="2">
+            <a:schemeClr val="accent1">
+              <a:shade val="15000"/>
+            </a:schemeClr>
+          </a:lnRef>
+          <a:fillRef idx="1">
+            <a:schemeClr val="accent1"/>
+          </a:fillRef>
+          <a:effectRef idx="0">
+            <a:schemeClr val="accent1"/>
+          </a:effectRef>
+          <a:fontRef idx="minor">
+            <a:schemeClr val="lt1"/>
+          </a:fontRef>
+        </p:style>
+        <p:txBody>
+          <a:bodyPr rtlCol="0" anchor="ctr"/>
+          <a:lstStyle/>
+          <a:p>
+            <a:pPr algn="ctr"/>
+            <a:endParaRPr lang="en-US"/>
+          </a:p>
+        </p:txBody>
+      </p:sp>
+      <p:sp>
+        <p:nvSpPr>
+          <p:cNvPr id="21" name="Rectangle 20">
+            <a:extLst>
+              <a:ext uri="{FF2B5EF4-FFF2-40B4-BE49-F238E27FC236}">
+                <a16:creationId xmlns:a16="http://schemas.microsoft.com/office/drawing/2014/main" id="{D44FC835-E36F-AA70-EB8A-A508E553CA79}"/>
+              </a:ext>
+            </a:extLst>
+          </p:cNvPr>
+          <p:cNvSpPr/>
+          <p:nvPr/>
+        </p:nvSpPr>
+        <p:spPr>
+          <a:xfrm>
+            <a:off x="9158480" y="2383892"/>
+            <a:ext cx="2284729" cy="930097"/>
+          </a:xfrm>
+          <a:prstGeom prst="rect">
+            <a:avLst/>
+          </a:prstGeom>
+        </p:spPr>
+        <p:style>
+          <a:lnRef idx="2">
+            <a:schemeClr val="accent1">
+              <a:shade val="15000"/>
+            </a:schemeClr>
+          </a:lnRef>
+          <a:fillRef idx="1">
+            <a:schemeClr val="accent1"/>
+          </a:fillRef>
+          <a:effectRef idx="0">
+            <a:schemeClr val="accent1"/>
+          </a:effectRef>
+          <a:fontRef idx="minor">
+            <a:schemeClr val="lt1"/>
+          </a:fontRef>
+        </p:style>
+        <p:txBody>
+          <a:bodyPr rtlCol="0" anchor="ctr"/>
+          <a:lstStyle/>
+          <a:p>
+            <a:pPr algn="ctr"/>
+            <a:r>
+              <a:rPr lang="en-US" dirty="0"/>
+              <a:t>Flag tumor and manually validate</a:t>
+            </a:r>
+          </a:p>
+        </p:txBody>
+      </p:sp>
+      <p:sp>
+        <p:nvSpPr>
+          <p:cNvPr id="22" name="Right Arrow 21">
+            <a:extLst>
+              <a:ext uri="{FF2B5EF4-FFF2-40B4-BE49-F238E27FC236}">
+                <a16:creationId xmlns:a16="http://schemas.microsoft.com/office/drawing/2014/main" id="{3F4E4C5A-9D0E-A829-80F2-9E0BA92A71AB}"/>
+              </a:ext>
+            </a:extLst>
+          </p:cNvPr>
+          <p:cNvSpPr/>
+          <p:nvPr/>
+        </p:nvSpPr>
+        <p:spPr>
+          <a:xfrm>
+            <a:off x="7996271" y="2616591"/>
+            <a:ext cx="1025495" cy="529839"/>
+          </a:xfrm>
+          <a:prstGeom prst="rightArrow">
+            <a:avLst/>
+          </a:prstGeom>
+        </p:spPr>
+        <p:style>
+          <a:lnRef idx="2">
+            <a:schemeClr val="accent1">
+              <a:shade val="15000"/>
+            </a:schemeClr>
+          </a:lnRef>
+          <a:fillRef idx="1">
+            <a:schemeClr val="accent1"/>
+          </a:fillRef>
+          <a:effectRef idx="0">
+            <a:schemeClr val="accent1"/>
+          </a:effectRef>
+          <a:fontRef idx="minor">
+            <a:schemeClr val="lt1"/>
+          </a:fontRef>
+        </p:style>
+        <p:txBody>
+          <a:bodyPr rtlCol="0" anchor="ctr"/>
+          <a:lstStyle/>
+          <a:p>
+            <a:pPr algn="ctr"/>
             <a:endParaRPr lang="en-US"/>
           </a:p>
         </p:txBody>

--- a/presentations/CANTOS_PPT.pptx
+++ b/presentations/CANTOS_PPT.pptx
@@ -5,7 +5,7 @@
     <p:sldMasterId id="2147483672" r:id="rId4"/>
   </p:sldMasterIdLst>
   <p:notesMasterIdLst>
-    <p:notesMasterId r:id="rId14"/>
+    <p:notesMasterId r:id="rId19"/>
   </p:notesMasterIdLst>
   <p:sldIdLst>
     <p:sldId id="256" r:id="rId5"/>
@@ -17,6 +17,11 @@
     <p:sldId id="259" r:id="rId11"/>
     <p:sldId id="264" r:id="rId12"/>
     <p:sldId id="258" r:id="rId13"/>
+    <p:sldId id="267" r:id="rId14"/>
+    <p:sldId id="265" r:id="rId15"/>
+    <p:sldId id="268" r:id="rId16"/>
+    <p:sldId id="266" r:id="rId17"/>
+    <p:sldId id="269" r:id="rId18"/>
   </p:sldIdLst>
   <p:sldSz cx="12192000" cy="6858000"/>
   <p:notesSz cx="6858000" cy="9144000"/>
@@ -1687,6 +1692,2456 @@
     <p:extLst>
       <p:ext uri="{BB962C8B-B14F-4D97-AF65-F5344CB8AC3E}">
         <p14:creationId xmlns:p14="http://schemas.microsoft.com/office/powerpoint/2010/main" val="682876590"/>
+      </p:ext>
+    </p:extLst>
+  </p:cSld>
+  <p:clrMapOvr>
+    <a:masterClrMapping/>
+  </p:clrMapOvr>
+</p:sld>
+</file>
+
+<file path=ppt/slides/slide10.xml><?xml version="1.0" encoding="utf-8"?>
+<p:sld xmlns:a="http://schemas.openxmlformats.org/drawingml/2006/main" xmlns:r="http://schemas.openxmlformats.org/officeDocument/2006/relationships" xmlns:p="http://schemas.openxmlformats.org/presentationml/2006/main">
+  <p:cSld>
+    <p:spTree>
+      <p:nvGrpSpPr>
+        <p:cNvPr id="1" name="">
+          <a:extLst>
+            <a:ext uri="{FF2B5EF4-FFF2-40B4-BE49-F238E27FC236}">
+              <a16:creationId xmlns:a16="http://schemas.microsoft.com/office/drawing/2014/main" id="{E9CE722E-3FCD-FD45-A0E6-12A95F208F4A}"/>
+            </a:ext>
+          </a:extLst>
+        </p:cNvPr>
+        <p:cNvGrpSpPr/>
+        <p:nvPr/>
+      </p:nvGrpSpPr>
+      <p:grpSpPr>
+        <a:xfrm>
+          <a:off x="0" y="0"/>
+          <a:ext cx="0" cy="0"/>
+          <a:chOff x="0" y="0"/>
+          <a:chExt cx="0" cy="0"/>
+        </a:xfrm>
+      </p:grpSpPr>
+      <p:sp>
+        <p:nvSpPr>
+          <p:cNvPr id="2" name="Title 1">
+            <a:extLst>
+              <a:ext uri="{FF2B5EF4-FFF2-40B4-BE49-F238E27FC236}">
+                <a16:creationId xmlns:a16="http://schemas.microsoft.com/office/drawing/2014/main" id="{C95D30D7-FC81-7A2E-2D28-63AA04393E7F}"/>
+              </a:ext>
+            </a:extLst>
+          </p:cNvPr>
+          <p:cNvSpPr>
+            <a:spLocks noGrp="1"/>
+          </p:cNvSpPr>
+          <p:nvPr>
+            <p:ph type="title"/>
+          </p:nvPr>
+        </p:nvSpPr>
+        <p:spPr>
+          <a:xfrm>
+            <a:off x="87086" y="21771"/>
+            <a:ext cx="10651402" cy="1143000"/>
+          </a:xfrm>
+        </p:spPr>
+        <p:txBody>
+          <a:bodyPr/>
+          <a:lstStyle/>
+          <a:p>
+            <a:r>
+              <a:rPr lang="en-US" dirty="0"/>
+              <a:t>Tumor Name Standardization		</a:t>
+            </a:r>
+          </a:p>
+        </p:txBody>
+      </p:sp>
+      <p:sp>
+        <p:nvSpPr>
+          <p:cNvPr id="3" name="Content Placeholder 2">
+            <a:extLst>
+              <a:ext uri="{FF2B5EF4-FFF2-40B4-BE49-F238E27FC236}">
+                <a16:creationId xmlns:a16="http://schemas.microsoft.com/office/drawing/2014/main" id="{03E5FCE7-F75E-2327-9C5F-55E00B34D11D}"/>
+              </a:ext>
+            </a:extLst>
+          </p:cNvPr>
+          <p:cNvSpPr>
+            <a:spLocks noGrp="1"/>
+          </p:cNvSpPr>
+          <p:nvPr>
+            <p:ph idx="1"/>
+          </p:nvPr>
+        </p:nvSpPr>
+        <p:spPr>
+          <a:xfrm>
+            <a:off x="179670" y="1164771"/>
+            <a:ext cx="11261215" cy="4484914"/>
+          </a:xfrm>
+        </p:spPr>
+        <p:txBody>
+          <a:bodyPr>
+            <a:normAutofit/>
+          </a:bodyPr>
+          <a:lstStyle/>
+          <a:p>
+            <a:pPr algn="just"/>
+            <a:r>
+              <a:rPr lang="en-US" sz="1800" dirty="0">
+                <a:solidFill>
+                  <a:schemeClr val="tx1"/>
+                </a:solidFill>
+                <a:latin typeface="+mn-lt"/>
+                <a:cs typeface="+mn-cs"/>
+              </a:rPr>
+              <a:t>Edit distances: are a way of measuring how different two strings (sequences of characters) are. The edit distance is the minimum number of operations needed to transform one string into another. E.g. </a:t>
+            </a:r>
+            <a:r>
+              <a:rPr lang="en-US" sz="1800" dirty="0" err="1">
+                <a:solidFill>
+                  <a:schemeClr val="tx1"/>
+                </a:solidFill>
+                <a:latin typeface="+mn-lt"/>
+                <a:cs typeface="+mn-cs"/>
+              </a:rPr>
+              <a:t>Levenshtein</a:t>
+            </a:r>
+            <a:r>
+              <a:rPr lang="en-US" sz="1800" dirty="0">
+                <a:solidFill>
+                  <a:schemeClr val="tx1"/>
+                </a:solidFill>
+                <a:latin typeface="+mn-lt"/>
+                <a:cs typeface="+mn-cs"/>
+              </a:rPr>
+              <a:t> , cosine, </a:t>
+            </a:r>
+            <a:r>
+              <a:rPr lang="en-US" sz="1800" dirty="0" err="1">
+                <a:solidFill>
+                  <a:schemeClr val="tx1"/>
+                </a:solidFill>
+                <a:latin typeface="+mn-lt"/>
+                <a:cs typeface="+mn-cs"/>
+              </a:rPr>
+              <a:t>jarro-winkler</a:t>
+            </a:r>
+            <a:r>
+              <a:rPr lang="en-US" sz="1800" dirty="0">
+                <a:solidFill>
+                  <a:schemeClr val="tx1"/>
+                </a:solidFill>
+                <a:latin typeface="+mn-lt"/>
+                <a:cs typeface="+mn-cs"/>
+              </a:rPr>
+              <a:t> etc. </a:t>
+            </a:r>
+          </a:p>
+          <a:p>
+            <a:pPr algn="just"/>
+            <a:endParaRPr lang="en-US" sz="1800" dirty="0">
+              <a:solidFill>
+                <a:schemeClr val="tx1"/>
+              </a:solidFill>
+              <a:latin typeface="+mn-lt"/>
+              <a:cs typeface="+mn-cs"/>
+            </a:endParaRPr>
+          </a:p>
+          <a:p>
+            <a:endParaRPr lang="en-US" sz="1800" dirty="0">
+              <a:solidFill>
+                <a:srgbClr val="000000"/>
+              </a:solidFill>
+              <a:latin typeface="Times New Roman" panose="02020603050405020304" pitchFamily="18" charset="0"/>
+            </a:endParaRPr>
+          </a:p>
+          <a:p>
+            <a:endParaRPr lang="en-US" sz="1800" dirty="0">
+              <a:solidFill>
+                <a:srgbClr val="000000"/>
+              </a:solidFill>
+              <a:latin typeface="Times New Roman" panose="02020603050405020304" pitchFamily="18" charset="0"/>
+            </a:endParaRPr>
+          </a:p>
+          <a:p>
+            <a:endParaRPr lang="en-US" dirty="0"/>
+          </a:p>
+        </p:txBody>
+      </p:sp>
+      <p:sp>
+        <p:nvSpPr>
+          <p:cNvPr id="4" name="Slide Number Placeholder 3">
+            <a:extLst>
+              <a:ext uri="{FF2B5EF4-FFF2-40B4-BE49-F238E27FC236}">
+                <a16:creationId xmlns:a16="http://schemas.microsoft.com/office/drawing/2014/main" id="{79537068-5C1D-29E8-6A44-3E3880B225DF}"/>
+              </a:ext>
+            </a:extLst>
+          </p:cNvPr>
+          <p:cNvSpPr>
+            <a:spLocks noGrp="1"/>
+          </p:cNvSpPr>
+          <p:nvPr>
+            <p:ph type="sldNum" sz="quarter" idx="12"/>
+          </p:nvPr>
+        </p:nvSpPr>
+        <p:spPr/>
+        <p:txBody>
+          <a:bodyPr/>
+          <a:lstStyle/>
+          <a:p>
+            <a:fld id="{AD40181A-01B0-4CB8-8614-1473649F6741}" type="slidenum">
+              <a:rPr lang="en-US" smtClean="0">
+                <a:solidFill>
+                  <a:schemeClr val="bg1"/>
+                </a:solidFill>
+              </a:rPr>
+              <a:t>10</a:t>
+            </a:fld>
+            <a:endParaRPr lang="en-US" dirty="0">
+              <a:solidFill>
+                <a:schemeClr val="bg1"/>
+              </a:solidFill>
+            </a:endParaRPr>
+          </a:p>
+        </p:txBody>
+      </p:sp>
+    </p:spTree>
+    <p:extLst>
+      <p:ext uri="{BB962C8B-B14F-4D97-AF65-F5344CB8AC3E}">
+        <p14:creationId xmlns:p14="http://schemas.microsoft.com/office/powerpoint/2010/main" val="2648807902"/>
+      </p:ext>
+    </p:extLst>
+  </p:cSld>
+  <p:clrMapOvr>
+    <a:masterClrMapping/>
+  </p:clrMapOvr>
+</p:sld>
+</file>
+
+<file path=ppt/slides/slide11.xml><?xml version="1.0" encoding="utf-8"?>
+<p:sld xmlns:a="http://schemas.openxmlformats.org/drawingml/2006/main" xmlns:r="http://schemas.openxmlformats.org/officeDocument/2006/relationships" xmlns:p="http://schemas.openxmlformats.org/presentationml/2006/main">
+  <p:cSld>
+    <p:spTree>
+      <p:nvGrpSpPr>
+        <p:cNvPr id="1" name="">
+          <a:extLst>
+            <a:ext uri="{FF2B5EF4-FFF2-40B4-BE49-F238E27FC236}">
+              <a16:creationId xmlns:a16="http://schemas.microsoft.com/office/drawing/2014/main" id="{109860D5-0ADE-5792-F38B-E62C062F6D1C}"/>
+            </a:ext>
+          </a:extLst>
+        </p:cNvPr>
+        <p:cNvGrpSpPr/>
+        <p:nvPr/>
+      </p:nvGrpSpPr>
+      <p:grpSpPr>
+        <a:xfrm>
+          <a:off x="0" y="0"/>
+          <a:ext cx="0" cy="0"/>
+          <a:chOff x="0" y="0"/>
+          <a:chExt cx="0" cy="0"/>
+        </a:xfrm>
+      </p:grpSpPr>
+      <p:sp>
+        <p:nvSpPr>
+          <p:cNvPr id="2" name="Slide Number Placeholder 1">
+            <a:extLst>
+              <a:ext uri="{FF2B5EF4-FFF2-40B4-BE49-F238E27FC236}">
+                <a16:creationId xmlns:a16="http://schemas.microsoft.com/office/drawing/2014/main" id="{8ACD26A8-2FC8-DD30-97D2-0E40EAF5ADBF}"/>
+              </a:ext>
+            </a:extLst>
+          </p:cNvPr>
+          <p:cNvSpPr>
+            <a:spLocks noGrp="1"/>
+          </p:cNvSpPr>
+          <p:nvPr>
+            <p:ph type="sldNum" sz="quarter" idx="12"/>
+          </p:nvPr>
+        </p:nvSpPr>
+        <p:spPr/>
+        <p:txBody>
+          <a:bodyPr/>
+          <a:lstStyle/>
+          <a:p>
+            <a:fld id="{AD40181A-01B0-4CB8-8614-1473649F6741}" type="slidenum">
+              <a:rPr lang="en-US" smtClean="0">
+                <a:solidFill>
+                  <a:srgbClr val="FFFFFE"/>
+                </a:solidFill>
+              </a:rPr>
+              <a:t>11</a:t>
+            </a:fld>
+            <a:endParaRPr lang="en-US" dirty="0">
+              <a:solidFill>
+                <a:srgbClr val="FFFFFE"/>
+              </a:solidFill>
+            </a:endParaRPr>
+          </a:p>
+        </p:txBody>
+      </p:sp>
+      <p:sp>
+        <p:nvSpPr>
+          <p:cNvPr id="3" name="Title 2">
+            <a:extLst>
+              <a:ext uri="{FF2B5EF4-FFF2-40B4-BE49-F238E27FC236}">
+                <a16:creationId xmlns:a16="http://schemas.microsoft.com/office/drawing/2014/main" id="{B1C6C862-386D-12B2-A6B7-8D9654E3FF35}"/>
+              </a:ext>
+            </a:extLst>
+          </p:cNvPr>
+          <p:cNvSpPr>
+            <a:spLocks noGrp="1"/>
+          </p:cNvSpPr>
+          <p:nvPr>
+            <p:ph type="title"/>
+          </p:nvPr>
+        </p:nvSpPr>
+        <p:spPr>
+          <a:xfrm>
+            <a:off x="0" y="-294409"/>
+            <a:ext cx="11874374" cy="1279750"/>
+          </a:xfrm>
+        </p:spPr>
+        <p:txBody>
+          <a:bodyPr/>
+          <a:lstStyle/>
+          <a:p>
+            <a:r>
+              <a:rPr lang="en-US" dirty="0"/>
+              <a:t>CANTOS : Tumor Name Standardization phase</a:t>
+            </a:r>
+          </a:p>
+        </p:txBody>
+      </p:sp>
+      <p:pic>
+        <p:nvPicPr>
+          <p:cNvPr id="5" name="Graphic 4" descr="Document outline">
+            <a:extLst>
+              <a:ext uri="{FF2B5EF4-FFF2-40B4-BE49-F238E27FC236}">
+                <a16:creationId xmlns:a16="http://schemas.microsoft.com/office/drawing/2014/main" id="{42B33DF4-60C2-1A56-0331-095B57C41900}"/>
+              </a:ext>
+            </a:extLst>
+          </p:cNvPr>
+          <p:cNvPicPr>
+            <a:picLocks noChangeAspect="1"/>
+          </p:cNvPicPr>
+          <p:nvPr/>
+        </p:nvPicPr>
+        <p:blipFill>
+          <a:blip r:embed="rId2">
+            <a:extLst>
+              <a:ext uri="{96DAC541-7B7A-43D3-8B79-37D633B846F1}">
+                <asvg:svgBlip xmlns:asvg="http://schemas.microsoft.com/office/drawing/2016/SVG/main" r:embed="rId3"/>
+              </a:ext>
+            </a:extLst>
+          </a:blip>
+          <a:stretch>
+            <a:fillRect/>
+          </a:stretch>
+        </p:blipFill>
+        <p:spPr>
+          <a:xfrm>
+            <a:off x="85015" y="716462"/>
+            <a:ext cx="1122081" cy="1122081"/>
+          </a:xfrm>
+          <a:prstGeom prst="rect">
+            <a:avLst/>
+          </a:prstGeom>
+        </p:spPr>
+      </p:pic>
+      <p:sp>
+        <p:nvSpPr>
+          <p:cNvPr id="6" name="TextBox 5">
+            <a:extLst>
+              <a:ext uri="{FF2B5EF4-FFF2-40B4-BE49-F238E27FC236}">
+                <a16:creationId xmlns:a16="http://schemas.microsoft.com/office/drawing/2014/main" id="{E776795F-7ACE-3F42-6A31-D87C253DD4B3}"/>
+              </a:ext>
+            </a:extLst>
+          </p:cNvPr>
+          <p:cNvSpPr txBox="1"/>
+          <p:nvPr/>
+        </p:nvSpPr>
+        <p:spPr>
+          <a:xfrm>
+            <a:off x="26800" y="1834241"/>
+            <a:ext cx="1877437" cy="646331"/>
+          </a:xfrm>
+          <a:prstGeom prst="rect">
+            <a:avLst/>
+          </a:prstGeom>
+          <a:noFill/>
+        </p:spPr>
+        <p:txBody>
+          <a:bodyPr wrap="none" rtlCol="0">
+            <a:spAutoFit/>
+          </a:bodyPr>
+          <a:lstStyle/>
+          <a:p>
+            <a:r>
+              <a:rPr lang="en-US" dirty="0">
+                <a:solidFill>
+                  <a:schemeClr val="bg2">
+                    <a:lumMod val="50000"/>
+                  </a:schemeClr>
+                </a:solidFill>
+              </a:rPr>
+              <a:t>Unstandardized </a:t>
+            </a:r>
+            <a:br>
+              <a:rPr lang="en-US" dirty="0">
+                <a:solidFill>
+                  <a:schemeClr val="bg2">
+                    <a:lumMod val="50000"/>
+                  </a:schemeClr>
+                </a:solidFill>
+              </a:rPr>
+            </a:br>
+            <a:r>
+              <a:rPr lang="en-US" dirty="0">
+                <a:solidFill>
+                  <a:schemeClr val="bg2">
+                    <a:lumMod val="50000"/>
+                  </a:schemeClr>
+                </a:solidFill>
+              </a:rPr>
+              <a:t>Tumor </a:t>
+            </a:r>
+            <a:r>
+              <a:rPr lang="en-US" dirty="0" err="1">
+                <a:solidFill>
+                  <a:schemeClr val="bg2">
+                    <a:lumMod val="50000"/>
+                  </a:schemeClr>
+                </a:solidFill>
+              </a:rPr>
+              <a:t>List.csv</a:t>
+            </a:r>
+            <a:endParaRPr lang="en-US" dirty="0">
+              <a:solidFill>
+                <a:schemeClr val="bg2">
+                  <a:lumMod val="50000"/>
+                </a:schemeClr>
+              </a:solidFill>
+            </a:endParaRPr>
+          </a:p>
+        </p:txBody>
+      </p:sp>
+      <p:pic>
+        <p:nvPicPr>
+          <p:cNvPr id="9" name="Graphic 8" descr="Database outline">
+            <a:extLst>
+              <a:ext uri="{FF2B5EF4-FFF2-40B4-BE49-F238E27FC236}">
+                <a16:creationId xmlns:a16="http://schemas.microsoft.com/office/drawing/2014/main" id="{9D1933F5-1AFB-BFD9-ED47-ABC750D7470C}"/>
+              </a:ext>
+            </a:extLst>
+          </p:cNvPr>
+          <p:cNvPicPr>
+            <a:picLocks noChangeAspect="1"/>
+          </p:cNvPicPr>
+          <p:nvPr/>
+        </p:nvPicPr>
+        <p:blipFill>
+          <a:blip r:embed="rId4">
+            <a:extLst>
+              <a:ext uri="{96DAC541-7B7A-43D3-8B79-37D633B846F1}">
+                <asvg:svgBlip xmlns:asvg="http://schemas.microsoft.com/office/drawing/2016/SVG/main" r:embed="rId5"/>
+              </a:ext>
+            </a:extLst>
+          </a:blip>
+          <a:stretch>
+            <a:fillRect/>
+          </a:stretch>
+        </p:blipFill>
+        <p:spPr>
+          <a:xfrm>
+            <a:off x="191306" y="2471051"/>
+            <a:ext cx="1244416" cy="1244416"/>
+          </a:xfrm>
+          <a:prstGeom prst="rect">
+            <a:avLst/>
+          </a:prstGeom>
+        </p:spPr>
+      </p:pic>
+      <p:sp>
+        <p:nvSpPr>
+          <p:cNvPr id="10" name="TextBox 9">
+            <a:extLst>
+              <a:ext uri="{FF2B5EF4-FFF2-40B4-BE49-F238E27FC236}">
+                <a16:creationId xmlns:a16="http://schemas.microsoft.com/office/drawing/2014/main" id="{F3AF1533-C3BE-BE71-98C1-E47E9B9F2B8C}"/>
+              </a:ext>
+            </a:extLst>
+          </p:cNvPr>
+          <p:cNvSpPr txBox="1"/>
+          <p:nvPr/>
+        </p:nvSpPr>
+        <p:spPr>
+          <a:xfrm>
+            <a:off x="14874" y="3644757"/>
+            <a:ext cx="1765922" cy="923330"/>
+          </a:xfrm>
+          <a:prstGeom prst="rect">
+            <a:avLst/>
+          </a:prstGeom>
+          <a:noFill/>
+        </p:spPr>
+        <p:txBody>
+          <a:bodyPr wrap="square" rtlCol="0">
+            <a:spAutoFit/>
+          </a:bodyPr>
+          <a:lstStyle/>
+          <a:p>
+            <a:pPr algn="ctr"/>
+            <a:r>
+              <a:rPr lang="en-US" dirty="0">
+                <a:solidFill>
+                  <a:schemeClr val="bg2">
+                    <a:lumMod val="50000"/>
+                  </a:schemeClr>
+                </a:solidFill>
+              </a:rPr>
+              <a:t>WHO Tumor Classification System</a:t>
+            </a:r>
+          </a:p>
+        </p:txBody>
+      </p:sp>
+      <p:sp>
+        <p:nvSpPr>
+          <p:cNvPr id="12" name="Rectangle 11">
+            <a:extLst>
+              <a:ext uri="{FF2B5EF4-FFF2-40B4-BE49-F238E27FC236}">
+                <a16:creationId xmlns:a16="http://schemas.microsoft.com/office/drawing/2014/main" id="{2DACE30A-D8C5-7184-1BB4-91D4E0E5CA43}"/>
+              </a:ext>
+            </a:extLst>
+          </p:cNvPr>
+          <p:cNvSpPr/>
+          <p:nvPr/>
+        </p:nvSpPr>
+        <p:spPr>
+          <a:xfrm>
+            <a:off x="2629512" y="1054229"/>
+            <a:ext cx="2907576" cy="837415"/>
+          </a:xfrm>
+          <a:prstGeom prst="rect">
+            <a:avLst/>
+          </a:prstGeom>
+        </p:spPr>
+        <p:style>
+          <a:lnRef idx="2">
+            <a:schemeClr val="accent1">
+              <a:shade val="15000"/>
+            </a:schemeClr>
+          </a:lnRef>
+          <a:fillRef idx="1">
+            <a:schemeClr val="accent1"/>
+          </a:fillRef>
+          <a:effectRef idx="0">
+            <a:schemeClr val="accent1"/>
+          </a:effectRef>
+          <a:fontRef idx="minor">
+            <a:schemeClr val="lt1"/>
+          </a:fontRef>
+        </p:style>
+        <p:txBody>
+          <a:bodyPr rtlCol="0" anchor="ctr"/>
+          <a:lstStyle/>
+          <a:p>
+            <a:pPr algn="ctr"/>
+            <a:r>
+              <a:rPr lang="en-US" dirty="0"/>
+              <a:t>Compute edit distance: Cosine, </a:t>
+            </a:r>
+            <a:r>
+              <a:rPr lang="en-US" dirty="0" err="1"/>
+              <a:t>Jarro</a:t>
+            </a:r>
+            <a:r>
+              <a:rPr lang="en-US" dirty="0"/>
+              <a:t> Winkler, </a:t>
+            </a:r>
+            <a:r>
+              <a:rPr lang="en-US" dirty="0" err="1"/>
+              <a:t>Levenshtein</a:t>
+            </a:r>
+            <a:endParaRPr lang="en-US" dirty="0"/>
+          </a:p>
+        </p:txBody>
+      </p:sp>
+      <p:sp>
+        <p:nvSpPr>
+          <p:cNvPr id="24" name="Right Arrow 23">
+            <a:extLst>
+              <a:ext uri="{FF2B5EF4-FFF2-40B4-BE49-F238E27FC236}">
+                <a16:creationId xmlns:a16="http://schemas.microsoft.com/office/drawing/2014/main" id="{DB2CF8BF-C061-21CA-3A3F-608F28B494D7}"/>
+              </a:ext>
+            </a:extLst>
+          </p:cNvPr>
+          <p:cNvSpPr/>
+          <p:nvPr/>
+        </p:nvSpPr>
+        <p:spPr>
+          <a:xfrm>
+            <a:off x="5747659" y="1136938"/>
+            <a:ext cx="1025495" cy="529839"/>
+          </a:xfrm>
+          <a:prstGeom prst="rightArrow">
+            <a:avLst/>
+          </a:prstGeom>
+        </p:spPr>
+        <p:style>
+          <a:lnRef idx="2">
+            <a:schemeClr val="accent1">
+              <a:shade val="15000"/>
+            </a:schemeClr>
+          </a:lnRef>
+          <a:fillRef idx="1">
+            <a:schemeClr val="accent1"/>
+          </a:fillRef>
+          <a:effectRef idx="0">
+            <a:schemeClr val="accent1"/>
+          </a:effectRef>
+          <a:fontRef idx="minor">
+            <a:schemeClr val="lt1"/>
+          </a:fontRef>
+        </p:style>
+        <p:txBody>
+          <a:bodyPr rtlCol="0" anchor="ctr"/>
+          <a:lstStyle/>
+          <a:p>
+            <a:pPr algn="ctr"/>
+            <a:endParaRPr lang="en-US"/>
+          </a:p>
+        </p:txBody>
+      </p:sp>
+      <p:sp>
+        <p:nvSpPr>
+          <p:cNvPr id="25" name="Rectangle 24">
+            <a:extLst>
+              <a:ext uri="{FF2B5EF4-FFF2-40B4-BE49-F238E27FC236}">
+                <a16:creationId xmlns:a16="http://schemas.microsoft.com/office/drawing/2014/main" id="{B5DF64D4-81B9-73C2-DD97-9F86B72DC86F}"/>
+              </a:ext>
+            </a:extLst>
+          </p:cNvPr>
+          <p:cNvSpPr/>
+          <p:nvPr/>
+        </p:nvSpPr>
+        <p:spPr>
+          <a:xfrm>
+            <a:off x="7030939" y="1001030"/>
+            <a:ext cx="3777046" cy="952919"/>
+          </a:xfrm>
+          <a:prstGeom prst="rect">
+            <a:avLst/>
+          </a:prstGeom>
+          <a:solidFill>
+            <a:schemeClr val="accent3">
+              <a:lumMod val="60000"/>
+              <a:lumOff val="40000"/>
+            </a:schemeClr>
+          </a:solidFill>
+        </p:spPr>
+        <p:style>
+          <a:lnRef idx="2">
+            <a:schemeClr val="accent1">
+              <a:shade val="15000"/>
+            </a:schemeClr>
+          </a:lnRef>
+          <a:fillRef idx="1">
+            <a:schemeClr val="accent1"/>
+          </a:fillRef>
+          <a:effectRef idx="0">
+            <a:schemeClr val="accent1"/>
+          </a:effectRef>
+          <a:fontRef idx="minor">
+            <a:schemeClr val="lt1"/>
+          </a:fontRef>
+        </p:style>
+        <p:txBody>
+          <a:bodyPr rtlCol="0" anchor="ctr"/>
+          <a:lstStyle/>
+          <a:p>
+            <a:pPr algn="ctr"/>
+            <a:r>
+              <a:rPr lang="en-US" dirty="0"/>
+              <a:t>Assign the closest standardized tumor name to the unstandardized tumor name from CTR</a:t>
+            </a:r>
+          </a:p>
+        </p:txBody>
+      </p:sp>
+      <p:sp>
+        <p:nvSpPr>
+          <p:cNvPr id="26" name="Rectangle 25">
+            <a:extLst>
+              <a:ext uri="{FF2B5EF4-FFF2-40B4-BE49-F238E27FC236}">
+                <a16:creationId xmlns:a16="http://schemas.microsoft.com/office/drawing/2014/main" id="{EC4A64BD-7770-C661-5A64-7BF246DDB17A}"/>
+              </a:ext>
+            </a:extLst>
+          </p:cNvPr>
+          <p:cNvSpPr/>
+          <p:nvPr/>
+        </p:nvSpPr>
+        <p:spPr>
+          <a:xfrm>
+            <a:off x="2683316" y="2700388"/>
+            <a:ext cx="3071488" cy="717907"/>
+          </a:xfrm>
+          <a:prstGeom prst="rect">
+            <a:avLst/>
+          </a:prstGeom>
+        </p:spPr>
+        <p:style>
+          <a:lnRef idx="2">
+            <a:schemeClr val="accent1">
+              <a:shade val="15000"/>
+            </a:schemeClr>
+          </a:lnRef>
+          <a:fillRef idx="1">
+            <a:schemeClr val="accent1"/>
+          </a:fillRef>
+          <a:effectRef idx="0">
+            <a:schemeClr val="accent1"/>
+          </a:effectRef>
+          <a:fontRef idx="minor">
+            <a:schemeClr val="lt1"/>
+          </a:fontRef>
+        </p:style>
+        <p:txBody>
+          <a:bodyPr rtlCol="0" anchor="ctr"/>
+          <a:lstStyle/>
+          <a:p>
+            <a:pPr algn="ctr"/>
+            <a:r>
+              <a:rPr lang="en-US" dirty="0"/>
+              <a:t>Use edit distance to cluster: Affinity Propagation</a:t>
+            </a:r>
+          </a:p>
+        </p:txBody>
+      </p:sp>
+      <p:sp>
+        <p:nvSpPr>
+          <p:cNvPr id="27" name="Right Arrow 26">
+            <a:extLst>
+              <a:ext uri="{FF2B5EF4-FFF2-40B4-BE49-F238E27FC236}">
+                <a16:creationId xmlns:a16="http://schemas.microsoft.com/office/drawing/2014/main" id="{B8B5E91A-3F3D-35CB-83A7-23E4CFFCD7FE}"/>
+              </a:ext>
+            </a:extLst>
+          </p:cNvPr>
+          <p:cNvSpPr/>
+          <p:nvPr/>
+        </p:nvSpPr>
+        <p:spPr>
+          <a:xfrm rot="5400000">
+            <a:off x="3820459" y="2017283"/>
+            <a:ext cx="717906" cy="554994"/>
+          </a:xfrm>
+          <a:prstGeom prst="rightArrow">
+            <a:avLst/>
+          </a:prstGeom>
+        </p:spPr>
+        <p:style>
+          <a:lnRef idx="2">
+            <a:schemeClr val="accent1">
+              <a:shade val="15000"/>
+            </a:schemeClr>
+          </a:lnRef>
+          <a:fillRef idx="1">
+            <a:schemeClr val="accent1"/>
+          </a:fillRef>
+          <a:effectRef idx="0">
+            <a:schemeClr val="accent1"/>
+          </a:effectRef>
+          <a:fontRef idx="minor">
+            <a:schemeClr val="lt1"/>
+          </a:fontRef>
+        </p:style>
+        <p:txBody>
+          <a:bodyPr rtlCol="0" anchor="ctr"/>
+          <a:lstStyle/>
+          <a:p>
+            <a:pPr algn="ctr"/>
+            <a:endParaRPr lang="en-US"/>
+          </a:p>
+        </p:txBody>
+      </p:sp>
+      <p:sp>
+        <p:nvSpPr>
+          <p:cNvPr id="28" name="Rectangle 27">
+            <a:extLst>
+              <a:ext uri="{FF2B5EF4-FFF2-40B4-BE49-F238E27FC236}">
+                <a16:creationId xmlns:a16="http://schemas.microsoft.com/office/drawing/2014/main" id="{926E6448-7FF8-7D01-CB23-D9DE6B6960D9}"/>
+              </a:ext>
+            </a:extLst>
+          </p:cNvPr>
+          <p:cNvSpPr/>
+          <p:nvPr/>
+        </p:nvSpPr>
+        <p:spPr>
+          <a:xfrm>
+            <a:off x="2296830" y="4297254"/>
+            <a:ext cx="3765164" cy="860083"/>
+          </a:xfrm>
+          <a:prstGeom prst="rect">
+            <a:avLst/>
+          </a:prstGeom>
+        </p:spPr>
+        <p:style>
+          <a:lnRef idx="2">
+            <a:schemeClr val="accent1">
+              <a:shade val="15000"/>
+            </a:schemeClr>
+          </a:lnRef>
+          <a:fillRef idx="1">
+            <a:schemeClr val="accent1"/>
+          </a:fillRef>
+          <a:effectRef idx="0">
+            <a:schemeClr val="accent1"/>
+          </a:effectRef>
+          <a:fontRef idx="minor">
+            <a:schemeClr val="lt1"/>
+          </a:fontRef>
+        </p:style>
+        <p:txBody>
+          <a:bodyPr rtlCol="0" anchor="ctr"/>
+          <a:lstStyle/>
+          <a:p>
+            <a:pPr algn="ctr"/>
+            <a:r>
+              <a:rPr lang="en-US" dirty="0"/>
+              <a:t>In each cluster find the standardized tumor name closest to each cluster member. </a:t>
+            </a:r>
+          </a:p>
+        </p:txBody>
+      </p:sp>
+      <p:sp>
+        <p:nvSpPr>
+          <p:cNvPr id="29" name="Right Arrow 28">
+            <a:extLst>
+              <a:ext uri="{FF2B5EF4-FFF2-40B4-BE49-F238E27FC236}">
+                <a16:creationId xmlns:a16="http://schemas.microsoft.com/office/drawing/2014/main" id="{84CCA57B-3C8C-41BE-8EA3-47D5E0FB7917}"/>
+              </a:ext>
+            </a:extLst>
+          </p:cNvPr>
+          <p:cNvSpPr/>
+          <p:nvPr/>
+        </p:nvSpPr>
+        <p:spPr>
+          <a:xfrm>
+            <a:off x="1391489" y="1102900"/>
+            <a:ext cx="1025495" cy="529839"/>
+          </a:xfrm>
+          <a:prstGeom prst="rightArrow">
+            <a:avLst/>
+          </a:prstGeom>
+        </p:spPr>
+        <p:style>
+          <a:lnRef idx="2">
+            <a:schemeClr val="accent1">
+              <a:shade val="15000"/>
+            </a:schemeClr>
+          </a:lnRef>
+          <a:fillRef idx="1">
+            <a:schemeClr val="accent1"/>
+          </a:fillRef>
+          <a:effectRef idx="0">
+            <a:schemeClr val="accent1"/>
+          </a:effectRef>
+          <a:fontRef idx="minor">
+            <a:schemeClr val="lt1"/>
+          </a:fontRef>
+        </p:style>
+        <p:txBody>
+          <a:bodyPr rtlCol="0" anchor="ctr"/>
+          <a:lstStyle/>
+          <a:p>
+            <a:pPr algn="ctr"/>
+            <a:endParaRPr lang="en-US"/>
+          </a:p>
+        </p:txBody>
+      </p:sp>
+      <p:sp>
+        <p:nvSpPr>
+          <p:cNvPr id="30" name="Right Arrow 29">
+            <a:extLst>
+              <a:ext uri="{FF2B5EF4-FFF2-40B4-BE49-F238E27FC236}">
+                <a16:creationId xmlns:a16="http://schemas.microsoft.com/office/drawing/2014/main" id="{81EB917E-25B1-AE1F-4FAD-C37EBF6AB563}"/>
+              </a:ext>
+            </a:extLst>
+          </p:cNvPr>
+          <p:cNvSpPr/>
+          <p:nvPr/>
+        </p:nvSpPr>
+        <p:spPr>
+          <a:xfrm rot="19419849">
+            <a:off x="1657498" y="2230109"/>
+            <a:ext cx="1025495" cy="529839"/>
+          </a:xfrm>
+          <a:prstGeom prst="rightArrow">
+            <a:avLst/>
+          </a:prstGeom>
+        </p:spPr>
+        <p:style>
+          <a:lnRef idx="2">
+            <a:schemeClr val="accent1">
+              <a:shade val="15000"/>
+            </a:schemeClr>
+          </a:lnRef>
+          <a:fillRef idx="1">
+            <a:schemeClr val="accent1"/>
+          </a:fillRef>
+          <a:effectRef idx="0">
+            <a:schemeClr val="accent1"/>
+          </a:effectRef>
+          <a:fontRef idx="minor">
+            <a:schemeClr val="lt1"/>
+          </a:fontRef>
+        </p:style>
+        <p:txBody>
+          <a:bodyPr rtlCol="0" anchor="ctr"/>
+          <a:lstStyle/>
+          <a:p>
+            <a:pPr algn="ctr"/>
+            <a:endParaRPr lang="en-US"/>
+          </a:p>
+        </p:txBody>
+      </p:sp>
+      <p:sp>
+        <p:nvSpPr>
+          <p:cNvPr id="31" name="Right Arrow 30">
+            <a:extLst>
+              <a:ext uri="{FF2B5EF4-FFF2-40B4-BE49-F238E27FC236}">
+                <a16:creationId xmlns:a16="http://schemas.microsoft.com/office/drawing/2014/main" id="{E25ED098-021B-C1C9-CF51-C674013DF8EA}"/>
+              </a:ext>
+            </a:extLst>
+          </p:cNvPr>
+          <p:cNvSpPr/>
+          <p:nvPr/>
+        </p:nvSpPr>
+        <p:spPr>
+          <a:xfrm rot="5400000">
+            <a:off x="3831138" y="3593062"/>
+            <a:ext cx="717906" cy="554994"/>
+          </a:xfrm>
+          <a:prstGeom prst="rightArrow">
+            <a:avLst/>
+          </a:prstGeom>
+        </p:spPr>
+        <p:style>
+          <a:lnRef idx="2">
+            <a:schemeClr val="accent1">
+              <a:shade val="15000"/>
+            </a:schemeClr>
+          </a:lnRef>
+          <a:fillRef idx="1">
+            <a:schemeClr val="accent1"/>
+          </a:fillRef>
+          <a:effectRef idx="0">
+            <a:schemeClr val="accent1"/>
+          </a:effectRef>
+          <a:fontRef idx="minor">
+            <a:schemeClr val="lt1"/>
+          </a:fontRef>
+        </p:style>
+        <p:txBody>
+          <a:bodyPr rtlCol="0" anchor="ctr"/>
+          <a:lstStyle/>
+          <a:p>
+            <a:pPr algn="ctr"/>
+            <a:endParaRPr lang="en-US"/>
+          </a:p>
+        </p:txBody>
+      </p:sp>
+      <p:sp>
+        <p:nvSpPr>
+          <p:cNvPr id="33" name="Rectangle 32">
+            <a:extLst>
+              <a:ext uri="{FF2B5EF4-FFF2-40B4-BE49-F238E27FC236}">
+                <a16:creationId xmlns:a16="http://schemas.microsoft.com/office/drawing/2014/main" id="{D6338E01-895B-58AC-0BC0-60DBE35F15B6}"/>
+              </a:ext>
+            </a:extLst>
+          </p:cNvPr>
+          <p:cNvSpPr/>
+          <p:nvPr/>
+        </p:nvSpPr>
+        <p:spPr>
+          <a:xfrm>
+            <a:off x="7002398" y="3418295"/>
+            <a:ext cx="3951340" cy="1073935"/>
+          </a:xfrm>
+          <a:prstGeom prst="rect">
+            <a:avLst/>
+          </a:prstGeom>
+          <a:solidFill>
+            <a:schemeClr val="accent3">
+              <a:lumMod val="60000"/>
+              <a:lumOff val="40000"/>
+            </a:schemeClr>
+          </a:solidFill>
+        </p:spPr>
+        <p:style>
+          <a:lnRef idx="2">
+            <a:schemeClr val="accent1">
+              <a:shade val="15000"/>
+            </a:schemeClr>
+          </a:lnRef>
+          <a:fillRef idx="1">
+            <a:schemeClr val="accent1"/>
+          </a:fillRef>
+          <a:effectRef idx="0">
+            <a:schemeClr val="accent1"/>
+          </a:effectRef>
+          <a:fontRef idx="minor">
+            <a:schemeClr val="lt1"/>
+          </a:fontRef>
+        </p:style>
+        <p:txBody>
+          <a:bodyPr rtlCol="0" anchor="ctr"/>
+          <a:lstStyle/>
+          <a:p>
+            <a:pPr algn="ctr"/>
+            <a:r>
+              <a:rPr lang="en-US" dirty="0"/>
+              <a:t>If a standardized name represents majority of the cluster member assign it as the standardized name for all cluster members.</a:t>
+            </a:r>
+          </a:p>
+        </p:txBody>
+      </p:sp>
+      <p:sp>
+        <p:nvSpPr>
+          <p:cNvPr id="34" name="Rectangle 33">
+            <a:extLst>
+              <a:ext uri="{FF2B5EF4-FFF2-40B4-BE49-F238E27FC236}">
+                <a16:creationId xmlns:a16="http://schemas.microsoft.com/office/drawing/2014/main" id="{3097155B-A889-68CD-94F7-A29B8338098A}"/>
+              </a:ext>
+            </a:extLst>
+          </p:cNvPr>
+          <p:cNvSpPr/>
+          <p:nvPr/>
+        </p:nvSpPr>
+        <p:spPr>
+          <a:xfrm>
+            <a:off x="7030939" y="4701874"/>
+            <a:ext cx="3951339" cy="860083"/>
+          </a:xfrm>
+          <a:prstGeom prst="rect">
+            <a:avLst/>
+          </a:prstGeom>
+          <a:solidFill>
+            <a:schemeClr val="accent3">
+              <a:lumMod val="60000"/>
+              <a:lumOff val="40000"/>
+            </a:schemeClr>
+          </a:solidFill>
+        </p:spPr>
+        <p:style>
+          <a:lnRef idx="2">
+            <a:schemeClr val="accent1">
+              <a:shade val="15000"/>
+            </a:schemeClr>
+          </a:lnRef>
+          <a:fillRef idx="1">
+            <a:schemeClr val="accent1"/>
+          </a:fillRef>
+          <a:effectRef idx="0">
+            <a:schemeClr val="accent1"/>
+          </a:effectRef>
+          <a:fontRef idx="minor">
+            <a:schemeClr val="lt1"/>
+          </a:fontRef>
+        </p:style>
+        <p:txBody>
+          <a:bodyPr rtlCol="0" anchor="ctr"/>
+          <a:lstStyle/>
+          <a:p>
+            <a:pPr algn="ctr"/>
+            <a:r>
+              <a:rPr lang="en-US" dirty="0"/>
+              <a:t>Otherwise, assign cluster members to nearest standardized term</a:t>
+            </a:r>
+          </a:p>
+        </p:txBody>
+      </p:sp>
+      <p:sp>
+        <p:nvSpPr>
+          <p:cNvPr id="36" name="Right Arrow 35">
+            <a:extLst>
+              <a:ext uri="{FF2B5EF4-FFF2-40B4-BE49-F238E27FC236}">
+                <a16:creationId xmlns:a16="http://schemas.microsoft.com/office/drawing/2014/main" id="{D9BC9283-53DA-ACD5-5130-2458D7B043CB}"/>
+              </a:ext>
+            </a:extLst>
+          </p:cNvPr>
+          <p:cNvSpPr/>
+          <p:nvPr/>
+        </p:nvSpPr>
+        <p:spPr>
+          <a:xfrm>
+            <a:off x="6132670" y="4398806"/>
+            <a:ext cx="717906" cy="554994"/>
+          </a:xfrm>
+          <a:prstGeom prst="rightArrow">
+            <a:avLst/>
+          </a:prstGeom>
+        </p:spPr>
+        <p:style>
+          <a:lnRef idx="2">
+            <a:schemeClr val="accent1">
+              <a:shade val="15000"/>
+            </a:schemeClr>
+          </a:lnRef>
+          <a:fillRef idx="1">
+            <a:schemeClr val="accent1"/>
+          </a:fillRef>
+          <a:effectRef idx="0">
+            <a:schemeClr val="accent1"/>
+          </a:effectRef>
+          <a:fontRef idx="minor">
+            <a:schemeClr val="lt1"/>
+          </a:fontRef>
+        </p:style>
+        <p:txBody>
+          <a:bodyPr rtlCol="0" anchor="ctr"/>
+          <a:lstStyle/>
+          <a:p>
+            <a:pPr algn="ctr"/>
+            <a:endParaRPr lang="en-US"/>
+          </a:p>
+        </p:txBody>
+      </p:sp>
+    </p:spTree>
+    <p:extLst>
+      <p:ext uri="{BB962C8B-B14F-4D97-AF65-F5344CB8AC3E}">
+        <p14:creationId xmlns:p14="http://schemas.microsoft.com/office/powerpoint/2010/main" val="2050892151"/>
+      </p:ext>
+    </p:extLst>
+  </p:cSld>
+  <p:clrMapOvr>
+    <a:masterClrMapping/>
+  </p:clrMapOvr>
+</p:sld>
+</file>
+
+<file path=ppt/slides/slide12.xml><?xml version="1.0" encoding="utf-8"?>
+<p:sld xmlns:a="http://schemas.openxmlformats.org/drawingml/2006/main" xmlns:r="http://schemas.openxmlformats.org/officeDocument/2006/relationships" xmlns:p="http://schemas.openxmlformats.org/presentationml/2006/main">
+  <p:cSld>
+    <p:spTree>
+      <p:nvGrpSpPr>
+        <p:cNvPr id="1" name="">
+          <a:extLst>
+            <a:ext uri="{FF2B5EF4-FFF2-40B4-BE49-F238E27FC236}">
+              <a16:creationId xmlns:a16="http://schemas.microsoft.com/office/drawing/2014/main" id="{D3EC1EB9-9B68-70A2-3AE0-52EF6172BBB7}"/>
+            </a:ext>
+          </a:extLst>
+        </p:cNvPr>
+        <p:cNvGrpSpPr/>
+        <p:nvPr/>
+      </p:nvGrpSpPr>
+      <p:grpSpPr>
+        <a:xfrm>
+          <a:off x="0" y="0"/>
+          <a:ext cx="0" cy="0"/>
+          <a:chOff x="0" y="0"/>
+          <a:chExt cx="0" cy="0"/>
+        </a:xfrm>
+      </p:grpSpPr>
+      <p:sp>
+        <p:nvSpPr>
+          <p:cNvPr id="2" name="Title 1">
+            <a:extLst>
+              <a:ext uri="{FF2B5EF4-FFF2-40B4-BE49-F238E27FC236}">
+                <a16:creationId xmlns:a16="http://schemas.microsoft.com/office/drawing/2014/main" id="{1C261B09-5FE2-1F2B-B4DA-07731E7651A6}"/>
+              </a:ext>
+            </a:extLst>
+          </p:cNvPr>
+          <p:cNvSpPr>
+            <a:spLocks noGrp="1"/>
+          </p:cNvSpPr>
+          <p:nvPr>
+            <p:ph type="title"/>
+          </p:nvPr>
+        </p:nvSpPr>
+        <p:spPr>
+          <a:xfrm>
+            <a:off x="87086" y="21771"/>
+            <a:ext cx="10651402" cy="1143000"/>
+          </a:xfrm>
+        </p:spPr>
+        <p:txBody>
+          <a:bodyPr/>
+          <a:lstStyle/>
+          <a:p>
+            <a:r>
+              <a:rPr lang="en-US" dirty="0"/>
+              <a:t>Tumor Name Standardization		</a:t>
+            </a:r>
+          </a:p>
+        </p:txBody>
+      </p:sp>
+      <p:sp>
+        <p:nvSpPr>
+          <p:cNvPr id="3" name="Content Placeholder 2">
+            <a:extLst>
+              <a:ext uri="{FF2B5EF4-FFF2-40B4-BE49-F238E27FC236}">
+                <a16:creationId xmlns:a16="http://schemas.microsoft.com/office/drawing/2014/main" id="{746048D8-729C-FD55-857D-1B1119FA6E74}"/>
+              </a:ext>
+            </a:extLst>
+          </p:cNvPr>
+          <p:cNvSpPr>
+            <a:spLocks noGrp="1"/>
+          </p:cNvSpPr>
+          <p:nvPr>
+            <p:ph idx="1"/>
+          </p:nvPr>
+        </p:nvSpPr>
+        <p:spPr>
+          <a:xfrm>
+            <a:off x="179670" y="1164771"/>
+            <a:ext cx="11261215" cy="4484914"/>
+          </a:xfrm>
+        </p:spPr>
+        <p:txBody>
+          <a:bodyPr>
+            <a:normAutofit/>
+          </a:bodyPr>
+          <a:lstStyle/>
+          <a:p>
+            <a:pPr algn="just"/>
+            <a:r>
+              <a:rPr lang="en-US" sz="1800" dirty="0">
+                <a:solidFill>
+                  <a:schemeClr val="tx1"/>
+                </a:solidFill>
+                <a:latin typeface="+mn-lt"/>
+                <a:cs typeface="+mn-cs"/>
+              </a:rPr>
+              <a:t>Edit distances: are a way of measuring how different two strings (sequences of characters) are. The edit distance is the minimum number of operations needed to transform one string into another. E.g. </a:t>
+            </a:r>
+            <a:r>
+              <a:rPr lang="en-US" sz="1800" dirty="0" err="1">
+                <a:solidFill>
+                  <a:schemeClr val="tx1"/>
+                </a:solidFill>
+                <a:latin typeface="+mn-lt"/>
+                <a:cs typeface="+mn-cs"/>
+              </a:rPr>
+              <a:t>Levenshtein</a:t>
+            </a:r>
+            <a:r>
+              <a:rPr lang="en-US" sz="1800" dirty="0">
+                <a:solidFill>
+                  <a:schemeClr val="tx1"/>
+                </a:solidFill>
+                <a:latin typeface="+mn-lt"/>
+                <a:cs typeface="+mn-cs"/>
+              </a:rPr>
+              <a:t> , cosine, </a:t>
+            </a:r>
+            <a:r>
+              <a:rPr lang="en-US" sz="1800" dirty="0" err="1">
+                <a:solidFill>
+                  <a:schemeClr val="tx1"/>
+                </a:solidFill>
+                <a:latin typeface="+mn-lt"/>
+                <a:cs typeface="+mn-cs"/>
+              </a:rPr>
+              <a:t>jarro-winkler</a:t>
+            </a:r>
+            <a:r>
+              <a:rPr lang="en-US" sz="1800" dirty="0">
+                <a:solidFill>
+                  <a:schemeClr val="tx1"/>
+                </a:solidFill>
+                <a:latin typeface="+mn-lt"/>
+                <a:cs typeface="+mn-cs"/>
+              </a:rPr>
+              <a:t> etc. </a:t>
+            </a:r>
+          </a:p>
+          <a:p>
+            <a:pPr algn="just"/>
+            <a:endParaRPr lang="en-US" sz="1800" dirty="0">
+              <a:solidFill>
+                <a:schemeClr val="tx1"/>
+              </a:solidFill>
+              <a:latin typeface="+mn-lt"/>
+              <a:cs typeface="+mn-cs"/>
+            </a:endParaRPr>
+          </a:p>
+          <a:p>
+            <a:r>
+              <a:rPr lang="en-US" sz="1800" dirty="0">
+                <a:solidFill>
+                  <a:schemeClr val="tx1"/>
+                </a:solidFill>
+                <a:latin typeface="+mn-lt"/>
+                <a:cs typeface="+mn-cs"/>
+              </a:rPr>
+              <a:t>Text Embeddings: Text embeddings are numerical vector representations of text — words, phrases, or entire documents — that capture their meaning and semantic relationships in a high-dimensional space.</a:t>
+            </a:r>
+          </a:p>
+          <a:p>
+            <a:pPr lvl="1"/>
+            <a:r>
+              <a:rPr lang="en-US" sz="1400" dirty="0">
+                <a:solidFill>
+                  <a:schemeClr val="tx1"/>
+                </a:solidFill>
+                <a:latin typeface="+mn-lt"/>
+                <a:cs typeface="+mn-cs"/>
+              </a:rPr>
+              <a:t>Similar meanings → vectors that are close together</a:t>
+            </a:r>
+            <a:br>
+              <a:rPr lang="en-US" sz="1400" dirty="0">
+                <a:solidFill>
+                  <a:schemeClr val="tx1"/>
+                </a:solidFill>
+                <a:latin typeface="+mn-lt"/>
+                <a:cs typeface="+mn-cs"/>
+              </a:rPr>
+            </a:br>
+            <a:r>
+              <a:rPr lang="en-US" sz="1400" dirty="0">
+                <a:solidFill>
+                  <a:schemeClr val="tx1"/>
+                </a:solidFill>
+                <a:latin typeface="+mn-lt"/>
+                <a:cs typeface="+mn-cs"/>
+              </a:rPr>
+              <a:t>Different meanings → vectors that are far apart</a:t>
+            </a:r>
+          </a:p>
+          <a:p>
+            <a:pPr lvl="1"/>
+            <a:endParaRPr lang="en-US" sz="1800" dirty="0">
+              <a:solidFill>
+                <a:schemeClr val="tx1"/>
+              </a:solidFill>
+              <a:latin typeface="+mn-lt"/>
+            </a:endParaRPr>
+          </a:p>
+          <a:p>
+            <a:r>
+              <a:rPr lang="en-US" sz="1800" dirty="0">
+                <a:solidFill>
+                  <a:schemeClr val="tx1"/>
+                </a:solidFill>
+                <a:latin typeface="+mn-lt"/>
+                <a:cs typeface="+mn-cs"/>
+              </a:rPr>
+              <a:t>Text Embeddings: generated by models based on NLP (Word2Vec, </a:t>
+            </a:r>
+            <a:r>
+              <a:rPr lang="en-US" sz="1800" dirty="0" err="1">
+                <a:solidFill>
+                  <a:schemeClr val="tx1"/>
+                </a:solidFill>
+                <a:latin typeface="+mn-lt"/>
+                <a:cs typeface="+mn-cs"/>
+              </a:rPr>
+              <a:t>GloVe</a:t>
+            </a:r>
+            <a:r>
+              <a:rPr lang="en-US" sz="1800" dirty="0">
+                <a:solidFill>
+                  <a:schemeClr val="tx1"/>
+                </a:solidFill>
+                <a:latin typeface="+mn-lt"/>
+                <a:cs typeface="+mn-cs"/>
+              </a:rPr>
+              <a:t>), transformers (</a:t>
+            </a:r>
+            <a:r>
+              <a:rPr lang="en-US" sz="1800" dirty="0" err="1">
+                <a:solidFill>
+                  <a:schemeClr val="tx1"/>
+                </a:solidFill>
+                <a:latin typeface="+mn-lt"/>
+                <a:cs typeface="+mn-cs"/>
+              </a:rPr>
+              <a:t>BioBERT</a:t>
+            </a:r>
+            <a:r>
+              <a:rPr lang="en-US" sz="1800" dirty="0">
+                <a:solidFill>
+                  <a:schemeClr val="tx1"/>
+                </a:solidFill>
+                <a:latin typeface="+mn-lt"/>
+                <a:cs typeface="+mn-cs"/>
+              </a:rPr>
+              <a:t>, </a:t>
+            </a:r>
+            <a:r>
+              <a:rPr lang="en-US" sz="1800" dirty="0" err="1">
+                <a:solidFill>
+                  <a:schemeClr val="tx1"/>
+                </a:solidFill>
+                <a:latin typeface="+mn-lt"/>
+                <a:cs typeface="+mn-cs"/>
+              </a:rPr>
+              <a:t>BioGPT</a:t>
+            </a:r>
+            <a:r>
+              <a:rPr lang="en-US" sz="1800" dirty="0">
+                <a:solidFill>
+                  <a:schemeClr val="tx1"/>
+                </a:solidFill>
+                <a:latin typeface="+mn-lt"/>
+                <a:cs typeface="+mn-cs"/>
+              </a:rPr>
+              <a:t>) and LLMs (Llama, Open AI, Cohere, </a:t>
+            </a:r>
+            <a:r>
+              <a:rPr lang="en-US" sz="1800" dirty="0" err="1">
+                <a:solidFill>
+                  <a:schemeClr val="tx1"/>
+                </a:solidFill>
+                <a:latin typeface="+mn-lt"/>
+                <a:cs typeface="+mn-cs"/>
+              </a:rPr>
+              <a:t>miniLM</a:t>
+            </a:r>
+            <a:r>
+              <a:rPr lang="en-US" sz="1800" dirty="0">
+                <a:solidFill>
+                  <a:schemeClr val="tx1"/>
+                </a:solidFill>
+                <a:latin typeface="+mn-lt"/>
+                <a:cs typeface="+mn-cs"/>
+              </a:rPr>
+              <a:t>).</a:t>
+            </a:r>
+          </a:p>
+          <a:p>
+            <a:endParaRPr lang="en-US" sz="1800" dirty="0">
+              <a:solidFill>
+                <a:schemeClr val="tx1"/>
+              </a:solidFill>
+              <a:latin typeface="+mn-lt"/>
+              <a:cs typeface="+mn-cs"/>
+            </a:endParaRPr>
+          </a:p>
+        </p:txBody>
+      </p:sp>
+      <p:sp>
+        <p:nvSpPr>
+          <p:cNvPr id="4" name="Slide Number Placeholder 3">
+            <a:extLst>
+              <a:ext uri="{FF2B5EF4-FFF2-40B4-BE49-F238E27FC236}">
+                <a16:creationId xmlns:a16="http://schemas.microsoft.com/office/drawing/2014/main" id="{329BE4E6-4BC0-54DC-4146-6C32F8532DB7}"/>
+              </a:ext>
+            </a:extLst>
+          </p:cNvPr>
+          <p:cNvSpPr>
+            <a:spLocks noGrp="1"/>
+          </p:cNvSpPr>
+          <p:nvPr>
+            <p:ph type="sldNum" sz="quarter" idx="12"/>
+          </p:nvPr>
+        </p:nvSpPr>
+        <p:spPr/>
+        <p:txBody>
+          <a:bodyPr/>
+          <a:lstStyle/>
+          <a:p>
+            <a:fld id="{AD40181A-01B0-4CB8-8614-1473649F6741}" type="slidenum">
+              <a:rPr lang="en-US" smtClean="0">
+                <a:solidFill>
+                  <a:schemeClr val="bg1"/>
+                </a:solidFill>
+              </a:rPr>
+              <a:t>12</a:t>
+            </a:fld>
+            <a:endParaRPr lang="en-US" dirty="0">
+              <a:solidFill>
+                <a:schemeClr val="bg1"/>
+              </a:solidFill>
+            </a:endParaRPr>
+          </a:p>
+        </p:txBody>
+      </p:sp>
+    </p:spTree>
+    <p:extLst>
+      <p:ext uri="{BB962C8B-B14F-4D97-AF65-F5344CB8AC3E}">
+        <p14:creationId xmlns:p14="http://schemas.microsoft.com/office/powerpoint/2010/main" val="3534941817"/>
+      </p:ext>
+    </p:extLst>
+  </p:cSld>
+  <p:clrMapOvr>
+    <a:masterClrMapping/>
+  </p:clrMapOvr>
+</p:sld>
+</file>
+
+<file path=ppt/slides/slide13.xml><?xml version="1.0" encoding="utf-8"?>
+<p:sld xmlns:a="http://schemas.openxmlformats.org/drawingml/2006/main" xmlns:r="http://schemas.openxmlformats.org/officeDocument/2006/relationships" xmlns:p="http://schemas.openxmlformats.org/presentationml/2006/main">
+  <p:cSld>
+    <p:spTree>
+      <p:nvGrpSpPr>
+        <p:cNvPr id="1" name="">
+          <a:extLst>
+            <a:ext uri="{FF2B5EF4-FFF2-40B4-BE49-F238E27FC236}">
+              <a16:creationId xmlns:a16="http://schemas.microsoft.com/office/drawing/2014/main" id="{86A6F464-9BC2-59B5-6597-4C3F2CDFD51F}"/>
+            </a:ext>
+          </a:extLst>
+        </p:cNvPr>
+        <p:cNvGrpSpPr/>
+        <p:nvPr/>
+      </p:nvGrpSpPr>
+      <p:grpSpPr>
+        <a:xfrm>
+          <a:off x="0" y="0"/>
+          <a:ext cx="0" cy="0"/>
+          <a:chOff x="0" y="0"/>
+          <a:chExt cx="0" cy="0"/>
+        </a:xfrm>
+      </p:grpSpPr>
+      <p:sp>
+        <p:nvSpPr>
+          <p:cNvPr id="2" name="Slide Number Placeholder 1">
+            <a:extLst>
+              <a:ext uri="{FF2B5EF4-FFF2-40B4-BE49-F238E27FC236}">
+                <a16:creationId xmlns:a16="http://schemas.microsoft.com/office/drawing/2014/main" id="{56DBE8F5-57CD-3A29-C0B3-CB97D1180950}"/>
+              </a:ext>
+            </a:extLst>
+          </p:cNvPr>
+          <p:cNvSpPr>
+            <a:spLocks noGrp="1"/>
+          </p:cNvSpPr>
+          <p:nvPr>
+            <p:ph type="sldNum" sz="quarter" idx="12"/>
+          </p:nvPr>
+        </p:nvSpPr>
+        <p:spPr/>
+        <p:txBody>
+          <a:bodyPr/>
+          <a:lstStyle/>
+          <a:p>
+            <a:fld id="{AD40181A-01B0-4CB8-8614-1473649F6741}" type="slidenum">
+              <a:rPr lang="en-US" smtClean="0">
+                <a:solidFill>
+                  <a:srgbClr val="FFFFFE"/>
+                </a:solidFill>
+              </a:rPr>
+              <a:t>13</a:t>
+            </a:fld>
+            <a:endParaRPr lang="en-US" dirty="0">
+              <a:solidFill>
+                <a:srgbClr val="FFFFFE"/>
+              </a:solidFill>
+            </a:endParaRPr>
+          </a:p>
+        </p:txBody>
+      </p:sp>
+      <p:sp>
+        <p:nvSpPr>
+          <p:cNvPr id="3" name="Title 2">
+            <a:extLst>
+              <a:ext uri="{FF2B5EF4-FFF2-40B4-BE49-F238E27FC236}">
+                <a16:creationId xmlns:a16="http://schemas.microsoft.com/office/drawing/2014/main" id="{23D9419A-DE97-CD7A-A21A-0DC56A367EDA}"/>
+              </a:ext>
+            </a:extLst>
+          </p:cNvPr>
+          <p:cNvSpPr>
+            <a:spLocks noGrp="1"/>
+          </p:cNvSpPr>
+          <p:nvPr>
+            <p:ph type="title"/>
+          </p:nvPr>
+        </p:nvSpPr>
+        <p:spPr>
+          <a:xfrm>
+            <a:off x="0" y="-294409"/>
+            <a:ext cx="11874374" cy="1279750"/>
+          </a:xfrm>
+        </p:spPr>
+        <p:txBody>
+          <a:bodyPr/>
+          <a:lstStyle/>
+          <a:p>
+            <a:r>
+              <a:rPr lang="en-US" dirty="0"/>
+              <a:t>CANTOS : Tumor Name Standardization phase</a:t>
+            </a:r>
+          </a:p>
+        </p:txBody>
+      </p:sp>
+      <p:pic>
+        <p:nvPicPr>
+          <p:cNvPr id="5" name="Graphic 4" descr="Document outline">
+            <a:extLst>
+              <a:ext uri="{FF2B5EF4-FFF2-40B4-BE49-F238E27FC236}">
+                <a16:creationId xmlns:a16="http://schemas.microsoft.com/office/drawing/2014/main" id="{B1274813-20A4-1606-A389-6B2E381AC680}"/>
+              </a:ext>
+            </a:extLst>
+          </p:cNvPr>
+          <p:cNvPicPr>
+            <a:picLocks noChangeAspect="1"/>
+          </p:cNvPicPr>
+          <p:nvPr/>
+        </p:nvPicPr>
+        <p:blipFill>
+          <a:blip r:embed="rId2">
+            <a:extLst>
+              <a:ext uri="{96DAC541-7B7A-43D3-8B79-37D633B846F1}">
+                <asvg:svgBlip xmlns:asvg="http://schemas.microsoft.com/office/drawing/2016/SVG/main" r:embed="rId3"/>
+              </a:ext>
+            </a:extLst>
+          </a:blip>
+          <a:stretch>
+            <a:fillRect/>
+          </a:stretch>
+        </p:blipFill>
+        <p:spPr>
+          <a:xfrm>
+            <a:off x="85015" y="716462"/>
+            <a:ext cx="1122081" cy="1122081"/>
+          </a:xfrm>
+          <a:prstGeom prst="rect">
+            <a:avLst/>
+          </a:prstGeom>
+        </p:spPr>
+      </p:pic>
+      <p:sp>
+        <p:nvSpPr>
+          <p:cNvPr id="6" name="TextBox 5">
+            <a:extLst>
+              <a:ext uri="{FF2B5EF4-FFF2-40B4-BE49-F238E27FC236}">
+                <a16:creationId xmlns:a16="http://schemas.microsoft.com/office/drawing/2014/main" id="{EC885851-A36F-18EE-0542-BF2BF98804E4}"/>
+              </a:ext>
+            </a:extLst>
+          </p:cNvPr>
+          <p:cNvSpPr txBox="1"/>
+          <p:nvPr/>
+        </p:nvSpPr>
+        <p:spPr>
+          <a:xfrm>
+            <a:off x="26800" y="1834241"/>
+            <a:ext cx="1877437" cy="646331"/>
+          </a:xfrm>
+          <a:prstGeom prst="rect">
+            <a:avLst/>
+          </a:prstGeom>
+          <a:noFill/>
+        </p:spPr>
+        <p:txBody>
+          <a:bodyPr wrap="none" rtlCol="0">
+            <a:spAutoFit/>
+          </a:bodyPr>
+          <a:lstStyle/>
+          <a:p>
+            <a:r>
+              <a:rPr lang="en-US" dirty="0">
+                <a:solidFill>
+                  <a:schemeClr val="bg2">
+                    <a:lumMod val="50000"/>
+                  </a:schemeClr>
+                </a:solidFill>
+              </a:rPr>
+              <a:t>Unstandardized </a:t>
+            </a:r>
+            <a:br>
+              <a:rPr lang="en-US" dirty="0">
+                <a:solidFill>
+                  <a:schemeClr val="bg2">
+                    <a:lumMod val="50000"/>
+                  </a:schemeClr>
+                </a:solidFill>
+              </a:rPr>
+            </a:br>
+            <a:r>
+              <a:rPr lang="en-US" dirty="0">
+                <a:solidFill>
+                  <a:schemeClr val="bg2">
+                    <a:lumMod val="50000"/>
+                  </a:schemeClr>
+                </a:solidFill>
+              </a:rPr>
+              <a:t>Tumor </a:t>
+            </a:r>
+            <a:r>
+              <a:rPr lang="en-US" dirty="0" err="1">
+                <a:solidFill>
+                  <a:schemeClr val="bg2">
+                    <a:lumMod val="50000"/>
+                  </a:schemeClr>
+                </a:solidFill>
+              </a:rPr>
+              <a:t>List.csv</a:t>
+            </a:r>
+            <a:endParaRPr lang="en-US" dirty="0">
+              <a:solidFill>
+                <a:schemeClr val="bg2">
+                  <a:lumMod val="50000"/>
+                </a:schemeClr>
+              </a:solidFill>
+            </a:endParaRPr>
+          </a:p>
+        </p:txBody>
+      </p:sp>
+      <p:pic>
+        <p:nvPicPr>
+          <p:cNvPr id="9" name="Graphic 8" descr="Database outline">
+            <a:extLst>
+              <a:ext uri="{FF2B5EF4-FFF2-40B4-BE49-F238E27FC236}">
+                <a16:creationId xmlns:a16="http://schemas.microsoft.com/office/drawing/2014/main" id="{9B7A1ED1-AF7D-2EAA-FDC9-7C40132B7AE4}"/>
+              </a:ext>
+            </a:extLst>
+          </p:cNvPr>
+          <p:cNvPicPr>
+            <a:picLocks noChangeAspect="1"/>
+          </p:cNvPicPr>
+          <p:nvPr/>
+        </p:nvPicPr>
+        <p:blipFill>
+          <a:blip r:embed="rId4">
+            <a:extLst>
+              <a:ext uri="{96DAC541-7B7A-43D3-8B79-37D633B846F1}">
+                <asvg:svgBlip xmlns:asvg="http://schemas.microsoft.com/office/drawing/2016/SVG/main" r:embed="rId5"/>
+              </a:ext>
+            </a:extLst>
+          </a:blip>
+          <a:stretch>
+            <a:fillRect/>
+          </a:stretch>
+        </p:blipFill>
+        <p:spPr>
+          <a:xfrm>
+            <a:off x="191306" y="2471051"/>
+            <a:ext cx="1244416" cy="1244416"/>
+          </a:xfrm>
+          <a:prstGeom prst="rect">
+            <a:avLst/>
+          </a:prstGeom>
+        </p:spPr>
+      </p:pic>
+      <p:sp>
+        <p:nvSpPr>
+          <p:cNvPr id="10" name="TextBox 9">
+            <a:extLst>
+              <a:ext uri="{FF2B5EF4-FFF2-40B4-BE49-F238E27FC236}">
+                <a16:creationId xmlns:a16="http://schemas.microsoft.com/office/drawing/2014/main" id="{AFB1358E-8A86-AD6C-27A6-FA2CDE97CB51}"/>
+              </a:ext>
+            </a:extLst>
+          </p:cNvPr>
+          <p:cNvSpPr txBox="1"/>
+          <p:nvPr/>
+        </p:nvSpPr>
+        <p:spPr>
+          <a:xfrm>
+            <a:off x="14874" y="3644757"/>
+            <a:ext cx="1765922" cy="923330"/>
+          </a:xfrm>
+          <a:prstGeom prst="rect">
+            <a:avLst/>
+          </a:prstGeom>
+          <a:noFill/>
+        </p:spPr>
+        <p:txBody>
+          <a:bodyPr wrap="square" rtlCol="0">
+            <a:spAutoFit/>
+          </a:bodyPr>
+          <a:lstStyle/>
+          <a:p>
+            <a:pPr algn="ctr"/>
+            <a:r>
+              <a:rPr lang="en-US" dirty="0">
+                <a:solidFill>
+                  <a:schemeClr val="bg2">
+                    <a:lumMod val="50000"/>
+                  </a:schemeClr>
+                </a:solidFill>
+              </a:rPr>
+              <a:t>WHO Tumor Classification System</a:t>
+            </a:r>
+          </a:p>
+        </p:txBody>
+      </p:sp>
+      <p:sp>
+        <p:nvSpPr>
+          <p:cNvPr id="12" name="Rectangle 11">
+            <a:extLst>
+              <a:ext uri="{FF2B5EF4-FFF2-40B4-BE49-F238E27FC236}">
+                <a16:creationId xmlns:a16="http://schemas.microsoft.com/office/drawing/2014/main" id="{B0BC2DE0-B4D5-9473-5C7D-82C99B381AB9}"/>
+              </a:ext>
+            </a:extLst>
+          </p:cNvPr>
+          <p:cNvSpPr/>
+          <p:nvPr/>
+        </p:nvSpPr>
+        <p:spPr>
+          <a:xfrm>
+            <a:off x="2629512" y="1054229"/>
+            <a:ext cx="2907576" cy="837415"/>
+          </a:xfrm>
+          <a:prstGeom prst="rect">
+            <a:avLst/>
+          </a:prstGeom>
+        </p:spPr>
+        <p:style>
+          <a:lnRef idx="2">
+            <a:schemeClr val="accent1">
+              <a:shade val="15000"/>
+            </a:schemeClr>
+          </a:lnRef>
+          <a:fillRef idx="1">
+            <a:schemeClr val="accent1"/>
+          </a:fillRef>
+          <a:effectRef idx="0">
+            <a:schemeClr val="accent1"/>
+          </a:effectRef>
+          <a:fontRef idx="minor">
+            <a:schemeClr val="lt1"/>
+          </a:fontRef>
+        </p:style>
+        <p:txBody>
+          <a:bodyPr rtlCol="0" anchor="ctr"/>
+          <a:lstStyle/>
+          <a:p>
+            <a:pPr algn="ctr"/>
+            <a:r>
+              <a:rPr lang="en-US" dirty="0"/>
+              <a:t>Compute embedding distance distance</a:t>
+            </a:r>
+          </a:p>
+        </p:txBody>
+      </p:sp>
+      <p:sp>
+        <p:nvSpPr>
+          <p:cNvPr id="24" name="Right Arrow 23">
+            <a:extLst>
+              <a:ext uri="{FF2B5EF4-FFF2-40B4-BE49-F238E27FC236}">
+                <a16:creationId xmlns:a16="http://schemas.microsoft.com/office/drawing/2014/main" id="{AE277EA4-33A9-11F8-A04C-D51F165EEAD3}"/>
+              </a:ext>
+            </a:extLst>
+          </p:cNvPr>
+          <p:cNvSpPr/>
+          <p:nvPr/>
+        </p:nvSpPr>
+        <p:spPr>
+          <a:xfrm>
+            <a:off x="5747659" y="1136938"/>
+            <a:ext cx="1025495" cy="529839"/>
+          </a:xfrm>
+          <a:prstGeom prst="rightArrow">
+            <a:avLst/>
+          </a:prstGeom>
+        </p:spPr>
+        <p:style>
+          <a:lnRef idx="2">
+            <a:schemeClr val="accent1">
+              <a:shade val="15000"/>
+            </a:schemeClr>
+          </a:lnRef>
+          <a:fillRef idx="1">
+            <a:schemeClr val="accent1"/>
+          </a:fillRef>
+          <a:effectRef idx="0">
+            <a:schemeClr val="accent1"/>
+          </a:effectRef>
+          <a:fontRef idx="minor">
+            <a:schemeClr val="lt1"/>
+          </a:fontRef>
+        </p:style>
+        <p:txBody>
+          <a:bodyPr rtlCol="0" anchor="ctr"/>
+          <a:lstStyle/>
+          <a:p>
+            <a:pPr algn="ctr"/>
+            <a:endParaRPr lang="en-US"/>
+          </a:p>
+        </p:txBody>
+      </p:sp>
+      <p:sp>
+        <p:nvSpPr>
+          <p:cNvPr id="25" name="Rectangle 24">
+            <a:extLst>
+              <a:ext uri="{FF2B5EF4-FFF2-40B4-BE49-F238E27FC236}">
+                <a16:creationId xmlns:a16="http://schemas.microsoft.com/office/drawing/2014/main" id="{C39FA034-ED8A-47ED-5412-F1A63511EA3C}"/>
+              </a:ext>
+            </a:extLst>
+          </p:cNvPr>
+          <p:cNvSpPr/>
+          <p:nvPr/>
+        </p:nvSpPr>
+        <p:spPr>
+          <a:xfrm>
+            <a:off x="7030939" y="1001030"/>
+            <a:ext cx="3777046" cy="952919"/>
+          </a:xfrm>
+          <a:prstGeom prst="rect">
+            <a:avLst/>
+          </a:prstGeom>
+          <a:solidFill>
+            <a:schemeClr val="accent3">
+              <a:lumMod val="60000"/>
+              <a:lumOff val="40000"/>
+            </a:schemeClr>
+          </a:solidFill>
+        </p:spPr>
+        <p:style>
+          <a:lnRef idx="2">
+            <a:schemeClr val="accent1">
+              <a:shade val="15000"/>
+            </a:schemeClr>
+          </a:lnRef>
+          <a:fillRef idx="1">
+            <a:schemeClr val="accent1"/>
+          </a:fillRef>
+          <a:effectRef idx="0">
+            <a:schemeClr val="accent1"/>
+          </a:effectRef>
+          <a:fontRef idx="minor">
+            <a:schemeClr val="lt1"/>
+          </a:fontRef>
+        </p:style>
+        <p:txBody>
+          <a:bodyPr rtlCol="0" anchor="ctr"/>
+          <a:lstStyle/>
+          <a:p>
+            <a:pPr algn="ctr"/>
+            <a:r>
+              <a:rPr lang="en-US" dirty="0"/>
+              <a:t>Assign the closest standardized tumor name to the unstandardized tumor name from CTR</a:t>
+            </a:r>
+          </a:p>
+        </p:txBody>
+      </p:sp>
+      <p:sp>
+        <p:nvSpPr>
+          <p:cNvPr id="26" name="Rectangle 25">
+            <a:extLst>
+              <a:ext uri="{FF2B5EF4-FFF2-40B4-BE49-F238E27FC236}">
+                <a16:creationId xmlns:a16="http://schemas.microsoft.com/office/drawing/2014/main" id="{610E811E-8F27-2DFB-ED8D-FD08D41E84C1}"/>
+              </a:ext>
+            </a:extLst>
+          </p:cNvPr>
+          <p:cNvSpPr/>
+          <p:nvPr/>
+        </p:nvSpPr>
+        <p:spPr>
+          <a:xfrm>
+            <a:off x="2600879" y="2650336"/>
+            <a:ext cx="3271171" cy="855955"/>
+          </a:xfrm>
+          <a:prstGeom prst="rect">
+            <a:avLst/>
+          </a:prstGeom>
+        </p:spPr>
+        <p:style>
+          <a:lnRef idx="2">
+            <a:schemeClr val="accent1">
+              <a:shade val="15000"/>
+            </a:schemeClr>
+          </a:lnRef>
+          <a:fillRef idx="1">
+            <a:schemeClr val="accent1"/>
+          </a:fillRef>
+          <a:effectRef idx="0">
+            <a:schemeClr val="accent1"/>
+          </a:effectRef>
+          <a:fontRef idx="minor">
+            <a:schemeClr val="lt1"/>
+          </a:fontRef>
+        </p:style>
+        <p:txBody>
+          <a:bodyPr rtlCol="0" anchor="ctr"/>
+          <a:lstStyle/>
+          <a:p>
+            <a:pPr algn="ctr"/>
+            <a:r>
+              <a:rPr lang="en-US" dirty="0"/>
+              <a:t>Use embedding distance to cluster: Affinity Propagation or </a:t>
+            </a:r>
+            <a:r>
+              <a:rPr lang="en-US" dirty="0" err="1"/>
+              <a:t>KMeans</a:t>
+            </a:r>
+            <a:endParaRPr lang="en-US" dirty="0"/>
+          </a:p>
+        </p:txBody>
+      </p:sp>
+      <p:sp>
+        <p:nvSpPr>
+          <p:cNvPr id="27" name="Right Arrow 26">
+            <a:extLst>
+              <a:ext uri="{FF2B5EF4-FFF2-40B4-BE49-F238E27FC236}">
+                <a16:creationId xmlns:a16="http://schemas.microsoft.com/office/drawing/2014/main" id="{09B512F6-E843-6C7C-F81B-0ED886805E12}"/>
+              </a:ext>
+            </a:extLst>
+          </p:cNvPr>
+          <p:cNvSpPr/>
+          <p:nvPr/>
+        </p:nvSpPr>
+        <p:spPr>
+          <a:xfrm rot="5400000">
+            <a:off x="3820459" y="2017283"/>
+            <a:ext cx="717906" cy="554994"/>
+          </a:xfrm>
+          <a:prstGeom prst="rightArrow">
+            <a:avLst/>
+          </a:prstGeom>
+        </p:spPr>
+        <p:style>
+          <a:lnRef idx="2">
+            <a:schemeClr val="accent1">
+              <a:shade val="15000"/>
+            </a:schemeClr>
+          </a:lnRef>
+          <a:fillRef idx="1">
+            <a:schemeClr val="accent1"/>
+          </a:fillRef>
+          <a:effectRef idx="0">
+            <a:schemeClr val="accent1"/>
+          </a:effectRef>
+          <a:fontRef idx="minor">
+            <a:schemeClr val="lt1"/>
+          </a:fontRef>
+        </p:style>
+        <p:txBody>
+          <a:bodyPr rtlCol="0" anchor="ctr"/>
+          <a:lstStyle/>
+          <a:p>
+            <a:pPr algn="ctr"/>
+            <a:endParaRPr lang="en-US"/>
+          </a:p>
+        </p:txBody>
+      </p:sp>
+      <p:sp>
+        <p:nvSpPr>
+          <p:cNvPr id="28" name="Rectangle 27">
+            <a:extLst>
+              <a:ext uri="{FF2B5EF4-FFF2-40B4-BE49-F238E27FC236}">
+                <a16:creationId xmlns:a16="http://schemas.microsoft.com/office/drawing/2014/main" id="{ACFC6ABB-43B9-D40D-04B3-9932E4470447}"/>
+              </a:ext>
+            </a:extLst>
+          </p:cNvPr>
+          <p:cNvSpPr/>
+          <p:nvPr/>
+        </p:nvSpPr>
+        <p:spPr>
+          <a:xfrm>
+            <a:off x="2296830" y="4297254"/>
+            <a:ext cx="3765164" cy="860083"/>
+          </a:xfrm>
+          <a:prstGeom prst="rect">
+            <a:avLst/>
+          </a:prstGeom>
+        </p:spPr>
+        <p:style>
+          <a:lnRef idx="2">
+            <a:schemeClr val="accent1">
+              <a:shade val="15000"/>
+            </a:schemeClr>
+          </a:lnRef>
+          <a:fillRef idx="1">
+            <a:schemeClr val="accent1"/>
+          </a:fillRef>
+          <a:effectRef idx="0">
+            <a:schemeClr val="accent1"/>
+          </a:effectRef>
+          <a:fontRef idx="minor">
+            <a:schemeClr val="lt1"/>
+          </a:fontRef>
+        </p:style>
+        <p:txBody>
+          <a:bodyPr rtlCol="0" anchor="ctr"/>
+          <a:lstStyle/>
+          <a:p>
+            <a:pPr algn="ctr"/>
+            <a:r>
+              <a:rPr lang="en-US" dirty="0"/>
+              <a:t>In each cluster find the standardized tumor name closest to each cluster member. </a:t>
+            </a:r>
+          </a:p>
+        </p:txBody>
+      </p:sp>
+      <p:sp>
+        <p:nvSpPr>
+          <p:cNvPr id="29" name="Right Arrow 28">
+            <a:extLst>
+              <a:ext uri="{FF2B5EF4-FFF2-40B4-BE49-F238E27FC236}">
+                <a16:creationId xmlns:a16="http://schemas.microsoft.com/office/drawing/2014/main" id="{FC63D67B-2B9C-9572-1165-5BA979E3917D}"/>
+              </a:ext>
+            </a:extLst>
+          </p:cNvPr>
+          <p:cNvSpPr/>
+          <p:nvPr/>
+        </p:nvSpPr>
+        <p:spPr>
+          <a:xfrm>
+            <a:off x="1391489" y="1102900"/>
+            <a:ext cx="1025495" cy="529839"/>
+          </a:xfrm>
+          <a:prstGeom prst="rightArrow">
+            <a:avLst/>
+          </a:prstGeom>
+        </p:spPr>
+        <p:style>
+          <a:lnRef idx="2">
+            <a:schemeClr val="accent1">
+              <a:shade val="15000"/>
+            </a:schemeClr>
+          </a:lnRef>
+          <a:fillRef idx="1">
+            <a:schemeClr val="accent1"/>
+          </a:fillRef>
+          <a:effectRef idx="0">
+            <a:schemeClr val="accent1"/>
+          </a:effectRef>
+          <a:fontRef idx="minor">
+            <a:schemeClr val="lt1"/>
+          </a:fontRef>
+        </p:style>
+        <p:txBody>
+          <a:bodyPr rtlCol="0" anchor="ctr"/>
+          <a:lstStyle/>
+          <a:p>
+            <a:pPr algn="ctr"/>
+            <a:endParaRPr lang="en-US"/>
+          </a:p>
+        </p:txBody>
+      </p:sp>
+      <p:sp>
+        <p:nvSpPr>
+          <p:cNvPr id="30" name="Right Arrow 29">
+            <a:extLst>
+              <a:ext uri="{FF2B5EF4-FFF2-40B4-BE49-F238E27FC236}">
+                <a16:creationId xmlns:a16="http://schemas.microsoft.com/office/drawing/2014/main" id="{1047004B-253B-9CC6-8B24-2F866D686566}"/>
+              </a:ext>
+            </a:extLst>
+          </p:cNvPr>
+          <p:cNvSpPr/>
+          <p:nvPr/>
+        </p:nvSpPr>
+        <p:spPr>
+          <a:xfrm rot="19419849">
+            <a:off x="1657498" y="2230109"/>
+            <a:ext cx="1025495" cy="529839"/>
+          </a:xfrm>
+          <a:prstGeom prst="rightArrow">
+            <a:avLst/>
+          </a:prstGeom>
+        </p:spPr>
+        <p:style>
+          <a:lnRef idx="2">
+            <a:schemeClr val="accent1">
+              <a:shade val="15000"/>
+            </a:schemeClr>
+          </a:lnRef>
+          <a:fillRef idx="1">
+            <a:schemeClr val="accent1"/>
+          </a:fillRef>
+          <a:effectRef idx="0">
+            <a:schemeClr val="accent1"/>
+          </a:effectRef>
+          <a:fontRef idx="minor">
+            <a:schemeClr val="lt1"/>
+          </a:fontRef>
+        </p:style>
+        <p:txBody>
+          <a:bodyPr rtlCol="0" anchor="ctr"/>
+          <a:lstStyle/>
+          <a:p>
+            <a:pPr algn="ctr"/>
+            <a:endParaRPr lang="en-US"/>
+          </a:p>
+        </p:txBody>
+      </p:sp>
+      <p:sp>
+        <p:nvSpPr>
+          <p:cNvPr id="31" name="Right Arrow 30">
+            <a:extLst>
+              <a:ext uri="{FF2B5EF4-FFF2-40B4-BE49-F238E27FC236}">
+                <a16:creationId xmlns:a16="http://schemas.microsoft.com/office/drawing/2014/main" id="{8D7E394A-7EE0-A9DA-D6B0-17E5EDD5EAB5}"/>
+              </a:ext>
+            </a:extLst>
+          </p:cNvPr>
+          <p:cNvSpPr/>
+          <p:nvPr/>
+        </p:nvSpPr>
+        <p:spPr>
+          <a:xfrm rot="5400000">
+            <a:off x="3820459" y="3637800"/>
+            <a:ext cx="717906" cy="554994"/>
+          </a:xfrm>
+          <a:prstGeom prst="rightArrow">
+            <a:avLst/>
+          </a:prstGeom>
+        </p:spPr>
+        <p:style>
+          <a:lnRef idx="2">
+            <a:schemeClr val="accent1">
+              <a:shade val="15000"/>
+            </a:schemeClr>
+          </a:lnRef>
+          <a:fillRef idx="1">
+            <a:schemeClr val="accent1"/>
+          </a:fillRef>
+          <a:effectRef idx="0">
+            <a:schemeClr val="accent1"/>
+          </a:effectRef>
+          <a:fontRef idx="minor">
+            <a:schemeClr val="lt1"/>
+          </a:fontRef>
+        </p:style>
+        <p:txBody>
+          <a:bodyPr rtlCol="0" anchor="ctr"/>
+          <a:lstStyle/>
+          <a:p>
+            <a:pPr algn="ctr"/>
+            <a:endParaRPr lang="en-US"/>
+          </a:p>
+        </p:txBody>
+      </p:sp>
+      <p:sp>
+        <p:nvSpPr>
+          <p:cNvPr id="33" name="Rectangle 32">
+            <a:extLst>
+              <a:ext uri="{FF2B5EF4-FFF2-40B4-BE49-F238E27FC236}">
+                <a16:creationId xmlns:a16="http://schemas.microsoft.com/office/drawing/2014/main" id="{C375490E-3D0B-FF10-98AB-5B9BC5C26EED}"/>
+              </a:ext>
+            </a:extLst>
+          </p:cNvPr>
+          <p:cNvSpPr/>
+          <p:nvPr/>
+        </p:nvSpPr>
+        <p:spPr>
+          <a:xfrm>
+            <a:off x="7002398" y="3418295"/>
+            <a:ext cx="3951340" cy="1073935"/>
+          </a:xfrm>
+          <a:prstGeom prst="rect">
+            <a:avLst/>
+          </a:prstGeom>
+          <a:solidFill>
+            <a:schemeClr val="accent3">
+              <a:lumMod val="60000"/>
+              <a:lumOff val="40000"/>
+            </a:schemeClr>
+          </a:solidFill>
+        </p:spPr>
+        <p:style>
+          <a:lnRef idx="2">
+            <a:schemeClr val="accent1">
+              <a:shade val="15000"/>
+            </a:schemeClr>
+          </a:lnRef>
+          <a:fillRef idx="1">
+            <a:schemeClr val="accent1"/>
+          </a:fillRef>
+          <a:effectRef idx="0">
+            <a:schemeClr val="accent1"/>
+          </a:effectRef>
+          <a:fontRef idx="minor">
+            <a:schemeClr val="lt1"/>
+          </a:fontRef>
+        </p:style>
+        <p:txBody>
+          <a:bodyPr rtlCol="0" anchor="ctr"/>
+          <a:lstStyle/>
+          <a:p>
+            <a:pPr algn="ctr"/>
+            <a:r>
+              <a:rPr lang="en-US" dirty="0"/>
+              <a:t>If a standardized name represents majority of the cluster member assign it as the standardized name for all cluster members.</a:t>
+            </a:r>
+          </a:p>
+        </p:txBody>
+      </p:sp>
+      <p:sp>
+        <p:nvSpPr>
+          <p:cNvPr id="34" name="Rectangle 33">
+            <a:extLst>
+              <a:ext uri="{FF2B5EF4-FFF2-40B4-BE49-F238E27FC236}">
+                <a16:creationId xmlns:a16="http://schemas.microsoft.com/office/drawing/2014/main" id="{99BD2896-22CA-7080-D08F-00B23282629E}"/>
+              </a:ext>
+            </a:extLst>
+          </p:cNvPr>
+          <p:cNvSpPr/>
+          <p:nvPr/>
+        </p:nvSpPr>
+        <p:spPr>
+          <a:xfrm>
+            <a:off x="7030939" y="4701874"/>
+            <a:ext cx="3951339" cy="860083"/>
+          </a:xfrm>
+          <a:prstGeom prst="rect">
+            <a:avLst/>
+          </a:prstGeom>
+          <a:solidFill>
+            <a:schemeClr val="accent3">
+              <a:lumMod val="60000"/>
+              <a:lumOff val="40000"/>
+            </a:schemeClr>
+          </a:solidFill>
+        </p:spPr>
+        <p:style>
+          <a:lnRef idx="2">
+            <a:schemeClr val="accent1">
+              <a:shade val="15000"/>
+            </a:schemeClr>
+          </a:lnRef>
+          <a:fillRef idx="1">
+            <a:schemeClr val="accent1"/>
+          </a:fillRef>
+          <a:effectRef idx="0">
+            <a:schemeClr val="accent1"/>
+          </a:effectRef>
+          <a:fontRef idx="minor">
+            <a:schemeClr val="lt1"/>
+          </a:fontRef>
+        </p:style>
+        <p:txBody>
+          <a:bodyPr rtlCol="0" anchor="ctr"/>
+          <a:lstStyle/>
+          <a:p>
+            <a:pPr algn="ctr"/>
+            <a:r>
+              <a:rPr lang="en-US" dirty="0"/>
+              <a:t>Otherwise, assign cluster members to nearest standardized term</a:t>
+            </a:r>
+          </a:p>
+        </p:txBody>
+      </p:sp>
+      <p:sp>
+        <p:nvSpPr>
+          <p:cNvPr id="36" name="Right Arrow 35">
+            <a:extLst>
+              <a:ext uri="{FF2B5EF4-FFF2-40B4-BE49-F238E27FC236}">
+                <a16:creationId xmlns:a16="http://schemas.microsoft.com/office/drawing/2014/main" id="{4DF430CE-88CC-33B4-4EB9-B61CDC7A4A17}"/>
+              </a:ext>
+            </a:extLst>
+          </p:cNvPr>
+          <p:cNvSpPr/>
+          <p:nvPr/>
+        </p:nvSpPr>
+        <p:spPr>
+          <a:xfrm>
+            <a:off x="6132670" y="4398806"/>
+            <a:ext cx="717906" cy="554994"/>
+          </a:xfrm>
+          <a:prstGeom prst="rightArrow">
+            <a:avLst/>
+          </a:prstGeom>
+        </p:spPr>
+        <p:style>
+          <a:lnRef idx="2">
+            <a:schemeClr val="accent1">
+              <a:shade val="15000"/>
+            </a:schemeClr>
+          </a:lnRef>
+          <a:fillRef idx="1">
+            <a:schemeClr val="accent1"/>
+          </a:fillRef>
+          <a:effectRef idx="0">
+            <a:schemeClr val="accent1"/>
+          </a:effectRef>
+          <a:fontRef idx="minor">
+            <a:schemeClr val="lt1"/>
+          </a:fontRef>
+        </p:style>
+        <p:txBody>
+          <a:bodyPr rtlCol="0" anchor="ctr"/>
+          <a:lstStyle/>
+          <a:p>
+            <a:pPr algn="ctr"/>
+            <a:endParaRPr lang="en-US"/>
+          </a:p>
+        </p:txBody>
+      </p:sp>
+    </p:spTree>
+    <p:extLst>
+      <p:ext uri="{BB962C8B-B14F-4D97-AF65-F5344CB8AC3E}">
+        <p14:creationId xmlns:p14="http://schemas.microsoft.com/office/powerpoint/2010/main" val="3115427848"/>
+      </p:ext>
+    </p:extLst>
+  </p:cSld>
+  <p:clrMapOvr>
+    <a:masterClrMapping/>
+  </p:clrMapOvr>
+</p:sld>
+</file>
+
+<file path=ppt/slides/slide14.xml><?xml version="1.0" encoding="utf-8"?>
+<p:sld xmlns:a="http://schemas.openxmlformats.org/drawingml/2006/main" xmlns:r="http://schemas.openxmlformats.org/officeDocument/2006/relationships" xmlns:p="http://schemas.openxmlformats.org/presentationml/2006/main">
+  <p:cSld>
+    <p:spTree>
+      <p:nvGrpSpPr>
+        <p:cNvPr id="1" name=""/>
+        <p:cNvGrpSpPr/>
+        <p:nvPr/>
+      </p:nvGrpSpPr>
+      <p:grpSpPr>
+        <a:xfrm>
+          <a:off x="0" y="0"/>
+          <a:ext cx="0" cy="0"/>
+          <a:chOff x="0" y="0"/>
+          <a:chExt cx="0" cy="0"/>
+        </a:xfrm>
+      </p:grpSpPr>
+      <p:sp>
+        <p:nvSpPr>
+          <p:cNvPr id="2" name="Slide Number Placeholder 1">
+            <a:extLst>
+              <a:ext uri="{FF2B5EF4-FFF2-40B4-BE49-F238E27FC236}">
+                <a16:creationId xmlns:a16="http://schemas.microsoft.com/office/drawing/2014/main" id="{44270733-E29D-FB26-4D1C-A42A2AC40AEC}"/>
+              </a:ext>
+            </a:extLst>
+          </p:cNvPr>
+          <p:cNvSpPr>
+            <a:spLocks noGrp="1"/>
+          </p:cNvSpPr>
+          <p:nvPr>
+            <p:ph type="sldNum" sz="quarter" idx="12"/>
+          </p:nvPr>
+        </p:nvSpPr>
+        <p:spPr/>
+        <p:txBody>
+          <a:bodyPr/>
+          <a:lstStyle/>
+          <a:p>
+            <a:fld id="{AD40181A-01B0-4CB8-8614-1473649F6741}" type="slidenum">
+              <a:rPr lang="en-US" smtClean="0"/>
+              <a:pPr/>
+              <a:t>14</a:t>
+            </a:fld>
+            <a:endParaRPr lang="en-US" dirty="0"/>
+          </a:p>
+        </p:txBody>
+      </p:sp>
+      <p:sp>
+        <p:nvSpPr>
+          <p:cNvPr id="4" name="Title 2">
+            <a:extLst>
+              <a:ext uri="{FF2B5EF4-FFF2-40B4-BE49-F238E27FC236}">
+                <a16:creationId xmlns:a16="http://schemas.microsoft.com/office/drawing/2014/main" id="{6E00D5E8-B1F0-2EBD-8ABB-6D3227812B99}"/>
+              </a:ext>
+            </a:extLst>
+          </p:cNvPr>
+          <p:cNvSpPr>
+            <a:spLocks noGrp="1"/>
+          </p:cNvSpPr>
+          <p:nvPr>
+            <p:ph type="title"/>
+          </p:nvPr>
+        </p:nvSpPr>
+        <p:spPr>
+          <a:xfrm>
+            <a:off x="0" y="-294409"/>
+            <a:ext cx="11874374" cy="1279750"/>
+          </a:xfrm>
+        </p:spPr>
+        <p:txBody>
+          <a:bodyPr/>
+          <a:lstStyle/>
+          <a:p>
+            <a:r>
+              <a:rPr lang="en-US" dirty="0"/>
+              <a:t>CANTOS : Tumor Name Standardization phase</a:t>
+            </a:r>
+          </a:p>
+        </p:txBody>
+      </p:sp>
+    </p:spTree>
+    <p:extLst>
+      <p:ext uri="{BB962C8B-B14F-4D97-AF65-F5344CB8AC3E}">
+        <p14:creationId xmlns:p14="http://schemas.microsoft.com/office/powerpoint/2010/main" val="875706484"/>
       </p:ext>
     </p:extLst>
   </p:cSld>
@@ -5932,6 +8387,165 @@
             <a:ext cx="1025495" cy="529839"/>
           </a:xfrm>
           <a:prstGeom prst="rightArrow">
+            <a:avLst/>
+          </a:prstGeom>
+        </p:spPr>
+        <p:style>
+          <a:lnRef idx="2">
+            <a:schemeClr val="accent1">
+              <a:shade val="15000"/>
+            </a:schemeClr>
+          </a:lnRef>
+          <a:fillRef idx="1">
+            <a:schemeClr val="accent1"/>
+          </a:fillRef>
+          <a:effectRef idx="0">
+            <a:schemeClr val="accent1"/>
+          </a:effectRef>
+          <a:fontRef idx="minor">
+            <a:schemeClr val="lt1"/>
+          </a:fontRef>
+        </p:style>
+        <p:txBody>
+          <a:bodyPr rtlCol="0" anchor="ctr"/>
+          <a:lstStyle/>
+          <a:p>
+            <a:pPr algn="ctr"/>
+            <a:endParaRPr lang="en-US"/>
+          </a:p>
+        </p:txBody>
+      </p:sp>
+      <p:pic>
+        <p:nvPicPr>
+          <p:cNvPr id="23" name="Graphic 22" descr="Document outline">
+            <a:extLst>
+              <a:ext uri="{FF2B5EF4-FFF2-40B4-BE49-F238E27FC236}">
+                <a16:creationId xmlns:a16="http://schemas.microsoft.com/office/drawing/2014/main" id="{1D642C46-64FD-E1CF-991E-3E2C3B5A90DE}"/>
+              </a:ext>
+            </a:extLst>
+          </p:cNvPr>
+          <p:cNvPicPr>
+            <a:picLocks noChangeAspect="1"/>
+          </p:cNvPicPr>
+          <p:nvPr/>
+        </p:nvPicPr>
+        <p:blipFill>
+          <a:blip r:embed="rId3">
+            <a:extLst>
+              <a:ext uri="{96DAC541-7B7A-43D3-8B79-37D633B846F1}">
+                <asvg:svgBlip xmlns:asvg="http://schemas.microsoft.com/office/drawing/2016/SVG/main" r:embed="rId4"/>
+              </a:ext>
+            </a:extLst>
+          </a:blip>
+          <a:stretch>
+            <a:fillRect/>
+          </a:stretch>
+        </p:blipFill>
+        <p:spPr>
+          <a:xfrm>
+            <a:off x="10203646" y="3771628"/>
+            <a:ext cx="1122081" cy="1122081"/>
+          </a:xfrm>
+          <a:prstGeom prst="rect">
+            <a:avLst/>
+          </a:prstGeom>
+        </p:spPr>
+      </p:pic>
+      <p:sp>
+        <p:nvSpPr>
+          <p:cNvPr id="24" name="TextBox 23">
+            <a:extLst>
+              <a:ext uri="{FF2B5EF4-FFF2-40B4-BE49-F238E27FC236}">
+                <a16:creationId xmlns:a16="http://schemas.microsoft.com/office/drawing/2014/main" id="{A7D4910C-3261-8D5E-DF44-BD78E4DFD445}"/>
+              </a:ext>
+            </a:extLst>
+          </p:cNvPr>
+          <p:cNvSpPr txBox="1"/>
+          <p:nvPr/>
+        </p:nvSpPr>
+        <p:spPr>
+          <a:xfrm>
+            <a:off x="9825967" y="4900084"/>
+            <a:ext cx="1877437" cy="646331"/>
+          </a:xfrm>
+          <a:prstGeom prst="rect">
+            <a:avLst/>
+          </a:prstGeom>
+          <a:noFill/>
+        </p:spPr>
+        <p:txBody>
+          <a:bodyPr wrap="none" rtlCol="0">
+            <a:spAutoFit/>
+          </a:bodyPr>
+          <a:lstStyle/>
+          <a:p>
+            <a:r>
+              <a:rPr lang="en-US" dirty="0">
+                <a:solidFill>
+                  <a:schemeClr val="bg2">
+                    <a:lumMod val="50000"/>
+                  </a:schemeClr>
+                </a:solidFill>
+              </a:rPr>
+              <a:t>Unstandardized </a:t>
+            </a:r>
+            <a:br>
+              <a:rPr lang="en-US" dirty="0">
+                <a:solidFill>
+                  <a:schemeClr val="bg2">
+                    <a:lumMod val="50000"/>
+                  </a:schemeClr>
+                </a:solidFill>
+              </a:rPr>
+            </a:br>
+            <a:r>
+              <a:rPr lang="en-US" dirty="0">
+                <a:solidFill>
+                  <a:schemeClr val="bg2">
+                    <a:lumMod val="50000"/>
+                  </a:schemeClr>
+                </a:solidFill>
+              </a:rPr>
+              <a:t>Tumor </a:t>
+            </a:r>
+            <a:r>
+              <a:rPr lang="en-US" dirty="0" err="1">
+                <a:solidFill>
+                  <a:schemeClr val="bg2">
+                    <a:lumMod val="50000"/>
+                  </a:schemeClr>
+                </a:solidFill>
+              </a:rPr>
+              <a:t>List.csv</a:t>
+            </a:r>
+            <a:endParaRPr lang="en-US" dirty="0">
+              <a:solidFill>
+                <a:schemeClr val="bg2">
+                  <a:lumMod val="50000"/>
+                </a:schemeClr>
+              </a:solidFill>
+            </a:endParaRPr>
+          </a:p>
+        </p:txBody>
+      </p:sp>
+      <p:sp>
+        <p:nvSpPr>
+          <p:cNvPr id="25" name="Down Arrow 24">
+            <a:extLst>
+              <a:ext uri="{FF2B5EF4-FFF2-40B4-BE49-F238E27FC236}">
+                <a16:creationId xmlns:a16="http://schemas.microsoft.com/office/drawing/2014/main" id="{7908E861-195C-F6AA-4218-CCC0E64A857F}"/>
+              </a:ext>
+            </a:extLst>
+          </p:cNvPr>
+          <p:cNvSpPr/>
+          <p:nvPr/>
+        </p:nvSpPr>
+        <p:spPr>
+          <a:xfrm>
+            <a:off x="10486690" y="3442087"/>
+            <a:ext cx="304800" cy="369333"/>
+          </a:xfrm>
+          <a:prstGeom prst="downArrow">
             <a:avLst/>
           </a:prstGeom>
         </p:spPr>

--- a/presentations/CANTOS_PPT.pptx
+++ b/presentations/CANTOS_PPT.pptx
@@ -5,7 +5,7 @@
     <p:sldMasterId id="2147483672" r:id="rId4"/>
   </p:sldMasterIdLst>
   <p:notesMasterIdLst>
-    <p:notesMasterId r:id="rId22"/>
+    <p:notesMasterId r:id="rId24"/>
   </p:notesMasterIdLst>
   <p:sldIdLst>
     <p:sldId id="256" r:id="rId5"/>
@@ -14,17 +14,19 @@
     <p:sldId id="261" r:id="rId8"/>
     <p:sldId id="262" r:id="rId9"/>
     <p:sldId id="263" r:id="rId10"/>
-    <p:sldId id="259" r:id="rId11"/>
-    <p:sldId id="264" r:id="rId12"/>
-    <p:sldId id="258" r:id="rId13"/>
-    <p:sldId id="267" r:id="rId14"/>
-    <p:sldId id="265" r:id="rId15"/>
-    <p:sldId id="272" r:id="rId16"/>
-    <p:sldId id="268" r:id="rId17"/>
-    <p:sldId id="266" r:id="rId18"/>
-    <p:sldId id="269" r:id="rId19"/>
-    <p:sldId id="270" r:id="rId20"/>
-    <p:sldId id="271" r:id="rId21"/>
+    <p:sldId id="273" r:id="rId11"/>
+    <p:sldId id="258" r:id="rId12"/>
+    <p:sldId id="267" r:id="rId13"/>
+    <p:sldId id="265" r:id="rId14"/>
+    <p:sldId id="272" r:id="rId15"/>
+    <p:sldId id="268" r:id="rId16"/>
+    <p:sldId id="266" r:id="rId17"/>
+    <p:sldId id="269" r:id="rId18"/>
+    <p:sldId id="270" r:id="rId19"/>
+    <p:sldId id="271" r:id="rId20"/>
+    <p:sldId id="274" r:id="rId21"/>
+    <p:sldId id="264" r:id="rId22"/>
+    <p:sldId id="259" r:id="rId23"/>
   </p:sldIdLst>
   <p:sldSz cx="12192000" cy="6858000"/>
   <p:notesSz cx="6858000" cy="9144000"/>
@@ -1540,9 +1542,28 @@
           <a:lstStyle/>
           <a:p>
             <a:r>
-              <a:rPr lang="en-US" sz="2400" dirty="0"/>
-              <a:t>CANTOS: Automated Tumor Name Standardization in the NIH Clinical Trials Registry Using the CANTOS Pipeline</a:t>
+              <a:rPr lang="en-US" sz="2400" dirty="0">
+                <a:solidFill>
+                  <a:schemeClr val="accent1"/>
+                </a:solidFill>
+              </a:rPr>
+              <a:t>CANTOS: </a:t>
             </a:r>
+            <a:r>
+              <a:rPr lang="en-US" sz="2400" dirty="0">
+                <a:solidFill>
+                  <a:schemeClr val="accent1"/>
+                </a:solidFill>
+                <a:latin typeface="+mn-lt"/>
+                <a:cs typeface="+mn-cs"/>
+              </a:rPr>
+              <a:t>Clinical trials Automated Nomenclature and Tumor Ontology Standardization PIPELINE</a:t>
+            </a:r>
+            <a:endParaRPr lang="en-US" sz="2400" dirty="0">
+              <a:solidFill>
+                <a:schemeClr val="accent1"/>
+              </a:solidFill>
+            </a:endParaRPr>
           </a:p>
         </p:txBody>
       </p:sp>
@@ -1712,223 +1733,6 @@
         <p:cNvPr id="1" name="">
           <a:extLst>
             <a:ext uri="{FF2B5EF4-FFF2-40B4-BE49-F238E27FC236}">
-              <a16:creationId xmlns:a16="http://schemas.microsoft.com/office/drawing/2014/main" id="{E9CE722E-3FCD-FD45-A0E6-12A95F208F4A}"/>
-            </a:ext>
-          </a:extLst>
-        </p:cNvPr>
-        <p:cNvGrpSpPr/>
-        <p:nvPr/>
-      </p:nvGrpSpPr>
-      <p:grpSpPr>
-        <a:xfrm>
-          <a:off x="0" y="0"/>
-          <a:ext cx="0" cy="0"/>
-          <a:chOff x="0" y="0"/>
-          <a:chExt cx="0" cy="0"/>
-        </a:xfrm>
-      </p:grpSpPr>
-      <p:sp>
-        <p:nvSpPr>
-          <p:cNvPr id="2" name="Title 1">
-            <a:extLst>
-              <a:ext uri="{FF2B5EF4-FFF2-40B4-BE49-F238E27FC236}">
-                <a16:creationId xmlns:a16="http://schemas.microsoft.com/office/drawing/2014/main" id="{C95D30D7-FC81-7A2E-2D28-63AA04393E7F}"/>
-              </a:ext>
-            </a:extLst>
-          </p:cNvPr>
-          <p:cNvSpPr>
-            <a:spLocks noGrp="1"/>
-          </p:cNvSpPr>
-          <p:nvPr>
-            <p:ph type="title"/>
-          </p:nvPr>
-        </p:nvSpPr>
-        <p:spPr>
-          <a:xfrm>
-            <a:off x="87086" y="21771"/>
-            <a:ext cx="10651402" cy="1143000"/>
-          </a:xfrm>
-        </p:spPr>
-        <p:txBody>
-          <a:bodyPr/>
-          <a:lstStyle/>
-          <a:p>
-            <a:r>
-              <a:rPr lang="en-US" dirty="0"/>
-              <a:t>Tumor Name Standardization		</a:t>
-            </a:r>
-          </a:p>
-        </p:txBody>
-      </p:sp>
-      <p:sp>
-        <p:nvSpPr>
-          <p:cNvPr id="3" name="Content Placeholder 2">
-            <a:extLst>
-              <a:ext uri="{FF2B5EF4-FFF2-40B4-BE49-F238E27FC236}">
-                <a16:creationId xmlns:a16="http://schemas.microsoft.com/office/drawing/2014/main" id="{03E5FCE7-F75E-2327-9C5F-55E00B34D11D}"/>
-              </a:ext>
-            </a:extLst>
-          </p:cNvPr>
-          <p:cNvSpPr>
-            <a:spLocks noGrp="1"/>
-          </p:cNvSpPr>
-          <p:nvPr>
-            <p:ph idx="1"/>
-          </p:nvPr>
-        </p:nvSpPr>
-        <p:spPr>
-          <a:xfrm>
-            <a:off x="179670" y="1164771"/>
-            <a:ext cx="11261215" cy="4484914"/>
-          </a:xfrm>
-        </p:spPr>
-        <p:txBody>
-          <a:bodyPr>
-            <a:normAutofit/>
-          </a:bodyPr>
-          <a:lstStyle/>
-          <a:p>
-            <a:pPr algn="just"/>
-            <a:r>
-              <a:rPr lang="en-US" sz="1800" dirty="0">
-                <a:solidFill>
-                  <a:schemeClr val="tx1"/>
-                </a:solidFill>
-                <a:latin typeface="+mn-lt"/>
-                <a:cs typeface="+mn-cs"/>
-              </a:rPr>
-              <a:t>Edit distances: are a way of measuring how different two strings (sequences of characters) are. The edit distance is the minimum number of operations needed to transform one string into another. E.g. </a:t>
-            </a:r>
-            <a:r>
-              <a:rPr lang="en-US" sz="1800" dirty="0" err="1">
-                <a:solidFill>
-                  <a:schemeClr val="tx1"/>
-                </a:solidFill>
-                <a:latin typeface="+mn-lt"/>
-                <a:cs typeface="+mn-cs"/>
-              </a:rPr>
-              <a:t>Levenshtein</a:t>
-            </a:r>
-            <a:r>
-              <a:rPr lang="en-US" sz="1800" dirty="0">
-                <a:solidFill>
-                  <a:schemeClr val="tx1"/>
-                </a:solidFill>
-                <a:latin typeface="+mn-lt"/>
-                <a:cs typeface="+mn-cs"/>
-              </a:rPr>
-              <a:t> , cosine, </a:t>
-            </a:r>
-            <a:r>
-              <a:rPr lang="en-US" sz="1800" dirty="0" err="1">
-                <a:solidFill>
-                  <a:schemeClr val="tx1"/>
-                </a:solidFill>
-                <a:latin typeface="+mn-lt"/>
-                <a:cs typeface="+mn-cs"/>
-              </a:rPr>
-              <a:t>jarro-winkler</a:t>
-            </a:r>
-            <a:r>
-              <a:rPr lang="en-US" sz="1800" dirty="0">
-                <a:solidFill>
-                  <a:schemeClr val="tx1"/>
-                </a:solidFill>
-                <a:latin typeface="+mn-lt"/>
-                <a:cs typeface="+mn-cs"/>
-              </a:rPr>
-              <a:t> etc. </a:t>
-            </a:r>
-          </a:p>
-          <a:p>
-            <a:pPr algn="just"/>
-            <a:endParaRPr lang="en-US" sz="1800" dirty="0">
-              <a:solidFill>
-                <a:schemeClr val="tx1"/>
-              </a:solidFill>
-              <a:latin typeface="+mn-lt"/>
-              <a:cs typeface="+mn-cs"/>
-            </a:endParaRPr>
-          </a:p>
-          <a:p>
-            <a:endParaRPr lang="en-US" sz="1800" dirty="0">
-              <a:solidFill>
-                <a:srgbClr val="000000"/>
-              </a:solidFill>
-              <a:latin typeface="Times New Roman" panose="02020603050405020304" pitchFamily="18" charset="0"/>
-            </a:endParaRPr>
-          </a:p>
-          <a:p>
-            <a:endParaRPr lang="en-US" sz="1800" dirty="0">
-              <a:solidFill>
-                <a:srgbClr val="000000"/>
-              </a:solidFill>
-              <a:latin typeface="Times New Roman" panose="02020603050405020304" pitchFamily="18" charset="0"/>
-            </a:endParaRPr>
-          </a:p>
-          <a:p>
-            <a:endParaRPr lang="en-US" dirty="0"/>
-          </a:p>
-        </p:txBody>
-      </p:sp>
-      <p:sp>
-        <p:nvSpPr>
-          <p:cNvPr id="4" name="Slide Number Placeholder 3">
-            <a:extLst>
-              <a:ext uri="{FF2B5EF4-FFF2-40B4-BE49-F238E27FC236}">
-                <a16:creationId xmlns:a16="http://schemas.microsoft.com/office/drawing/2014/main" id="{79537068-5C1D-29E8-6A44-3E3880B225DF}"/>
-              </a:ext>
-            </a:extLst>
-          </p:cNvPr>
-          <p:cNvSpPr>
-            <a:spLocks noGrp="1"/>
-          </p:cNvSpPr>
-          <p:nvPr>
-            <p:ph type="sldNum" sz="quarter" idx="12"/>
-          </p:nvPr>
-        </p:nvSpPr>
-        <p:spPr/>
-        <p:txBody>
-          <a:bodyPr/>
-          <a:lstStyle/>
-          <a:p>
-            <a:fld id="{AD40181A-01B0-4CB8-8614-1473649F6741}" type="slidenum">
-              <a:rPr lang="en-US" smtClean="0">
-                <a:solidFill>
-                  <a:schemeClr val="bg1"/>
-                </a:solidFill>
-              </a:rPr>
-              <a:t>10</a:t>
-            </a:fld>
-            <a:endParaRPr lang="en-US" dirty="0">
-              <a:solidFill>
-                <a:schemeClr val="bg1"/>
-              </a:solidFill>
-            </a:endParaRPr>
-          </a:p>
-        </p:txBody>
-      </p:sp>
-    </p:spTree>
-    <p:extLst>
-      <p:ext uri="{BB962C8B-B14F-4D97-AF65-F5344CB8AC3E}">
-        <p14:creationId xmlns:p14="http://schemas.microsoft.com/office/powerpoint/2010/main" val="2648807902"/>
-      </p:ext>
-    </p:extLst>
-  </p:cSld>
-  <p:clrMapOvr>
-    <a:masterClrMapping/>
-  </p:clrMapOvr>
-</p:sld>
-</file>
-
-<file path=ppt/slides/slide11.xml><?xml version="1.0" encoding="utf-8"?>
-<p:sld xmlns:a="http://schemas.openxmlformats.org/drawingml/2006/main" xmlns:r="http://schemas.openxmlformats.org/officeDocument/2006/relationships" xmlns:p="http://schemas.openxmlformats.org/presentationml/2006/main">
-  <p:cSld>
-    <p:spTree>
-      <p:nvGrpSpPr>
-        <p:cNvPr id="1" name="">
-          <a:extLst>
-            <a:ext uri="{FF2B5EF4-FFF2-40B4-BE49-F238E27FC236}">
               <a16:creationId xmlns:a16="http://schemas.microsoft.com/office/drawing/2014/main" id="{109860D5-0ADE-5792-F38B-E62C062F6D1C}"/>
             </a:ext>
           </a:extLst>
@@ -1971,7 +1775,7 @@
                   <a:srgbClr val="FFFFFE"/>
                 </a:solidFill>
               </a:rPr>
-              <a:t>11</a:t>
+              <a:t>10</a:t>
             </a:fld>
             <a:endParaRPr lang="en-US" dirty="0">
               <a:solidFill>
@@ -2460,6 +2264,85 @@
           </a:p>
         </p:txBody>
       </p:sp>
+      <p:sp>
+        <p:nvSpPr>
+          <p:cNvPr id="38" name="Right Brace 37">
+            <a:extLst>
+              <a:ext uri="{FF2B5EF4-FFF2-40B4-BE49-F238E27FC236}">
+                <a16:creationId xmlns:a16="http://schemas.microsoft.com/office/drawing/2014/main" id="{5B15DFEF-EFF7-8D4C-54A0-DC38BE50E2DC}"/>
+              </a:ext>
+            </a:extLst>
+          </p:cNvPr>
+          <p:cNvSpPr/>
+          <p:nvPr/>
+        </p:nvSpPr>
+        <p:spPr>
+          <a:xfrm>
+            <a:off x="10663790" y="716462"/>
+            <a:ext cx="1140035" cy="1653221"/>
+          </a:xfrm>
+          <a:prstGeom prst="rightBrace">
+            <a:avLst/>
+          </a:prstGeom>
+        </p:spPr>
+        <p:style>
+          <a:lnRef idx="1">
+            <a:schemeClr val="accent1"/>
+          </a:lnRef>
+          <a:fillRef idx="0">
+            <a:schemeClr val="accent1"/>
+          </a:fillRef>
+          <a:effectRef idx="0">
+            <a:schemeClr val="accent1"/>
+          </a:effectRef>
+          <a:fontRef idx="minor">
+            <a:schemeClr val="tx1"/>
+          </a:fontRef>
+        </p:style>
+        <p:txBody>
+          <a:bodyPr rtlCol="0" anchor="ctr"/>
+          <a:lstStyle/>
+          <a:p>
+            <a:pPr algn="ctr"/>
+            <a:endParaRPr lang="en-US"/>
+          </a:p>
+        </p:txBody>
+      </p:sp>
+      <p:sp>
+        <p:nvSpPr>
+          <p:cNvPr id="39" name="TextBox 38">
+            <a:extLst>
+              <a:ext uri="{FF2B5EF4-FFF2-40B4-BE49-F238E27FC236}">
+                <a16:creationId xmlns:a16="http://schemas.microsoft.com/office/drawing/2014/main" id="{53EDA427-5FAF-58FC-D28C-F17CF15A4D06}"/>
+              </a:ext>
+            </a:extLst>
+          </p:cNvPr>
+          <p:cNvSpPr txBox="1"/>
+          <p:nvPr/>
+        </p:nvSpPr>
+        <p:spPr>
+          <a:xfrm>
+            <a:off x="8612577" y="2016040"/>
+            <a:ext cx="2621230" cy="369332"/>
+          </a:xfrm>
+          <a:prstGeom prst="rect">
+            <a:avLst/>
+          </a:prstGeom>
+          <a:noFill/>
+        </p:spPr>
+        <p:txBody>
+          <a:bodyPr wrap="none" rtlCol="0">
+            <a:spAutoFit/>
+          </a:bodyPr>
+          <a:lstStyle/>
+          <a:p>
+            <a:r>
+              <a:rPr lang="en-US" dirty="0"/>
+              <a:t>Closest match approach</a:t>
+            </a:r>
+          </a:p>
+        </p:txBody>
+      </p:sp>
     </p:spTree>
     <p:extLst>
       <p:ext uri="{BB962C8B-B14F-4D97-AF65-F5344CB8AC3E}">
@@ -2473,7 +2356,7 @@
 </p:sld>
 </file>
 
-<file path=ppt/slides/slide12.xml><?xml version="1.0" encoding="utf-8"?>
+<file path=ppt/slides/slide11.xml><?xml version="1.0" encoding="utf-8"?>
 <p:sld xmlns:a="http://schemas.openxmlformats.org/drawingml/2006/main" xmlns:r="http://schemas.openxmlformats.org/officeDocument/2006/relationships" xmlns:p="http://schemas.openxmlformats.org/presentationml/2006/main">
   <p:cSld>
     <p:spTree>
@@ -2523,7 +2406,7 @@
                   <a:srgbClr val="FFFFFE"/>
                 </a:solidFill>
               </a:rPr>
-              <a:t>12</a:t>
+              <a:t>11</a:t>
             </a:fld>
             <a:endParaRPr lang="en-US" dirty="0">
               <a:solidFill>
@@ -3358,6 +3241,164 @@
           </a:p>
         </p:txBody>
       </p:sp>
+      <p:sp>
+        <p:nvSpPr>
+          <p:cNvPr id="4" name="Right Brace 3">
+            <a:extLst>
+              <a:ext uri="{FF2B5EF4-FFF2-40B4-BE49-F238E27FC236}">
+                <a16:creationId xmlns:a16="http://schemas.microsoft.com/office/drawing/2014/main" id="{600FA181-A992-DD0D-5CB4-088E693E75FB}"/>
+              </a:ext>
+            </a:extLst>
+          </p:cNvPr>
+          <p:cNvSpPr/>
+          <p:nvPr/>
+        </p:nvSpPr>
+        <p:spPr>
+          <a:xfrm>
+            <a:off x="11046758" y="3686560"/>
+            <a:ext cx="1140035" cy="2235791"/>
+          </a:xfrm>
+          <a:prstGeom prst="rightBrace">
+            <a:avLst/>
+          </a:prstGeom>
+        </p:spPr>
+        <p:style>
+          <a:lnRef idx="1">
+            <a:schemeClr val="accent1"/>
+          </a:lnRef>
+          <a:fillRef idx="0">
+            <a:schemeClr val="accent1"/>
+          </a:fillRef>
+          <a:effectRef idx="0">
+            <a:schemeClr val="accent1"/>
+          </a:effectRef>
+          <a:fontRef idx="minor">
+            <a:schemeClr val="tx1"/>
+          </a:fontRef>
+        </p:style>
+        <p:txBody>
+          <a:bodyPr rtlCol="0" anchor="ctr"/>
+          <a:lstStyle/>
+          <a:p>
+            <a:pPr algn="ctr"/>
+            <a:endParaRPr lang="en-US"/>
+          </a:p>
+        </p:txBody>
+      </p:sp>
+      <p:sp>
+        <p:nvSpPr>
+          <p:cNvPr id="7" name="TextBox 6">
+            <a:extLst>
+              <a:ext uri="{FF2B5EF4-FFF2-40B4-BE49-F238E27FC236}">
+                <a16:creationId xmlns:a16="http://schemas.microsoft.com/office/drawing/2014/main" id="{E239C3DB-2C35-219F-451D-86A29531D9E5}"/>
+              </a:ext>
+            </a:extLst>
+          </p:cNvPr>
+          <p:cNvSpPr txBox="1"/>
+          <p:nvPr/>
+        </p:nvSpPr>
+        <p:spPr>
+          <a:xfrm>
+            <a:off x="8612577" y="2016040"/>
+            <a:ext cx="2621230" cy="369332"/>
+          </a:xfrm>
+          <a:prstGeom prst="rect">
+            <a:avLst/>
+          </a:prstGeom>
+          <a:noFill/>
+        </p:spPr>
+        <p:txBody>
+          <a:bodyPr wrap="none" rtlCol="0">
+            <a:spAutoFit/>
+          </a:bodyPr>
+          <a:lstStyle/>
+          <a:p>
+            <a:r>
+              <a:rPr lang="en-US" dirty="0"/>
+              <a:t>Closest match approach</a:t>
+            </a:r>
+          </a:p>
+        </p:txBody>
+      </p:sp>
+      <p:sp>
+        <p:nvSpPr>
+          <p:cNvPr id="8" name="Right Brace 7">
+            <a:extLst>
+              <a:ext uri="{FF2B5EF4-FFF2-40B4-BE49-F238E27FC236}">
+                <a16:creationId xmlns:a16="http://schemas.microsoft.com/office/drawing/2014/main" id="{5AAD7296-6D9B-0524-2F1F-4564768692A3}"/>
+              </a:ext>
+            </a:extLst>
+          </p:cNvPr>
+          <p:cNvSpPr/>
+          <p:nvPr/>
+        </p:nvSpPr>
+        <p:spPr>
+          <a:xfrm>
+            <a:off x="10816190" y="868862"/>
+            <a:ext cx="1140035" cy="1653221"/>
+          </a:xfrm>
+          <a:prstGeom prst="rightBrace">
+            <a:avLst/>
+          </a:prstGeom>
+        </p:spPr>
+        <p:style>
+          <a:lnRef idx="1">
+            <a:schemeClr val="accent1"/>
+          </a:lnRef>
+          <a:fillRef idx="0">
+            <a:schemeClr val="accent1"/>
+          </a:fillRef>
+          <a:effectRef idx="0">
+            <a:schemeClr val="accent1"/>
+          </a:effectRef>
+          <a:fontRef idx="minor">
+            <a:schemeClr val="tx1"/>
+          </a:fontRef>
+        </p:style>
+        <p:txBody>
+          <a:bodyPr rtlCol="0" anchor="ctr"/>
+          <a:lstStyle/>
+          <a:p>
+            <a:pPr algn="ctr"/>
+            <a:endParaRPr lang="en-US"/>
+          </a:p>
+        </p:txBody>
+      </p:sp>
+      <p:sp>
+        <p:nvSpPr>
+          <p:cNvPr id="11" name="TextBox 10">
+            <a:extLst>
+              <a:ext uri="{FF2B5EF4-FFF2-40B4-BE49-F238E27FC236}">
+                <a16:creationId xmlns:a16="http://schemas.microsoft.com/office/drawing/2014/main" id="{C6A03E6C-FEDA-1054-D40F-FABECE919F01}"/>
+              </a:ext>
+            </a:extLst>
+          </p:cNvPr>
+          <p:cNvSpPr txBox="1"/>
+          <p:nvPr/>
+        </p:nvSpPr>
+        <p:spPr>
+          <a:xfrm>
+            <a:off x="8809861" y="5585353"/>
+            <a:ext cx="2576346" cy="369332"/>
+          </a:xfrm>
+          <a:prstGeom prst="rect">
+            <a:avLst/>
+          </a:prstGeom>
+          <a:noFill/>
+        </p:spPr>
+        <p:txBody>
+          <a:bodyPr wrap="none" rtlCol="0">
+            <a:spAutoFit/>
+          </a:bodyPr>
+          <a:lstStyle/>
+          <a:p>
+            <a:r>
+              <a:rPr lang="en-US" dirty="0"/>
+              <a:t>Cluster based approach</a:t>
+            </a:r>
+          </a:p>
+        </p:txBody>
+      </p:sp>
     </p:spTree>
     <p:extLst>
       <p:ext uri="{BB962C8B-B14F-4D97-AF65-F5344CB8AC3E}">
@@ -3371,7 +3412,7 @@
 </p:sld>
 </file>
 
-<file path=ppt/slides/slide13.xml><?xml version="1.0" encoding="utf-8"?>
+<file path=ppt/slides/slide12.xml><?xml version="1.0" encoding="utf-8"?>
 <p:sld xmlns:a="http://schemas.openxmlformats.org/drawingml/2006/main" xmlns:r="http://schemas.openxmlformats.org/officeDocument/2006/relationships" xmlns:p="http://schemas.openxmlformats.org/presentationml/2006/main">
   <p:cSld>
     <p:spTree>
@@ -3700,7 +3741,7 @@
                   <a:schemeClr val="bg1"/>
                 </a:solidFill>
               </a:rPr>
-              <a:t>13</a:t>
+              <a:t>12</a:t>
             </a:fld>
             <a:endParaRPr lang="en-US" dirty="0">
               <a:solidFill>
@@ -3723,7 +3764,7 @@
 </p:sld>
 </file>
 
-<file path=ppt/slides/slide14.xml><?xml version="1.0" encoding="utf-8"?>
+<file path=ppt/slides/slide13.xml><?xml version="1.0" encoding="utf-8"?>
 <p:sld xmlns:a="http://schemas.openxmlformats.org/drawingml/2006/main" xmlns:r="http://schemas.openxmlformats.org/officeDocument/2006/relationships" xmlns:p="http://schemas.openxmlformats.org/presentationml/2006/main">
   <p:cSld>
     <p:spTree>
@@ -3773,7 +3814,7 @@
                   <a:srgbClr val="FFFFFE"/>
                 </a:solidFill>
               </a:rPr>
-              <a:t>14</a:t>
+              <a:t>13</a:t>
             </a:fld>
             <a:endParaRPr lang="en-US" dirty="0">
               <a:solidFill>
@@ -4600,6 +4641,164 @@
           </a:p>
         </p:txBody>
       </p:sp>
+      <p:sp>
+        <p:nvSpPr>
+          <p:cNvPr id="4" name="TextBox 3">
+            <a:extLst>
+              <a:ext uri="{FF2B5EF4-FFF2-40B4-BE49-F238E27FC236}">
+                <a16:creationId xmlns:a16="http://schemas.microsoft.com/office/drawing/2014/main" id="{AB1CD9AB-D049-9B89-0184-1623082C5969}"/>
+              </a:ext>
+            </a:extLst>
+          </p:cNvPr>
+          <p:cNvSpPr txBox="1"/>
+          <p:nvPr/>
+        </p:nvSpPr>
+        <p:spPr>
+          <a:xfrm>
+            <a:off x="8612577" y="2016040"/>
+            <a:ext cx="2621230" cy="369332"/>
+          </a:xfrm>
+          <a:prstGeom prst="rect">
+            <a:avLst/>
+          </a:prstGeom>
+          <a:noFill/>
+        </p:spPr>
+        <p:txBody>
+          <a:bodyPr wrap="none" rtlCol="0">
+            <a:spAutoFit/>
+          </a:bodyPr>
+          <a:lstStyle/>
+          <a:p>
+            <a:r>
+              <a:rPr lang="en-US" dirty="0"/>
+              <a:t>Closest match approach</a:t>
+            </a:r>
+          </a:p>
+        </p:txBody>
+      </p:sp>
+      <p:sp>
+        <p:nvSpPr>
+          <p:cNvPr id="8" name="TextBox 7">
+            <a:extLst>
+              <a:ext uri="{FF2B5EF4-FFF2-40B4-BE49-F238E27FC236}">
+                <a16:creationId xmlns:a16="http://schemas.microsoft.com/office/drawing/2014/main" id="{74D069E5-567D-6E1D-DC31-2F485E64EDB2}"/>
+              </a:ext>
+            </a:extLst>
+          </p:cNvPr>
+          <p:cNvSpPr txBox="1"/>
+          <p:nvPr/>
+        </p:nvSpPr>
+        <p:spPr>
+          <a:xfrm>
+            <a:off x="8367705" y="5586935"/>
+            <a:ext cx="2576346" cy="369332"/>
+          </a:xfrm>
+          <a:prstGeom prst="rect">
+            <a:avLst/>
+          </a:prstGeom>
+          <a:noFill/>
+        </p:spPr>
+        <p:txBody>
+          <a:bodyPr wrap="none" rtlCol="0">
+            <a:spAutoFit/>
+          </a:bodyPr>
+          <a:lstStyle/>
+          <a:p>
+            <a:r>
+              <a:rPr lang="en-US" dirty="0"/>
+              <a:t>Cluster based approach</a:t>
+            </a:r>
+          </a:p>
+        </p:txBody>
+      </p:sp>
+      <p:sp>
+        <p:nvSpPr>
+          <p:cNvPr id="11" name="Right Brace 10">
+            <a:extLst>
+              <a:ext uri="{FF2B5EF4-FFF2-40B4-BE49-F238E27FC236}">
+                <a16:creationId xmlns:a16="http://schemas.microsoft.com/office/drawing/2014/main" id="{5BD72F0F-ACDA-FA11-7C05-CD8C396F7970}"/>
+              </a:ext>
+            </a:extLst>
+          </p:cNvPr>
+          <p:cNvSpPr/>
+          <p:nvPr/>
+        </p:nvSpPr>
+        <p:spPr>
+          <a:xfrm>
+            <a:off x="10816190" y="868862"/>
+            <a:ext cx="1140035" cy="1653221"/>
+          </a:xfrm>
+          <a:prstGeom prst="rightBrace">
+            <a:avLst/>
+          </a:prstGeom>
+        </p:spPr>
+        <p:style>
+          <a:lnRef idx="1">
+            <a:schemeClr val="accent1"/>
+          </a:lnRef>
+          <a:fillRef idx="0">
+            <a:schemeClr val="accent1"/>
+          </a:fillRef>
+          <a:effectRef idx="0">
+            <a:schemeClr val="accent1"/>
+          </a:effectRef>
+          <a:fontRef idx="minor">
+            <a:schemeClr val="tx1"/>
+          </a:fontRef>
+        </p:style>
+        <p:txBody>
+          <a:bodyPr rtlCol="0" anchor="ctr"/>
+          <a:lstStyle/>
+          <a:p>
+            <a:pPr algn="ctr"/>
+            <a:endParaRPr lang="en-US"/>
+          </a:p>
+        </p:txBody>
+      </p:sp>
+      <p:sp>
+        <p:nvSpPr>
+          <p:cNvPr id="13" name="Right Brace 12">
+            <a:extLst>
+              <a:ext uri="{FF2B5EF4-FFF2-40B4-BE49-F238E27FC236}">
+                <a16:creationId xmlns:a16="http://schemas.microsoft.com/office/drawing/2014/main" id="{3A4F91AD-3EFF-0F9D-B233-B98F6E40E653}"/>
+              </a:ext>
+            </a:extLst>
+          </p:cNvPr>
+          <p:cNvSpPr/>
+          <p:nvPr/>
+        </p:nvSpPr>
+        <p:spPr>
+          <a:xfrm>
+            <a:off x="10944051" y="3578655"/>
+            <a:ext cx="1140035" cy="2235791"/>
+          </a:xfrm>
+          <a:prstGeom prst="rightBrace">
+            <a:avLst/>
+          </a:prstGeom>
+        </p:spPr>
+        <p:style>
+          <a:lnRef idx="1">
+            <a:schemeClr val="accent1"/>
+          </a:lnRef>
+          <a:fillRef idx="0">
+            <a:schemeClr val="accent1"/>
+          </a:fillRef>
+          <a:effectRef idx="0">
+            <a:schemeClr val="accent1"/>
+          </a:effectRef>
+          <a:fontRef idx="minor">
+            <a:schemeClr val="tx1"/>
+          </a:fontRef>
+        </p:style>
+        <p:txBody>
+          <a:bodyPr rtlCol="0" anchor="ctr"/>
+          <a:lstStyle/>
+          <a:p>
+            <a:pPr algn="ctr"/>
+            <a:endParaRPr lang="en-US"/>
+          </a:p>
+        </p:txBody>
+      </p:sp>
     </p:spTree>
     <p:extLst>
       <p:ext uri="{BB962C8B-B14F-4D97-AF65-F5344CB8AC3E}">
@@ -4613,7 +4812,7 @@
 </p:sld>
 </file>
 
-<file path=ppt/slides/slide15.xml><?xml version="1.0" encoding="utf-8"?>
+<file path=ppt/slides/slide14.xml><?xml version="1.0" encoding="utf-8"?>
 <p:sld xmlns:a="http://schemas.openxmlformats.org/drawingml/2006/main" xmlns:r="http://schemas.openxmlformats.org/officeDocument/2006/relationships" xmlns:p="http://schemas.openxmlformats.org/presentationml/2006/main">
   <p:cSld>
     <p:spTree>
@@ -4654,7 +4853,7 @@
             <a:fld id="{AD40181A-01B0-4CB8-8614-1473649F6741}" type="slidenum">
               <a:rPr lang="en-US" smtClean="0"/>
               <a:pPr/>
-              <a:t>15</a:t>
+              <a:t>14</a:t>
             </a:fld>
             <a:endParaRPr lang="en-US" dirty="0"/>
           </a:p>
@@ -4708,7 +4907,7 @@
         <p:spPr>
           <a:xfrm>
             <a:off x="158813" y="345466"/>
-            <a:ext cx="11556748" cy="2862322"/>
+            <a:ext cx="11556748" cy="3416320"/>
           </a:xfrm>
           <a:prstGeom prst="rect">
             <a:avLst/>
@@ -4794,6 +4993,20 @@
             </a:r>
           </a:p>
           <a:p>
+            <a:pPr lvl="2" algn="just"/>
+            <a:r>
+              <a:rPr lang="en-US" dirty="0"/>
+              <a:t>  </a:t>
+            </a:r>
+          </a:p>
+          <a:p>
+            <a:pPr lvl="2" algn="just"/>
+            <a:r>
+              <a:rPr lang="en-US" dirty="0"/>
+              <a:t>					</a:t>
+            </a:r>
+          </a:p>
+          <a:p>
             <a:pPr marL="1200150" lvl="2" indent="-285750" algn="just">
               <a:buFont typeface="Arial" panose="020B0604020202020204" pitchFamily="34" charset="0"/>
               <a:buChar char="•"/>
@@ -4837,14 +5050,14 @@
           <p:nvPr>
             <p:extLst>
               <p:ext uri="{D42A27DB-BD31-4B8C-83A1-F6EECF244321}">
-                <p14:modId xmlns:p14="http://schemas.microsoft.com/office/powerpoint/2010/main" val="285878547"/>
+                <p14:modId xmlns:p14="http://schemas.microsoft.com/office/powerpoint/2010/main" val="1053260055"/>
               </p:ext>
             </p:extLst>
           </p:nvPr>
         </p:nvGraphicFramePr>
         <p:xfrm>
-          <a:off x="1513113" y="2378076"/>
-          <a:ext cx="9307287" cy="4479925"/>
+          <a:off x="1801585" y="2409242"/>
+          <a:ext cx="8588829" cy="3566160"/>
         </p:xfrm>
         <a:graphic>
           <a:graphicData uri="http://schemas.openxmlformats.org/drawingml/2006/table">
@@ -4853,46 +5066,53 @@
                 <a:tableStyleId>{5C22544A-7EE6-4342-B048-85BDC9FD1C3A}</a:tableStyleId>
               </a:tblPr>
               <a:tblGrid>
-                <a:gridCol w="5382331">
+                <a:gridCol w="3493581">
                   <a:extLst>
                     <a:ext uri="{9D8B030D-6E8A-4147-A177-3AD203B41FA5}">
                       <a16:colId xmlns:a16="http://schemas.microsoft.com/office/drawing/2014/main" val="4253658004"/>
                     </a:ext>
                   </a:extLst>
                 </a:gridCol>
-                <a:gridCol w="3924956">
+                <a:gridCol w="2547624">
                   <a:extLst>
                     <a:ext uri="{9D8B030D-6E8A-4147-A177-3AD203B41FA5}">
                       <a16:colId xmlns:a16="http://schemas.microsoft.com/office/drawing/2014/main" val="987428443"/>
                     </a:ext>
                   </a:extLst>
                 </a:gridCol>
+                <a:gridCol w="2547624">
+                  <a:extLst>
+                    <a:ext uri="{9D8B030D-6E8A-4147-A177-3AD203B41FA5}">
+                      <a16:colId xmlns:a16="http://schemas.microsoft.com/office/drawing/2014/main" val="544761200"/>
+                    </a:ext>
+                  </a:extLst>
+                </a:gridCol>
               </a:tblGrid>
-              <a:tr h="377257">
-                <a:tc>
-                  <a:txBody>
-                    <a:bodyPr/>
-                    <a:lstStyle/>
-                    <a:p>
-                      <a:pPr marL="0" marR="0" lvl="0" indent="0" algn="ctr" defTabSz="914400" rtl="0" eaLnBrk="1" fontAlgn="auto" latinLnBrk="0" hangingPunct="1">
-                        <a:lnSpc>
-                          <a:spcPct val="100000"/>
-                        </a:lnSpc>
-                        <a:spcBef>
-                          <a:spcPts val="0"/>
-                        </a:spcBef>
-                        <a:spcAft>
-                          <a:spcPts val="0"/>
-                        </a:spcAft>
-                        <a:buClrTx/>
-                        <a:buSzTx/>
-                        <a:buFontTx/>
-                        <a:buNone/>
-                        <a:tabLst/>
-                        <a:defRPr/>
-                      </a:pPr>
-                      <a:r>
-                        <a:rPr lang="en-US" sz="900" kern="1200" dirty="0">
+              <a:tr h="0">
+                <a:tc>
+                  <a:txBody>
+                    <a:bodyPr/>
+                    <a:lstStyle/>
+                    <a:p>
+                      <a:pPr marL="171450" marR="0" lvl="0" indent="-171450" algn="l" defTabSz="914400" rtl="0" eaLnBrk="1" fontAlgn="auto" latinLnBrk="0" hangingPunct="1">
+                        <a:lnSpc>
+                          <a:spcPct val="100000"/>
+                        </a:lnSpc>
+                        <a:spcBef>
+                          <a:spcPts val="0"/>
+                        </a:spcBef>
+                        <a:spcAft>
+                          <a:spcPts val="0"/>
+                        </a:spcAft>
+                        <a:buClrTx/>
+                        <a:buSzTx/>
+                        <a:buFont typeface="Arial" panose="020B0604020202020204" pitchFamily="34" charset="0"/>
+                        <a:buChar char="•"/>
+                        <a:tabLst/>
+                        <a:defRPr/>
+                      </a:pPr>
+                      <a:r>
+                        <a:rPr lang="en-US" sz="1000" kern="1200" dirty="0">
                           <a:solidFill>
                             <a:schemeClr val="dk1"/>
                           </a:solidFill>
@@ -4903,9 +5123,79 @@
                         <a:t>Open AI: text-embedding-3-large (LTE-3) </a:t>
                       </a:r>
                     </a:p>
-                    <a:p>
-                      <a:pPr marL="0" algn="l" defTabSz="914400" rtl="0" eaLnBrk="1" latinLnBrk="0" hangingPunct="1"/>
-                      <a:endParaRPr lang="en-US" sz="900" kern="1200" dirty="0">
+                  </a:txBody>
+                  <a:tcPr>
+                    <a:lnL w="12700" cap="flat" cmpd="sng" algn="ctr">
+                      <a:noFill/>
+                      <a:prstDash val="solid"/>
+                      <a:round/>
+                      <a:headEnd type="none" w="med" len="med"/>
+                      <a:tailEnd type="none" w="med" len="med"/>
+                    </a:lnL>
+                    <a:lnR w="12700" cmpd="sng">
+                      <a:noFill/>
+                    </a:lnR>
+                    <a:lnT w="12700" cap="flat" cmpd="sng" algn="ctr">
+                      <a:noFill/>
+                      <a:prstDash val="solid"/>
+                      <a:round/>
+                      <a:headEnd type="none" w="med" len="med"/>
+                      <a:tailEnd type="none" w="med" len="med"/>
+                    </a:lnT>
+                    <a:lnB w="12700" cmpd="sng">
+                      <a:noFill/>
+                    </a:lnB>
+                    <a:lnTlToBr w="12700" cmpd="sng">
+                      <a:noFill/>
+                      <a:prstDash val="solid"/>
+                    </a:lnTlToBr>
+                    <a:lnBlToTr w="12700" cmpd="sng">
+                      <a:noFill/>
+                      <a:prstDash val="solid"/>
+                    </a:lnBlToTr>
+                    <a:noFill/>
+                  </a:tcPr>
+                </a:tc>
+                <a:tc>
+                  <a:txBody>
+                    <a:bodyPr/>
+                    <a:lstStyle/>
+                    <a:p>
+                      <a:pPr marL="171450" marR="0" lvl="0" indent="-171450" algn="l" defTabSz="914400" rtl="0" eaLnBrk="1" fontAlgn="auto" latinLnBrk="0" hangingPunct="1">
+                        <a:lnSpc>
+                          <a:spcPct val="100000"/>
+                        </a:lnSpc>
+                        <a:spcBef>
+                          <a:spcPts val="0"/>
+                        </a:spcBef>
+                        <a:spcAft>
+                          <a:spcPts val="0"/>
+                        </a:spcAft>
+                        <a:buClrTx/>
+                        <a:buSzTx/>
+                        <a:buFont typeface="Arial" panose="020B0604020202020204" pitchFamily="34" charset="0"/>
+                        <a:buChar char="•"/>
+                        <a:tabLst/>
+                        <a:defRPr/>
+                      </a:pPr>
+                      <a:r>
+                        <a:rPr lang="en-US" sz="1000" kern="1200" dirty="0">
+                          <a:solidFill>
+                            <a:schemeClr val="dk1"/>
+                          </a:solidFill>
+                          <a:latin typeface="+mn-lt"/>
+                          <a:ea typeface="+mn-ea"/>
+                          <a:cs typeface="+mn-cs"/>
+                        </a:rPr>
+                        <a:t>Open AI: text-embedding-ada-002 (ADA-002)</a:t>
+                      </a:r>
+                    </a:p>
+                    <a:p>
+                      <a:pPr marL="171450" indent="-171450" algn="l" defTabSz="914400" rtl="0" eaLnBrk="1" latinLnBrk="0" hangingPunct="1">
+                        <a:buFont typeface="Arial" panose="020B0604020202020204" pitchFamily="34" charset="0"/>
+                        <a:buChar char="•"/>
+                      </a:pPr>
+                      <a:endParaRPr lang="en-US" sz="1000" kern="1200" dirty="0">
                         <a:solidFill>
                           <a:schemeClr val="dk1"/>
                         </a:solidFill>
@@ -4915,45 +5205,67 @@
                       </a:endParaRPr>
                     </a:p>
                   </a:txBody>
-                  <a:tcPr/>
-                </a:tc>
-                <a:tc>
-                  <a:txBody>
-                    <a:bodyPr/>
-                    <a:lstStyle/>
-                    <a:p>
-                      <a:pPr marL="0" marR="0" lvl="0" indent="0" algn="ctr" defTabSz="914400" rtl="0" eaLnBrk="1" fontAlgn="auto" latinLnBrk="0" hangingPunct="1">
-                        <a:lnSpc>
-                          <a:spcPct val="100000"/>
-                        </a:lnSpc>
-                        <a:spcBef>
-                          <a:spcPts val="0"/>
-                        </a:spcBef>
-                        <a:spcAft>
-                          <a:spcPts val="0"/>
-                        </a:spcAft>
-                        <a:buClrTx/>
-                        <a:buSzTx/>
-                        <a:buFontTx/>
-                        <a:buNone/>
-                        <a:tabLst/>
-                        <a:defRPr/>
-                      </a:pPr>
-                      <a:r>
-                        <a:rPr lang="en-US" sz="900" kern="1200" dirty="0">
-                          <a:solidFill>
-                            <a:schemeClr val="dk1"/>
-                          </a:solidFill>
-                          <a:latin typeface="+mn-lt"/>
-                          <a:ea typeface="+mn-ea"/>
-                          <a:cs typeface="+mn-cs"/>
-                        </a:rPr>
-                        <a:t>Open AI: text-embedding-ada-002 (ADA-002)</a:t>
-                      </a:r>
-                    </a:p>
-                    <a:p>
-                      <a:pPr marL="0" algn="l" defTabSz="914400" rtl="0" eaLnBrk="1" latinLnBrk="0" hangingPunct="1"/>
-                      <a:endParaRPr lang="en-US" sz="900" kern="1200" dirty="0">
+                  <a:tcPr>
+                    <a:lnL w="12700" cmpd="sng">
+                      <a:noFill/>
+                    </a:lnL>
+                    <a:lnR w="12700" cmpd="sng">
+                      <a:noFill/>
+                    </a:lnR>
+                    <a:lnT w="12700" cap="flat" cmpd="sng" algn="ctr">
+                      <a:noFill/>
+                      <a:prstDash val="solid"/>
+                      <a:round/>
+                      <a:headEnd type="none" w="med" len="med"/>
+                      <a:tailEnd type="none" w="med" len="med"/>
+                    </a:lnT>
+                    <a:lnB w="12700" cmpd="sng">
+                      <a:noFill/>
+                    </a:lnB>
+                    <a:lnTlToBr w="12700" cmpd="sng">
+                      <a:noFill/>
+                      <a:prstDash val="solid"/>
+                    </a:lnTlToBr>
+                    <a:lnBlToTr w="12700" cmpd="sng">
+                      <a:noFill/>
+                      <a:prstDash val="solid"/>
+                    </a:lnBlToTr>
+                    <a:noFill/>
+                  </a:tcPr>
+                </a:tc>
+                <a:tc>
+                  <a:txBody>
+                    <a:bodyPr/>
+                    <a:lstStyle/>
+                    <a:p>
+                      <a:pPr marL="171450" marR="0" lvl="0" indent="-171450" algn="l" defTabSz="914400" rtl="0" eaLnBrk="1" fontAlgn="auto" latinLnBrk="0" hangingPunct="1">
+                        <a:lnSpc>
+                          <a:spcPct val="100000"/>
+                        </a:lnSpc>
+                        <a:spcBef>
+                          <a:spcPts val="0"/>
+                        </a:spcBef>
+                        <a:spcAft>
+                          <a:spcPts val="0"/>
+                        </a:spcAft>
+                        <a:buClrTx/>
+                        <a:buSzTx/>
+                        <a:buFont typeface="Arial" panose="020B0604020202020204" pitchFamily="34" charset="0"/>
+                        <a:buChar char="•"/>
+                        <a:tabLst/>
+                        <a:defRPr/>
+                      </a:pPr>
+                      <a:r>
+                        <a:rPr lang="en-US" sz="1000" dirty="0"/>
+                        <a:t>Cohere: embed-english-v2.0</a:t>
+                      </a:r>
+                    </a:p>
+                    <a:p>
+                      <a:pPr marL="171450" indent="-171450" algn="l" defTabSz="914400" rtl="0" eaLnBrk="1" latinLnBrk="0" hangingPunct="1">
+                        <a:buFont typeface="Arial" panose="020B0604020202020204" pitchFamily="34" charset="0"/>
+                        <a:buChar char="•"/>
+                      </a:pPr>
+                      <a:endParaRPr lang="en-US" sz="1000" kern="1200" dirty="0">
                         <a:solidFill>
                           <a:schemeClr val="dk1"/>
                         </a:solidFill>
@@ -4963,7 +5275,37 @@
                       </a:endParaRPr>
                     </a:p>
                   </a:txBody>
-                  <a:tcPr/>
+                  <a:tcPr>
+                    <a:lnL w="12700" cmpd="sng">
+                      <a:noFill/>
+                    </a:lnL>
+                    <a:lnR w="12700" cap="flat" cmpd="sng" algn="ctr">
+                      <a:noFill/>
+                      <a:prstDash val="solid"/>
+                      <a:round/>
+                      <a:headEnd type="none" w="med" len="med"/>
+                      <a:tailEnd type="none" w="med" len="med"/>
+                    </a:lnR>
+                    <a:lnT w="12700" cap="flat" cmpd="sng" algn="ctr">
+                      <a:noFill/>
+                      <a:prstDash val="solid"/>
+                      <a:round/>
+                      <a:headEnd type="none" w="med" len="med"/>
+                      <a:tailEnd type="none" w="med" len="med"/>
+                    </a:lnT>
+                    <a:lnB w="12700" cmpd="sng">
+                      <a:noFill/>
+                    </a:lnB>
+                    <a:lnTlToBr w="12700" cmpd="sng">
+                      <a:noFill/>
+                      <a:prstDash val="solid"/>
+                    </a:lnTlToBr>
+                    <a:lnBlToTr w="12700" cmpd="sng">
+                      <a:noFill/>
+                      <a:prstDash val="solid"/>
+                    </a:lnBlToTr>
+                    <a:noFill/>
+                  </a:tcPr>
                 </a:tc>
                 <a:extLst>
                   <a:ext uri="{0D108BD9-81ED-4DB2-BD59-A6C34878D82A}">
@@ -4971,42 +5313,191 @@
                   </a:ext>
                 </a:extLst>
               </a:tr>
-              <a:tr h="377257">
-                <a:tc>
-                  <a:txBody>
-                    <a:bodyPr/>
-                    <a:lstStyle/>
-                    <a:p>
-                      <a:pPr algn="ctr"/>
-                      <a:r>
-                        <a:rPr lang="en-US" sz="900" dirty="0"/>
-                        <a:t>Cohere: embed-english-v2.0 </a:t>
-                      </a:r>
-                    </a:p>
-                    <a:p>
-                      <a:pPr algn="ctr"/>
-                      <a:endParaRPr lang="en-US" sz="900" dirty="0"/>
-                    </a:p>
-                  </a:txBody>
-                  <a:tcPr/>
-                </a:tc>
-                <a:tc>
-                  <a:txBody>
-                    <a:bodyPr/>
-                    <a:lstStyle/>
-                    <a:p>
-                      <a:pPr algn="ctr"/>
-                      <a:r>
-                        <a:rPr lang="en-US" sz="900" dirty="0"/>
+              <a:tr h="230821">
+                <a:tc>
+                  <a:txBody>
+                    <a:bodyPr/>
+                    <a:lstStyle/>
+                    <a:p>
+                      <a:pPr marL="171450" marR="0" lvl="0" indent="-171450" algn="l" defTabSz="914400" rtl="0" eaLnBrk="1" fontAlgn="auto" latinLnBrk="0" hangingPunct="1">
+                        <a:lnSpc>
+                          <a:spcPct val="100000"/>
+                        </a:lnSpc>
+                        <a:spcBef>
+                          <a:spcPts val="0"/>
+                        </a:spcBef>
+                        <a:spcAft>
+                          <a:spcPts val="0"/>
+                        </a:spcAft>
+                        <a:buClrTx/>
+                        <a:buSzTx/>
+                        <a:buFont typeface="Arial" panose="020B0604020202020204" pitchFamily="34" charset="0"/>
+                        <a:buChar char="•"/>
+                        <a:tabLst/>
+                        <a:defRPr/>
+                      </a:pPr>
+                      <a:r>
+                        <a:rPr lang="en-US" sz="1000" dirty="0"/>
                         <a:t>LLama3.3 (Llama3.3_70B)</a:t>
                       </a:r>
                     </a:p>
                     <a:p>
-                      <a:pPr algn="ctr"/>
-                      <a:endParaRPr lang="en-US" sz="900" dirty="0"/>
-                    </a:p>
-                  </a:txBody>
-                  <a:tcPr/>
+                      <a:pPr marL="171450" indent="-171450" algn="l">
+                        <a:buFont typeface="Arial" panose="020B0604020202020204" pitchFamily="34" charset="0"/>
+                        <a:buChar char="•"/>
+                      </a:pPr>
+                      <a:endParaRPr lang="en-US" sz="1000" dirty="0"/>
+                    </a:p>
+                  </a:txBody>
+                  <a:tcPr>
+                    <a:lnL w="12700" cap="flat" cmpd="sng" algn="ctr">
+                      <a:noFill/>
+                      <a:prstDash val="solid"/>
+                      <a:round/>
+                      <a:headEnd type="none" w="med" len="med"/>
+                      <a:tailEnd type="none" w="med" len="med"/>
+                    </a:lnL>
+                    <a:lnR w="12700" cmpd="sng">
+                      <a:noFill/>
+                    </a:lnR>
+                    <a:lnT w="12700" cmpd="sng">
+                      <a:noFill/>
+                    </a:lnT>
+                    <a:lnB w="12700" cmpd="sng">
+                      <a:noFill/>
+                    </a:lnB>
+                    <a:lnTlToBr w="12700" cmpd="sng">
+                      <a:noFill/>
+                      <a:prstDash val="solid"/>
+                    </a:lnTlToBr>
+                    <a:lnBlToTr w="12700" cmpd="sng">
+                      <a:noFill/>
+                      <a:prstDash val="solid"/>
+                    </a:lnBlToTr>
+                    <a:noFill/>
+                  </a:tcPr>
+                </a:tc>
+                <a:tc>
+                  <a:txBody>
+                    <a:bodyPr/>
+                    <a:lstStyle/>
+                    <a:p>
+                      <a:pPr marL="171450" marR="0" lvl="0" indent="-171450" algn="l" defTabSz="914400" rtl="0" eaLnBrk="1" fontAlgn="auto" latinLnBrk="0" hangingPunct="1">
+                        <a:lnSpc>
+                          <a:spcPct val="100000"/>
+                        </a:lnSpc>
+                        <a:spcBef>
+                          <a:spcPts val="0"/>
+                        </a:spcBef>
+                        <a:spcAft>
+                          <a:spcPts val="0"/>
+                        </a:spcAft>
+                        <a:buClrTx/>
+                        <a:buSzTx/>
+                        <a:buFont typeface="Arial" panose="020B0604020202020204" pitchFamily="34" charset="0"/>
+                        <a:buChar char="•"/>
+                        <a:tabLst/>
+                        <a:defRPr/>
+                      </a:pPr>
+                      <a:r>
+                        <a:rPr lang="en-US" sz="1000" dirty="0"/>
+                        <a:t>Llama3.2 (Llama3.2_3B)</a:t>
+                      </a:r>
+                    </a:p>
+                    <a:p>
+                      <a:pPr marL="171450" indent="-171450" algn="l">
+                        <a:buFont typeface="Arial" panose="020B0604020202020204" pitchFamily="34" charset="0"/>
+                        <a:buChar char="•"/>
+                      </a:pPr>
+                      <a:endParaRPr lang="en-US" sz="1000" dirty="0"/>
+                    </a:p>
+                  </a:txBody>
+                  <a:tcPr>
+                    <a:lnL w="12700" cmpd="sng">
+                      <a:noFill/>
+                    </a:lnL>
+                    <a:lnR w="12700" cmpd="sng">
+                      <a:noFill/>
+                    </a:lnR>
+                    <a:lnT w="12700" cmpd="sng">
+                      <a:noFill/>
+                    </a:lnT>
+                    <a:lnB w="12700" cmpd="sng">
+                      <a:noFill/>
+                    </a:lnB>
+                    <a:lnTlToBr w="12700" cmpd="sng">
+                      <a:noFill/>
+                      <a:prstDash val="solid"/>
+                    </a:lnTlToBr>
+                    <a:lnBlToTr w="12700" cmpd="sng">
+                      <a:noFill/>
+                      <a:prstDash val="solid"/>
+                    </a:lnBlToTr>
+                    <a:noFill/>
+                  </a:tcPr>
+                </a:tc>
+                <a:tc>
+                  <a:txBody>
+                    <a:bodyPr/>
+                    <a:lstStyle/>
+                    <a:p>
+                      <a:pPr marL="171450" marR="0" lvl="0" indent="-171450" algn="l" defTabSz="914400" rtl="0" eaLnBrk="1" fontAlgn="auto" latinLnBrk="0" hangingPunct="1">
+                        <a:lnSpc>
+                          <a:spcPct val="100000"/>
+                        </a:lnSpc>
+                        <a:spcBef>
+                          <a:spcPts val="0"/>
+                        </a:spcBef>
+                        <a:spcAft>
+                          <a:spcPts val="0"/>
+                        </a:spcAft>
+                        <a:buClrTx/>
+                        <a:buSzTx/>
+                        <a:buFont typeface="Arial" panose="020B0604020202020204" pitchFamily="34" charset="0"/>
+                        <a:buChar char="•"/>
+                        <a:tabLst/>
+                        <a:defRPr/>
+                      </a:pPr>
+                      <a:r>
+                        <a:rPr lang="en-US" sz="1000" dirty="0"/>
+                        <a:t>LLama3.0  </a:t>
+                      </a:r>
+                    </a:p>
+                    <a:p>
+                      <a:pPr marL="171450" indent="-171450" algn="l">
+                        <a:buFont typeface="Arial" panose="020B0604020202020204" pitchFamily="34" charset="0"/>
+                        <a:buChar char="•"/>
+                      </a:pPr>
+                      <a:endParaRPr lang="en-US" sz="1000" dirty="0"/>
+                    </a:p>
+                  </a:txBody>
+                  <a:tcPr>
+                    <a:lnL w="12700" cmpd="sng">
+                      <a:noFill/>
+                    </a:lnL>
+                    <a:lnR w="12700" cap="flat" cmpd="sng" algn="ctr">
+                      <a:noFill/>
+                      <a:prstDash val="solid"/>
+                      <a:round/>
+                      <a:headEnd type="none" w="med" len="med"/>
+                      <a:tailEnd type="none" w="med" len="med"/>
+                    </a:lnR>
+                    <a:lnT w="12700" cmpd="sng">
+                      <a:noFill/>
+                    </a:lnT>
+                    <a:lnB w="12700" cmpd="sng">
+                      <a:noFill/>
+                    </a:lnB>
+                    <a:lnTlToBr w="12700" cmpd="sng">
+                      <a:noFill/>
+                      <a:prstDash val="solid"/>
+                    </a:lnTlToBr>
+                    <a:lnBlToTr w="12700" cmpd="sng">
+                      <a:noFill/>
+                      <a:prstDash val="solid"/>
+                    </a:lnBlToTr>
+                    <a:noFill/>
+                  </a:tcPr>
                 </a:tc>
                 <a:extLst>
                   <a:ext uri="{0D108BD9-81ED-4DB2-BD59-A6C34878D82A}">
@@ -5014,54 +5505,178 @@
                   </a:ext>
                 </a:extLst>
               </a:tr>
-              <a:tr h="377257">
-                <a:tc>
-                  <a:txBody>
-                    <a:bodyPr/>
-                    <a:lstStyle/>
-                    <a:p>
-                      <a:pPr algn="ctr"/>
-                      <a:r>
-                        <a:rPr lang="en-US" sz="900" dirty="0"/>
-                        <a:t>Llama3.2 (Llama3.2_3B)</a:t>
-                      </a:r>
-                    </a:p>
-                  </a:txBody>
-                  <a:tcPr/>
-                </a:tc>
-                <a:tc>
-                  <a:txBody>
-                    <a:bodyPr/>
-                    <a:lstStyle/>
-                    <a:p>
-                      <a:pPr marL="0" marR="0" lvl="0" indent="0" algn="ctr" defTabSz="914400" rtl="0" eaLnBrk="1" fontAlgn="auto" latinLnBrk="0" hangingPunct="1">
-                        <a:lnSpc>
-                          <a:spcPct val="100000"/>
-                        </a:lnSpc>
-                        <a:spcBef>
-                          <a:spcPts val="0"/>
-                        </a:spcBef>
-                        <a:spcAft>
-                          <a:spcPts val="0"/>
-                        </a:spcAft>
-                        <a:buClrTx/>
-                        <a:buSzTx/>
-                        <a:buFontTx/>
-                        <a:buNone/>
-                        <a:tabLst/>
-                        <a:defRPr/>
-                      </a:pPr>
-                      <a:r>
-                        <a:rPr lang="en-US" sz="900" dirty="0"/>
-                        <a:t>LLama3.0  </a:t>
-                      </a:r>
-                    </a:p>
-                    <a:p>
-                      <a:pPr algn="ctr"/>
-                      <a:endParaRPr lang="en-US" sz="900" dirty="0"/>
-                    </a:p>
-                  </a:txBody>
-                  <a:tcPr/>
+              <a:tr h="230821">
+                <a:tc>
+                  <a:txBody>
+                    <a:bodyPr/>
+                    <a:lstStyle/>
+                    <a:p>
+                      <a:pPr marL="171450" marR="0" lvl="0" indent="-171450" algn="l" defTabSz="914400" rtl="0" eaLnBrk="1" fontAlgn="auto" latinLnBrk="0" hangingPunct="1">
+                        <a:lnSpc>
+                          <a:spcPct val="100000"/>
+                        </a:lnSpc>
+                        <a:spcBef>
+                          <a:spcPts val="0"/>
+                        </a:spcBef>
+                        <a:spcAft>
+                          <a:spcPts val="0"/>
+                        </a:spcAft>
+                        <a:buClrTx/>
+                        <a:buSzTx/>
+                        <a:buFont typeface="Arial" panose="020B0604020202020204" pitchFamily="34" charset="0"/>
+                        <a:buChar char="•"/>
+                        <a:tabLst/>
+                        <a:defRPr/>
+                      </a:pPr>
+                      <a:r>
+                        <a:rPr lang="en-US" sz="1000" dirty="0"/>
+                        <a:t>MedLLama2</a:t>
+                      </a:r>
+                    </a:p>
+                  </a:txBody>
+                  <a:tcPr>
+                    <a:lnL w="12700" cap="flat" cmpd="sng" algn="ctr">
+                      <a:noFill/>
+                      <a:prstDash val="solid"/>
+                      <a:round/>
+                      <a:headEnd type="none" w="med" len="med"/>
+                      <a:tailEnd type="none" w="med" len="med"/>
+                    </a:lnL>
+                    <a:lnR w="12700" cmpd="sng">
+                      <a:noFill/>
+                    </a:lnR>
+                    <a:lnT w="12700" cmpd="sng">
+                      <a:noFill/>
+                    </a:lnT>
+                    <a:lnB w="12700" cmpd="sng">
+                      <a:noFill/>
+                    </a:lnB>
+                    <a:lnTlToBr w="12700" cmpd="sng">
+                      <a:noFill/>
+                      <a:prstDash val="solid"/>
+                    </a:lnTlToBr>
+                    <a:lnBlToTr w="12700" cmpd="sng">
+                      <a:noFill/>
+                      <a:prstDash val="solid"/>
+                    </a:lnBlToTr>
+                    <a:noFill/>
+                  </a:tcPr>
+                </a:tc>
+                <a:tc>
+                  <a:txBody>
+                    <a:bodyPr/>
+                    <a:lstStyle/>
+                    <a:p>
+                      <a:pPr marL="171450" marR="0" lvl="0" indent="-171450" algn="l" defTabSz="914400" rtl="0" eaLnBrk="1" fontAlgn="auto" latinLnBrk="0" hangingPunct="1">
+                        <a:lnSpc>
+                          <a:spcPct val="100000"/>
+                        </a:lnSpc>
+                        <a:spcBef>
+                          <a:spcPts val="0"/>
+                        </a:spcBef>
+                        <a:spcAft>
+                          <a:spcPts val="0"/>
+                        </a:spcAft>
+                        <a:buClrTx/>
+                        <a:buSzTx/>
+                        <a:buFont typeface="Arial" panose="020B0604020202020204" pitchFamily="34" charset="0"/>
+                        <a:buChar char="•"/>
+                        <a:tabLst/>
+                        <a:defRPr/>
+                      </a:pPr>
+                      <a:r>
+                        <a:rPr lang="en-US" sz="1000" dirty="0"/>
+                        <a:t>MedLLama_13B</a:t>
+                      </a:r>
+                    </a:p>
+                  </a:txBody>
+                  <a:tcPr>
+                    <a:lnL w="12700" cmpd="sng">
+                      <a:noFill/>
+                    </a:lnL>
+                    <a:lnR w="12700" cmpd="sng">
+                      <a:noFill/>
+                    </a:lnR>
+                    <a:lnT w="12700" cmpd="sng">
+                      <a:noFill/>
+                    </a:lnT>
+                    <a:lnB w="12700" cmpd="sng">
+                      <a:noFill/>
+                    </a:lnB>
+                    <a:lnTlToBr w="12700" cmpd="sng">
+                      <a:noFill/>
+                      <a:prstDash val="solid"/>
+                    </a:lnTlToBr>
+                    <a:lnBlToTr w="12700" cmpd="sng">
+                      <a:noFill/>
+                      <a:prstDash val="solid"/>
+                    </a:lnBlToTr>
+                    <a:noFill/>
+                  </a:tcPr>
+                </a:tc>
+                <a:tc>
+                  <a:txBody>
+                    <a:bodyPr/>
+                    <a:lstStyle/>
+                    <a:p>
+                      <a:pPr marL="171450" marR="0" lvl="0" indent="-171450" algn="l" defTabSz="914400" rtl="0" eaLnBrk="1" fontAlgn="auto" latinLnBrk="0" hangingPunct="1">
+                        <a:lnSpc>
+                          <a:spcPct val="100000"/>
+                        </a:lnSpc>
+                        <a:spcBef>
+                          <a:spcPts val="0"/>
+                        </a:spcBef>
+                        <a:spcAft>
+                          <a:spcPts val="0"/>
+                        </a:spcAft>
+                        <a:buClrTx/>
+                        <a:buSzTx/>
+                        <a:buFont typeface="Arial" panose="020B0604020202020204" pitchFamily="34" charset="0"/>
+                        <a:buChar char="•"/>
+                        <a:tabLst/>
+                        <a:defRPr/>
+                      </a:pPr>
+                      <a:r>
+                        <a:rPr lang="en-US" sz="1000" dirty="0" err="1"/>
+                        <a:t>BioBERT</a:t>
+                      </a:r>
+                      <a:endParaRPr lang="en-US" sz="1000" dirty="0"/>
+                    </a:p>
+                    <a:p>
+                      <a:pPr marL="171450" indent="-171450" algn="l">
+                        <a:buFont typeface="Arial" panose="020B0604020202020204" pitchFamily="34" charset="0"/>
+                        <a:buChar char="•"/>
+                      </a:pPr>
+                      <a:endParaRPr lang="en-US" sz="1000" dirty="0"/>
+                    </a:p>
+                  </a:txBody>
+                  <a:tcPr>
+                    <a:lnL w="12700" cmpd="sng">
+                      <a:noFill/>
+                    </a:lnL>
+                    <a:lnR w="12700" cap="flat" cmpd="sng" algn="ctr">
+                      <a:noFill/>
+                      <a:prstDash val="solid"/>
+                      <a:round/>
+                      <a:headEnd type="none" w="med" len="med"/>
+                      <a:tailEnd type="none" w="med" len="med"/>
+                    </a:lnR>
+                    <a:lnT w="12700" cmpd="sng">
+                      <a:noFill/>
+                    </a:lnT>
+                    <a:lnB w="12700" cmpd="sng">
+                      <a:noFill/>
+                    </a:lnB>
+                    <a:lnTlToBr w="12700" cmpd="sng">
+                      <a:noFill/>
+                      <a:prstDash val="solid"/>
+                    </a:lnTlToBr>
+                    <a:lnBlToTr w="12700" cmpd="sng">
+                      <a:noFill/>
+                      <a:prstDash val="solid"/>
+                    </a:lnBlToTr>
+                    <a:noFill/>
+                  </a:tcPr>
                 </a:tc>
                 <a:extLst>
                   <a:ext uri="{0D108BD9-81ED-4DB2-BD59-A6C34878D82A}">
@@ -5069,74 +5684,195 @@
                   </a:ext>
                 </a:extLst>
               </a:tr>
-              <a:tr h="377257">
-                <a:tc>
-                  <a:txBody>
-                    <a:bodyPr/>
-                    <a:lstStyle/>
-                    <a:p>
-                      <a:pPr marL="0" marR="0" lvl="0" indent="0" algn="ctr" defTabSz="914400" rtl="0" eaLnBrk="1" fontAlgn="auto" latinLnBrk="0" hangingPunct="1">
-                        <a:lnSpc>
-                          <a:spcPct val="100000"/>
-                        </a:lnSpc>
-                        <a:spcBef>
-                          <a:spcPts val="0"/>
-                        </a:spcBef>
-                        <a:spcAft>
-                          <a:spcPts val="0"/>
-                        </a:spcAft>
-                        <a:buClrTx/>
-                        <a:buSzTx/>
-                        <a:buFontTx/>
-                        <a:buNone/>
-                        <a:tabLst/>
-                        <a:defRPr/>
-                      </a:pPr>
-                      <a:r>
-                        <a:rPr lang="en-US" sz="900" dirty="0"/>
-                        <a:t>MedLLama2</a:t>
-                      </a:r>
-                    </a:p>
-                    <a:p>
-                      <a:pPr algn="ctr"/>
-                      <a:endParaRPr lang="en-US" sz="900" dirty="0"/>
-                    </a:p>
-                  </a:txBody>
-                  <a:tcPr/>
-                </a:tc>
-                <a:tc>
-                  <a:txBody>
-                    <a:bodyPr/>
-                    <a:lstStyle/>
-                    <a:p>
-                      <a:pPr marL="0" marR="0" lvl="0" indent="0" algn="ctr" defTabSz="914400" rtl="0" eaLnBrk="1" fontAlgn="auto" latinLnBrk="0" hangingPunct="1">
-                        <a:lnSpc>
-                          <a:spcPct val="100000"/>
-                        </a:lnSpc>
-                        <a:spcBef>
-                          <a:spcPts val="0"/>
-                        </a:spcBef>
-                        <a:spcAft>
-                          <a:spcPts val="0"/>
-                        </a:spcAft>
-                        <a:buClrTx/>
-                        <a:buSzTx/>
-                        <a:buFontTx/>
-                        <a:buNone/>
-                        <a:tabLst/>
-                        <a:defRPr/>
-                      </a:pPr>
-                      <a:r>
-                        <a:rPr lang="en-US" sz="900" dirty="0"/>
-                        <a:t>MedLLama_13B</a:t>
-                      </a:r>
-                    </a:p>
-                    <a:p>
-                      <a:pPr algn="ctr"/>
-                      <a:endParaRPr lang="en-US" sz="900" dirty="0"/>
-                    </a:p>
-                  </a:txBody>
-                  <a:tcPr/>
+              <a:tr h="230821">
+                <a:tc>
+                  <a:txBody>
+                    <a:bodyPr/>
+                    <a:lstStyle/>
+                    <a:p>
+                      <a:pPr marL="171450" marR="0" lvl="0" indent="-171450" algn="l" defTabSz="914400" rtl="0" eaLnBrk="1" fontAlgn="auto" latinLnBrk="0" hangingPunct="1">
+                        <a:lnSpc>
+                          <a:spcPct val="100000"/>
+                        </a:lnSpc>
+                        <a:spcBef>
+                          <a:spcPts val="0"/>
+                        </a:spcBef>
+                        <a:spcAft>
+                          <a:spcPts val="0"/>
+                        </a:spcAft>
+                        <a:buClrTx/>
+                        <a:buSzTx/>
+                        <a:buFont typeface="Arial" panose="020B0604020202020204" pitchFamily="34" charset="0"/>
+                        <a:buChar char="•"/>
+                        <a:tabLst/>
+                        <a:defRPr/>
+                      </a:pPr>
+                      <a:r>
+                        <a:rPr lang="en-US" sz="1000" dirty="0" err="1"/>
+                        <a:t>PubMedBERT</a:t>
+                      </a:r>
+                      <a:r>
+                        <a:rPr lang="en-US" sz="1000" dirty="0"/>
+                        <a:t>-Abstract (</a:t>
+                      </a:r>
+                      <a:r>
+                        <a:rPr lang="en-US" sz="1000" dirty="0" err="1"/>
+                        <a:t>PubMedBERT</a:t>
+                      </a:r>
+                      <a:r>
+                        <a:rPr lang="en-US" sz="1000" dirty="0"/>
+                        <a:t>)</a:t>
+                      </a:r>
+                    </a:p>
+                    <a:p>
+                      <a:pPr marL="171450" indent="-171450" algn="l">
+                        <a:buFont typeface="Arial" panose="020B0604020202020204" pitchFamily="34" charset="0"/>
+                        <a:buChar char="•"/>
+                      </a:pPr>
+                      <a:endParaRPr lang="en-US" sz="1000" dirty="0"/>
+                    </a:p>
+                  </a:txBody>
+                  <a:tcPr>
+                    <a:lnL w="12700" cap="flat" cmpd="sng" algn="ctr">
+                      <a:noFill/>
+                      <a:prstDash val="solid"/>
+                      <a:round/>
+                      <a:headEnd type="none" w="med" len="med"/>
+                      <a:tailEnd type="none" w="med" len="med"/>
+                    </a:lnL>
+                    <a:lnR w="12700" cmpd="sng">
+                      <a:noFill/>
+                    </a:lnR>
+                    <a:lnT w="12700" cmpd="sng">
+                      <a:noFill/>
+                    </a:lnT>
+                    <a:lnB w="12700" cmpd="sng">
+                      <a:noFill/>
+                    </a:lnB>
+                    <a:lnTlToBr w="12700" cmpd="sng">
+                      <a:noFill/>
+                      <a:prstDash val="solid"/>
+                    </a:lnTlToBr>
+                    <a:lnBlToTr w="12700" cmpd="sng">
+                      <a:noFill/>
+                      <a:prstDash val="solid"/>
+                    </a:lnBlToTr>
+                    <a:noFill/>
+                  </a:tcPr>
+                </a:tc>
+                <a:tc>
+                  <a:txBody>
+                    <a:bodyPr/>
+                    <a:lstStyle/>
+                    <a:p>
+                      <a:pPr marL="171450" indent="-171450" algn="l">
+                        <a:buFont typeface="Arial" panose="020B0604020202020204" pitchFamily="34" charset="0"/>
+                        <a:buChar char="•"/>
+                      </a:pPr>
+                      <a:r>
+                        <a:rPr lang="en-US" sz="1000" dirty="0"/>
+                        <a:t>Phi-4</a:t>
+                      </a:r>
+                    </a:p>
+                  </a:txBody>
+                  <a:tcPr>
+                    <a:lnL w="12700" cmpd="sng">
+                      <a:noFill/>
+                    </a:lnL>
+                    <a:lnR w="12700" cmpd="sng">
+                      <a:noFill/>
+                    </a:lnR>
+                    <a:lnT w="12700" cmpd="sng">
+                      <a:noFill/>
+                    </a:lnT>
+                    <a:lnB w="12700" cmpd="sng">
+                      <a:noFill/>
+                    </a:lnB>
+                    <a:lnTlToBr w="12700" cmpd="sng">
+                      <a:noFill/>
+                      <a:prstDash val="solid"/>
+                    </a:lnTlToBr>
+                    <a:lnBlToTr w="12700" cmpd="sng">
+                      <a:noFill/>
+                      <a:prstDash val="solid"/>
+                    </a:lnBlToTr>
+                    <a:noFill/>
+                  </a:tcPr>
+                </a:tc>
+                <a:tc>
+                  <a:txBody>
+                    <a:bodyPr/>
+                    <a:lstStyle/>
+                    <a:p>
+                      <a:pPr marL="171450" marR="0" lvl="0" indent="-171450" algn="l" defTabSz="914400" rtl="0" eaLnBrk="1" fontAlgn="auto" latinLnBrk="0" hangingPunct="1">
+                        <a:lnSpc>
+                          <a:spcPct val="100000"/>
+                        </a:lnSpc>
+                        <a:spcBef>
+                          <a:spcPts val="0"/>
+                        </a:spcBef>
+                        <a:spcAft>
+                          <a:spcPts val="0"/>
+                        </a:spcAft>
+                        <a:buClrTx/>
+                        <a:buSzTx/>
+                        <a:buFont typeface="Arial" panose="020B0604020202020204" pitchFamily="34" charset="0"/>
+                        <a:buChar char="•"/>
+                        <a:tabLst/>
+                        <a:defRPr/>
+                      </a:pPr>
+                      <a:r>
+                        <a:rPr lang="en-US" sz="1000" dirty="0" err="1"/>
+                        <a:t>ModernBERT</a:t>
+                      </a:r>
+                      <a:r>
+                        <a:rPr lang="en-US" sz="1000" dirty="0"/>
+                        <a:t>-Large (</a:t>
+                      </a:r>
+                      <a:r>
+                        <a:rPr lang="en-US" sz="1000" dirty="0" err="1"/>
+                        <a:t>ModernBERT</a:t>
+                      </a:r>
+                      <a:r>
+                        <a:rPr lang="en-US" sz="1000" dirty="0"/>
+                        <a:t>)</a:t>
+                      </a:r>
+                    </a:p>
+                    <a:p>
+                      <a:pPr marL="171450" indent="-171450" algn="l">
+                        <a:buFont typeface="Arial" panose="020B0604020202020204" pitchFamily="34" charset="0"/>
+                        <a:buChar char="•"/>
+                      </a:pPr>
+                      <a:endParaRPr lang="en-US" sz="1000" dirty="0"/>
+                    </a:p>
+                  </a:txBody>
+                  <a:tcPr>
+                    <a:lnL w="12700" cmpd="sng">
+                      <a:noFill/>
+                    </a:lnL>
+                    <a:lnR w="12700" cap="flat" cmpd="sng" algn="ctr">
+                      <a:noFill/>
+                      <a:prstDash val="solid"/>
+                      <a:round/>
+                      <a:headEnd type="none" w="med" len="med"/>
+                      <a:tailEnd type="none" w="med" len="med"/>
+                    </a:lnR>
+                    <a:lnT w="12700" cmpd="sng">
+                      <a:noFill/>
+                    </a:lnT>
+                    <a:lnB w="12700" cmpd="sng">
+                      <a:noFill/>
+                    </a:lnB>
+                    <a:lnTlToBr w="12700" cmpd="sng">
+                      <a:noFill/>
+                      <a:prstDash val="solid"/>
+                    </a:lnTlToBr>
+                    <a:lnBlToTr w="12700" cmpd="sng">
+                      <a:noFill/>
+                      <a:prstDash val="solid"/>
+                    </a:lnBlToTr>
+                    <a:noFill/>
+                  </a:tcPr>
                 </a:tc>
                 <a:extLst>
                   <a:ext uri="{0D108BD9-81ED-4DB2-BD59-A6C34878D82A}">
@@ -5144,67 +5880,164 @@
                   </a:ext>
                 </a:extLst>
               </a:tr>
-              <a:tr h="377257">
-                <a:tc>
-                  <a:txBody>
-                    <a:bodyPr/>
-                    <a:lstStyle/>
-                    <a:p>
-                      <a:pPr algn="ctr"/>
-                      <a:r>
-                        <a:rPr lang="en-US" sz="900" dirty="0" err="1"/>
-                        <a:t>BioBERT</a:t>
-                      </a:r>
-                      <a:endParaRPr lang="en-US" sz="900" dirty="0"/>
-                    </a:p>
-                  </a:txBody>
-                  <a:tcPr/>
-                </a:tc>
-                <a:tc>
-                  <a:txBody>
-                    <a:bodyPr/>
-                    <a:lstStyle/>
-                    <a:p>
-                      <a:pPr marL="0" marR="0" lvl="0" indent="0" algn="ctr" defTabSz="914400" rtl="0" eaLnBrk="1" fontAlgn="auto" latinLnBrk="0" hangingPunct="1">
-                        <a:lnSpc>
-                          <a:spcPct val="100000"/>
-                        </a:lnSpc>
-                        <a:spcBef>
-                          <a:spcPts val="0"/>
-                        </a:spcBef>
-                        <a:spcAft>
-                          <a:spcPts val="0"/>
-                        </a:spcAft>
-                        <a:buClrTx/>
-                        <a:buSzTx/>
-                        <a:buFontTx/>
-                        <a:buNone/>
-                        <a:tabLst/>
-                        <a:defRPr/>
-                      </a:pPr>
-                      <a:r>
-                        <a:rPr lang="en-US" sz="900" dirty="0" err="1"/>
-                        <a:t>PubMedBERT</a:t>
-                      </a:r>
-                      <a:r>
-                        <a:rPr lang="en-US" sz="900" dirty="0"/>
-                        <a:t>-Abstract (</a:t>
-                      </a:r>
-                      <a:r>
-                        <a:rPr lang="en-US" sz="900" dirty="0" err="1"/>
-                        <a:t>PubMedBERT</a:t>
-                      </a:r>
-                      <a:r>
-                        <a:rPr lang="en-US" sz="900" dirty="0"/>
-                        <a:t>)</a:t>
-                      </a:r>
-                    </a:p>
-                    <a:p>
-                      <a:pPr algn="ctr"/>
-                      <a:endParaRPr lang="en-US" sz="900" dirty="0"/>
-                    </a:p>
-                  </a:txBody>
-                  <a:tcPr/>
+              <a:tr h="230821">
+                <a:tc>
+                  <a:txBody>
+                    <a:bodyPr/>
+                    <a:lstStyle/>
+                    <a:p>
+                      <a:pPr marL="171450" indent="-171450" algn="l">
+                        <a:buFont typeface="Arial" panose="020B0604020202020204" pitchFamily="34" charset="0"/>
+                        <a:buChar char="•"/>
+                      </a:pPr>
+                      <a:r>
+                        <a:rPr lang="en-US" sz="1000" dirty="0"/>
+                        <a:t>e5-large-v2</a:t>
+                      </a:r>
+                    </a:p>
+                  </a:txBody>
+                  <a:tcPr>
+                    <a:lnL w="12700" cap="flat" cmpd="sng" algn="ctr">
+                      <a:noFill/>
+                      <a:prstDash val="solid"/>
+                      <a:round/>
+                      <a:headEnd type="none" w="med" len="med"/>
+                      <a:tailEnd type="none" w="med" len="med"/>
+                    </a:lnL>
+                    <a:lnR w="12700" cmpd="sng">
+                      <a:noFill/>
+                    </a:lnR>
+                    <a:lnT w="12700" cmpd="sng">
+                      <a:noFill/>
+                    </a:lnT>
+                    <a:lnB w="12700" cmpd="sng">
+                      <a:noFill/>
+                    </a:lnB>
+                    <a:lnTlToBr w="12700" cmpd="sng">
+                      <a:noFill/>
+                      <a:prstDash val="solid"/>
+                    </a:lnTlToBr>
+                    <a:lnBlToTr w="12700" cmpd="sng">
+                      <a:noFill/>
+                      <a:prstDash val="solid"/>
+                    </a:lnBlToTr>
+                    <a:noFill/>
+                  </a:tcPr>
+                </a:tc>
+                <a:tc>
+                  <a:txBody>
+                    <a:bodyPr/>
+                    <a:lstStyle/>
+                    <a:p>
+                      <a:pPr marL="171450" marR="0" lvl="0" indent="-171450" algn="l" defTabSz="914400" rtl="0" eaLnBrk="1" fontAlgn="auto" latinLnBrk="0" hangingPunct="1">
+                        <a:lnSpc>
+                          <a:spcPct val="100000"/>
+                        </a:lnSpc>
+                        <a:spcBef>
+                          <a:spcPts val="0"/>
+                        </a:spcBef>
+                        <a:spcAft>
+                          <a:spcPts val="0"/>
+                        </a:spcAft>
+                        <a:buClrTx/>
+                        <a:buSzTx/>
+                        <a:buFont typeface="Arial" panose="020B0604020202020204" pitchFamily="34" charset="0"/>
+                        <a:buChar char="•"/>
+                        <a:tabLst/>
+                        <a:defRPr/>
+                      </a:pPr>
+                      <a:r>
+                        <a:rPr lang="en-US" sz="1000" dirty="0"/>
+                        <a:t>e5-large</a:t>
+                      </a:r>
+                    </a:p>
+                  </a:txBody>
+                  <a:tcPr>
+                    <a:lnL w="12700" cmpd="sng">
+                      <a:noFill/>
+                    </a:lnL>
+                    <a:lnR w="12700" cmpd="sng">
+                      <a:noFill/>
+                    </a:lnR>
+                    <a:lnT w="12700" cmpd="sng">
+                      <a:noFill/>
+                    </a:lnT>
+                    <a:lnB w="12700" cmpd="sng">
+                      <a:noFill/>
+                    </a:lnB>
+                    <a:lnTlToBr w="12700" cmpd="sng">
+                      <a:noFill/>
+                      <a:prstDash val="solid"/>
+                    </a:lnTlToBr>
+                    <a:lnBlToTr w="12700" cmpd="sng">
+                      <a:noFill/>
+                      <a:prstDash val="solid"/>
+                    </a:lnBlToTr>
+                    <a:noFill/>
+                  </a:tcPr>
+                </a:tc>
+                <a:tc>
+                  <a:txBody>
+                    <a:bodyPr/>
+                    <a:lstStyle/>
+                    <a:p>
+                      <a:pPr marL="171450" marR="0" lvl="0" indent="-171450" algn="l" defTabSz="914400" rtl="0" eaLnBrk="1" fontAlgn="auto" latinLnBrk="0" hangingPunct="1">
+                        <a:lnSpc>
+                          <a:spcPct val="100000"/>
+                        </a:lnSpc>
+                        <a:spcBef>
+                          <a:spcPts val="0"/>
+                        </a:spcBef>
+                        <a:spcAft>
+                          <a:spcPts val="0"/>
+                        </a:spcAft>
+                        <a:buClrTx/>
+                        <a:buSzTx/>
+                        <a:buFont typeface="Arial" panose="020B0604020202020204" pitchFamily="34" charset="0"/>
+                        <a:buChar char="•"/>
+                        <a:tabLst/>
+                        <a:defRPr/>
+                      </a:pPr>
+                      <a:r>
+                        <a:rPr lang="en-US" sz="1000" dirty="0"/>
+                        <a:t>gtr-t5-large</a:t>
+                      </a:r>
+                    </a:p>
+                    <a:p>
+                      <a:pPr marL="171450" indent="-171450" algn="l">
+                        <a:buFont typeface="Arial" panose="020B0604020202020204" pitchFamily="34" charset="0"/>
+                        <a:buChar char="•"/>
+                      </a:pPr>
+                      <a:endParaRPr lang="en-US" sz="1000" dirty="0"/>
+                    </a:p>
+                  </a:txBody>
+                  <a:tcPr>
+                    <a:lnL w="12700" cmpd="sng">
+                      <a:noFill/>
+                    </a:lnL>
+                    <a:lnR w="12700" cap="flat" cmpd="sng" algn="ctr">
+                      <a:noFill/>
+                      <a:prstDash val="solid"/>
+                      <a:round/>
+                      <a:headEnd type="none" w="med" len="med"/>
+                      <a:tailEnd type="none" w="med" len="med"/>
+                    </a:lnR>
+                    <a:lnT w="12700" cmpd="sng">
+                      <a:noFill/>
+                    </a:lnT>
+                    <a:lnB w="12700" cmpd="sng">
+                      <a:noFill/>
+                    </a:lnB>
+                    <a:lnTlToBr w="12700" cmpd="sng">
+                      <a:noFill/>
+                      <a:prstDash val="solid"/>
+                    </a:lnTlToBr>
+                    <a:lnBlToTr w="12700" cmpd="sng">
+                      <a:noFill/>
+                      <a:prstDash val="solid"/>
+                    </a:lnBlToTr>
+                    <a:noFill/>
+                  </a:tcPr>
                 </a:tc>
                 <a:extLst>
                   <a:ext uri="{0D108BD9-81ED-4DB2-BD59-A6C34878D82A}">
@@ -5212,66 +6045,151 @@
                   </a:ext>
                 </a:extLst>
               </a:tr>
-              <a:tr h="377257">
-                <a:tc>
-                  <a:txBody>
-                    <a:bodyPr/>
-                    <a:lstStyle/>
-                    <a:p>
-                      <a:pPr algn="ctr"/>
-                      <a:r>
-                        <a:rPr lang="en-US" sz="900" dirty="0"/>
-                        <a:t>Phi-4</a:t>
-                      </a:r>
-                    </a:p>
-                  </a:txBody>
-                  <a:tcPr/>
-                </a:tc>
-                <a:tc>
-                  <a:txBody>
-                    <a:bodyPr/>
-                    <a:lstStyle/>
-                    <a:p>
-                      <a:pPr marL="0" marR="0" lvl="0" indent="0" algn="ctr" defTabSz="914400" rtl="0" eaLnBrk="1" fontAlgn="auto" latinLnBrk="0" hangingPunct="1">
-                        <a:lnSpc>
-                          <a:spcPct val="100000"/>
-                        </a:lnSpc>
-                        <a:spcBef>
-                          <a:spcPts val="0"/>
-                        </a:spcBef>
-                        <a:spcAft>
-                          <a:spcPts val="0"/>
-                        </a:spcAft>
-                        <a:buClrTx/>
-                        <a:buSzTx/>
-                        <a:buFontTx/>
-                        <a:buNone/>
-                        <a:tabLst/>
-                        <a:defRPr/>
-                      </a:pPr>
-                      <a:r>
-                        <a:rPr lang="en-US" sz="900" dirty="0" err="1"/>
-                        <a:t>ModernBERT</a:t>
-                      </a:r>
-                      <a:r>
-                        <a:rPr lang="en-US" sz="900" dirty="0"/>
-                        <a:t>-Large (</a:t>
-                      </a:r>
-                      <a:r>
-                        <a:rPr lang="en-US" sz="900" dirty="0" err="1"/>
-                        <a:t>ModernBERT</a:t>
-                      </a:r>
-                      <a:r>
-                        <a:rPr lang="en-US" sz="900" dirty="0"/>
-                        <a:t>)</a:t>
-                      </a:r>
-                    </a:p>
-                    <a:p>
-                      <a:pPr algn="ctr"/>
-                      <a:endParaRPr lang="en-US" sz="900" dirty="0"/>
-                    </a:p>
-                  </a:txBody>
-                  <a:tcPr/>
+              <a:tr h="0">
+                <a:tc>
+                  <a:txBody>
+                    <a:bodyPr/>
+                    <a:lstStyle/>
+                    <a:p>
+                      <a:pPr marL="171450" marR="0" lvl="0" indent="-171450" algn="l" defTabSz="914400" rtl="0" eaLnBrk="1" fontAlgn="auto" latinLnBrk="0" hangingPunct="1">
+                        <a:lnSpc>
+                          <a:spcPct val="100000"/>
+                        </a:lnSpc>
+                        <a:spcBef>
+                          <a:spcPts val="0"/>
+                        </a:spcBef>
+                        <a:spcAft>
+                          <a:spcPts val="0"/>
+                        </a:spcAft>
+                        <a:buClrTx/>
+                        <a:buSzTx/>
+                        <a:buFont typeface="Arial" panose="020B0604020202020204" pitchFamily="34" charset="0"/>
+                        <a:buChar char="•"/>
+                        <a:tabLst/>
+                        <a:defRPr/>
+                      </a:pPr>
+                      <a:r>
+                        <a:rPr lang="en-US" sz="1000" dirty="0"/>
+                        <a:t>all-mpnet-base-v2</a:t>
+                      </a:r>
+                    </a:p>
+                    <a:p>
+                      <a:pPr marL="171450" indent="-171450" algn="l">
+                        <a:buFont typeface="Arial" panose="020B0604020202020204" pitchFamily="34" charset="0"/>
+                        <a:buChar char="•"/>
+                      </a:pPr>
+                      <a:endParaRPr lang="en-US" sz="1000" dirty="0"/>
+                    </a:p>
+                  </a:txBody>
+                  <a:tcPr>
+                    <a:lnL w="12700" cap="flat" cmpd="sng" algn="ctr">
+                      <a:noFill/>
+                      <a:prstDash val="solid"/>
+                      <a:round/>
+                      <a:headEnd type="none" w="med" len="med"/>
+                      <a:tailEnd type="none" w="med" len="med"/>
+                    </a:lnL>
+                    <a:lnR w="12700" cmpd="sng">
+                      <a:noFill/>
+                    </a:lnR>
+                    <a:lnT w="12700" cmpd="sng">
+                      <a:noFill/>
+                    </a:lnT>
+                    <a:lnB w="12700" cmpd="sng">
+                      <a:noFill/>
+                    </a:lnB>
+                    <a:lnTlToBr w="12700" cmpd="sng">
+                      <a:noFill/>
+                      <a:prstDash val="solid"/>
+                    </a:lnTlToBr>
+                    <a:lnBlToTr w="12700" cmpd="sng">
+                      <a:noFill/>
+                      <a:prstDash val="solid"/>
+                    </a:lnBlToTr>
+                    <a:noFill/>
+                  </a:tcPr>
+                </a:tc>
+                <a:tc>
+                  <a:txBody>
+                    <a:bodyPr/>
+                    <a:lstStyle/>
+                    <a:p>
+                      <a:pPr marL="171450" indent="-171450" algn="l">
+                        <a:buFont typeface="Arial" panose="020B0604020202020204" pitchFamily="34" charset="0"/>
+                        <a:buChar char="•"/>
+                      </a:pPr>
+                      <a:r>
+                        <a:rPr lang="en-US" sz="1000" dirty="0"/>
+                        <a:t>all-MiniLM-L6-v2</a:t>
+                      </a:r>
+                    </a:p>
+                  </a:txBody>
+                  <a:tcPr>
+                    <a:lnL w="12700" cmpd="sng">
+                      <a:noFill/>
+                    </a:lnL>
+                    <a:lnR w="12700" cmpd="sng">
+                      <a:noFill/>
+                    </a:lnR>
+                    <a:lnT w="12700" cmpd="sng">
+                      <a:noFill/>
+                    </a:lnT>
+                    <a:lnB w="12700" cmpd="sng">
+                      <a:noFill/>
+                    </a:lnB>
+                    <a:lnTlToBr w="12700" cmpd="sng">
+                      <a:noFill/>
+                      <a:prstDash val="solid"/>
+                    </a:lnTlToBr>
+                    <a:lnBlToTr w="12700" cmpd="sng">
+                      <a:noFill/>
+                      <a:prstDash val="solid"/>
+                    </a:lnBlToTr>
+                    <a:noFill/>
+                  </a:tcPr>
+                </a:tc>
+                <a:tc>
+                  <a:txBody>
+                    <a:bodyPr/>
+                    <a:lstStyle/>
+                    <a:p>
+                      <a:pPr marL="171450" indent="-171450" algn="l">
+                        <a:buFont typeface="Arial" panose="020B0604020202020204" pitchFamily="34" charset="0"/>
+                        <a:buChar char="•"/>
+                      </a:pPr>
+                      <a:r>
+                        <a:rPr lang="en-US" sz="1000" dirty="0"/>
+                        <a:t>all-MiniLM-L12-v2</a:t>
+                      </a:r>
+                    </a:p>
+                  </a:txBody>
+                  <a:tcPr>
+                    <a:lnL w="12700" cmpd="sng">
+                      <a:noFill/>
+                    </a:lnL>
+                    <a:lnR w="12700" cap="flat" cmpd="sng" algn="ctr">
+                      <a:noFill/>
+                      <a:prstDash val="solid"/>
+                      <a:round/>
+                      <a:headEnd type="none" w="med" len="med"/>
+                      <a:tailEnd type="none" w="med" len="med"/>
+                    </a:lnR>
+                    <a:lnT w="12700" cmpd="sng">
+                      <a:noFill/>
+                    </a:lnT>
+                    <a:lnB w="12700" cmpd="sng">
+                      <a:noFill/>
+                    </a:lnB>
+                    <a:lnTlToBr w="12700" cmpd="sng">
+                      <a:noFill/>
+                      <a:prstDash val="solid"/>
+                    </a:lnTlToBr>
+                    <a:lnBlToTr w="12700" cmpd="sng">
+                      <a:noFill/>
+                      <a:prstDash val="solid"/>
+                    </a:lnBlToTr>
+                    <a:noFill/>
+                  </a:tcPr>
                 </a:tc>
                 <a:extLst>
                   <a:ext uri="{0D108BD9-81ED-4DB2-BD59-A6C34878D82A}">
@@ -5279,54 +6197,146 @@
                   </a:ext>
                 </a:extLst>
               </a:tr>
-              <a:tr h="377257">
-                <a:tc>
-                  <a:txBody>
-                    <a:bodyPr/>
-                    <a:lstStyle/>
-                    <a:p>
-                      <a:pPr algn="ctr"/>
-                      <a:r>
-                        <a:rPr lang="en-US" sz="900" dirty="0"/>
-                        <a:t>e5-large-v2</a:t>
-                      </a:r>
-                    </a:p>
-                  </a:txBody>
-                  <a:tcPr/>
-                </a:tc>
-                <a:tc>
-                  <a:txBody>
-                    <a:bodyPr/>
-                    <a:lstStyle/>
-                    <a:p>
-                      <a:pPr marL="0" marR="0" lvl="0" indent="0" algn="ctr" defTabSz="914400" rtl="0" eaLnBrk="1" fontAlgn="auto" latinLnBrk="0" hangingPunct="1">
-                        <a:lnSpc>
-                          <a:spcPct val="100000"/>
-                        </a:lnSpc>
-                        <a:spcBef>
-                          <a:spcPts val="0"/>
-                        </a:spcBef>
-                        <a:spcAft>
-                          <a:spcPts val="0"/>
-                        </a:spcAft>
-                        <a:buClrTx/>
-                        <a:buSzTx/>
-                        <a:buFontTx/>
-                        <a:buNone/>
-                        <a:tabLst/>
-                        <a:defRPr/>
-                      </a:pPr>
-                      <a:r>
-                        <a:rPr lang="en-US" sz="900" dirty="0"/>
-                        <a:t>e5-large</a:t>
-                      </a:r>
-                    </a:p>
-                    <a:p>
-                      <a:pPr algn="ctr"/>
-                      <a:endParaRPr lang="en-US" sz="900" dirty="0"/>
-                    </a:p>
-                  </a:txBody>
-                  <a:tcPr/>
+              <a:tr h="230821">
+                <a:tc>
+                  <a:txBody>
+                    <a:bodyPr/>
+                    <a:lstStyle/>
+                    <a:p>
+                      <a:pPr marL="171450" indent="-171450" algn="l">
+                        <a:buFont typeface="Arial" panose="020B0604020202020204" pitchFamily="34" charset="0"/>
+                        <a:buChar char="•"/>
+                      </a:pPr>
+                      <a:r>
+                        <a:rPr lang="en-US" sz="1000" dirty="0" err="1"/>
+                        <a:t>SapBERT</a:t>
+                      </a:r>
+                      <a:endParaRPr lang="en-US" sz="1000" dirty="0"/>
+                    </a:p>
+                  </a:txBody>
+                  <a:tcPr>
+                    <a:lnL w="12700" cap="flat" cmpd="sng" algn="ctr">
+                      <a:noFill/>
+                      <a:prstDash val="solid"/>
+                      <a:round/>
+                      <a:headEnd type="none" w="med" len="med"/>
+                      <a:tailEnd type="none" w="med" len="med"/>
+                    </a:lnL>
+                    <a:lnR w="12700" cmpd="sng">
+                      <a:noFill/>
+                    </a:lnR>
+                    <a:lnT w="12700" cmpd="sng">
+                      <a:noFill/>
+                    </a:lnT>
+                    <a:lnB w="12700" cmpd="sng">
+                      <a:noFill/>
+                    </a:lnB>
+                    <a:lnTlToBr w="12700" cmpd="sng">
+                      <a:noFill/>
+                      <a:prstDash val="solid"/>
+                    </a:lnTlToBr>
+                    <a:lnBlToTr w="12700" cmpd="sng">
+                      <a:noFill/>
+                      <a:prstDash val="solid"/>
+                    </a:lnBlToTr>
+                    <a:noFill/>
+                  </a:tcPr>
+                </a:tc>
+                <a:tc>
+                  <a:txBody>
+                    <a:bodyPr/>
+                    <a:lstStyle/>
+                    <a:p>
+                      <a:pPr marL="171450" marR="0" lvl="0" indent="-171450" algn="l" defTabSz="914400" rtl="0" eaLnBrk="1" fontAlgn="auto" latinLnBrk="0" hangingPunct="1">
+                        <a:lnSpc>
+                          <a:spcPct val="100000"/>
+                        </a:lnSpc>
+                        <a:spcBef>
+                          <a:spcPts val="0"/>
+                        </a:spcBef>
+                        <a:spcAft>
+                          <a:spcPts val="0"/>
+                        </a:spcAft>
+                        <a:buClrTx/>
+                        <a:buSzTx/>
+                        <a:buFont typeface="Arial" panose="020B0604020202020204" pitchFamily="34" charset="0"/>
+                        <a:buChar char="•"/>
+                        <a:tabLst/>
+                        <a:defRPr/>
+                      </a:pPr>
+                      <a:r>
+                        <a:rPr lang="en-US" sz="1000" dirty="0"/>
+                        <a:t>all-roberta-large-v1</a:t>
+                      </a:r>
+                    </a:p>
+                  </a:txBody>
+                  <a:tcPr>
+                    <a:lnL w="12700" cmpd="sng">
+                      <a:noFill/>
+                    </a:lnL>
+                    <a:lnR w="12700" cmpd="sng">
+                      <a:noFill/>
+                    </a:lnR>
+                    <a:lnT w="12700" cmpd="sng">
+                      <a:noFill/>
+                    </a:lnT>
+                    <a:lnB w="12700" cmpd="sng">
+                      <a:noFill/>
+                    </a:lnB>
+                    <a:lnTlToBr w="12700" cmpd="sng">
+                      <a:noFill/>
+                      <a:prstDash val="solid"/>
+                    </a:lnTlToBr>
+                    <a:lnBlToTr w="12700" cmpd="sng">
+                      <a:noFill/>
+                      <a:prstDash val="solid"/>
+                    </a:lnBlToTr>
+                    <a:noFill/>
+                  </a:tcPr>
+                </a:tc>
+                <a:tc>
+                  <a:txBody>
+                    <a:bodyPr/>
+                    <a:lstStyle/>
+                    <a:p>
+                      <a:pPr marL="171450" indent="-171450" algn="l">
+                        <a:buFont typeface="Arial" panose="020B0604020202020204" pitchFamily="34" charset="0"/>
+                        <a:buChar char="•"/>
+                      </a:pPr>
+                      <a:r>
+                        <a:rPr lang="en-US" sz="1000" dirty="0" err="1"/>
+                        <a:t>clinicalBERT</a:t>
+                      </a:r>
+                      <a:endParaRPr lang="en-US" sz="1000" dirty="0"/>
+                    </a:p>
+                  </a:txBody>
+                  <a:tcPr>
+                    <a:lnL w="12700" cmpd="sng">
+                      <a:noFill/>
+                    </a:lnL>
+                    <a:lnR w="12700" cap="flat" cmpd="sng" algn="ctr">
+                      <a:noFill/>
+                      <a:prstDash val="solid"/>
+                      <a:round/>
+                      <a:headEnd type="none" w="med" len="med"/>
+                      <a:tailEnd type="none" w="med" len="med"/>
+                    </a:lnR>
+                    <a:lnT w="12700" cmpd="sng">
+                      <a:noFill/>
+                    </a:lnT>
+                    <a:lnB w="12700" cmpd="sng">
+                      <a:noFill/>
+                    </a:lnB>
+                    <a:lnTlToBr w="12700" cmpd="sng">
+                      <a:noFill/>
+                      <a:prstDash val="solid"/>
+                    </a:lnTlToBr>
+                    <a:lnBlToTr w="12700" cmpd="sng">
+                      <a:noFill/>
+                      <a:prstDash val="solid"/>
+                    </a:lnBlToTr>
+                    <a:noFill/>
+                  </a:tcPr>
                 </a:tc>
                 <a:extLst>
                   <a:ext uri="{0D108BD9-81ED-4DB2-BD59-A6C34878D82A}">
@@ -5334,34 +6344,173 @@
                   </a:ext>
                 </a:extLst>
               </a:tr>
-              <a:tr h="235785">
-                <a:tc>
-                  <a:txBody>
-                    <a:bodyPr/>
-                    <a:lstStyle/>
-                    <a:p>
-                      <a:pPr algn="ctr"/>
-                      <a:r>
-                        <a:rPr lang="en-US" sz="900" dirty="0"/>
-                        <a:t>gtr-t5-large</a:t>
-                      </a:r>
-                    </a:p>
-                  </a:txBody>
-                  <a:tcPr/>
-                </a:tc>
-                <a:tc>
-                  <a:txBody>
-                    <a:bodyPr/>
-                    <a:lstStyle/>
-                    <a:p>
-                      <a:pPr algn="ctr"/>
-                      <a:r>
-                        <a:rPr lang="en-US" sz="900" dirty="0"/>
-                        <a:t>all-mpnet-base-v2</a:t>
-                      </a:r>
-                    </a:p>
-                  </a:txBody>
-                  <a:tcPr/>
+              <a:tr h="144263">
+                <a:tc>
+                  <a:txBody>
+                    <a:bodyPr/>
+                    <a:lstStyle/>
+                    <a:p>
+                      <a:pPr marL="171450" indent="-171450" algn="l">
+                        <a:buFont typeface="Arial" panose="020B0604020202020204" pitchFamily="34" charset="0"/>
+                        <a:buChar char="•"/>
+                      </a:pPr>
+                      <a:r>
+                        <a:rPr lang="en-US" sz="1000" dirty="0" err="1"/>
+                        <a:t>LaBSE</a:t>
+                      </a:r>
+                      <a:endParaRPr lang="en-US" sz="1000" dirty="0"/>
+                    </a:p>
+                  </a:txBody>
+                  <a:tcPr>
+                    <a:lnL w="12700" cap="flat" cmpd="sng" algn="ctr">
+                      <a:noFill/>
+                      <a:prstDash val="solid"/>
+                      <a:round/>
+                      <a:headEnd type="none" w="med" len="med"/>
+                      <a:tailEnd type="none" w="med" len="med"/>
+                    </a:lnL>
+                    <a:lnR w="12700" cmpd="sng">
+                      <a:noFill/>
+                    </a:lnR>
+                    <a:lnT w="12700" cmpd="sng">
+                      <a:noFill/>
+                    </a:lnT>
+                    <a:lnB w="12700" cmpd="sng">
+                      <a:noFill/>
+                    </a:lnB>
+                    <a:lnTlToBr w="12700" cmpd="sng">
+                      <a:noFill/>
+                      <a:prstDash val="solid"/>
+                    </a:lnTlToBr>
+                    <a:lnBlToTr w="12700" cmpd="sng">
+                      <a:noFill/>
+                      <a:prstDash val="solid"/>
+                    </a:lnBlToTr>
+                    <a:noFill/>
+                  </a:tcPr>
+                </a:tc>
+                <a:tc>
+                  <a:txBody>
+                    <a:bodyPr/>
+                    <a:lstStyle/>
+                    <a:p>
+                      <a:pPr marL="171450" marR="0" lvl="0" indent="-171450" algn="l" defTabSz="914400" rtl="0" eaLnBrk="1" fontAlgn="auto" latinLnBrk="0" hangingPunct="1">
+                        <a:lnSpc>
+                          <a:spcPct val="100000"/>
+                        </a:lnSpc>
+                        <a:spcBef>
+                          <a:spcPts val="0"/>
+                        </a:spcBef>
+                        <a:spcAft>
+                          <a:spcPts val="0"/>
+                        </a:spcAft>
+                        <a:buClrTx/>
+                        <a:buSzTx/>
+                        <a:buFont typeface="Arial" panose="020B0604020202020204" pitchFamily="34" charset="0"/>
+                        <a:buChar char="•"/>
+                        <a:tabLst/>
+                        <a:defRPr/>
+                      </a:pPr>
+                      <a:r>
+                        <a:rPr lang="en-US" sz="1000" dirty="0" err="1"/>
+                        <a:t>BioGPT</a:t>
+                      </a:r>
+                      <a:endParaRPr lang="en-US" sz="1000" dirty="0"/>
+                    </a:p>
+                    <a:p>
+                      <a:pPr marL="171450" indent="-171450" algn="l">
+                        <a:buFont typeface="Arial" panose="020B0604020202020204" pitchFamily="34" charset="0"/>
+                        <a:buChar char="•"/>
+                      </a:pPr>
+                      <a:endParaRPr lang="en-US" sz="1000" dirty="0"/>
+                    </a:p>
+                  </a:txBody>
+                  <a:tcPr>
+                    <a:lnL w="12700" cmpd="sng">
+                      <a:noFill/>
+                    </a:lnL>
+                    <a:lnR w="12700" cmpd="sng">
+                      <a:noFill/>
+                    </a:lnR>
+                    <a:lnT w="12700" cmpd="sng">
+                      <a:noFill/>
+                    </a:lnT>
+                    <a:lnB w="12700" cmpd="sng">
+                      <a:noFill/>
+                    </a:lnB>
+                    <a:lnTlToBr w="12700" cmpd="sng">
+                      <a:noFill/>
+                      <a:prstDash val="solid"/>
+                    </a:lnTlToBr>
+                    <a:lnBlToTr w="12700" cmpd="sng">
+                      <a:noFill/>
+                      <a:prstDash val="solid"/>
+                    </a:lnBlToTr>
+                    <a:noFill/>
+                  </a:tcPr>
+                </a:tc>
+                <a:tc>
+                  <a:txBody>
+                    <a:bodyPr/>
+                    <a:lstStyle/>
+                    <a:p>
+                      <a:pPr marL="171450" marR="0" lvl="0" indent="-171450" algn="l" defTabSz="914400" rtl="0" eaLnBrk="1" fontAlgn="auto" latinLnBrk="0" hangingPunct="1">
+                        <a:lnSpc>
+                          <a:spcPct val="100000"/>
+                        </a:lnSpc>
+                        <a:spcBef>
+                          <a:spcPts val="0"/>
+                        </a:spcBef>
+                        <a:spcAft>
+                          <a:spcPts val="0"/>
+                        </a:spcAft>
+                        <a:buClrTx/>
+                        <a:buSzTx/>
+                        <a:buFont typeface="Arial" panose="020B0604020202020204" pitchFamily="34" charset="0"/>
+                        <a:buChar char="•"/>
+                        <a:tabLst/>
+                        <a:defRPr/>
+                      </a:pPr>
+                      <a:r>
+                        <a:rPr lang="en-US" sz="1000" dirty="0"/>
+                        <a:t>DeepSeek_8B</a:t>
+                      </a:r>
+                    </a:p>
+                    <a:p>
+                      <a:pPr marL="171450" indent="-171450" algn="l">
+                        <a:buFont typeface="Arial" panose="020B0604020202020204" pitchFamily="34" charset="0"/>
+                        <a:buChar char="•"/>
+                      </a:pPr>
+                      <a:endParaRPr lang="en-US" sz="1000" dirty="0"/>
+                    </a:p>
+                  </a:txBody>
+                  <a:tcPr>
+                    <a:lnL w="12700" cmpd="sng">
+                      <a:noFill/>
+                    </a:lnL>
+                    <a:lnR w="12700" cap="flat" cmpd="sng" algn="ctr">
+                      <a:noFill/>
+                      <a:prstDash val="solid"/>
+                      <a:round/>
+                      <a:headEnd type="none" w="med" len="med"/>
+                      <a:tailEnd type="none" w="med" len="med"/>
+                    </a:lnR>
+                    <a:lnT w="12700" cmpd="sng">
+                      <a:noFill/>
+                    </a:lnT>
+                    <a:lnB w="12700" cmpd="sng">
+                      <a:noFill/>
+                    </a:lnB>
+                    <a:lnTlToBr w="12700" cmpd="sng">
+                      <a:noFill/>
+                      <a:prstDash val="solid"/>
+                    </a:lnTlToBr>
+                    <a:lnBlToTr w="12700" cmpd="sng">
+                      <a:noFill/>
+                      <a:prstDash val="solid"/>
+                    </a:lnBlToTr>
+                    <a:noFill/>
+                  </a:tcPr>
                 </a:tc>
                 <a:extLst>
                   <a:ext uri="{0D108BD9-81ED-4DB2-BD59-A6C34878D82A}">
@@ -5369,263 +6518,165 @@
                   </a:ext>
                 </a:extLst>
               </a:tr>
-              <a:tr h="235785">
-                <a:tc>
-                  <a:txBody>
-                    <a:bodyPr/>
-                    <a:lstStyle/>
-                    <a:p>
-                      <a:pPr algn="ctr"/>
-                      <a:r>
-                        <a:rPr lang="en-US" sz="900" dirty="0"/>
-                        <a:t>all-MiniLM-L6-v2</a:t>
-                      </a:r>
-                    </a:p>
-                  </a:txBody>
-                  <a:tcPr/>
-                </a:tc>
-                <a:tc>
-                  <a:txBody>
-                    <a:bodyPr/>
-                    <a:lstStyle/>
-                    <a:p>
-                      <a:pPr algn="ctr"/>
-                      <a:r>
-                        <a:rPr lang="en-US" sz="900" dirty="0"/>
-                        <a:t>all-MiniLM-L12-v2</a:t>
-                      </a:r>
-                    </a:p>
-                  </a:txBody>
-                  <a:tcPr/>
+              <a:tr h="144263">
+                <a:tc>
+                  <a:txBody>
+                    <a:bodyPr/>
+                    <a:lstStyle/>
+                    <a:p>
+                      <a:pPr marL="171450" indent="-171450" algn="l">
+                        <a:buFont typeface="Arial" panose="020B0604020202020204" pitchFamily="34" charset="0"/>
+                        <a:buChar char="•"/>
+                      </a:pPr>
+                      <a:r>
+                        <a:rPr lang="en-US" sz="1000" dirty="0" err="1"/>
+                        <a:t>sciBERT</a:t>
+                      </a:r>
+                      <a:endParaRPr lang="en-US" sz="1000" dirty="0"/>
+                    </a:p>
+                  </a:txBody>
+                  <a:tcPr>
+                    <a:lnL w="12700" cap="flat" cmpd="sng" algn="ctr">
+                      <a:noFill/>
+                      <a:prstDash val="solid"/>
+                      <a:round/>
+                      <a:headEnd type="none" w="med" len="med"/>
+                      <a:tailEnd type="none" w="med" len="med"/>
+                    </a:lnL>
+                    <a:lnR w="12700" cmpd="sng">
+                      <a:noFill/>
+                    </a:lnR>
+                    <a:lnT w="12700" cmpd="sng">
+                      <a:noFill/>
+                    </a:lnT>
+                    <a:lnB w="12700" cap="flat" cmpd="sng" algn="ctr">
+                      <a:noFill/>
+                      <a:prstDash val="solid"/>
+                      <a:round/>
+                      <a:headEnd type="none" w="med" len="med"/>
+                      <a:tailEnd type="none" w="med" len="med"/>
+                    </a:lnB>
+                    <a:lnTlToBr w="12700" cmpd="sng">
+                      <a:noFill/>
+                      <a:prstDash val="solid"/>
+                    </a:lnTlToBr>
+                    <a:lnBlToTr w="12700" cmpd="sng">
+                      <a:noFill/>
+                      <a:prstDash val="solid"/>
+                    </a:lnBlToTr>
+                    <a:noFill/>
+                  </a:tcPr>
+                </a:tc>
+                <a:tc>
+                  <a:txBody>
+                    <a:bodyPr/>
+                    <a:lstStyle/>
+                    <a:p>
+                      <a:pPr marL="171450" marR="0" lvl="0" indent="-171450" algn="l" defTabSz="914400" rtl="0" eaLnBrk="1" fontAlgn="auto" latinLnBrk="0" hangingPunct="1">
+                        <a:lnSpc>
+                          <a:spcPct val="100000"/>
+                        </a:lnSpc>
+                        <a:spcBef>
+                          <a:spcPts val="0"/>
+                        </a:spcBef>
+                        <a:spcAft>
+                          <a:spcPts val="0"/>
+                        </a:spcAft>
+                        <a:buClrTx/>
+                        <a:buSzTx/>
+                        <a:buFont typeface="Arial" panose="020B0604020202020204" pitchFamily="34" charset="0"/>
+                        <a:buChar char="•"/>
+                        <a:tabLst/>
+                        <a:defRPr/>
+                      </a:pPr>
+                      <a:r>
+                        <a:rPr lang="en-US" sz="1000" dirty="0"/>
+                        <a:t>nomic-embed-text</a:t>
+                      </a:r>
+                    </a:p>
+                    <a:p>
+                      <a:pPr marL="171450" indent="-171450" algn="l">
+                        <a:buFont typeface="Arial" panose="020B0604020202020204" pitchFamily="34" charset="0"/>
+                        <a:buChar char="•"/>
+                      </a:pPr>
+                      <a:endParaRPr lang="en-US" sz="1000" dirty="0"/>
+                    </a:p>
+                  </a:txBody>
+                  <a:tcPr>
+                    <a:lnL w="12700" cmpd="sng">
+                      <a:noFill/>
+                    </a:lnL>
+                    <a:lnR w="12700" cmpd="sng">
+                      <a:noFill/>
+                    </a:lnR>
+                    <a:lnT w="12700" cmpd="sng">
+                      <a:noFill/>
+                    </a:lnT>
+                    <a:lnB w="12700" cap="flat" cmpd="sng" algn="ctr">
+                      <a:noFill/>
+                      <a:prstDash val="solid"/>
+                      <a:round/>
+                      <a:headEnd type="none" w="med" len="med"/>
+                      <a:tailEnd type="none" w="med" len="med"/>
+                    </a:lnB>
+                    <a:lnTlToBr w="12700" cmpd="sng">
+                      <a:noFill/>
+                      <a:prstDash val="solid"/>
+                    </a:lnTlToBr>
+                    <a:lnBlToTr w="12700" cmpd="sng">
+                      <a:noFill/>
+                      <a:prstDash val="solid"/>
+                    </a:lnBlToTr>
+                    <a:noFill/>
+                  </a:tcPr>
+                </a:tc>
+                <a:tc>
+                  <a:txBody>
+                    <a:bodyPr/>
+                    <a:lstStyle/>
+                    <a:p>
+                      <a:pPr marL="171450" indent="-171450" algn="l">
+                        <a:buFont typeface="Arial" panose="020B0604020202020204" pitchFamily="34" charset="0"/>
+                        <a:buChar char="•"/>
+                      </a:pPr>
+                      <a:endParaRPr lang="en-US" sz="1000" dirty="0"/>
+                    </a:p>
+                  </a:txBody>
+                  <a:tcPr>
+                    <a:lnL w="12700" cmpd="sng">
+                      <a:noFill/>
+                    </a:lnL>
+                    <a:lnR w="12700" cap="flat" cmpd="sng" algn="ctr">
+                      <a:noFill/>
+                      <a:prstDash val="solid"/>
+                      <a:round/>
+                      <a:headEnd type="none" w="med" len="med"/>
+                      <a:tailEnd type="none" w="med" len="med"/>
+                    </a:lnR>
+                    <a:lnT w="12700" cmpd="sng">
+                      <a:noFill/>
+                    </a:lnT>
+                    <a:lnB w="12700" cap="flat" cmpd="sng" algn="ctr">
+                      <a:noFill/>
+                      <a:prstDash val="solid"/>
+                      <a:round/>
+                      <a:headEnd type="none" w="med" len="med"/>
+                      <a:tailEnd type="none" w="med" len="med"/>
+                    </a:lnB>
+                    <a:lnTlToBr w="12700" cmpd="sng">
+                      <a:noFill/>
+                      <a:prstDash val="solid"/>
+                    </a:lnTlToBr>
+                    <a:lnBlToTr w="12700" cmpd="sng">
+                      <a:noFill/>
+                      <a:prstDash val="solid"/>
+                    </a:lnBlToTr>
+                    <a:noFill/>
+                  </a:tcPr>
                 </a:tc>
                 <a:extLst>
                   <a:ext uri="{0D108BD9-81ED-4DB2-BD59-A6C34878D82A}">
                     <a16:rowId xmlns:a16="http://schemas.microsoft.com/office/drawing/2014/main" val="3766593195"/>
-                  </a:ext>
-                </a:extLst>
-              </a:tr>
-              <a:tr h="377257">
-                <a:tc>
-                  <a:txBody>
-                    <a:bodyPr/>
-                    <a:lstStyle/>
-                    <a:p>
-                      <a:pPr algn="ctr"/>
-                      <a:r>
-                        <a:rPr lang="en-US" sz="900" dirty="0" err="1"/>
-                        <a:t>SapBERT</a:t>
-                      </a:r>
-                      <a:endParaRPr lang="en-US" sz="900" dirty="0"/>
-                    </a:p>
-                  </a:txBody>
-                  <a:tcPr/>
-                </a:tc>
-                <a:tc>
-                  <a:txBody>
-                    <a:bodyPr/>
-                    <a:lstStyle/>
-                    <a:p>
-                      <a:pPr marL="0" marR="0" lvl="0" indent="0" algn="ctr" defTabSz="914400" rtl="0" eaLnBrk="1" fontAlgn="auto" latinLnBrk="0" hangingPunct="1">
-                        <a:lnSpc>
-                          <a:spcPct val="100000"/>
-                        </a:lnSpc>
-                        <a:spcBef>
-                          <a:spcPts val="0"/>
-                        </a:spcBef>
-                        <a:spcAft>
-                          <a:spcPts val="0"/>
-                        </a:spcAft>
-                        <a:buClrTx/>
-                        <a:buSzTx/>
-                        <a:buFontTx/>
-                        <a:buNone/>
-                        <a:tabLst/>
-                        <a:defRPr/>
-                      </a:pPr>
-                      <a:r>
-                        <a:rPr lang="en-US" sz="900" dirty="0"/>
-                        <a:t>all-roberta-large-v1</a:t>
-                      </a:r>
-                    </a:p>
-                    <a:p>
-                      <a:pPr algn="ctr"/>
-                      <a:endParaRPr lang="en-US" sz="900" dirty="0"/>
-                    </a:p>
-                  </a:txBody>
-                  <a:tcPr/>
-                </a:tc>
-                <a:extLst>
-                  <a:ext uri="{0D108BD9-81ED-4DB2-BD59-A6C34878D82A}">
-                    <a16:rowId xmlns:a16="http://schemas.microsoft.com/office/drawing/2014/main" val="588821290"/>
-                  </a:ext>
-                </a:extLst>
-              </a:tr>
-              <a:tr h="235785">
-                <a:tc>
-                  <a:txBody>
-                    <a:bodyPr/>
-                    <a:lstStyle/>
-                    <a:p>
-                      <a:pPr algn="ctr"/>
-                      <a:r>
-                        <a:rPr lang="en-US" sz="900" dirty="0" err="1"/>
-                        <a:t>clinicalBERT</a:t>
-                      </a:r>
-                      <a:endParaRPr lang="en-US" sz="900" dirty="0"/>
-                    </a:p>
-                  </a:txBody>
-                  <a:tcPr/>
-                </a:tc>
-                <a:tc>
-                  <a:txBody>
-                    <a:bodyPr/>
-                    <a:lstStyle/>
-                    <a:p>
-                      <a:pPr algn="ctr"/>
-                      <a:r>
-                        <a:rPr lang="en-US" sz="900" dirty="0" err="1"/>
-                        <a:t>LaBSE</a:t>
-                      </a:r>
-                      <a:endParaRPr lang="en-US" sz="900" dirty="0"/>
-                    </a:p>
-                  </a:txBody>
-                  <a:tcPr/>
-                </a:tc>
-                <a:extLst>
-                  <a:ext uri="{0D108BD9-81ED-4DB2-BD59-A6C34878D82A}">
-                    <a16:rowId xmlns:a16="http://schemas.microsoft.com/office/drawing/2014/main" val="2901117500"/>
-                  </a:ext>
-                </a:extLst>
-              </a:tr>
-              <a:tr h="377257">
-                <a:tc>
-                  <a:txBody>
-                    <a:bodyPr/>
-                    <a:lstStyle/>
-                    <a:p>
-                      <a:pPr marL="0" marR="0" lvl="0" indent="0" algn="ctr" defTabSz="914400" rtl="0" eaLnBrk="1" fontAlgn="auto" latinLnBrk="0" hangingPunct="1">
-                        <a:lnSpc>
-                          <a:spcPct val="100000"/>
-                        </a:lnSpc>
-                        <a:spcBef>
-                          <a:spcPts val="0"/>
-                        </a:spcBef>
-                        <a:spcAft>
-                          <a:spcPts val="0"/>
-                        </a:spcAft>
-                        <a:buClrTx/>
-                        <a:buSzTx/>
-                        <a:buFontTx/>
-                        <a:buNone/>
-                        <a:tabLst/>
-                        <a:defRPr/>
-                      </a:pPr>
-                      <a:r>
-                        <a:rPr lang="en-US" sz="900" dirty="0" err="1"/>
-                        <a:t>BioGPT</a:t>
-                      </a:r>
-                      <a:endParaRPr lang="en-US" sz="900" dirty="0"/>
-                    </a:p>
-                    <a:p>
-                      <a:pPr algn="ctr"/>
-                      <a:endParaRPr lang="en-US" sz="900" dirty="0"/>
-                    </a:p>
-                  </a:txBody>
-                  <a:tcPr/>
-                </a:tc>
-                <a:tc>
-                  <a:txBody>
-                    <a:bodyPr/>
-                    <a:lstStyle/>
-                    <a:p>
-                      <a:pPr marL="0" marR="0" lvl="0" indent="0" algn="ctr" defTabSz="914400" rtl="0" eaLnBrk="1" fontAlgn="auto" latinLnBrk="0" hangingPunct="1">
-                        <a:lnSpc>
-                          <a:spcPct val="100000"/>
-                        </a:lnSpc>
-                        <a:spcBef>
-                          <a:spcPts val="0"/>
-                        </a:spcBef>
-                        <a:spcAft>
-                          <a:spcPts val="0"/>
-                        </a:spcAft>
-                        <a:buClrTx/>
-                        <a:buSzTx/>
-                        <a:buFontTx/>
-                        <a:buNone/>
-                        <a:tabLst/>
-                        <a:defRPr/>
-                      </a:pPr>
-                      <a:r>
-                        <a:rPr lang="en-US" sz="900" dirty="0"/>
-                        <a:t>DeepSeek_8B</a:t>
-                      </a:r>
-                    </a:p>
-                    <a:p>
-                      <a:pPr algn="ctr"/>
-                      <a:endParaRPr lang="en-US" sz="900" dirty="0"/>
-                    </a:p>
-                  </a:txBody>
-                  <a:tcPr/>
-                </a:tc>
-                <a:extLst>
-                  <a:ext uri="{0D108BD9-81ED-4DB2-BD59-A6C34878D82A}">
-                    <a16:rowId xmlns:a16="http://schemas.microsoft.com/office/drawing/2014/main" val="1086751412"/>
-                  </a:ext>
-                </a:extLst>
-              </a:tr>
-              <a:tr h="377257">
-                <a:tc>
-                  <a:txBody>
-                    <a:bodyPr/>
-                    <a:lstStyle/>
-                    <a:p>
-                      <a:pPr algn="ctr"/>
-                      <a:r>
-                        <a:rPr lang="en-US" sz="900" dirty="0" err="1"/>
-                        <a:t>sciBERT</a:t>
-                      </a:r>
-                      <a:endParaRPr lang="en-US" sz="900" dirty="0"/>
-                    </a:p>
-                  </a:txBody>
-                  <a:tcPr/>
-                </a:tc>
-                <a:tc>
-                  <a:txBody>
-                    <a:bodyPr/>
-                    <a:lstStyle/>
-                    <a:p>
-                      <a:pPr marL="0" marR="0" lvl="0" indent="0" algn="ctr" defTabSz="914400" rtl="0" eaLnBrk="1" fontAlgn="auto" latinLnBrk="0" hangingPunct="1">
-                        <a:lnSpc>
-                          <a:spcPct val="100000"/>
-                        </a:lnSpc>
-                        <a:spcBef>
-                          <a:spcPts val="0"/>
-                        </a:spcBef>
-                        <a:spcAft>
-                          <a:spcPts val="0"/>
-                        </a:spcAft>
-                        <a:buClrTx/>
-                        <a:buSzTx/>
-                        <a:buFontTx/>
-                        <a:buNone/>
-                        <a:tabLst/>
-                        <a:defRPr/>
-                      </a:pPr>
-                      <a:r>
-                        <a:rPr lang="en-US" sz="900" dirty="0"/>
-                        <a:t>nomic-embed-text</a:t>
-                      </a:r>
-                    </a:p>
-                    <a:p>
-                      <a:pPr algn="ctr"/>
-                      <a:endParaRPr lang="en-US" sz="900" dirty="0"/>
-                    </a:p>
-                  </a:txBody>
-                  <a:tcPr/>
-                </a:tc>
-                <a:extLst>
-                  <a:ext uri="{0D108BD9-81ED-4DB2-BD59-A6C34878D82A}">
-                    <a16:rowId xmlns:a16="http://schemas.microsoft.com/office/drawing/2014/main" val="3984900074"/>
                   </a:ext>
                 </a:extLst>
               </a:tr>
@@ -5646,7 +6697,7 @@
 </p:sld>
 </file>
 
-<file path=ppt/slides/slide16.xml><?xml version="1.0" encoding="utf-8"?>
+<file path=ppt/slides/slide15.xml><?xml version="1.0" encoding="utf-8"?>
 <p:sld xmlns:a="http://schemas.openxmlformats.org/drawingml/2006/main" xmlns:r="http://schemas.openxmlformats.org/officeDocument/2006/relationships" xmlns:p="http://schemas.openxmlformats.org/presentationml/2006/main">
   <p:cSld>
     <p:spTree>
@@ -5687,7 +6738,7 @@
             <a:fld id="{AD40181A-01B0-4CB8-8614-1473649F6741}" type="slidenum">
               <a:rPr lang="en-US" smtClean="0"/>
               <a:pPr/>
-              <a:t>16</a:t>
+              <a:t>15</a:t>
             </a:fld>
             <a:endParaRPr lang="en-US" dirty="0"/>
           </a:p>
@@ -5708,14 +6759,14 @@
           <p:nvPr>
             <p:extLst>
               <p:ext uri="{D42A27DB-BD31-4B8C-83A1-F6EECF244321}">
-                <p14:modId xmlns:p14="http://schemas.microsoft.com/office/powerpoint/2010/main" val="715380665"/>
+                <p14:modId xmlns:p14="http://schemas.microsoft.com/office/powerpoint/2010/main" val="1524688020"/>
               </p:ext>
             </p:extLst>
           </p:nvPr>
         </p:nvGraphicFramePr>
         <p:xfrm>
-          <a:off x="6095999" y="461666"/>
-          <a:ext cx="5889171" cy="5926145"/>
+          <a:off x="6302829" y="2"/>
+          <a:ext cx="5571545" cy="7708194"/>
         </p:xfrm>
         <a:graphic>
           <a:graphicData uri="http://schemas.openxmlformats.org/drawingml/2006/table">
@@ -5724,21 +6775,21 @@
                 <a:tableStyleId>{5C22544A-7EE6-4342-B048-85BDC9FD1C3A}</a:tableStyleId>
               </a:tblPr>
               <a:tblGrid>
-                <a:gridCol w="1191319">
+                <a:gridCol w="1127067">
                   <a:extLst>
                     <a:ext uri="{9D8B030D-6E8A-4147-A177-3AD203B41FA5}">
                       <a16:colId xmlns:a16="http://schemas.microsoft.com/office/drawing/2014/main" val="3177516889"/>
                     </a:ext>
                   </a:extLst>
                 </a:gridCol>
-                <a:gridCol w="1770817">
+                <a:gridCol w="1675309">
                   <a:extLst>
                     <a:ext uri="{9D8B030D-6E8A-4147-A177-3AD203B41FA5}">
                       <a16:colId xmlns:a16="http://schemas.microsoft.com/office/drawing/2014/main" val="523317735"/>
                     </a:ext>
                   </a:extLst>
                 </a:gridCol>
-                <a:gridCol w="2927035">
+                <a:gridCol w="2769169">
                   <a:extLst>
                     <a:ext uri="{9D8B030D-6E8A-4147-A177-3AD203B41FA5}">
                       <a16:colId xmlns:a16="http://schemas.microsoft.com/office/drawing/2014/main" val="2056308797"/>
@@ -5746,7 +6797,7 @@
                   </a:extLst>
                 </a:gridCol>
               </a:tblGrid>
-              <a:tr h="329241">
+              <a:tr h="318233">
                 <a:tc>
                   <a:txBody>
                     <a:bodyPr/>
@@ -5912,7 +6963,7 @@
                   </a:ext>
                 </a:extLst>
               </a:tr>
-              <a:tr h="194551">
+              <a:tr h="188047">
                 <a:tc>
                   <a:txBody>
                     <a:bodyPr/>
@@ -6048,7 +7099,7 @@
                   </a:ext>
                 </a:extLst>
               </a:tr>
-              <a:tr h="194551">
+              <a:tr h="142325">
                 <a:tc>
                   <a:txBody>
                     <a:bodyPr/>
@@ -6158,7 +7209,7 @@
                         <a:defRPr/>
                       </a:pPr>
                       <a:r>
-                        <a:rPr kumimoji="0" lang="en-US" sz="800" b="0" i="0" u="none" strike="noStrike" kern="1200" cap="none" spc="0" normalizeH="0" baseline="0">
+                        <a:rPr kumimoji="0" lang="en-US" sz="800" b="0" i="0" u="none" strike="noStrike" kern="1200" cap="none" spc="0" normalizeH="0" baseline="0" dirty="0">
                           <a:ln>
                             <a:noFill/>
                           </a:ln>
@@ -6184,7 +7235,7 @@
                   </a:ext>
                 </a:extLst>
               </a:tr>
-              <a:tr h="194551">
+              <a:tr h="188047">
                 <a:tc>
                   <a:txBody>
                     <a:bodyPr/>
@@ -6320,7 +7371,7 @@
                   </a:ext>
                 </a:extLst>
               </a:tr>
-              <a:tr h="289037">
+              <a:tr h="188047">
                 <a:tc>
                   <a:txBody>
                     <a:bodyPr/>
@@ -6456,7 +7507,7 @@
                   </a:ext>
                 </a:extLst>
               </a:tr>
-              <a:tr h="194551">
+              <a:tr h="188047">
                 <a:tc>
                   <a:txBody>
                     <a:bodyPr/>
@@ -6592,7 +7643,7 @@
                   </a:ext>
                 </a:extLst>
               </a:tr>
-              <a:tr h="211594">
+              <a:tr h="188047">
                 <a:tc>
                   <a:txBody>
                     <a:bodyPr/>
@@ -6728,7 +7779,7 @@
                   </a:ext>
                 </a:extLst>
               </a:tr>
-              <a:tr h="174172">
+              <a:tr h="271898">
                 <a:tc>
                   <a:txBody>
                     <a:bodyPr/>
@@ -6895,7 +7946,7 @@
                   </a:ext>
                 </a:extLst>
               </a:tr>
-              <a:tr h="194551">
+              <a:tr h="188047">
                 <a:tc>
                   <a:txBody>
                     <a:bodyPr/>
@@ -7031,7 +8082,7 @@
                   </a:ext>
                 </a:extLst>
               </a:tr>
-              <a:tr h="194551">
+              <a:tr h="188047">
                 <a:tc>
                   <a:txBody>
                     <a:bodyPr/>
@@ -7167,7 +8218,7 @@
                   </a:ext>
                 </a:extLst>
               </a:tr>
-              <a:tr h="194551">
+              <a:tr h="188047">
                 <a:tc>
                   <a:txBody>
                     <a:bodyPr/>
@@ -7303,7 +8354,7 @@
                   </a:ext>
                 </a:extLst>
               </a:tr>
-              <a:tr h="194551">
+              <a:tr h="188047">
                 <a:tc>
                   <a:txBody>
                     <a:bodyPr/>
@@ -7439,7 +8490,7 @@
                   </a:ext>
                 </a:extLst>
               </a:tr>
-              <a:tr h="174172">
+              <a:tr h="271898">
                 <a:tc>
                   <a:txBody>
                     <a:bodyPr/>
@@ -7575,7 +8626,7 @@
                   </a:ext>
                 </a:extLst>
               </a:tr>
-              <a:tr h="194551">
+              <a:tr h="188047">
                 <a:tc>
                   <a:txBody>
                     <a:bodyPr/>
@@ -7711,7 +8762,7 @@
                   </a:ext>
                 </a:extLst>
               </a:tr>
-              <a:tr h="194551">
+              <a:tr h="188047">
                 <a:tc>
                   <a:txBody>
                     <a:bodyPr/>
@@ -7847,7 +8898,7 @@
                   </a:ext>
                 </a:extLst>
               </a:tr>
-              <a:tr h="178526">
+              <a:tr h="291158">
                 <a:tc>
                   <a:txBody>
                     <a:bodyPr/>
@@ -8014,7 +9065,7 @@
                   </a:ext>
                 </a:extLst>
               </a:tr>
-              <a:tr h="194551">
+              <a:tr h="188047">
                 <a:tc>
                   <a:txBody>
                     <a:bodyPr/>
@@ -8081,7 +9132,7 @@
                         <a:defRPr/>
                       </a:pPr>
                       <a:r>
-                        <a:rPr kumimoji="0" lang="en-US" sz="800" b="0" i="0" u="none" strike="noStrike" kern="1200" cap="none" spc="0" normalizeH="0" baseline="0">
+                        <a:rPr kumimoji="0" lang="en-US" sz="800" b="0" i="0" u="none" strike="noStrike" kern="1200" cap="none" spc="0" normalizeH="0" baseline="0" dirty="0" err="1">
                           <a:ln>
                             <a:noFill/>
                           </a:ln>
@@ -8095,8 +9146,56 @@
                           <a:ea typeface="+mn-ea"/>
                           <a:cs typeface="+mn-cs"/>
                         </a:rPr>
-                        <a:t>SapBERT+Euclidean Dist</a:t>
-                      </a:r>
+                        <a:t>SapBERT+Euclidean</a:t>
+                      </a:r>
+                      <a:r>
+                        <a:rPr kumimoji="0" lang="en-US" sz="800" b="0" i="0" u="none" strike="noStrike" kern="1200" cap="none" spc="0" normalizeH="0" baseline="0" dirty="0">
+                          <a:ln>
+                            <a:noFill/>
+                          </a:ln>
+                          <a:solidFill>
+                            <a:srgbClr val="D11960"/>
+                          </a:solidFill>
+                          <a:effectLst/>
+                          <a:uLnTx/>
+                          <a:uFillTx/>
+                          <a:latin typeface="Georgia"/>
+                          <a:ea typeface="+mn-ea"/>
+                          <a:cs typeface="+mn-cs"/>
+                        </a:rPr>
+                        <a:t> </a:t>
+                      </a:r>
+                      <a:r>
+                        <a:rPr kumimoji="0" lang="en-US" sz="800" b="0" i="0" u="none" strike="noStrike" kern="1200" cap="none" spc="0" normalizeH="0" baseline="0" dirty="0" err="1">
+                          <a:ln>
+                            <a:noFill/>
+                          </a:ln>
+                          <a:solidFill>
+                            <a:srgbClr val="D11960"/>
+                          </a:solidFill>
+                          <a:effectLst/>
+                          <a:uLnTx/>
+                          <a:uFillTx/>
+                          <a:latin typeface="Georgia"/>
+                          <a:ea typeface="+mn-ea"/>
+                          <a:cs typeface="+mn-cs"/>
+                        </a:rPr>
+                        <a:t>Dist</a:t>
+                      </a:r>
+                      <a:endParaRPr kumimoji="0" lang="en-US" sz="800" b="0" i="0" u="none" strike="noStrike" kern="1200" cap="none" spc="0" normalizeH="0" baseline="0" dirty="0">
+                        <a:ln>
+                          <a:noFill/>
+                        </a:ln>
+                        <a:solidFill>
+                          <a:srgbClr val="D11960"/>
+                        </a:solidFill>
+                        <a:effectLst/>
+                        <a:uLnTx/>
+                        <a:uFillTx/>
+                        <a:latin typeface="Georgia"/>
+                        <a:ea typeface="+mn-ea"/>
+                        <a:cs typeface="+mn-cs"/>
+                      </a:endParaRPr>
                     </a:p>
                   </a:txBody>
                   <a:tcPr marL="12700" marR="12700" marT="12700" marB="63500"/>
@@ -8150,7 +9249,7 @@
                   </a:ext>
                 </a:extLst>
               </a:tr>
-              <a:tr h="194551">
+              <a:tr h="188047">
                 <a:tc>
                   <a:txBody>
                     <a:bodyPr/>
@@ -8286,7 +9385,7 @@
                   </a:ext>
                 </a:extLst>
               </a:tr>
-              <a:tr h="194551">
+              <a:tr h="188047">
                 <a:tc>
                   <a:txBody>
                     <a:bodyPr/>
@@ -8422,7 +9521,7 @@
                   </a:ext>
                 </a:extLst>
               </a:tr>
-              <a:tr h="194551">
+              <a:tr h="188047">
                 <a:tc>
                   <a:txBody>
                     <a:bodyPr/>
@@ -8558,7 +9657,7 @@
                   </a:ext>
                 </a:extLst>
               </a:tr>
-              <a:tr h="194551">
+              <a:tr h="188047">
                 <a:tc>
                   <a:txBody>
                     <a:bodyPr/>
@@ -8708,7 +9807,7 @@
                   </a:ext>
                 </a:extLst>
               </a:tr>
-              <a:tr h="194551">
+              <a:tr h="188047">
                 <a:tc>
                   <a:txBody>
                     <a:bodyPr/>
@@ -8844,7 +9943,7 @@
                   </a:ext>
                 </a:extLst>
               </a:tr>
-              <a:tr h="194551">
+              <a:tr h="188047">
                 <a:tc>
                   <a:txBody>
                     <a:bodyPr/>
@@ -8980,7 +10079,7 @@
                   </a:ext>
                 </a:extLst>
               </a:tr>
-              <a:tr h="194551">
+              <a:tr h="188047">
                 <a:tc>
                   <a:txBody>
                     <a:bodyPr/>
@@ -9116,7 +10215,7 @@
                   </a:ext>
                 </a:extLst>
               </a:tr>
-              <a:tr h="194551">
+              <a:tr h="188047">
                 <a:tc>
                   <a:txBody>
                     <a:bodyPr/>
@@ -9252,7 +10351,7 @@
                   </a:ext>
                 </a:extLst>
               </a:tr>
-              <a:tr h="266737">
+              <a:tr h="188047">
                 <a:tc>
                   <a:txBody>
                     <a:bodyPr/>
@@ -9319,7 +10418,7 @@
                         <a:defRPr/>
                       </a:pPr>
                       <a:r>
-                        <a:rPr kumimoji="0" lang="en-US" sz="800" b="0" i="0" u="none" strike="noStrike" kern="1200" cap="none" spc="0" normalizeH="0" baseline="0">
+                        <a:rPr kumimoji="0" lang="en-US" sz="800" b="0" i="0" u="none" strike="noStrike" kern="1200" cap="none" spc="0" normalizeH="0" baseline="0" dirty="0" err="1">
                           <a:ln>
                             <a:noFill/>
                           </a:ln>
@@ -9333,8 +10432,56 @@
                           <a:ea typeface="+mn-ea"/>
                           <a:cs typeface="+mn-cs"/>
                         </a:rPr>
-                        <a:t>Jarro Winkler+AP</a:t>
-                      </a:r>
+                        <a:t>Jarro</a:t>
+                      </a:r>
+                      <a:r>
+                        <a:rPr kumimoji="0" lang="en-US" sz="800" b="0" i="0" u="none" strike="noStrike" kern="1200" cap="none" spc="0" normalizeH="0" baseline="0" dirty="0">
+                          <a:ln>
+                            <a:noFill/>
+                          </a:ln>
+                          <a:solidFill>
+                            <a:schemeClr val="accent3"/>
+                          </a:solidFill>
+                          <a:effectLst/>
+                          <a:uLnTx/>
+                          <a:uFillTx/>
+                          <a:latin typeface="Georgia"/>
+                          <a:ea typeface="+mn-ea"/>
+                          <a:cs typeface="+mn-cs"/>
+                        </a:rPr>
+                        <a:t> </a:t>
+                      </a:r>
+                      <a:r>
+                        <a:rPr kumimoji="0" lang="en-US" sz="800" b="0" i="0" u="none" strike="noStrike" kern="1200" cap="none" spc="0" normalizeH="0" baseline="0" dirty="0" err="1">
+                          <a:ln>
+                            <a:noFill/>
+                          </a:ln>
+                          <a:solidFill>
+                            <a:schemeClr val="accent3"/>
+                          </a:solidFill>
+                          <a:effectLst/>
+                          <a:uLnTx/>
+                          <a:uFillTx/>
+                          <a:latin typeface="Georgia"/>
+                          <a:ea typeface="+mn-ea"/>
+                          <a:cs typeface="+mn-cs"/>
+                        </a:rPr>
+                        <a:t>Winkler+AP</a:t>
+                      </a:r>
+                      <a:endParaRPr kumimoji="0" lang="en-US" sz="800" b="0" i="0" u="none" strike="noStrike" kern="1200" cap="none" spc="0" normalizeH="0" baseline="0" dirty="0">
+                        <a:ln>
+                          <a:noFill/>
+                        </a:ln>
+                        <a:solidFill>
+                          <a:schemeClr val="accent3"/>
+                        </a:solidFill>
+                        <a:effectLst/>
+                        <a:uLnTx/>
+                        <a:uFillTx/>
+                        <a:latin typeface="Georgia"/>
+                        <a:ea typeface="+mn-ea"/>
+                        <a:cs typeface="+mn-cs"/>
+                      </a:endParaRPr>
                     </a:p>
                   </a:txBody>
                   <a:tcPr marL="12700" marR="12700" marT="12700" marB="63500"/>
@@ -9388,7 +10535,7 @@
                   </a:ext>
                 </a:extLst>
               </a:tr>
-              <a:tr h="194551">
+              <a:tr h="188047">
                 <a:tc>
                   <a:txBody>
                     <a:bodyPr/>
@@ -9524,7 +10671,7 @@
                   </a:ext>
                 </a:extLst>
               </a:tr>
-              <a:tr h="266737">
+              <a:tr h="188047">
                 <a:tc>
                   <a:txBody>
                     <a:bodyPr/>
@@ -9591,7 +10738,7 @@
                         <a:defRPr/>
                       </a:pPr>
                       <a:r>
-                        <a:rPr kumimoji="0" lang="en-US" sz="800" b="0" i="0" u="none" strike="noStrike" kern="1200" cap="none" spc="0" normalizeH="0" baseline="0">
+                        <a:rPr kumimoji="0" lang="en-US" sz="800" b="0" i="0" u="none" strike="noStrike" kern="1200" cap="none" spc="0" normalizeH="0" baseline="0" dirty="0">
                           <a:ln>
                             <a:noFill/>
                           </a:ln>
@@ -9605,8 +10752,39 @@
                           <a:ea typeface="+mn-ea"/>
                           <a:cs typeface="+mn-cs"/>
                         </a:rPr>
-                        <a:t>DeepSeek_8B+Euclidean Dist</a:t>
-                      </a:r>
+                        <a:t>DeepSeek_8B+Euclidean </a:t>
+                      </a:r>
+                      <a:r>
+                        <a:rPr kumimoji="0" lang="en-US" sz="800" b="0" i="0" u="none" strike="noStrike" kern="1200" cap="none" spc="0" normalizeH="0" baseline="0" dirty="0" err="1">
+                          <a:ln>
+                            <a:noFill/>
+                          </a:ln>
+                          <a:solidFill>
+                            <a:srgbClr val="D11960"/>
+                          </a:solidFill>
+                          <a:effectLst/>
+                          <a:uLnTx/>
+                          <a:uFillTx/>
+                          <a:latin typeface="Georgia"/>
+                          <a:ea typeface="+mn-ea"/>
+                          <a:cs typeface="+mn-cs"/>
+                        </a:rPr>
+                        <a:t>Dist</a:t>
+                      </a:r>
+                      <a:endParaRPr kumimoji="0" lang="en-US" sz="800" b="0" i="0" u="none" strike="noStrike" kern="1200" cap="none" spc="0" normalizeH="0" baseline="0" dirty="0">
+                        <a:ln>
+                          <a:noFill/>
+                        </a:ln>
+                        <a:solidFill>
+                          <a:srgbClr val="D11960"/>
+                        </a:solidFill>
+                        <a:effectLst/>
+                        <a:uLnTx/>
+                        <a:uFillTx/>
+                        <a:latin typeface="Georgia"/>
+                        <a:ea typeface="+mn-ea"/>
+                        <a:cs typeface="+mn-cs"/>
+                      </a:endParaRPr>
                     </a:p>
                   </a:txBody>
                   <a:tcPr marL="12700" marR="12700" marT="12700" marB="63500"/>
@@ -9657,6 +10835,1357 @@
                 <a:extLst>
                   <a:ext uri="{0D108BD9-81ED-4DB2-BD59-A6C34878D82A}">
                     <a16:rowId xmlns:a16="http://schemas.microsoft.com/office/drawing/2014/main" val="2617066"/>
+                  </a:ext>
+                </a:extLst>
+              </a:tr>
+              <a:tr h="188047">
+                <a:tc>
+                  <a:txBody>
+                    <a:bodyPr/>
+                    <a:lstStyle/>
+                    <a:p>
+                      <a:pPr marL="0" marR="0" lvl="0" indent="0" algn="l" defTabSz="914400" rtl="0" eaLnBrk="1" fontAlgn="auto" latinLnBrk="0" hangingPunct="1">
+                        <a:lnSpc>
+                          <a:spcPct val="100000"/>
+                        </a:lnSpc>
+                        <a:spcBef>
+                          <a:spcPts val="0"/>
+                        </a:spcBef>
+                        <a:spcAft>
+                          <a:spcPts val="0"/>
+                        </a:spcAft>
+                        <a:buClrTx/>
+                        <a:buSzTx/>
+                        <a:buFontTx/>
+                        <a:buNone/>
+                        <a:tabLst/>
+                        <a:defRPr/>
+                      </a:pPr>
+                      <a:r>
+                        <a:rPr kumimoji="0" lang="en-US" sz="800" b="0" i="0" u="none" strike="noStrike" kern="1200" cap="none" spc="0" normalizeH="0" baseline="0" dirty="0">
+                          <a:ln>
+                            <a:noFill/>
+                          </a:ln>
+                          <a:solidFill>
+                            <a:schemeClr val="accent3"/>
+                          </a:solidFill>
+                          <a:effectLst/>
+                          <a:uLnTx/>
+                          <a:uFillTx/>
+                          <a:latin typeface="Georgia"/>
+                          <a:ea typeface="+mn-ea"/>
+                          <a:cs typeface="+mn-cs"/>
+                        </a:rPr>
+                        <a:t>Text-Matching</a:t>
+                      </a:r>
+                    </a:p>
+                  </a:txBody>
+                  <a:tcPr marL="25400" marR="25400" marT="25400" marB="25400" anchor="b"/>
+                </a:tc>
+                <a:tc>
+                  <a:txBody>
+                    <a:bodyPr/>
+                    <a:lstStyle/>
+                    <a:p>
+                      <a:pPr marL="0" marR="0" lvl="0" indent="0" algn="l" defTabSz="914400" rtl="0" eaLnBrk="1" fontAlgn="auto" latinLnBrk="0" hangingPunct="1">
+                        <a:lnSpc>
+                          <a:spcPct val="100000"/>
+                        </a:lnSpc>
+                        <a:spcBef>
+                          <a:spcPts val="0"/>
+                        </a:spcBef>
+                        <a:spcAft>
+                          <a:spcPts val="0"/>
+                        </a:spcAft>
+                        <a:buClrTx/>
+                        <a:buSzTx/>
+                        <a:buFontTx/>
+                        <a:buNone/>
+                        <a:tabLst/>
+                        <a:defRPr/>
+                      </a:pPr>
+                      <a:r>
+                        <a:rPr kumimoji="0" lang="en-US" sz="800" b="0" i="0" u="none" strike="noStrike" kern="1200" cap="none" spc="0" normalizeH="0" baseline="0">
+                          <a:ln>
+                            <a:noFill/>
+                          </a:ln>
+                          <a:solidFill>
+                            <a:schemeClr val="accent3"/>
+                          </a:solidFill>
+                          <a:effectLst/>
+                          <a:uLnTx/>
+                          <a:uFillTx/>
+                          <a:latin typeface="Georgia"/>
+                          <a:ea typeface="+mn-ea"/>
+                          <a:cs typeface="+mn-cs"/>
+                        </a:rPr>
+                        <a:t>Cosine+AP</a:t>
+                      </a:r>
+                    </a:p>
+                  </a:txBody>
+                  <a:tcPr marL="12700" marR="12700" marT="12700" marB="63500" anchor="b"/>
+                </a:tc>
+                <a:tc>
+                  <a:txBody>
+                    <a:bodyPr/>
+                    <a:lstStyle/>
+                    <a:p>
+                      <a:pPr marL="0" marR="0" lvl="0" indent="0" algn="l" defTabSz="914400" rtl="0" eaLnBrk="1" fontAlgn="auto" latinLnBrk="0" hangingPunct="1">
+                        <a:lnSpc>
+                          <a:spcPct val="100000"/>
+                        </a:lnSpc>
+                        <a:spcBef>
+                          <a:spcPts val="0"/>
+                        </a:spcBef>
+                        <a:spcAft>
+                          <a:spcPts val="0"/>
+                        </a:spcAft>
+                        <a:buClrTx/>
+                        <a:buSzTx/>
+                        <a:buFontTx/>
+                        <a:buNone/>
+                        <a:tabLst/>
+                        <a:defRPr/>
+                      </a:pPr>
+                      <a:r>
+                        <a:rPr kumimoji="0" lang="en-US" sz="800" b="0" i="0" u="none" strike="noStrike" kern="1200" cap="none" spc="0" normalizeH="0" baseline="0" dirty="0">
+                          <a:ln>
+                            <a:noFill/>
+                          </a:ln>
+                          <a:solidFill>
+                            <a:schemeClr val="accent3"/>
+                          </a:solidFill>
+                          <a:effectLst/>
+                          <a:uLnTx/>
+                          <a:uFillTx/>
+                          <a:latin typeface="Georgia"/>
+                          <a:ea typeface="+mn-ea"/>
+                          <a:cs typeface="+mn-cs"/>
+                        </a:rPr>
+                        <a:t>22.7%</a:t>
+                      </a:r>
+                    </a:p>
+                  </a:txBody>
+                  <a:tcPr marL="12700" marR="12700" marT="12700" marB="63500" anchor="b"/>
+                </a:tc>
+                <a:extLst>
+                  <a:ext uri="{0D108BD9-81ED-4DB2-BD59-A6C34878D82A}">
+                    <a16:rowId xmlns:a16="http://schemas.microsoft.com/office/drawing/2014/main" val="2989408918"/>
+                  </a:ext>
+                </a:extLst>
+              </a:tr>
+              <a:tr h="188047">
+                <a:tc>
+                  <a:txBody>
+                    <a:bodyPr/>
+                    <a:lstStyle/>
+                    <a:p>
+                      <a:pPr marL="0" marR="0" lvl="0" indent="0" algn="l" defTabSz="914400" rtl="0" eaLnBrk="1" fontAlgn="auto" latinLnBrk="0" hangingPunct="1">
+                        <a:lnSpc>
+                          <a:spcPct val="100000"/>
+                        </a:lnSpc>
+                        <a:spcBef>
+                          <a:spcPts val="0"/>
+                        </a:spcBef>
+                        <a:spcAft>
+                          <a:spcPts val="0"/>
+                        </a:spcAft>
+                        <a:buClrTx/>
+                        <a:buSzTx/>
+                        <a:buFontTx/>
+                        <a:buNone/>
+                        <a:tabLst/>
+                        <a:defRPr/>
+                      </a:pPr>
+                      <a:r>
+                        <a:rPr kumimoji="0" lang="en-US" sz="800" b="0" i="0" u="none" strike="noStrike" kern="1200" cap="none" spc="0" normalizeH="0" baseline="0">
+                          <a:ln>
+                            <a:noFill/>
+                          </a:ln>
+                          <a:solidFill>
+                            <a:srgbClr val="D11960"/>
+                          </a:solidFill>
+                          <a:effectLst/>
+                          <a:uLnTx/>
+                          <a:uFillTx/>
+                          <a:latin typeface="Georgia"/>
+                          <a:ea typeface="+mn-ea"/>
+                          <a:cs typeface="+mn-cs"/>
+                        </a:rPr>
+                        <a:t>Embedding</a:t>
+                      </a:r>
+                    </a:p>
+                  </a:txBody>
+                  <a:tcPr marL="25400" marR="25400" marT="25400" marB="25400" anchor="b"/>
+                </a:tc>
+                <a:tc>
+                  <a:txBody>
+                    <a:bodyPr/>
+                    <a:lstStyle/>
+                    <a:p>
+                      <a:pPr marL="0" marR="0" lvl="0" indent="0" algn="l" defTabSz="914400" rtl="0" eaLnBrk="1" fontAlgn="auto" latinLnBrk="0" hangingPunct="1">
+                        <a:lnSpc>
+                          <a:spcPct val="100000"/>
+                        </a:lnSpc>
+                        <a:spcBef>
+                          <a:spcPts val="0"/>
+                        </a:spcBef>
+                        <a:spcAft>
+                          <a:spcPts val="0"/>
+                        </a:spcAft>
+                        <a:buClrTx/>
+                        <a:buSzTx/>
+                        <a:buFontTx/>
+                        <a:buNone/>
+                        <a:tabLst/>
+                        <a:defRPr/>
+                      </a:pPr>
+                      <a:r>
+                        <a:rPr kumimoji="0" lang="en-US" sz="800" b="0" i="0" u="none" strike="noStrike" kern="1200" cap="none" spc="0" normalizeH="0" baseline="0" dirty="0" err="1">
+                          <a:ln>
+                            <a:noFill/>
+                          </a:ln>
+                          <a:solidFill>
+                            <a:srgbClr val="D11960"/>
+                          </a:solidFill>
+                          <a:effectLst/>
+                          <a:uLnTx/>
+                          <a:uFillTx/>
+                          <a:latin typeface="Georgia"/>
+                          <a:ea typeface="+mn-ea"/>
+                          <a:cs typeface="+mn-cs"/>
+                        </a:rPr>
+                        <a:t>PubMedBERT+Euclidean</a:t>
+                      </a:r>
+                      <a:r>
+                        <a:rPr kumimoji="0" lang="en-US" sz="800" b="0" i="0" u="none" strike="noStrike" kern="1200" cap="none" spc="0" normalizeH="0" baseline="0" dirty="0">
+                          <a:ln>
+                            <a:noFill/>
+                          </a:ln>
+                          <a:solidFill>
+                            <a:srgbClr val="D11960"/>
+                          </a:solidFill>
+                          <a:effectLst/>
+                          <a:uLnTx/>
+                          <a:uFillTx/>
+                          <a:latin typeface="Georgia"/>
+                          <a:ea typeface="+mn-ea"/>
+                          <a:cs typeface="+mn-cs"/>
+                        </a:rPr>
+                        <a:t> </a:t>
+                      </a:r>
+                      <a:r>
+                        <a:rPr kumimoji="0" lang="en-US" sz="800" b="0" i="0" u="none" strike="noStrike" kern="1200" cap="none" spc="0" normalizeH="0" baseline="0" dirty="0" err="1">
+                          <a:ln>
+                            <a:noFill/>
+                          </a:ln>
+                          <a:solidFill>
+                            <a:srgbClr val="D11960"/>
+                          </a:solidFill>
+                          <a:effectLst/>
+                          <a:uLnTx/>
+                          <a:uFillTx/>
+                          <a:latin typeface="Georgia"/>
+                          <a:ea typeface="+mn-ea"/>
+                          <a:cs typeface="+mn-cs"/>
+                        </a:rPr>
+                        <a:t>Dist</a:t>
+                      </a:r>
+                      <a:endParaRPr kumimoji="0" lang="en-US" sz="800" b="0" i="0" u="none" strike="noStrike" kern="1200" cap="none" spc="0" normalizeH="0" baseline="0" dirty="0">
+                        <a:ln>
+                          <a:noFill/>
+                        </a:ln>
+                        <a:solidFill>
+                          <a:srgbClr val="D11960"/>
+                        </a:solidFill>
+                        <a:effectLst/>
+                        <a:uLnTx/>
+                        <a:uFillTx/>
+                        <a:latin typeface="Georgia"/>
+                        <a:ea typeface="+mn-ea"/>
+                        <a:cs typeface="+mn-cs"/>
+                      </a:endParaRPr>
+                    </a:p>
+                  </a:txBody>
+                  <a:tcPr marL="12700" marR="12700" marT="12700" marB="63500" anchor="b"/>
+                </a:tc>
+                <a:tc>
+                  <a:txBody>
+                    <a:bodyPr/>
+                    <a:lstStyle/>
+                    <a:p>
+                      <a:pPr marL="0" marR="0" lvl="0" indent="0" algn="l" defTabSz="914400" rtl="0" eaLnBrk="1" fontAlgn="auto" latinLnBrk="0" hangingPunct="1">
+                        <a:lnSpc>
+                          <a:spcPct val="100000"/>
+                        </a:lnSpc>
+                        <a:spcBef>
+                          <a:spcPts val="0"/>
+                        </a:spcBef>
+                        <a:spcAft>
+                          <a:spcPts val="0"/>
+                        </a:spcAft>
+                        <a:buClrTx/>
+                        <a:buSzTx/>
+                        <a:buFontTx/>
+                        <a:buNone/>
+                        <a:tabLst/>
+                        <a:defRPr/>
+                      </a:pPr>
+                      <a:r>
+                        <a:rPr kumimoji="0" lang="en-US" sz="800" b="0" i="0" u="none" strike="noStrike" kern="1200" cap="none" spc="0" normalizeH="0" baseline="0">
+                          <a:ln>
+                            <a:noFill/>
+                          </a:ln>
+                          <a:solidFill>
+                            <a:srgbClr val="D11960"/>
+                          </a:solidFill>
+                          <a:effectLst/>
+                          <a:uLnTx/>
+                          <a:uFillTx/>
+                          <a:latin typeface="Georgia"/>
+                          <a:ea typeface="+mn-ea"/>
+                          <a:cs typeface="+mn-cs"/>
+                        </a:rPr>
+                        <a:t>22.5%</a:t>
+                      </a:r>
+                    </a:p>
+                  </a:txBody>
+                  <a:tcPr marL="12700" marR="12700" marT="12700" marB="63500" anchor="b"/>
+                </a:tc>
+                <a:extLst>
+                  <a:ext uri="{0D108BD9-81ED-4DB2-BD59-A6C34878D82A}">
+                    <a16:rowId xmlns:a16="http://schemas.microsoft.com/office/drawing/2014/main" val="311880686"/>
+                  </a:ext>
+                </a:extLst>
+              </a:tr>
+              <a:tr h="188047">
+                <a:tc>
+                  <a:txBody>
+                    <a:bodyPr/>
+                    <a:lstStyle/>
+                    <a:p>
+                      <a:pPr marL="0" marR="0" lvl="0" indent="0" algn="l" defTabSz="914400" rtl="0" eaLnBrk="1" fontAlgn="auto" latinLnBrk="0" hangingPunct="1">
+                        <a:lnSpc>
+                          <a:spcPct val="100000"/>
+                        </a:lnSpc>
+                        <a:spcBef>
+                          <a:spcPts val="0"/>
+                        </a:spcBef>
+                        <a:spcAft>
+                          <a:spcPts val="0"/>
+                        </a:spcAft>
+                        <a:buClrTx/>
+                        <a:buSzTx/>
+                        <a:buFontTx/>
+                        <a:buNone/>
+                        <a:tabLst/>
+                        <a:defRPr/>
+                      </a:pPr>
+                      <a:r>
+                        <a:rPr kumimoji="0" lang="en-US" sz="800" b="0" i="0" u="none" strike="noStrike" kern="1200" cap="none" spc="0" normalizeH="0" baseline="0">
+                          <a:ln>
+                            <a:noFill/>
+                          </a:ln>
+                          <a:solidFill>
+                            <a:srgbClr val="D11960"/>
+                          </a:solidFill>
+                          <a:effectLst/>
+                          <a:uLnTx/>
+                          <a:uFillTx/>
+                          <a:latin typeface="Georgia"/>
+                          <a:ea typeface="+mn-ea"/>
+                          <a:cs typeface="+mn-cs"/>
+                        </a:rPr>
+                        <a:t>Embedding</a:t>
+                      </a:r>
+                    </a:p>
+                  </a:txBody>
+                  <a:tcPr marL="25400" marR="25400" marT="25400" marB="25400" anchor="b"/>
+                </a:tc>
+                <a:tc>
+                  <a:txBody>
+                    <a:bodyPr/>
+                    <a:lstStyle/>
+                    <a:p>
+                      <a:pPr marL="0" marR="0" lvl="0" indent="0" algn="l" defTabSz="914400" rtl="0" eaLnBrk="1" fontAlgn="auto" latinLnBrk="0" hangingPunct="1">
+                        <a:lnSpc>
+                          <a:spcPct val="100000"/>
+                        </a:lnSpc>
+                        <a:spcBef>
+                          <a:spcPts val="0"/>
+                        </a:spcBef>
+                        <a:spcAft>
+                          <a:spcPts val="0"/>
+                        </a:spcAft>
+                        <a:buClrTx/>
+                        <a:buSzTx/>
+                        <a:buFontTx/>
+                        <a:buNone/>
+                        <a:tabLst/>
+                        <a:defRPr/>
+                      </a:pPr>
+                      <a:r>
+                        <a:rPr kumimoji="0" lang="en-US" sz="800" b="0" i="0" u="none" strike="noStrike" kern="1200" cap="none" spc="0" normalizeH="0" baseline="0">
+                          <a:ln>
+                            <a:noFill/>
+                          </a:ln>
+                          <a:solidFill>
+                            <a:srgbClr val="D11960"/>
+                          </a:solidFill>
+                          <a:effectLst/>
+                          <a:uLnTx/>
+                          <a:uFillTx/>
+                          <a:latin typeface="Georgia"/>
+                          <a:ea typeface="+mn-ea"/>
+                          <a:cs typeface="+mn-cs"/>
+                        </a:rPr>
+                        <a:t>SciBERT+Euclidean Dist</a:t>
+                      </a:r>
+                    </a:p>
+                  </a:txBody>
+                  <a:tcPr marL="12700" marR="12700" marT="12700" marB="63500" anchor="b"/>
+                </a:tc>
+                <a:tc>
+                  <a:txBody>
+                    <a:bodyPr/>
+                    <a:lstStyle/>
+                    <a:p>
+                      <a:pPr marL="0" marR="0" lvl="0" indent="0" algn="l" defTabSz="914400" rtl="0" eaLnBrk="1" fontAlgn="auto" latinLnBrk="0" hangingPunct="1">
+                        <a:lnSpc>
+                          <a:spcPct val="100000"/>
+                        </a:lnSpc>
+                        <a:spcBef>
+                          <a:spcPts val="0"/>
+                        </a:spcBef>
+                        <a:spcAft>
+                          <a:spcPts val="0"/>
+                        </a:spcAft>
+                        <a:buClrTx/>
+                        <a:buSzTx/>
+                        <a:buFontTx/>
+                        <a:buNone/>
+                        <a:tabLst/>
+                        <a:defRPr/>
+                      </a:pPr>
+                      <a:r>
+                        <a:rPr kumimoji="0" lang="en-US" sz="800" b="0" i="0" u="none" strike="noStrike" kern="1200" cap="none" spc="0" normalizeH="0" baseline="0">
+                          <a:ln>
+                            <a:noFill/>
+                          </a:ln>
+                          <a:solidFill>
+                            <a:srgbClr val="D11960"/>
+                          </a:solidFill>
+                          <a:effectLst/>
+                          <a:uLnTx/>
+                          <a:uFillTx/>
+                          <a:latin typeface="Georgia"/>
+                          <a:ea typeface="+mn-ea"/>
+                          <a:cs typeface="+mn-cs"/>
+                        </a:rPr>
+                        <a:t>21.4%</a:t>
+                      </a:r>
+                    </a:p>
+                  </a:txBody>
+                  <a:tcPr marL="12700" marR="12700" marT="12700" marB="63500" anchor="b"/>
+                </a:tc>
+                <a:extLst>
+                  <a:ext uri="{0D108BD9-81ED-4DB2-BD59-A6C34878D82A}">
+                    <a16:rowId xmlns:a16="http://schemas.microsoft.com/office/drawing/2014/main" val="1373437111"/>
+                  </a:ext>
+                </a:extLst>
+              </a:tr>
+              <a:tr h="188047">
+                <a:tc>
+                  <a:txBody>
+                    <a:bodyPr/>
+                    <a:lstStyle/>
+                    <a:p>
+                      <a:pPr marL="0" marR="0" lvl="0" indent="0" algn="l" defTabSz="914400" rtl="0" eaLnBrk="1" fontAlgn="auto" latinLnBrk="0" hangingPunct="1">
+                        <a:lnSpc>
+                          <a:spcPct val="100000"/>
+                        </a:lnSpc>
+                        <a:spcBef>
+                          <a:spcPts val="0"/>
+                        </a:spcBef>
+                        <a:spcAft>
+                          <a:spcPts val="0"/>
+                        </a:spcAft>
+                        <a:buClrTx/>
+                        <a:buSzTx/>
+                        <a:buFontTx/>
+                        <a:buNone/>
+                        <a:tabLst/>
+                        <a:defRPr/>
+                      </a:pPr>
+                      <a:r>
+                        <a:rPr kumimoji="0" lang="en-US" sz="800" b="0" i="0" u="none" strike="noStrike" kern="1200" cap="none" spc="0" normalizeH="0" baseline="0">
+                          <a:ln>
+                            <a:noFill/>
+                          </a:ln>
+                          <a:solidFill>
+                            <a:srgbClr val="D11960"/>
+                          </a:solidFill>
+                          <a:effectLst/>
+                          <a:uLnTx/>
+                          <a:uFillTx/>
+                          <a:latin typeface="Georgia"/>
+                          <a:ea typeface="+mn-ea"/>
+                          <a:cs typeface="+mn-cs"/>
+                        </a:rPr>
+                        <a:t>Embedding</a:t>
+                      </a:r>
+                    </a:p>
+                  </a:txBody>
+                  <a:tcPr marL="25400" marR="25400" marT="25400" marB="25400" anchor="b"/>
+                </a:tc>
+                <a:tc>
+                  <a:txBody>
+                    <a:bodyPr/>
+                    <a:lstStyle/>
+                    <a:p>
+                      <a:pPr marL="0" marR="0" lvl="0" indent="0" algn="l" defTabSz="914400" rtl="0" eaLnBrk="1" fontAlgn="auto" latinLnBrk="0" hangingPunct="1">
+                        <a:lnSpc>
+                          <a:spcPct val="100000"/>
+                        </a:lnSpc>
+                        <a:spcBef>
+                          <a:spcPts val="0"/>
+                        </a:spcBef>
+                        <a:spcAft>
+                          <a:spcPts val="0"/>
+                        </a:spcAft>
+                        <a:buClrTx/>
+                        <a:buSzTx/>
+                        <a:buFontTx/>
+                        <a:buNone/>
+                        <a:tabLst/>
+                        <a:defRPr/>
+                      </a:pPr>
+                      <a:r>
+                        <a:rPr kumimoji="0" lang="en-US" sz="800" b="0" i="0" u="none" strike="noStrike" kern="1200" cap="none" spc="0" normalizeH="0" baseline="0">
+                          <a:ln>
+                            <a:noFill/>
+                          </a:ln>
+                          <a:solidFill>
+                            <a:srgbClr val="D11960"/>
+                          </a:solidFill>
+                          <a:effectLst/>
+                          <a:uLnTx/>
+                          <a:uFillTx/>
+                          <a:latin typeface="Georgia"/>
+                          <a:ea typeface="+mn-ea"/>
+                          <a:cs typeface="+mn-cs"/>
+                        </a:rPr>
+                        <a:t>BioBERT+Euclidean Dist</a:t>
+                      </a:r>
+                    </a:p>
+                  </a:txBody>
+                  <a:tcPr marL="12700" marR="12700" marT="12700" marB="63500" anchor="b"/>
+                </a:tc>
+                <a:tc>
+                  <a:txBody>
+                    <a:bodyPr/>
+                    <a:lstStyle/>
+                    <a:p>
+                      <a:pPr marL="0" marR="0" lvl="0" indent="0" algn="l" defTabSz="914400" rtl="0" eaLnBrk="1" fontAlgn="auto" latinLnBrk="0" hangingPunct="1">
+                        <a:lnSpc>
+                          <a:spcPct val="100000"/>
+                        </a:lnSpc>
+                        <a:spcBef>
+                          <a:spcPts val="0"/>
+                        </a:spcBef>
+                        <a:spcAft>
+                          <a:spcPts val="0"/>
+                        </a:spcAft>
+                        <a:buClrTx/>
+                        <a:buSzTx/>
+                        <a:buFontTx/>
+                        <a:buNone/>
+                        <a:tabLst/>
+                        <a:defRPr/>
+                      </a:pPr>
+                      <a:r>
+                        <a:rPr kumimoji="0" lang="en-US" sz="800" b="0" i="0" u="none" strike="noStrike" kern="1200" cap="none" spc="0" normalizeH="0" baseline="0">
+                          <a:ln>
+                            <a:noFill/>
+                          </a:ln>
+                          <a:solidFill>
+                            <a:srgbClr val="D11960"/>
+                          </a:solidFill>
+                          <a:effectLst/>
+                          <a:uLnTx/>
+                          <a:uFillTx/>
+                          <a:latin typeface="Georgia"/>
+                          <a:ea typeface="+mn-ea"/>
+                          <a:cs typeface="+mn-cs"/>
+                        </a:rPr>
+                        <a:t>21.3%</a:t>
+                      </a:r>
+                    </a:p>
+                  </a:txBody>
+                  <a:tcPr marL="12700" marR="12700" marT="12700" marB="63500" anchor="b"/>
+                </a:tc>
+                <a:extLst>
+                  <a:ext uri="{0D108BD9-81ED-4DB2-BD59-A6C34878D82A}">
+                    <a16:rowId xmlns:a16="http://schemas.microsoft.com/office/drawing/2014/main" val="2551747063"/>
+                  </a:ext>
+                </a:extLst>
+              </a:tr>
+              <a:tr h="188047">
+                <a:tc>
+                  <a:txBody>
+                    <a:bodyPr/>
+                    <a:lstStyle/>
+                    <a:p>
+                      <a:pPr marL="0" marR="0" lvl="0" indent="0" algn="l" defTabSz="914400" rtl="0" eaLnBrk="1" fontAlgn="auto" latinLnBrk="0" hangingPunct="1">
+                        <a:lnSpc>
+                          <a:spcPct val="100000"/>
+                        </a:lnSpc>
+                        <a:spcBef>
+                          <a:spcPts val="0"/>
+                        </a:spcBef>
+                        <a:spcAft>
+                          <a:spcPts val="0"/>
+                        </a:spcAft>
+                        <a:buClrTx/>
+                        <a:buSzTx/>
+                        <a:buFontTx/>
+                        <a:buNone/>
+                        <a:tabLst/>
+                        <a:defRPr/>
+                      </a:pPr>
+                      <a:r>
+                        <a:rPr kumimoji="0" lang="en-US" sz="800" b="0" i="0" u="none" strike="noStrike" kern="1200" cap="none" spc="0" normalizeH="0" baseline="0">
+                          <a:ln>
+                            <a:noFill/>
+                          </a:ln>
+                          <a:solidFill>
+                            <a:srgbClr val="D11960"/>
+                          </a:solidFill>
+                          <a:effectLst/>
+                          <a:uLnTx/>
+                          <a:uFillTx/>
+                          <a:latin typeface="Georgia"/>
+                          <a:ea typeface="+mn-ea"/>
+                          <a:cs typeface="+mn-cs"/>
+                        </a:rPr>
+                        <a:t>Embedding</a:t>
+                      </a:r>
+                    </a:p>
+                  </a:txBody>
+                  <a:tcPr marL="25400" marR="25400" marT="25400" marB="25400" anchor="b"/>
+                </a:tc>
+                <a:tc>
+                  <a:txBody>
+                    <a:bodyPr/>
+                    <a:lstStyle/>
+                    <a:p>
+                      <a:pPr marL="0" marR="0" lvl="0" indent="0" algn="l" defTabSz="914400" rtl="0" eaLnBrk="1" fontAlgn="auto" latinLnBrk="0" hangingPunct="1">
+                        <a:lnSpc>
+                          <a:spcPct val="100000"/>
+                        </a:lnSpc>
+                        <a:spcBef>
+                          <a:spcPts val="0"/>
+                        </a:spcBef>
+                        <a:spcAft>
+                          <a:spcPts val="0"/>
+                        </a:spcAft>
+                        <a:buClrTx/>
+                        <a:buSzTx/>
+                        <a:buFontTx/>
+                        <a:buNone/>
+                        <a:tabLst/>
+                        <a:defRPr/>
+                      </a:pPr>
+                      <a:r>
+                        <a:rPr kumimoji="0" lang="en-US" sz="800" b="0" i="0" u="none" strike="noStrike" kern="1200" cap="none" spc="0" normalizeH="0" baseline="0">
+                          <a:ln>
+                            <a:noFill/>
+                          </a:ln>
+                          <a:solidFill>
+                            <a:srgbClr val="D11960"/>
+                          </a:solidFill>
+                          <a:effectLst/>
+                          <a:uLnTx/>
+                          <a:uFillTx/>
+                          <a:latin typeface="Georgia"/>
+                          <a:ea typeface="+mn-ea"/>
+                          <a:cs typeface="+mn-cs"/>
+                        </a:rPr>
+                        <a:t>Llama3.2_3B+Euclidean Dist</a:t>
+                      </a:r>
+                    </a:p>
+                  </a:txBody>
+                  <a:tcPr marL="12700" marR="12700" marT="12700" marB="63500" anchor="b"/>
+                </a:tc>
+                <a:tc>
+                  <a:txBody>
+                    <a:bodyPr/>
+                    <a:lstStyle/>
+                    <a:p>
+                      <a:pPr marL="0" marR="0" lvl="0" indent="0" algn="l" defTabSz="914400" rtl="0" eaLnBrk="1" fontAlgn="auto" latinLnBrk="0" hangingPunct="1">
+                        <a:lnSpc>
+                          <a:spcPct val="100000"/>
+                        </a:lnSpc>
+                        <a:spcBef>
+                          <a:spcPts val="0"/>
+                        </a:spcBef>
+                        <a:spcAft>
+                          <a:spcPts val="0"/>
+                        </a:spcAft>
+                        <a:buClrTx/>
+                        <a:buSzTx/>
+                        <a:buFontTx/>
+                        <a:buNone/>
+                        <a:tabLst/>
+                        <a:defRPr/>
+                      </a:pPr>
+                      <a:r>
+                        <a:rPr kumimoji="0" lang="en-US" sz="800" b="0" i="0" u="none" strike="noStrike" kern="1200" cap="none" spc="0" normalizeH="0" baseline="0">
+                          <a:ln>
+                            <a:noFill/>
+                          </a:ln>
+                          <a:solidFill>
+                            <a:srgbClr val="D11960"/>
+                          </a:solidFill>
+                          <a:effectLst/>
+                          <a:uLnTx/>
+                          <a:uFillTx/>
+                          <a:latin typeface="Georgia"/>
+                          <a:ea typeface="+mn-ea"/>
+                          <a:cs typeface="+mn-cs"/>
+                        </a:rPr>
+                        <a:t>21.1%</a:t>
+                      </a:r>
+                    </a:p>
+                  </a:txBody>
+                  <a:tcPr marL="12700" marR="12700" marT="12700" marB="63500" anchor="b"/>
+                </a:tc>
+                <a:extLst>
+                  <a:ext uri="{0D108BD9-81ED-4DB2-BD59-A6C34878D82A}">
+                    <a16:rowId xmlns:a16="http://schemas.microsoft.com/office/drawing/2014/main" val="68008229"/>
+                  </a:ext>
+                </a:extLst>
+              </a:tr>
+              <a:tr h="188047">
+                <a:tc>
+                  <a:txBody>
+                    <a:bodyPr/>
+                    <a:lstStyle/>
+                    <a:p>
+                      <a:pPr marL="0" marR="0" lvl="0" indent="0" algn="l" defTabSz="914400" rtl="0" eaLnBrk="1" fontAlgn="auto" latinLnBrk="0" hangingPunct="1">
+                        <a:lnSpc>
+                          <a:spcPct val="100000"/>
+                        </a:lnSpc>
+                        <a:spcBef>
+                          <a:spcPts val="0"/>
+                        </a:spcBef>
+                        <a:spcAft>
+                          <a:spcPts val="0"/>
+                        </a:spcAft>
+                        <a:buClrTx/>
+                        <a:buSzTx/>
+                        <a:buFontTx/>
+                        <a:buNone/>
+                        <a:tabLst/>
+                        <a:defRPr/>
+                      </a:pPr>
+                      <a:r>
+                        <a:rPr kumimoji="0" lang="en-US" sz="800" b="0" i="0" u="none" strike="noStrike" kern="1200" cap="none" spc="0" normalizeH="0" baseline="0">
+                          <a:ln>
+                            <a:noFill/>
+                          </a:ln>
+                          <a:solidFill>
+                            <a:srgbClr val="D11960"/>
+                          </a:solidFill>
+                          <a:effectLst/>
+                          <a:uLnTx/>
+                          <a:uFillTx/>
+                          <a:latin typeface="Georgia"/>
+                          <a:ea typeface="+mn-ea"/>
+                          <a:cs typeface="+mn-cs"/>
+                        </a:rPr>
+                        <a:t>Embedding</a:t>
+                      </a:r>
+                    </a:p>
+                  </a:txBody>
+                  <a:tcPr marL="25400" marR="25400" marT="25400" marB="25400" anchor="b"/>
+                </a:tc>
+                <a:tc>
+                  <a:txBody>
+                    <a:bodyPr/>
+                    <a:lstStyle/>
+                    <a:p>
+                      <a:pPr marL="0" marR="0" lvl="0" indent="0" algn="l" defTabSz="914400" rtl="0" eaLnBrk="1" fontAlgn="auto" latinLnBrk="0" hangingPunct="1">
+                        <a:lnSpc>
+                          <a:spcPct val="100000"/>
+                        </a:lnSpc>
+                        <a:spcBef>
+                          <a:spcPts val="0"/>
+                        </a:spcBef>
+                        <a:spcAft>
+                          <a:spcPts val="0"/>
+                        </a:spcAft>
+                        <a:buClrTx/>
+                        <a:buSzTx/>
+                        <a:buFontTx/>
+                        <a:buNone/>
+                        <a:tabLst/>
+                        <a:defRPr/>
+                      </a:pPr>
+                      <a:r>
+                        <a:rPr kumimoji="0" lang="en-US" sz="800" b="0" i="0" u="none" strike="noStrike" kern="1200" cap="none" spc="0" normalizeH="0" baseline="0" dirty="0">
+                          <a:ln>
+                            <a:noFill/>
+                          </a:ln>
+                          <a:solidFill>
+                            <a:srgbClr val="D11960"/>
+                          </a:solidFill>
+                          <a:effectLst/>
+                          <a:uLnTx/>
+                          <a:uFillTx/>
+                          <a:latin typeface="Georgia"/>
+                          <a:ea typeface="+mn-ea"/>
+                          <a:cs typeface="+mn-cs"/>
+                        </a:rPr>
+                        <a:t>Llama3.0+Euclidean </a:t>
+                      </a:r>
+                      <a:r>
+                        <a:rPr kumimoji="0" lang="en-US" sz="800" b="0" i="0" u="none" strike="noStrike" kern="1200" cap="none" spc="0" normalizeH="0" baseline="0" dirty="0" err="1">
+                          <a:ln>
+                            <a:noFill/>
+                          </a:ln>
+                          <a:solidFill>
+                            <a:srgbClr val="D11960"/>
+                          </a:solidFill>
+                          <a:effectLst/>
+                          <a:uLnTx/>
+                          <a:uFillTx/>
+                          <a:latin typeface="Georgia"/>
+                          <a:ea typeface="+mn-ea"/>
+                          <a:cs typeface="+mn-cs"/>
+                        </a:rPr>
+                        <a:t>Dist</a:t>
+                      </a:r>
+                      <a:endParaRPr kumimoji="0" lang="en-US" sz="800" b="0" i="0" u="none" strike="noStrike" kern="1200" cap="none" spc="0" normalizeH="0" baseline="0" dirty="0">
+                        <a:ln>
+                          <a:noFill/>
+                        </a:ln>
+                        <a:solidFill>
+                          <a:srgbClr val="D11960"/>
+                        </a:solidFill>
+                        <a:effectLst/>
+                        <a:uLnTx/>
+                        <a:uFillTx/>
+                        <a:latin typeface="Georgia"/>
+                        <a:ea typeface="+mn-ea"/>
+                        <a:cs typeface="+mn-cs"/>
+                      </a:endParaRPr>
+                    </a:p>
+                  </a:txBody>
+                  <a:tcPr marL="12700" marR="12700" marT="12700" marB="63500" anchor="b"/>
+                </a:tc>
+                <a:tc>
+                  <a:txBody>
+                    <a:bodyPr/>
+                    <a:lstStyle/>
+                    <a:p>
+                      <a:pPr marL="0" marR="0" lvl="0" indent="0" algn="l" defTabSz="914400" rtl="0" eaLnBrk="1" fontAlgn="auto" latinLnBrk="0" hangingPunct="1">
+                        <a:lnSpc>
+                          <a:spcPct val="100000"/>
+                        </a:lnSpc>
+                        <a:spcBef>
+                          <a:spcPts val="0"/>
+                        </a:spcBef>
+                        <a:spcAft>
+                          <a:spcPts val="0"/>
+                        </a:spcAft>
+                        <a:buClrTx/>
+                        <a:buSzTx/>
+                        <a:buFontTx/>
+                        <a:buNone/>
+                        <a:tabLst/>
+                        <a:defRPr/>
+                      </a:pPr>
+                      <a:r>
+                        <a:rPr kumimoji="0" lang="en-US" sz="800" b="0" i="0" u="none" strike="noStrike" kern="1200" cap="none" spc="0" normalizeH="0" baseline="0" dirty="0">
+                          <a:ln>
+                            <a:noFill/>
+                          </a:ln>
+                          <a:solidFill>
+                            <a:srgbClr val="D11960"/>
+                          </a:solidFill>
+                          <a:effectLst/>
+                          <a:uLnTx/>
+                          <a:uFillTx/>
+                          <a:latin typeface="Georgia"/>
+                          <a:ea typeface="+mn-ea"/>
+                          <a:cs typeface="+mn-cs"/>
+                        </a:rPr>
+                        <a:t>20.3%</a:t>
+                      </a:r>
+                    </a:p>
+                  </a:txBody>
+                  <a:tcPr marL="12700" marR="12700" marT="12700" marB="63500" anchor="b"/>
+                </a:tc>
+                <a:extLst>
+                  <a:ext uri="{0D108BD9-81ED-4DB2-BD59-A6C34878D82A}">
+                    <a16:rowId xmlns:a16="http://schemas.microsoft.com/office/drawing/2014/main" val="3910479231"/>
+                  </a:ext>
+                </a:extLst>
+              </a:tr>
+              <a:tr h="188047">
+                <a:tc>
+                  <a:txBody>
+                    <a:bodyPr/>
+                    <a:lstStyle/>
+                    <a:p>
+                      <a:pPr marL="0" marR="0" lvl="0" indent="0" algn="l" defTabSz="914400" rtl="0" eaLnBrk="1" fontAlgn="auto" latinLnBrk="0" hangingPunct="1">
+                        <a:lnSpc>
+                          <a:spcPct val="100000"/>
+                        </a:lnSpc>
+                        <a:spcBef>
+                          <a:spcPts val="0"/>
+                        </a:spcBef>
+                        <a:spcAft>
+                          <a:spcPts val="0"/>
+                        </a:spcAft>
+                        <a:buClrTx/>
+                        <a:buSzTx/>
+                        <a:buFontTx/>
+                        <a:buNone/>
+                        <a:tabLst/>
+                        <a:defRPr/>
+                      </a:pPr>
+                      <a:r>
+                        <a:rPr kumimoji="0" lang="en-US" sz="800" b="0" i="0" u="none" strike="noStrike" kern="1200" cap="none" spc="0" normalizeH="0" baseline="0">
+                          <a:ln>
+                            <a:noFill/>
+                          </a:ln>
+                          <a:solidFill>
+                            <a:srgbClr val="D11960"/>
+                          </a:solidFill>
+                          <a:effectLst/>
+                          <a:uLnTx/>
+                          <a:uFillTx/>
+                          <a:latin typeface="Georgia"/>
+                          <a:ea typeface="+mn-ea"/>
+                          <a:cs typeface="+mn-cs"/>
+                        </a:rPr>
+                        <a:t>Embedding</a:t>
+                      </a:r>
+                    </a:p>
+                  </a:txBody>
+                  <a:tcPr marL="25400" marR="25400" marT="25400" marB="25400" anchor="b"/>
+                </a:tc>
+                <a:tc>
+                  <a:txBody>
+                    <a:bodyPr/>
+                    <a:lstStyle/>
+                    <a:p>
+                      <a:pPr marL="0" marR="0" lvl="0" indent="0" algn="l" defTabSz="914400" rtl="0" eaLnBrk="1" fontAlgn="auto" latinLnBrk="0" hangingPunct="1">
+                        <a:lnSpc>
+                          <a:spcPct val="100000"/>
+                        </a:lnSpc>
+                        <a:spcBef>
+                          <a:spcPts val="0"/>
+                        </a:spcBef>
+                        <a:spcAft>
+                          <a:spcPts val="0"/>
+                        </a:spcAft>
+                        <a:buClrTx/>
+                        <a:buSzTx/>
+                        <a:buFontTx/>
+                        <a:buNone/>
+                        <a:tabLst/>
+                        <a:defRPr/>
+                      </a:pPr>
+                      <a:r>
+                        <a:rPr kumimoji="0" lang="en-US" sz="800" b="0" i="0" u="none" strike="noStrike" kern="1200" cap="none" spc="0" normalizeH="0" baseline="0" dirty="0" err="1">
+                          <a:ln>
+                            <a:noFill/>
+                          </a:ln>
+                          <a:solidFill>
+                            <a:srgbClr val="D11960"/>
+                          </a:solidFill>
+                          <a:effectLst/>
+                          <a:uLnTx/>
+                          <a:uFillTx/>
+                          <a:latin typeface="Georgia"/>
+                          <a:ea typeface="+mn-ea"/>
+                          <a:cs typeface="+mn-cs"/>
+                        </a:rPr>
+                        <a:t>ModernBERT+Euclidean</a:t>
+                      </a:r>
+                      <a:r>
+                        <a:rPr kumimoji="0" lang="en-US" sz="800" b="0" i="0" u="none" strike="noStrike" kern="1200" cap="none" spc="0" normalizeH="0" baseline="0" dirty="0">
+                          <a:ln>
+                            <a:noFill/>
+                          </a:ln>
+                          <a:solidFill>
+                            <a:srgbClr val="D11960"/>
+                          </a:solidFill>
+                          <a:effectLst/>
+                          <a:uLnTx/>
+                          <a:uFillTx/>
+                          <a:latin typeface="Georgia"/>
+                          <a:ea typeface="+mn-ea"/>
+                          <a:cs typeface="+mn-cs"/>
+                        </a:rPr>
+                        <a:t> </a:t>
+                      </a:r>
+                      <a:r>
+                        <a:rPr kumimoji="0" lang="en-US" sz="800" b="0" i="0" u="none" strike="noStrike" kern="1200" cap="none" spc="0" normalizeH="0" baseline="0" dirty="0" err="1">
+                          <a:ln>
+                            <a:noFill/>
+                          </a:ln>
+                          <a:solidFill>
+                            <a:srgbClr val="D11960"/>
+                          </a:solidFill>
+                          <a:effectLst/>
+                          <a:uLnTx/>
+                          <a:uFillTx/>
+                          <a:latin typeface="Georgia"/>
+                          <a:ea typeface="+mn-ea"/>
+                          <a:cs typeface="+mn-cs"/>
+                        </a:rPr>
+                        <a:t>Dist</a:t>
+                      </a:r>
+                      <a:endParaRPr kumimoji="0" lang="en-US" sz="800" b="0" i="0" u="none" strike="noStrike" kern="1200" cap="none" spc="0" normalizeH="0" baseline="0" dirty="0">
+                        <a:ln>
+                          <a:noFill/>
+                        </a:ln>
+                        <a:solidFill>
+                          <a:srgbClr val="D11960"/>
+                        </a:solidFill>
+                        <a:effectLst/>
+                        <a:uLnTx/>
+                        <a:uFillTx/>
+                        <a:latin typeface="Georgia"/>
+                        <a:ea typeface="+mn-ea"/>
+                        <a:cs typeface="+mn-cs"/>
+                      </a:endParaRPr>
+                    </a:p>
+                  </a:txBody>
+                  <a:tcPr marL="12700" marR="12700" marT="12700" marB="63500" anchor="b"/>
+                </a:tc>
+                <a:tc>
+                  <a:txBody>
+                    <a:bodyPr/>
+                    <a:lstStyle/>
+                    <a:p>
+                      <a:pPr marL="0" marR="0" lvl="0" indent="0" algn="l" defTabSz="914400" rtl="0" eaLnBrk="1" fontAlgn="auto" latinLnBrk="0" hangingPunct="1">
+                        <a:lnSpc>
+                          <a:spcPct val="100000"/>
+                        </a:lnSpc>
+                        <a:spcBef>
+                          <a:spcPts val="0"/>
+                        </a:spcBef>
+                        <a:spcAft>
+                          <a:spcPts val="0"/>
+                        </a:spcAft>
+                        <a:buClrTx/>
+                        <a:buSzTx/>
+                        <a:buFontTx/>
+                        <a:buNone/>
+                        <a:tabLst/>
+                        <a:defRPr/>
+                      </a:pPr>
+                      <a:r>
+                        <a:rPr kumimoji="0" lang="en-US" sz="800" b="0" i="0" u="none" strike="noStrike" kern="1200" cap="none" spc="0" normalizeH="0" baseline="0">
+                          <a:ln>
+                            <a:noFill/>
+                          </a:ln>
+                          <a:solidFill>
+                            <a:srgbClr val="D11960"/>
+                          </a:solidFill>
+                          <a:effectLst/>
+                          <a:uLnTx/>
+                          <a:uFillTx/>
+                          <a:latin typeface="Georgia"/>
+                          <a:ea typeface="+mn-ea"/>
+                          <a:cs typeface="+mn-cs"/>
+                        </a:rPr>
+                        <a:t>19.3%</a:t>
+                      </a:r>
+                    </a:p>
+                  </a:txBody>
+                  <a:tcPr marL="12700" marR="12700" marT="12700" marB="63500" anchor="b"/>
+                </a:tc>
+                <a:extLst>
+                  <a:ext uri="{0D108BD9-81ED-4DB2-BD59-A6C34878D82A}">
+                    <a16:rowId xmlns:a16="http://schemas.microsoft.com/office/drawing/2014/main" val="4286666507"/>
+                  </a:ext>
+                </a:extLst>
+              </a:tr>
+              <a:tr h="188047">
+                <a:tc>
+                  <a:txBody>
+                    <a:bodyPr/>
+                    <a:lstStyle/>
+                    <a:p>
+                      <a:pPr marL="0" marR="0" lvl="0" indent="0" algn="l" defTabSz="914400" rtl="0" eaLnBrk="1" fontAlgn="auto" latinLnBrk="0" hangingPunct="1">
+                        <a:lnSpc>
+                          <a:spcPct val="100000"/>
+                        </a:lnSpc>
+                        <a:spcBef>
+                          <a:spcPts val="0"/>
+                        </a:spcBef>
+                        <a:spcAft>
+                          <a:spcPts val="0"/>
+                        </a:spcAft>
+                        <a:buClrTx/>
+                        <a:buSzTx/>
+                        <a:buFontTx/>
+                        <a:buNone/>
+                        <a:tabLst/>
+                        <a:defRPr/>
+                      </a:pPr>
+                      <a:r>
+                        <a:rPr kumimoji="0" lang="en-US" sz="800" b="0" i="0" u="none" strike="noStrike" kern="1200" cap="none" spc="0" normalizeH="0" baseline="0">
+                          <a:ln>
+                            <a:noFill/>
+                          </a:ln>
+                          <a:solidFill>
+                            <a:srgbClr val="D11960"/>
+                          </a:solidFill>
+                          <a:effectLst/>
+                          <a:uLnTx/>
+                          <a:uFillTx/>
+                          <a:latin typeface="Georgia"/>
+                          <a:ea typeface="+mn-ea"/>
+                          <a:cs typeface="+mn-cs"/>
+                        </a:rPr>
+                        <a:t>Embedding</a:t>
+                      </a:r>
+                    </a:p>
+                  </a:txBody>
+                  <a:tcPr marL="25400" marR="25400" marT="25400" marB="25400" anchor="b"/>
+                </a:tc>
+                <a:tc>
+                  <a:txBody>
+                    <a:bodyPr/>
+                    <a:lstStyle/>
+                    <a:p>
+                      <a:pPr marL="0" marR="0" lvl="0" indent="0" algn="l" defTabSz="914400" rtl="0" eaLnBrk="1" fontAlgn="auto" latinLnBrk="0" hangingPunct="1">
+                        <a:lnSpc>
+                          <a:spcPct val="100000"/>
+                        </a:lnSpc>
+                        <a:spcBef>
+                          <a:spcPts val="0"/>
+                        </a:spcBef>
+                        <a:spcAft>
+                          <a:spcPts val="0"/>
+                        </a:spcAft>
+                        <a:buClrTx/>
+                        <a:buSzTx/>
+                        <a:buFontTx/>
+                        <a:buNone/>
+                        <a:tabLst/>
+                        <a:defRPr/>
+                      </a:pPr>
+                      <a:r>
+                        <a:rPr kumimoji="0" lang="en-US" sz="800" b="0" i="0" u="none" strike="noStrike" kern="1200" cap="none" spc="0" normalizeH="0" baseline="0">
+                          <a:ln>
+                            <a:noFill/>
+                          </a:ln>
+                          <a:solidFill>
+                            <a:srgbClr val="D11960"/>
+                          </a:solidFill>
+                          <a:effectLst/>
+                          <a:uLnTx/>
+                          <a:uFillTx/>
+                          <a:latin typeface="Georgia"/>
+                          <a:ea typeface="+mn-ea"/>
+                          <a:cs typeface="+mn-cs"/>
+                        </a:rPr>
+                        <a:t>Phi-4+Euclidean Dist</a:t>
+                      </a:r>
+                    </a:p>
+                  </a:txBody>
+                  <a:tcPr marL="12700" marR="12700" marT="12700" marB="63500" anchor="b"/>
+                </a:tc>
+                <a:tc>
+                  <a:txBody>
+                    <a:bodyPr/>
+                    <a:lstStyle/>
+                    <a:p>
+                      <a:pPr marL="0" marR="0" lvl="0" indent="0" algn="l" defTabSz="914400" rtl="0" eaLnBrk="1" fontAlgn="auto" latinLnBrk="0" hangingPunct="1">
+                        <a:lnSpc>
+                          <a:spcPct val="100000"/>
+                        </a:lnSpc>
+                        <a:spcBef>
+                          <a:spcPts val="0"/>
+                        </a:spcBef>
+                        <a:spcAft>
+                          <a:spcPts val="0"/>
+                        </a:spcAft>
+                        <a:buClrTx/>
+                        <a:buSzTx/>
+                        <a:buFontTx/>
+                        <a:buNone/>
+                        <a:tabLst/>
+                        <a:defRPr/>
+                      </a:pPr>
+                      <a:r>
+                        <a:rPr kumimoji="0" lang="en-US" sz="800" b="0" i="0" u="none" strike="noStrike" kern="1200" cap="none" spc="0" normalizeH="0" baseline="0" dirty="0">
+                          <a:ln>
+                            <a:noFill/>
+                          </a:ln>
+                          <a:solidFill>
+                            <a:srgbClr val="D11960"/>
+                          </a:solidFill>
+                          <a:effectLst/>
+                          <a:uLnTx/>
+                          <a:uFillTx/>
+                          <a:latin typeface="Georgia"/>
+                          <a:ea typeface="+mn-ea"/>
+                          <a:cs typeface="+mn-cs"/>
+                        </a:rPr>
+                        <a:t>17.2%</a:t>
+                      </a:r>
+                    </a:p>
+                  </a:txBody>
+                  <a:tcPr marL="12700" marR="12700" marT="12700" marB="63500" anchor="b"/>
+                </a:tc>
+                <a:extLst>
+                  <a:ext uri="{0D108BD9-81ED-4DB2-BD59-A6C34878D82A}">
+                    <a16:rowId xmlns:a16="http://schemas.microsoft.com/office/drawing/2014/main" val="1954130689"/>
+                  </a:ext>
+                </a:extLst>
+              </a:tr>
+              <a:tr h="188047">
+                <a:tc>
+                  <a:txBody>
+                    <a:bodyPr/>
+                    <a:lstStyle/>
+                    <a:p>
+                      <a:pPr marL="0" marR="0" lvl="0" indent="0" algn="l" defTabSz="914400" rtl="0" eaLnBrk="1" fontAlgn="auto" latinLnBrk="0" hangingPunct="1">
+                        <a:lnSpc>
+                          <a:spcPct val="100000"/>
+                        </a:lnSpc>
+                        <a:spcBef>
+                          <a:spcPts val="0"/>
+                        </a:spcBef>
+                        <a:spcAft>
+                          <a:spcPts val="0"/>
+                        </a:spcAft>
+                        <a:buClrTx/>
+                        <a:buSzTx/>
+                        <a:buFontTx/>
+                        <a:buNone/>
+                        <a:tabLst/>
+                        <a:defRPr/>
+                      </a:pPr>
+                      <a:r>
+                        <a:rPr kumimoji="0" lang="en-US" sz="800" b="0" i="0" u="none" strike="noStrike" kern="1200" cap="none" spc="0" normalizeH="0" baseline="0">
+                          <a:ln>
+                            <a:noFill/>
+                          </a:ln>
+                          <a:solidFill>
+                            <a:srgbClr val="D11960"/>
+                          </a:solidFill>
+                          <a:effectLst/>
+                          <a:uLnTx/>
+                          <a:uFillTx/>
+                          <a:latin typeface="Georgia"/>
+                          <a:ea typeface="+mn-ea"/>
+                          <a:cs typeface="+mn-cs"/>
+                        </a:rPr>
+                        <a:t>Embedding</a:t>
+                      </a:r>
+                    </a:p>
+                  </a:txBody>
+                  <a:tcPr marL="25400" marR="25400" marT="25400" marB="25400" anchor="b"/>
+                </a:tc>
+                <a:tc>
+                  <a:txBody>
+                    <a:bodyPr/>
+                    <a:lstStyle/>
+                    <a:p>
+                      <a:pPr marL="0" marR="0" lvl="0" indent="0" algn="l" defTabSz="914400" rtl="0" eaLnBrk="1" fontAlgn="auto" latinLnBrk="0" hangingPunct="1">
+                        <a:lnSpc>
+                          <a:spcPct val="100000"/>
+                        </a:lnSpc>
+                        <a:spcBef>
+                          <a:spcPts val="0"/>
+                        </a:spcBef>
+                        <a:spcAft>
+                          <a:spcPts val="0"/>
+                        </a:spcAft>
+                        <a:buClrTx/>
+                        <a:buSzTx/>
+                        <a:buFontTx/>
+                        <a:buNone/>
+                        <a:tabLst/>
+                        <a:defRPr/>
+                      </a:pPr>
+                      <a:r>
+                        <a:rPr kumimoji="0" lang="en-US" sz="800" b="0" i="0" u="none" strike="noStrike" kern="1200" cap="none" spc="0" normalizeH="0" baseline="0">
+                          <a:ln>
+                            <a:noFill/>
+                          </a:ln>
+                          <a:solidFill>
+                            <a:srgbClr val="D11960"/>
+                          </a:solidFill>
+                          <a:effectLst/>
+                          <a:uLnTx/>
+                          <a:uFillTx/>
+                          <a:latin typeface="Georgia"/>
+                          <a:ea typeface="+mn-ea"/>
+                          <a:cs typeface="+mn-cs"/>
+                        </a:rPr>
+                        <a:t>MedLlama2+Euclidean Dist</a:t>
+                      </a:r>
+                    </a:p>
+                  </a:txBody>
+                  <a:tcPr marL="12700" marR="12700" marT="12700" marB="63500" anchor="b"/>
+                </a:tc>
+                <a:tc>
+                  <a:txBody>
+                    <a:bodyPr/>
+                    <a:lstStyle/>
+                    <a:p>
+                      <a:pPr marL="0" marR="0" lvl="0" indent="0" algn="l" defTabSz="914400" rtl="0" eaLnBrk="1" fontAlgn="auto" latinLnBrk="0" hangingPunct="1">
+                        <a:lnSpc>
+                          <a:spcPct val="100000"/>
+                        </a:lnSpc>
+                        <a:spcBef>
+                          <a:spcPts val="0"/>
+                        </a:spcBef>
+                        <a:spcAft>
+                          <a:spcPts val="0"/>
+                        </a:spcAft>
+                        <a:buClrTx/>
+                        <a:buSzTx/>
+                        <a:buFontTx/>
+                        <a:buNone/>
+                        <a:tabLst/>
+                        <a:defRPr/>
+                      </a:pPr>
+                      <a:r>
+                        <a:rPr kumimoji="0" lang="en-US" sz="800" b="0" i="0" u="none" strike="noStrike" kern="1200" cap="none" spc="0" normalizeH="0" baseline="0" dirty="0">
+                          <a:ln>
+                            <a:noFill/>
+                          </a:ln>
+                          <a:solidFill>
+                            <a:srgbClr val="D11960"/>
+                          </a:solidFill>
+                          <a:effectLst/>
+                          <a:uLnTx/>
+                          <a:uFillTx/>
+                          <a:latin typeface="Georgia"/>
+                          <a:ea typeface="+mn-ea"/>
+                          <a:cs typeface="+mn-cs"/>
+                        </a:rPr>
+                        <a:t>15.4%</a:t>
+                      </a:r>
+                    </a:p>
+                  </a:txBody>
+                  <a:tcPr marL="12700" marR="12700" marT="12700" marB="63500" anchor="b"/>
+                </a:tc>
+                <a:extLst>
+                  <a:ext uri="{0D108BD9-81ED-4DB2-BD59-A6C34878D82A}">
+                    <a16:rowId xmlns:a16="http://schemas.microsoft.com/office/drawing/2014/main" val="2586442628"/>
                   </a:ext>
                 </a:extLst>
               </a:tr>
@@ -9679,14 +12208,14 @@
           <p:nvPr>
             <p:extLst>
               <p:ext uri="{D42A27DB-BD31-4B8C-83A1-F6EECF244321}">
-                <p14:modId xmlns:p14="http://schemas.microsoft.com/office/powerpoint/2010/main" val="1975402421"/>
+                <p14:modId xmlns:p14="http://schemas.microsoft.com/office/powerpoint/2010/main" val="3933766387"/>
               </p:ext>
             </p:extLst>
           </p:nvPr>
         </p:nvGraphicFramePr>
         <p:xfrm>
-          <a:off x="91374" y="434521"/>
-          <a:ext cx="5634512" cy="6020065"/>
+          <a:off x="0" y="0"/>
+          <a:ext cx="5475516" cy="7467600"/>
         </p:xfrm>
         <a:graphic>
           <a:graphicData uri="http://schemas.openxmlformats.org/drawingml/2006/table">
@@ -9695,21 +12224,21 @@
                 <a:tableStyleId>{5C22544A-7EE6-4342-B048-85BDC9FD1C3A}</a:tableStyleId>
               </a:tblPr>
               <a:tblGrid>
-                <a:gridCol w="962784">
+                <a:gridCol w="935616">
                   <a:extLst>
                     <a:ext uri="{9D8B030D-6E8A-4147-A177-3AD203B41FA5}">
                       <a16:colId xmlns:a16="http://schemas.microsoft.com/office/drawing/2014/main" val="3177516889"/>
                     </a:ext>
                   </a:extLst>
                 </a:gridCol>
-                <a:gridCol w="1723629">
+                <a:gridCol w="1674991">
                   <a:extLst>
                     <a:ext uri="{9D8B030D-6E8A-4147-A177-3AD203B41FA5}">
                       <a16:colId xmlns:a16="http://schemas.microsoft.com/office/drawing/2014/main" val="523317735"/>
                     </a:ext>
                   </a:extLst>
                 </a:gridCol>
-                <a:gridCol w="2948099">
+                <a:gridCol w="2864909">
                   <a:extLst>
                     <a:ext uri="{9D8B030D-6E8A-4147-A177-3AD203B41FA5}">
                       <a16:colId xmlns:a16="http://schemas.microsoft.com/office/drawing/2014/main" val="2056308797"/>
@@ -9717,7 +12246,7 @@
                   </a:extLst>
                 </a:gridCol>
               </a:tblGrid>
-              <a:tr h="320591">
+              <a:tr h="301781">
                 <a:tc>
                   <a:txBody>
                     <a:bodyPr/>
@@ -9807,7 +12336,7 @@
                   </a:ext>
                 </a:extLst>
               </a:tr>
-              <a:tr h="216202">
+              <a:tr h="178325">
                 <a:tc>
                   <a:txBody>
                     <a:bodyPr/>
@@ -9917,7 +12446,7 @@
                         <a:defRPr/>
                       </a:pPr>
                       <a:r>
-                        <a:rPr kumimoji="0" lang="en-US" sz="800" b="0" i="0" u="none" strike="noStrike" kern="1200" cap="none" spc="0" normalizeH="0" baseline="0">
+                        <a:rPr kumimoji="0" lang="en-US" sz="800" b="0" i="0" u="none" strike="noStrike" kern="1200" cap="none" spc="0" normalizeH="0" baseline="0" dirty="0">
                           <a:ln>
                             <a:noFill/>
                           </a:ln>
@@ -9943,7 +12472,7 @@
                   </a:ext>
                 </a:extLst>
               </a:tr>
-              <a:tr h="216202">
+              <a:tr h="178325">
                 <a:tc>
                   <a:txBody>
                     <a:bodyPr/>
@@ -10084,7 +12613,7 @@
                         <a:defRPr/>
                       </a:pPr>
                       <a:r>
-                        <a:rPr kumimoji="0" lang="en-US" sz="800" b="0" i="0" u="none" strike="noStrike" kern="1200" cap="none" spc="0" normalizeH="0" baseline="0">
+                        <a:rPr kumimoji="0" lang="en-US" sz="800" b="0" i="0" u="none" strike="noStrike" kern="1200" cap="none" spc="0" normalizeH="0" baseline="0" dirty="0">
                           <a:ln>
                             <a:noFill/>
                           </a:ln>
@@ -10110,7 +12639,7 @@
                   </a:ext>
                 </a:extLst>
               </a:tr>
-              <a:tr h="216202">
+              <a:tr h="178325">
                 <a:tc>
                   <a:txBody>
                     <a:bodyPr/>
@@ -10277,7 +12806,7 @@
                   </a:ext>
                 </a:extLst>
               </a:tr>
-              <a:tr h="216202">
+              <a:tr h="178325">
                 <a:tc>
                   <a:txBody>
                     <a:bodyPr/>
@@ -10387,7 +12916,7 @@
                         <a:defRPr/>
                       </a:pPr>
                       <a:r>
-                        <a:rPr kumimoji="0" lang="en-US" sz="800" b="0" i="0" u="none" strike="noStrike" kern="1200" cap="none" spc="0" normalizeH="0" baseline="0">
+                        <a:rPr kumimoji="0" lang="en-US" sz="800" b="0" i="0" u="none" strike="noStrike" kern="1200" cap="none" spc="0" normalizeH="0" baseline="0" dirty="0">
                           <a:ln>
                             <a:noFill/>
                           </a:ln>
@@ -10413,7 +12942,7 @@
                   </a:ext>
                 </a:extLst>
               </a:tr>
-              <a:tr h="210061">
+              <a:tr h="178325">
                 <a:tc>
                   <a:txBody>
                     <a:bodyPr/>
@@ -10523,7 +13052,7 @@
                         <a:defRPr/>
                       </a:pPr>
                       <a:r>
-                        <a:rPr kumimoji="0" lang="en-US" sz="800" b="0" i="0" u="none" strike="noStrike" kern="1200" cap="none" spc="0" normalizeH="0" baseline="0">
+                        <a:rPr kumimoji="0" lang="en-US" sz="800" b="0" i="0" u="none" strike="noStrike" kern="1200" cap="none" spc="0" normalizeH="0" baseline="0" dirty="0">
                           <a:ln>
                             <a:noFill/>
                           </a:ln>
@@ -10549,7 +13078,7 @@
                   </a:ext>
                 </a:extLst>
               </a:tr>
-              <a:tr h="210061">
+              <a:tr h="178325">
                 <a:tc>
                   <a:txBody>
                     <a:bodyPr/>
@@ -10659,7 +13188,7 @@
                         <a:defRPr/>
                       </a:pPr>
                       <a:r>
-                        <a:rPr kumimoji="0" lang="en-US" sz="800" b="0" i="0" u="none" strike="noStrike" kern="1200" cap="none" spc="0" normalizeH="0" baseline="0">
+                        <a:rPr kumimoji="0" lang="en-US" sz="800" b="0" i="0" u="none" strike="noStrike" kern="1200" cap="none" spc="0" normalizeH="0" baseline="0" dirty="0">
                           <a:ln>
                             <a:noFill/>
                           </a:ln>
@@ -10685,7 +13214,7 @@
                   </a:ext>
                 </a:extLst>
               </a:tr>
-              <a:tr h="210061">
+              <a:tr h="178325">
                 <a:tc>
                   <a:txBody>
                     <a:bodyPr/>
@@ -10821,7 +13350,7 @@
                   </a:ext>
                 </a:extLst>
               </a:tr>
-              <a:tr h="210061">
+              <a:tr h="178325">
                 <a:tc>
                   <a:txBody>
                     <a:bodyPr/>
@@ -10931,7 +13460,7 @@
                         <a:defRPr/>
                       </a:pPr>
                       <a:r>
-                        <a:rPr kumimoji="0" lang="en-US" sz="800" b="0" i="0" u="none" strike="noStrike" kern="1200" cap="none" spc="0" normalizeH="0" baseline="0">
+                        <a:rPr kumimoji="0" lang="en-US" sz="800" b="0" i="0" u="none" strike="noStrike" kern="1200" cap="none" spc="0" normalizeH="0" baseline="0" dirty="0">
                           <a:ln>
                             <a:noFill/>
                           </a:ln>
@@ -10957,7 +13486,7 @@
                   </a:ext>
                 </a:extLst>
               </a:tr>
-              <a:tr h="216202">
+              <a:tr h="178325">
                 <a:tc>
                   <a:txBody>
                     <a:bodyPr/>
@@ -11067,7 +13596,7 @@
                         <a:defRPr/>
                       </a:pPr>
                       <a:r>
-                        <a:rPr kumimoji="0" lang="en-US" sz="800" b="0" i="0" u="none" strike="noStrike" kern="1200" cap="none" spc="0" normalizeH="0" baseline="0">
+                        <a:rPr kumimoji="0" lang="en-US" sz="800" b="0" i="0" u="none" strike="noStrike" kern="1200" cap="none" spc="0" normalizeH="0" baseline="0" dirty="0">
                           <a:ln>
                             <a:noFill/>
                           </a:ln>
@@ -11093,7 +13622,7 @@
                   </a:ext>
                 </a:extLst>
               </a:tr>
-              <a:tr h="216202">
+              <a:tr h="178325">
                 <a:tc>
                   <a:txBody>
                     <a:bodyPr/>
@@ -11203,7 +13732,7 @@
                         <a:defRPr/>
                       </a:pPr>
                       <a:r>
-                        <a:rPr kumimoji="0" lang="en-US" sz="800" b="0" i="0" u="none" strike="noStrike" kern="1200" cap="none" spc="0" normalizeH="0" baseline="0">
+                        <a:rPr kumimoji="0" lang="en-US" sz="800" b="0" i="0" u="none" strike="noStrike" kern="1200" cap="none" spc="0" normalizeH="0" baseline="0" dirty="0">
                           <a:ln>
                             <a:noFill/>
                           </a:ln>
@@ -11229,7 +13758,7 @@
                   </a:ext>
                 </a:extLst>
               </a:tr>
-              <a:tr h="216202">
+              <a:tr h="178325">
                 <a:tc>
                   <a:txBody>
                     <a:bodyPr/>
@@ -11339,7 +13868,7 @@
                         <a:defRPr/>
                       </a:pPr>
                       <a:r>
-                        <a:rPr kumimoji="0" lang="en-US" sz="800" b="0" i="0" u="none" strike="noStrike" kern="1200" cap="none" spc="0" normalizeH="0" baseline="0">
+                        <a:rPr kumimoji="0" lang="en-US" sz="800" b="0" i="0" u="none" strike="noStrike" kern="1200" cap="none" spc="0" normalizeH="0" baseline="0" dirty="0">
                           <a:ln>
                             <a:noFill/>
                           </a:ln>
@@ -11365,7 +13894,7 @@
                   </a:ext>
                 </a:extLst>
               </a:tr>
-              <a:tr h="216202">
+              <a:tr h="178325">
                 <a:tc>
                   <a:txBody>
                     <a:bodyPr/>
@@ -11475,7 +14004,7 @@
                         <a:defRPr/>
                       </a:pPr>
                       <a:r>
-                        <a:rPr kumimoji="0" lang="en-US" sz="800" b="0" i="0" u="none" strike="noStrike" kern="1200" cap="none" spc="0" normalizeH="0" baseline="0">
+                        <a:rPr kumimoji="0" lang="en-US" sz="800" b="0" i="0" u="none" strike="noStrike" kern="1200" cap="none" spc="0" normalizeH="0" baseline="0" dirty="0">
                           <a:ln>
                             <a:noFill/>
                           </a:ln>
@@ -11501,7 +14030,7 @@
                   </a:ext>
                 </a:extLst>
               </a:tr>
-              <a:tr h="216202">
+              <a:tr h="178325">
                 <a:tc>
                   <a:txBody>
                     <a:bodyPr/>
@@ -11568,7 +14097,7 @@
                         <a:defRPr/>
                       </a:pPr>
                       <a:r>
-                        <a:rPr kumimoji="0" lang="en-US" sz="800" b="0" i="0" u="none" strike="noStrike" kern="1200" cap="none" spc="0" normalizeH="0" baseline="0">
+                        <a:rPr kumimoji="0" lang="en-US" sz="800" b="0" i="0" u="none" strike="noStrike" kern="1200" cap="none" spc="0" normalizeH="0" baseline="0" dirty="0">
                           <a:ln>
                             <a:noFill/>
                           </a:ln>
@@ -11582,279 +14111,7 @@
                           <a:ea typeface="+mn-ea"/>
                           <a:cs typeface="+mn-cs"/>
                         </a:rPr>
-                        <a:t>all-roberta-large-v1+Euclidean Dist</a:t>
-                      </a:r>
-                    </a:p>
-                  </a:txBody>
-                  <a:tcPr marL="12700" marR="12700" marT="12700" marB="63500" anchor="b"/>
-                </a:tc>
-                <a:tc>
-                  <a:txBody>
-                    <a:bodyPr/>
-                    <a:lstStyle/>
-                    <a:p>
-                      <a:pPr marL="0" marR="0" lvl="0" indent="0" algn="l" defTabSz="914400" rtl="0" eaLnBrk="1" fontAlgn="auto" latinLnBrk="0" hangingPunct="1">
-                        <a:lnSpc>
-                          <a:spcPct val="100000"/>
-                        </a:lnSpc>
-                        <a:spcBef>
-                          <a:spcPts val="0"/>
-                        </a:spcBef>
-                        <a:spcAft>
-                          <a:spcPts val="0"/>
-                        </a:spcAft>
-                        <a:buClrTx/>
-                        <a:buSzTx/>
-                        <a:buFontTx/>
-                        <a:buNone/>
-                        <a:tabLst/>
-                        <a:defRPr/>
-                      </a:pPr>
-                      <a:r>
-                        <a:rPr kumimoji="0" lang="en-US" sz="800" b="0" i="0" u="none" strike="noStrike" kern="1200" cap="none" spc="0" normalizeH="0" baseline="0">
-                          <a:ln>
-                            <a:noFill/>
-                          </a:ln>
-                          <a:solidFill>
-                            <a:srgbClr val="D11960"/>
-                          </a:solidFill>
-                          <a:effectLst/>
-                          <a:uLnTx/>
-                          <a:uFillTx/>
-                          <a:latin typeface="Georgia"/>
-                          <a:ea typeface="+mn-ea"/>
-                          <a:cs typeface="+mn-cs"/>
-                        </a:rPr>
-                        <a:t>58.6%</a:t>
-                      </a:r>
-                    </a:p>
-                  </a:txBody>
-                  <a:tcPr marL="12700" marR="12700" marT="12700" marB="63500" anchor="b"/>
-                </a:tc>
-                <a:extLst>
-                  <a:ext uri="{0D108BD9-81ED-4DB2-BD59-A6C34878D82A}">
-                    <a16:rowId xmlns:a16="http://schemas.microsoft.com/office/drawing/2014/main" val="2147432743"/>
-                  </a:ext>
-                </a:extLst>
-              </a:tr>
-              <a:tr h="210061">
-                <a:tc>
-                  <a:txBody>
-                    <a:bodyPr/>
-                    <a:lstStyle/>
-                    <a:p>
-                      <a:pPr marL="0" marR="0" lvl="0" indent="0" algn="l" defTabSz="914400" rtl="0" eaLnBrk="1" fontAlgn="auto" latinLnBrk="0" hangingPunct="1">
-                        <a:lnSpc>
-                          <a:spcPct val="100000"/>
-                        </a:lnSpc>
-                        <a:spcBef>
-                          <a:spcPts val="0"/>
-                        </a:spcBef>
-                        <a:spcAft>
-                          <a:spcPts val="0"/>
-                        </a:spcAft>
-                        <a:buClrTx/>
-                        <a:buSzTx/>
-                        <a:buFontTx/>
-                        <a:buNone/>
-                        <a:tabLst/>
-                        <a:defRPr/>
-                      </a:pPr>
-                      <a:r>
-                        <a:rPr kumimoji="0" lang="en-US" sz="800" b="0" i="0" u="none" strike="noStrike" kern="1200" cap="none" spc="0" normalizeH="0" baseline="0">
-                          <a:ln>
-                            <a:noFill/>
-                          </a:ln>
-                          <a:solidFill>
-                            <a:srgbClr val="D11960"/>
-                          </a:solidFill>
-                          <a:effectLst/>
-                          <a:uLnTx/>
-                          <a:uFillTx/>
-                          <a:latin typeface="Georgia"/>
-                          <a:ea typeface="+mn-ea"/>
-                          <a:cs typeface="+mn-cs"/>
-                        </a:rPr>
-                        <a:t>Embedding</a:t>
-                      </a:r>
-                    </a:p>
-                  </a:txBody>
-                  <a:tcPr marL="25400" marR="25400" marT="25400" marB="25400" anchor="b"/>
-                </a:tc>
-                <a:tc>
-                  <a:txBody>
-                    <a:bodyPr/>
-                    <a:lstStyle/>
-                    <a:p>
-                      <a:pPr marL="0" marR="0" lvl="0" indent="0" algn="l" defTabSz="914400" rtl="0" eaLnBrk="1" fontAlgn="auto" latinLnBrk="0" hangingPunct="1">
-                        <a:lnSpc>
-                          <a:spcPct val="100000"/>
-                        </a:lnSpc>
-                        <a:spcBef>
-                          <a:spcPts val="0"/>
-                        </a:spcBef>
-                        <a:spcAft>
-                          <a:spcPts val="0"/>
-                        </a:spcAft>
-                        <a:buClrTx/>
-                        <a:buSzTx/>
-                        <a:buFontTx/>
-                        <a:buNone/>
-                        <a:tabLst/>
-                        <a:defRPr/>
-                      </a:pPr>
-                      <a:r>
-                        <a:rPr kumimoji="0" lang="en-US" sz="800" b="0" i="0" u="none" strike="noStrike" kern="1200" cap="none" spc="0" normalizeH="0" baseline="0">
-                          <a:ln>
-                            <a:noFill/>
-                          </a:ln>
-                          <a:solidFill>
-                            <a:srgbClr val="D11960"/>
-                          </a:solidFill>
-                          <a:effectLst/>
-                          <a:uLnTx/>
-                          <a:uFillTx/>
-                          <a:latin typeface="Georgia"/>
-                          <a:ea typeface="+mn-ea"/>
-                          <a:cs typeface="+mn-cs"/>
-                        </a:rPr>
-                        <a:t>gtr-t5-large+Euclidean Dist</a:t>
-                      </a:r>
-                    </a:p>
-                  </a:txBody>
-                  <a:tcPr marL="12700" marR="12700" marT="12700" marB="63500" anchor="b"/>
-                </a:tc>
-                <a:tc>
-                  <a:txBody>
-                    <a:bodyPr/>
-                    <a:lstStyle/>
-                    <a:p>
-                      <a:pPr marL="0" marR="0" lvl="0" indent="0" algn="l" defTabSz="914400" rtl="0" eaLnBrk="1" fontAlgn="auto" latinLnBrk="0" hangingPunct="1">
-                        <a:lnSpc>
-                          <a:spcPct val="100000"/>
-                        </a:lnSpc>
-                        <a:spcBef>
-                          <a:spcPts val="0"/>
-                        </a:spcBef>
-                        <a:spcAft>
-                          <a:spcPts val="0"/>
-                        </a:spcAft>
-                        <a:buClrTx/>
-                        <a:buSzTx/>
-                        <a:buFontTx/>
-                        <a:buNone/>
-                        <a:tabLst/>
-                        <a:defRPr/>
-                      </a:pPr>
-                      <a:r>
-                        <a:rPr kumimoji="0" lang="en-US" sz="800" b="0" i="0" u="none" strike="noStrike" kern="1200" cap="none" spc="0" normalizeH="0" baseline="0">
-                          <a:ln>
-                            <a:noFill/>
-                          </a:ln>
-                          <a:solidFill>
-                            <a:srgbClr val="D11960"/>
-                          </a:solidFill>
-                          <a:effectLst/>
-                          <a:uLnTx/>
-                          <a:uFillTx/>
-                          <a:latin typeface="Georgia"/>
-                          <a:ea typeface="+mn-ea"/>
-                          <a:cs typeface="+mn-cs"/>
-                        </a:rPr>
-                        <a:t>57%</a:t>
-                      </a:r>
-                    </a:p>
-                  </a:txBody>
-                  <a:tcPr marL="12700" marR="12700" marT="12700" marB="63500" anchor="b"/>
-                </a:tc>
-                <a:extLst>
-                  <a:ext uri="{0D108BD9-81ED-4DB2-BD59-A6C34878D82A}">
-                    <a16:rowId xmlns:a16="http://schemas.microsoft.com/office/drawing/2014/main" val="1506931024"/>
-                  </a:ext>
-                </a:extLst>
-              </a:tr>
-              <a:tr h="216202">
-                <a:tc>
-                  <a:txBody>
-                    <a:bodyPr/>
-                    <a:lstStyle/>
-                    <a:p>
-                      <a:pPr marL="0" marR="0" lvl="0" indent="0" algn="l" defTabSz="914400" rtl="0" eaLnBrk="1" fontAlgn="auto" latinLnBrk="0" hangingPunct="1">
-                        <a:lnSpc>
-                          <a:spcPct val="100000"/>
-                        </a:lnSpc>
-                        <a:spcBef>
-                          <a:spcPts val="0"/>
-                        </a:spcBef>
-                        <a:spcAft>
-                          <a:spcPts val="0"/>
-                        </a:spcAft>
-                        <a:buClrTx/>
-                        <a:buSzTx/>
-                        <a:buFontTx/>
-                        <a:buNone/>
-                        <a:tabLst/>
-                        <a:defRPr/>
-                      </a:pPr>
-                      <a:r>
-                        <a:rPr kumimoji="0" lang="en-US" sz="800" b="0" i="0" u="none" strike="noStrike" kern="1200" cap="none" spc="0" normalizeH="0" baseline="0">
-                          <a:ln>
-                            <a:noFill/>
-                          </a:ln>
-                          <a:solidFill>
-                            <a:srgbClr val="D11960"/>
-                          </a:solidFill>
-                          <a:effectLst/>
-                          <a:uLnTx/>
-                          <a:uFillTx/>
-                          <a:latin typeface="Georgia"/>
-                          <a:ea typeface="+mn-ea"/>
-                          <a:cs typeface="+mn-cs"/>
-                        </a:rPr>
-                        <a:t>Embedding</a:t>
-                      </a:r>
-                    </a:p>
-                  </a:txBody>
-                  <a:tcPr marL="25400" marR="25400" marT="25400" marB="25400" anchor="b"/>
-                </a:tc>
-                <a:tc>
-                  <a:txBody>
-                    <a:bodyPr/>
-                    <a:lstStyle/>
-                    <a:p>
-                      <a:pPr marL="0" marR="0" lvl="0" indent="0" algn="l" defTabSz="914400" rtl="0" eaLnBrk="1" fontAlgn="auto" latinLnBrk="0" hangingPunct="1">
-                        <a:lnSpc>
-                          <a:spcPct val="100000"/>
-                        </a:lnSpc>
-                        <a:spcBef>
-                          <a:spcPts val="0"/>
-                        </a:spcBef>
-                        <a:spcAft>
-                          <a:spcPts val="0"/>
-                        </a:spcAft>
-                        <a:buClrTx/>
-                        <a:buSzTx/>
-                        <a:buFontTx/>
-                        <a:buNone/>
-                        <a:tabLst/>
-                        <a:defRPr/>
-                      </a:pPr>
-                      <a:r>
-                        <a:rPr kumimoji="0" lang="en-US" sz="800" b="0" i="0" u="none" strike="noStrike" kern="1200" cap="none" spc="0" normalizeH="0" baseline="0" dirty="0">
-                          <a:ln>
-                            <a:noFill/>
-                          </a:ln>
-                          <a:solidFill>
-                            <a:srgbClr val="D11960"/>
-                          </a:solidFill>
-                          <a:effectLst/>
-                          <a:uLnTx/>
-                          <a:uFillTx/>
-                          <a:latin typeface="Georgia"/>
-                          <a:ea typeface="+mn-ea"/>
-                          <a:cs typeface="+mn-cs"/>
-                        </a:rPr>
-                        <a:t>embed-english-v2.0+Euclidean </a:t>
+                        <a:t>all-roberta-large-v1+Euclidean </a:t>
                       </a:r>
                       <a:r>
                         <a:rPr kumimoji="0" lang="en-US" sz="800" b="0" i="0" u="none" strike="noStrike" kern="1200" cap="none" spc="0" normalizeH="0" baseline="0" dirty="0" err="1">
@@ -11928,6 +14185,309 @@
                           <a:ea typeface="+mn-ea"/>
                           <a:cs typeface="+mn-cs"/>
                         </a:rPr>
+                        <a:t>58.6%</a:t>
+                      </a:r>
+                    </a:p>
+                  </a:txBody>
+                  <a:tcPr marL="12700" marR="12700" marT="12700" marB="63500" anchor="b"/>
+                </a:tc>
+                <a:extLst>
+                  <a:ext uri="{0D108BD9-81ED-4DB2-BD59-A6C34878D82A}">
+                    <a16:rowId xmlns:a16="http://schemas.microsoft.com/office/drawing/2014/main" val="2147432743"/>
+                  </a:ext>
+                </a:extLst>
+              </a:tr>
+              <a:tr h="178325">
+                <a:tc>
+                  <a:txBody>
+                    <a:bodyPr/>
+                    <a:lstStyle/>
+                    <a:p>
+                      <a:pPr marL="0" marR="0" lvl="0" indent="0" algn="l" defTabSz="914400" rtl="0" eaLnBrk="1" fontAlgn="auto" latinLnBrk="0" hangingPunct="1">
+                        <a:lnSpc>
+                          <a:spcPct val="100000"/>
+                        </a:lnSpc>
+                        <a:spcBef>
+                          <a:spcPts val="0"/>
+                        </a:spcBef>
+                        <a:spcAft>
+                          <a:spcPts val="0"/>
+                        </a:spcAft>
+                        <a:buClrTx/>
+                        <a:buSzTx/>
+                        <a:buFontTx/>
+                        <a:buNone/>
+                        <a:tabLst/>
+                        <a:defRPr/>
+                      </a:pPr>
+                      <a:r>
+                        <a:rPr kumimoji="0" lang="en-US" sz="800" b="0" i="0" u="none" strike="noStrike" kern="1200" cap="none" spc="0" normalizeH="0" baseline="0">
+                          <a:ln>
+                            <a:noFill/>
+                          </a:ln>
+                          <a:solidFill>
+                            <a:srgbClr val="D11960"/>
+                          </a:solidFill>
+                          <a:effectLst/>
+                          <a:uLnTx/>
+                          <a:uFillTx/>
+                          <a:latin typeface="Georgia"/>
+                          <a:ea typeface="+mn-ea"/>
+                          <a:cs typeface="+mn-cs"/>
+                        </a:rPr>
+                        <a:t>Embedding</a:t>
+                      </a:r>
+                    </a:p>
+                  </a:txBody>
+                  <a:tcPr marL="25400" marR="25400" marT="25400" marB="25400" anchor="b"/>
+                </a:tc>
+                <a:tc>
+                  <a:txBody>
+                    <a:bodyPr/>
+                    <a:lstStyle/>
+                    <a:p>
+                      <a:pPr marL="0" marR="0" lvl="0" indent="0" algn="l" defTabSz="914400" rtl="0" eaLnBrk="1" fontAlgn="auto" latinLnBrk="0" hangingPunct="1">
+                        <a:lnSpc>
+                          <a:spcPct val="100000"/>
+                        </a:lnSpc>
+                        <a:spcBef>
+                          <a:spcPts val="0"/>
+                        </a:spcBef>
+                        <a:spcAft>
+                          <a:spcPts val="0"/>
+                        </a:spcAft>
+                        <a:buClrTx/>
+                        <a:buSzTx/>
+                        <a:buFontTx/>
+                        <a:buNone/>
+                        <a:tabLst/>
+                        <a:defRPr/>
+                      </a:pPr>
+                      <a:r>
+                        <a:rPr kumimoji="0" lang="en-US" sz="800" b="0" i="0" u="none" strike="noStrike" kern="1200" cap="none" spc="0" normalizeH="0" baseline="0">
+                          <a:ln>
+                            <a:noFill/>
+                          </a:ln>
+                          <a:solidFill>
+                            <a:srgbClr val="D11960"/>
+                          </a:solidFill>
+                          <a:effectLst/>
+                          <a:uLnTx/>
+                          <a:uFillTx/>
+                          <a:latin typeface="Georgia"/>
+                          <a:ea typeface="+mn-ea"/>
+                          <a:cs typeface="+mn-cs"/>
+                        </a:rPr>
+                        <a:t>gtr-t5-large+Euclidean Dist</a:t>
+                      </a:r>
+                    </a:p>
+                  </a:txBody>
+                  <a:tcPr marL="12700" marR="12700" marT="12700" marB="63500" anchor="b"/>
+                </a:tc>
+                <a:tc>
+                  <a:txBody>
+                    <a:bodyPr/>
+                    <a:lstStyle/>
+                    <a:p>
+                      <a:pPr marL="0" marR="0" lvl="0" indent="0" algn="l" defTabSz="914400" rtl="0" eaLnBrk="1" fontAlgn="auto" latinLnBrk="0" hangingPunct="1">
+                        <a:lnSpc>
+                          <a:spcPct val="100000"/>
+                        </a:lnSpc>
+                        <a:spcBef>
+                          <a:spcPts val="0"/>
+                        </a:spcBef>
+                        <a:spcAft>
+                          <a:spcPts val="0"/>
+                        </a:spcAft>
+                        <a:buClrTx/>
+                        <a:buSzTx/>
+                        <a:buFontTx/>
+                        <a:buNone/>
+                        <a:tabLst/>
+                        <a:defRPr/>
+                      </a:pPr>
+                      <a:r>
+                        <a:rPr kumimoji="0" lang="en-US" sz="800" b="0" i="0" u="none" strike="noStrike" kern="1200" cap="none" spc="0" normalizeH="0" baseline="0" dirty="0">
+                          <a:ln>
+                            <a:noFill/>
+                          </a:ln>
+                          <a:solidFill>
+                            <a:srgbClr val="D11960"/>
+                          </a:solidFill>
+                          <a:effectLst/>
+                          <a:uLnTx/>
+                          <a:uFillTx/>
+                          <a:latin typeface="Georgia"/>
+                          <a:ea typeface="+mn-ea"/>
+                          <a:cs typeface="+mn-cs"/>
+                        </a:rPr>
+                        <a:t>57%</a:t>
+                      </a:r>
+                    </a:p>
+                  </a:txBody>
+                  <a:tcPr marL="12700" marR="12700" marT="12700" marB="63500" anchor="b"/>
+                </a:tc>
+                <a:extLst>
+                  <a:ext uri="{0D108BD9-81ED-4DB2-BD59-A6C34878D82A}">
+                    <a16:rowId xmlns:a16="http://schemas.microsoft.com/office/drawing/2014/main" val="1506931024"/>
+                  </a:ext>
+                </a:extLst>
+              </a:tr>
+              <a:tr h="178325">
+                <a:tc>
+                  <a:txBody>
+                    <a:bodyPr/>
+                    <a:lstStyle/>
+                    <a:p>
+                      <a:pPr marL="0" marR="0" lvl="0" indent="0" algn="l" defTabSz="914400" rtl="0" eaLnBrk="1" fontAlgn="auto" latinLnBrk="0" hangingPunct="1">
+                        <a:lnSpc>
+                          <a:spcPct val="100000"/>
+                        </a:lnSpc>
+                        <a:spcBef>
+                          <a:spcPts val="0"/>
+                        </a:spcBef>
+                        <a:spcAft>
+                          <a:spcPts val="0"/>
+                        </a:spcAft>
+                        <a:buClrTx/>
+                        <a:buSzTx/>
+                        <a:buFontTx/>
+                        <a:buNone/>
+                        <a:tabLst/>
+                        <a:defRPr/>
+                      </a:pPr>
+                      <a:r>
+                        <a:rPr kumimoji="0" lang="en-US" sz="800" b="0" i="0" u="none" strike="noStrike" kern="1200" cap="none" spc="0" normalizeH="0" baseline="0">
+                          <a:ln>
+                            <a:noFill/>
+                          </a:ln>
+                          <a:solidFill>
+                            <a:srgbClr val="D11960"/>
+                          </a:solidFill>
+                          <a:effectLst/>
+                          <a:uLnTx/>
+                          <a:uFillTx/>
+                          <a:latin typeface="Georgia"/>
+                          <a:ea typeface="+mn-ea"/>
+                          <a:cs typeface="+mn-cs"/>
+                        </a:rPr>
+                        <a:t>Embedding</a:t>
+                      </a:r>
+                    </a:p>
+                  </a:txBody>
+                  <a:tcPr marL="25400" marR="25400" marT="25400" marB="25400" anchor="b"/>
+                </a:tc>
+                <a:tc>
+                  <a:txBody>
+                    <a:bodyPr/>
+                    <a:lstStyle/>
+                    <a:p>
+                      <a:pPr marL="0" marR="0" lvl="0" indent="0" algn="l" defTabSz="914400" rtl="0" eaLnBrk="1" fontAlgn="auto" latinLnBrk="0" hangingPunct="1">
+                        <a:lnSpc>
+                          <a:spcPct val="100000"/>
+                        </a:lnSpc>
+                        <a:spcBef>
+                          <a:spcPts val="0"/>
+                        </a:spcBef>
+                        <a:spcAft>
+                          <a:spcPts val="0"/>
+                        </a:spcAft>
+                        <a:buClrTx/>
+                        <a:buSzTx/>
+                        <a:buFontTx/>
+                        <a:buNone/>
+                        <a:tabLst/>
+                        <a:defRPr/>
+                      </a:pPr>
+                      <a:r>
+                        <a:rPr kumimoji="0" lang="en-US" sz="800" b="0" i="0" u="none" strike="noStrike" kern="1200" cap="none" spc="0" normalizeH="0" baseline="0" dirty="0">
+                          <a:ln>
+                            <a:noFill/>
+                          </a:ln>
+                          <a:solidFill>
+                            <a:srgbClr val="D11960"/>
+                          </a:solidFill>
+                          <a:effectLst/>
+                          <a:uLnTx/>
+                          <a:uFillTx/>
+                          <a:latin typeface="Georgia"/>
+                          <a:ea typeface="+mn-ea"/>
+                          <a:cs typeface="+mn-cs"/>
+                        </a:rPr>
+                        <a:t>embed-english-v2.0+Euclidean </a:t>
+                      </a:r>
+                      <a:r>
+                        <a:rPr kumimoji="0" lang="en-US" sz="800" b="0" i="0" u="none" strike="noStrike" kern="1200" cap="none" spc="0" normalizeH="0" baseline="0" dirty="0" err="1">
+                          <a:ln>
+                            <a:noFill/>
+                          </a:ln>
+                          <a:solidFill>
+                            <a:srgbClr val="D11960"/>
+                          </a:solidFill>
+                          <a:effectLst/>
+                          <a:uLnTx/>
+                          <a:uFillTx/>
+                          <a:latin typeface="Georgia"/>
+                          <a:ea typeface="+mn-ea"/>
+                          <a:cs typeface="+mn-cs"/>
+                        </a:rPr>
+                        <a:t>Dist</a:t>
+                      </a:r>
+                      <a:endParaRPr kumimoji="0" lang="en-US" sz="800" b="0" i="0" u="none" strike="noStrike" kern="1200" cap="none" spc="0" normalizeH="0" baseline="0" dirty="0">
+                        <a:ln>
+                          <a:noFill/>
+                        </a:ln>
+                        <a:solidFill>
+                          <a:srgbClr val="D11960"/>
+                        </a:solidFill>
+                        <a:effectLst/>
+                        <a:uLnTx/>
+                        <a:uFillTx/>
+                        <a:latin typeface="Georgia"/>
+                        <a:ea typeface="+mn-ea"/>
+                        <a:cs typeface="+mn-cs"/>
+                      </a:endParaRPr>
+                    </a:p>
+                  </a:txBody>
+                  <a:tcPr marL="12700" marR="12700" marT="12700" marB="63500" anchor="b"/>
+                </a:tc>
+                <a:tc>
+                  <a:txBody>
+                    <a:bodyPr/>
+                    <a:lstStyle/>
+                    <a:p>
+                      <a:pPr marL="0" marR="0" lvl="0" indent="0" algn="l" defTabSz="914400" rtl="0" eaLnBrk="1" fontAlgn="auto" latinLnBrk="0" hangingPunct="1">
+                        <a:lnSpc>
+                          <a:spcPct val="100000"/>
+                        </a:lnSpc>
+                        <a:spcBef>
+                          <a:spcPts val="0"/>
+                        </a:spcBef>
+                        <a:spcAft>
+                          <a:spcPts val="0"/>
+                        </a:spcAft>
+                        <a:buClrTx/>
+                        <a:buSzTx/>
+                        <a:buFontTx/>
+                        <a:buNone/>
+                        <a:tabLst/>
+                        <a:defRPr/>
+                      </a:pPr>
+                      <a:r>
+                        <a:rPr kumimoji="0" lang="en-US" sz="800" b="0" i="0" u="none" strike="noStrike" kern="1200" cap="none" spc="0" normalizeH="0" baseline="0" dirty="0">
+                          <a:ln>
+                            <a:noFill/>
+                          </a:ln>
+                          <a:solidFill>
+                            <a:srgbClr val="D11960"/>
+                          </a:solidFill>
+                          <a:effectLst/>
+                          <a:uLnTx/>
+                          <a:uFillTx/>
+                          <a:latin typeface="Georgia"/>
+                          <a:ea typeface="+mn-ea"/>
+                          <a:cs typeface="+mn-cs"/>
+                        </a:rPr>
                         <a:t>53.5%</a:t>
                       </a:r>
                     </a:p>
@@ -11940,7 +14500,7 @@
                   </a:ext>
                 </a:extLst>
               </a:tr>
-              <a:tr h="210061">
+              <a:tr h="178325">
                 <a:tc>
                   <a:txBody>
                     <a:bodyPr/>
@@ -12050,7 +14610,7 @@
                         <a:defRPr/>
                       </a:pPr>
                       <a:r>
-                        <a:rPr kumimoji="0" lang="en-US" sz="800" b="0" i="0" u="none" strike="noStrike" kern="1200" cap="none" spc="0" normalizeH="0" baseline="0">
+                        <a:rPr kumimoji="0" lang="en-US" sz="800" b="0" i="0" u="none" strike="noStrike" kern="1200" cap="none" spc="0" normalizeH="0" baseline="0" dirty="0">
                           <a:ln>
                             <a:noFill/>
                           </a:ln>
@@ -12076,7 +14636,7 @@
                   </a:ext>
                 </a:extLst>
               </a:tr>
-              <a:tr h="216202">
+              <a:tr h="178325">
                 <a:tc>
                   <a:txBody>
                     <a:bodyPr/>
@@ -12186,7 +14746,7 @@
                         <a:defRPr/>
                       </a:pPr>
                       <a:r>
-                        <a:rPr kumimoji="0" lang="en-US" sz="800" b="0" i="0" u="none" strike="noStrike" kern="1200" cap="none" spc="0" normalizeH="0" baseline="0">
+                        <a:rPr kumimoji="0" lang="en-US" sz="800" b="0" i="0" u="none" strike="noStrike" kern="1200" cap="none" spc="0" normalizeH="0" baseline="0" dirty="0">
                           <a:ln>
                             <a:noFill/>
                           </a:ln>
@@ -12212,7 +14772,7 @@
                   </a:ext>
                 </a:extLst>
               </a:tr>
-              <a:tr h="189440">
+              <a:tr h="178325">
                 <a:tc>
                   <a:txBody>
                     <a:bodyPr/>
@@ -12279,7 +14839,41 @@
                         <a:defRPr/>
                       </a:pPr>
                       <a:r>
-                        <a:rPr kumimoji="0" lang="en-US" sz="800" b="0" i="0" u="none" strike="noStrike" kern="1200" cap="none" spc="0" normalizeH="0" baseline="0">
+                        <a:rPr kumimoji="0" lang="en-US" sz="800" b="0" i="0" u="none" strike="noStrike" kern="1200" cap="none" spc="0" normalizeH="0" baseline="0" dirty="0" err="1">
+                          <a:ln>
+                            <a:noFill/>
+                          </a:ln>
+                          <a:solidFill>
+                            <a:schemeClr val="tx1"/>
+                          </a:solidFill>
+                          <a:effectLst/>
+                          <a:uLnTx/>
+                          <a:uFillTx/>
+                          <a:latin typeface="Georgia"/>
+                          <a:ea typeface="+mn-ea"/>
+                          <a:cs typeface="+mn-cs"/>
+                        </a:rPr>
+                        <a:t>BioGPT+Euclidean</a:t>
+                      </a:r>
+                      <a:r>
+                        <a:rPr kumimoji="0" lang="en-US" sz="800" b="0" i="0" u="none" strike="noStrike" kern="1200" cap="none" spc="0" normalizeH="0" baseline="0" dirty="0">
+                          <a:ln>
+                            <a:noFill/>
+                          </a:ln>
+                          <a:solidFill>
+                            <a:schemeClr val="tx1"/>
+                          </a:solidFill>
+                          <a:effectLst/>
+                          <a:uLnTx/>
+                          <a:uFillTx/>
+                          <a:latin typeface="Georgia"/>
+                          <a:ea typeface="+mn-ea"/>
+                          <a:cs typeface="+mn-cs"/>
+                        </a:rPr>
+                        <a:t> </a:t>
+                      </a:r>
+                      <a:r>
+                        <a:rPr kumimoji="0" lang="en-US" sz="800" b="0" i="0" u="none" strike="noStrike" kern="1200" cap="none" spc="0" normalizeH="0" baseline="0" dirty="0" err="1">
                           <a:ln>
                             <a:noFill/>
                           </a:ln>
@@ -12293,8 +14887,22 @@
                           <a:ea typeface="+mn-ea"/>
                           <a:cs typeface="+mn-cs"/>
                         </a:rPr>
-                        <a:t>BioGPT+Euclidean Dist</a:t>
-                      </a:r>
+                        <a:t>Dist</a:t>
+                      </a:r>
+                      <a:endParaRPr kumimoji="0" lang="en-US" sz="800" b="0" i="0" u="none" strike="noStrike" kern="1200" cap="none" spc="0" normalizeH="0" baseline="0" dirty="0">
+                        <a:ln>
+                          <a:noFill/>
+                        </a:ln>
+                        <a:solidFill>
+                          <a:srgbClr val="D11960"/>
+                        </a:solidFill>
+                        <a:effectLst/>
+                        <a:uLnTx/>
+                        <a:uFillTx/>
+                        <a:latin typeface="Georgia"/>
+                        <a:ea typeface="+mn-ea"/>
+                        <a:cs typeface="+mn-cs"/>
+                      </a:endParaRPr>
                     </a:p>
                   </a:txBody>
                   <a:tcPr marL="12700" marR="12700" marT="12700" marB="63500" anchor="b"/>
@@ -12322,7 +14930,7 @@
                         <a:defRPr/>
                       </a:pPr>
                       <a:r>
-                        <a:rPr kumimoji="0" lang="en-US" sz="800" b="0" i="0" u="none" strike="noStrike" kern="1200" cap="none" spc="0" normalizeH="0" baseline="0">
+                        <a:rPr kumimoji="0" lang="en-US" sz="800" b="0" i="0" u="none" strike="noStrike" kern="1200" cap="none" spc="0" normalizeH="0" baseline="0" dirty="0">
                           <a:ln>
                             <a:noFill/>
                           </a:ln>
@@ -12348,7 +14956,7 @@
                   </a:ext>
                 </a:extLst>
               </a:tr>
-              <a:tr h="216202">
+              <a:tr h="178325">
                 <a:tc>
                   <a:txBody>
                     <a:bodyPr/>
@@ -12458,7 +15066,7 @@
                         <a:defRPr/>
                       </a:pPr>
                       <a:r>
-                        <a:rPr kumimoji="0" lang="en-US" sz="800" b="0" i="0" u="none" strike="noStrike" kern="1200" cap="none" spc="0" normalizeH="0" baseline="0">
+                        <a:rPr kumimoji="0" lang="en-US" sz="800" b="0" i="0" u="none" strike="noStrike" kern="1200" cap="none" spc="0" normalizeH="0" baseline="0" dirty="0">
                           <a:ln>
                             <a:noFill/>
                           </a:ln>
@@ -12484,7 +15092,7 @@
                   </a:ext>
                 </a:extLst>
               </a:tr>
-              <a:tr h="189440">
+              <a:tr h="178325">
                 <a:tc>
                   <a:txBody>
                     <a:bodyPr/>
@@ -12594,7 +15202,7 @@
                         <a:defRPr/>
                       </a:pPr>
                       <a:r>
-                        <a:rPr kumimoji="0" lang="en-US" sz="800" b="0" i="0" u="none" strike="noStrike" kern="1200" cap="none" spc="0" normalizeH="0" baseline="0">
+                        <a:rPr kumimoji="0" lang="en-US" sz="800" b="0" i="0" u="none" strike="noStrike" kern="1200" cap="none" spc="0" normalizeH="0" baseline="0" dirty="0">
                           <a:ln>
                             <a:noFill/>
                           </a:ln>
@@ -12620,7 +15228,7 @@
                   </a:ext>
                 </a:extLst>
               </a:tr>
-              <a:tr h="189440">
+              <a:tr h="178325">
                 <a:tc>
                   <a:txBody>
                     <a:bodyPr/>
@@ -12730,7 +15338,7 @@
                         <a:defRPr/>
                       </a:pPr>
                       <a:r>
-                        <a:rPr kumimoji="0" lang="en-US" sz="800" b="0" i="0" u="none" strike="noStrike" kern="1200" cap="none" spc="0" normalizeH="0" baseline="0">
+                        <a:rPr kumimoji="0" lang="en-US" sz="800" b="0" i="0" u="none" strike="noStrike" kern="1200" cap="none" spc="0" normalizeH="0" baseline="0" dirty="0">
                           <a:ln>
                             <a:noFill/>
                           </a:ln>
@@ -12756,7 +15364,7 @@
                   </a:ext>
                 </a:extLst>
               </a:tr>
-              <a:tr h="189440">
+              <a:tr h="178325">
                 <a:tc>
                   <a:txBody>
                     <a:bodyPr/>
@@ -12892,7 +15500,7 @@
                   </a:ext>
                 </a:extLst>
               </a:tr>
-              <a:tr h="216202">
+              <a:tr h="178325">
                 <a:tc>
                   <a:txBody>
                     <a:bodyPr/>
@@ -13002,7 +15610,7 @@
                         <a:defRPr/>
                       </a:pPr>
                       <a:r>
-                        <a:rPr kumimoji="0" lang="en-US" sz="800" b="0" i="0" u="none" strike="noStrike" kern="1200" cap="none" spc="0" normalizeH="0" baseline="0">
+                        <a:rPr kumimoji="0" lang="en-US" sz="800" b="0" i="0" u="none" strike="noStrike" kern="1200" cap="none" spc="0" normalizeH="0" baseline="0" dirty="0">
                           <a:ln>
                             <a:noFill/>
                           </a:ln>
@@ -13028,7 +15636,7 @@
                   </a:ext>
                 </a:extLst>
               </a:tr>
-              <a:tr h="189440">
+              <a:tr h="178325">
                 <a:tc>
                   <a:txBody>
                     <a:bodyPr/>
@@ -13138,7 +15746,7 @@
                         <a:defRPr/>
                       </a:pPr>
                       <a:r>
-                        <a:rPr kumimoji="0" lang="en-US" sz="800" b="0" i="0" u="none" strike="noStrike" kern="1200" cap="none" spc="0" normalizeH="0" baseline="0">
+                        <a:rPr kumimoji="0" lang="en-US" sz="800" b="0" i="0" u="none" strike="noStrike" kern="1200" cap="none" spc="0" normalizeH="0" baseline="0" dirty="0">
                           <a:ln>
                             <a:noFill/>
                           </a:ln>
@@ -13164,7 +15772,7 @@
                   </a:ext>
                 </a:extLst>
               </a:tr>
-              <a:tr h="215012">
+              <a:tr h="178325">
                 <a:tc>
                   <a:txBody>
                     <a:bodyPr/>
@@ -13274,7 +15882,7 @@
                         <a:defRPr/>
                       </a:pPr>
                       <a:r>
-                        <a:rPr kumimoji="0" lang="en-US" sz="800" b="0" i="0" u="none" strike="noStrike" kern="1200" cap="none" spc="0" normalizeH="0" baseline="0">
+                        <a:rPr kumimoji="0" lang="en-US" sz="800" b="0" i="0" u="none" strike="noStrike" kern="1200" cap="none" spc="0" normalizeH="0" baseline="0" dirty="0">
                           <a:ln>
                             <a:noFill/>
                           </a:ln>
@@ -13300,7 +15908,7 @@
                   </a:ext>
                 </a:extLst>
               </a:tr>
-              <a:tr h="189440">
+              <a:tr h="178325">
                 <a:tc>
                   <a:txBody>
                     <a:bodyPr/>
@@ -13410,7 +16018,7 @@
                         <a:defRPr/>
                       </a:pPr>
                       <a:r>
-                        <a:rPr kumimoji="0" lang="en-US" sz="800" b="0" i="0" u="none" strike="noStrike" kern="1200" cap="none" spc="0" normalizeH="0" baseline="0">
+                        <a:rPr kumimoji="0" lang="en-US" sz="800" b="0" i="0" u="none" strike="noStrike" kern="1200" cap="none" spc="0" normalizeH="0" baseline="0" dirty="0">
                           <a:ln>
                             <a:noFill/>
                           </a:ln>
@@ -13436,7 +16044,7 @@
                   </a:ext>
                 </a:extLst>
               </a:tr>
-              <a:tr h="210061">
+              <a:tr h="178325">
                 <a:tc>
                   <a:txBody>
                     <a:bodyPr/>
@@ -13569,6 +16177,1467 @@
                 <a:extLst>
                   <a:ext uri="{0D108BD9-81ED-4DB2-BD59-A6C34878D82A}">
                     <a16:rowId xmlns:a16="http://schemas.microsoft.com/office/drawing/2014/main" val="2617066"/>
+                  </a:ext>
+                </a:extLst>
+              </a:tr>
+              <a:tr h="178325">
+                <a:tc>
+                  <a:txBody>
+                    <a:bodyPr/>
+                    <a:lstStyle/>
+                    <a:p>
+                      <a:pPr marL="0" marR="0" lvl="0" indent="0" algn="l" defTabSz="914400" rtl="0" eaLnBrk="1" fontAlgn="auto" latinLnBrk="0" hangingPunct="1">
+                        <a:lnSpc>
+                          <a:spcPct val="100000"/>
+                        </a:lnSpc>
+                        <a:spcBef>
+                          <a:spcPts val="0"/>
+                        </a:spcBef>
+                        <a:spcAft>
+                          <a:spcPts val="0"/>
+                        </a:spcAft>
+                        <a:buClrTx/>
+                        <a:buSzTx/>
+                        <a:buFontTx/>
+                        <a:buNone/>
+                        <a:tabLst/>
+                        <a:defRPr/>
+                      </a:pPr>
+                      <a:r>
+                        <a:rPr kumimoji="0" lang="en-US" sz="800" b="0" i="0" u="none" strike="noStrike" kern="1200" cap="none" spc="0" normalizeH="0" baseline="0" dirty="0">
+                          <a:ln>
+                            <a:noFill/>
+                          </a:ln>
+                          <a:solidFill>
+                            <a:srgbClr val="D11960"/>
+                          </a:solidFill>
+                          <a:effectLst/>
+                          <a:uLnTx/>
+                          <a:uFillTx/>
+                          <a:latin typeface="Georgia"/>
+                          <a:ea typeface="+mn-ea"/>
+                          <a:cs typeface="+mn-cs"/>
+                        </a:rPr>
+                        <a:t>Embedding</a:t>
+                      </a:r>
+                    </a:p>
+                  </a:txBody>
+                  <a:tcPr marL="25400" marR="25400" marT="25400" marB="25400" anchor="b"/>
+                </a:tc>
+                <a:tc>
+                  <a:txBody>
+                    <a:bodyPr/>
+                    <a:lstStyle/>
+                    <a:p>
+                      <a:pPr marL="0" marR="0" lvl="0" indent="0" algn="l" defTabSz="914400" rtl="0" eaLnBrk="1" fontAlgn="auto" latinLnBrk="0" hangingPunct="1">
+                        <a:lnSpc>
+                          <a:spcPct val="100000"/>
+                        </a:lnSpc>
+                        <a:spcBef>
+                          <a:spcPts val="0"/>
+                        </a:spcBef>
+                        <a:spcAft>
+                          <a:spcPts val="0"/>
+                        </a:spcAft>
+                        <a:buClrTx/>
+                        <a:buSzTx/>
+                        <a:buFontTx/>
+                        <a:buNone/>
+                        <a:tabLst/>
+                        <a:defRPr/>
+                      </a:pPr>
+                      <a:r>
+                        <a:rPr kumimoji="0" lang="en-US" sz="800" b="0" i="0" u="none" strike="noStrike" kern="1200" cap="none" spc="0" normalizeH="0" baseline="0" dirty="0">
+                          <a:ln>
+                            <a:noFill/>
+                          </a:ln>
+                          <a:solidFill>
+                            <a:srgbClr val="D11960"/>
+                          </a:solidFill>
+                          <a:effectLst/>
+                          <a:uLnTx/>
+                          <a:uFillTx/>
+                          <a:latin typeface="Georgia"/>
+                          <a:ea typeface="+mn-ea"/>
+                          <a:cs typeface="+mn-cs"/>
+                        </a:rPr>
+                        <a:t>DeepSeek_8B+Euclidean </a:t>
+                      </a:r>
+                      <a:r>
+                        <a:rPr kumimoji="0" lang="en-US" sz="800" b="0" i="0" u="none" strike="noStrike" kern="1200" cap="none" spc="0" normalizeH="0" baseline="0" dirty="0" err="1">
+                          <a:ln>
+                            <a:noFill/>
+                          </a:ln>
+                          <a:solidFill>
+                            <a:srgbClr val="D11960"/>
+                          </a:solidFill>
+                          <a:effectLst/>
+                          <a:uLnTx/>
+                          <a:uFillTx/>
+                          <a:latin typeface="Georgia"/>
+                          <a:ea typeface="+mn-ea"/>
+                          <a:cs typeface="+mn-cs"/>
+                        </a:rPr>
+                        <a:t>Dist</a:t>
+                      </a:r>
+                      <a:endParaRPr kumimoji="0" lang="en-US" sz="800" b="0" i="0" u="none" strike="noStrike" kern="1200" cap="none" spc="0" normalizeH="0" baseline="0" dirty="0">
+                        <a:ln>
+                          <a:noFill/>
+                        </a:ln>
+                        <a:solidFill>
+                          <a:srgbClr val="D11960"/>
+                        </a:solidFill>
+                        <a:effectLst/>
+                        <a:uLnTx/>
+                        <a:uFillTx/>
+                        <a:latin typeface="Georgia"/>
+                        <a:ea typeface="+mn-ea"/>
+                        <a:cs typeface="+mn-cs"/>
+                      </a:endParaRPr>
+                    </a:p>
+                  </a:txBody>
+                  <a:tcPr marL="12700" marR="12700" marT="12700" marB="63500" anchor="b"/>
+                </a:tc>
+                <a:tc>
+                  <a:txBody>
+                    <a:bodyPr/>
+                    <a:lstStyle/>
+                    <a:p>
+                      <a:pPr marL="0" marR="0" lvl="0" indent="0" algn="l" defTabSz="914400" rtl="0" eaLnBrk="1" fontAlgn="auto" latinLnBrk="0" hangingPunct="1">
+                        <a:lnSpc>
+                          <a:spcPct val="100000"/>
+                        </a:lnSpc>
+                        <a:spcBef>
+                          <a:spcPts val="0"/>
+                        </a:spcBef>
+                        <a:spcAft>
+                          <a:spcPts val="0"/>
+                        </a:spcAft>
+                        <a:buClrTx/>
+                        <a:buSzTx/>
+                        <a:buFontTx/>
+                        <a:buNone/>
+                        <a:tabLst/>
+                        <a:defRPr/>
+                      </a:pPr>
+                      <a:r>
+                        <a:rPr kumimoji="0" lang="en-US" sz="800" b="0" i="0" u="none" strike="noStrike" kern="1200" cap="none" spc="0" normalizeH="0" baseline="0">
+                          <a:ln>
+                            <a:noFill/>
+                          </a:ln>
+                          <a:solidFill>
+                            <a:srgbClr val="D11960"/>
+                          </a:solidFill>
+                          <a:effectLst/>
+                          <a:uLnTx/>
+                          <a:uFillTx/>
+                          <a:latin typeface="Georgia"/>
+                          <a:ea typeface="+mn-ea"/>
+                          <a:cs typeface="+mn-cs"/>
+                        </a:rPr>
+                        <a:t>21.4%</a:t>
+                      </a:r>
+                    </a:p>
+                  </a:txBody>
+                  <a:tcPr marL="12700" marR="12700" marT="12700" marB="63500" anchor="b"/>
+                </a:tc>
+                <a:extLst>
+                  <a:ext uri="{0D108BD9-81ED-4DB2-BD59-A6C34878D82A}">
+                    <a16:rowId xmlns:a16="http://schemas.microsoft.com/office/drawing/2014/main" val="3386371047"/>
+                  </a:ext>
+                </a:extLst>
+              </a:tr>
+              <a:tr h="178325">
+                <a:tc>
+                  <a:txBody>
+                    <a:bodyPr/>
+                    <a:lstStyle/>
+                    <a:p>
+                      <a:pPr marL="0" marR="0" lvl="0" indent="0" algn="l" defTabSz="914400" rtl="0" eaLnBrk="1" fontAlgn="auto" latinLnBrk="0" hangingPunct="1">
+                        <a:lnSpc>
+                          <a:spcPct val="100000"/>
+                        </a:lnSpc>
+                        <a:spcBef>
+                          <a:spcPts val="0"/>
+                        </a:spcBef>
+                        <a:spcAft>
+                          <a:spcPts val="0"/>
+                        </a:spcAft>
+                        <a:buClrTx/>
+                        <a:buSzTx/>
+                        <a:buFontTx/>
+                        <a:buNone/>
+                        <a:tabLst/>
+                        <a:defRPr/>
+                      </a:pPr>
+                      <a:r>
+                        <a:rPr kumimoji="0" lang="en-US" sz="800" b="0" i="0" u="none" strike="noStrike" kern="1200" cap="none" spc="0" normalizeH="0" baseline="0">
+                          <a:ln>
+                            <a:noFill/>
+                          </a:ln>
+                          <a:solidFill>
+                            <a:srgbClr val="D11960"/>
+                          </a:solidFill>
+                          <a:effectLst/>
+                          <a:uLnTx/>
+                          <a:uFillTx/>
+                          <a:latin typeface="Georgia"/>
+                          <a:ea typeface="+mn-ea"/>
+                          <a:cs typeface="+mn-cs"/>
+                        </a:rPr>
+                        <a:t>Embedding</a:t>
+                      </a:r>
+                    </a:p>
+                  </a:txBody>
+                  <a:tcPr marL="25400" marR="25400" marT="25400" marB="25400" anchor="b"/>
+                </a:tc>
+                <a:tc>
+                  <a:txBody>
+                    <a:bodyPr/>
+                    <a:lstStyle/>
+                    <a:p>
+                      <a:pPr marL="0" marR="0" lvl="0" indent="0" algn="l" defTabSz="914400" rtl="0" eaLnBrk="1" fontAlgn="auto" latinLnBrk="0" hangingPunct="1">
+                        <a:lnSpc>
+                          <a:spcPct val="100000"/>
+                        </a:lnSpc>
+                        <a:spcBef>
+                          <a:spcPts val="0"/>
+                        </a:spcBef>
+                        <a:spcAft>
+                          <a:spcPts val="0"/>
+                        </a:spcAft>
+                        <a:buClrTx/>
+                        <a:buSzTx/>
+                        <a:buFontTx/>
+                        <a:buNone/>
+                        <a:tabLst/>
+                        <a:defRPr/>
+                      </a:pPr>
+                      <a:r>
+                        <a:rPr kumimoji="0" lang="en-US" sz="800" b="0" i="0" u="none" strike="noStrike" kern="1200" cap="none" spc="0" normalizeH="0" baseline="0" dirty="0" err="1">
+                          <a:ln>
+                            <a:noFill/>
+                          </a:ln>
+                          <a:solidFill>
+                            <a:srgbClr val="D11960"/>
+                          </a:solidFill>
+                          <a:effectLst/>
+                          <a:uLnTx/>
+                          <a:uFillTx/>
+                          <a:latin typeface="Georgia"/>
+                          <a:ea typeface="+mn-ea"/>
+                          <a:cs typeface="+mn-cs"/>
+                        </a:rPr>
+                        <a:t>PubMedBERT+Euclidean</a:t>
+                      </a:r>
+                      <a:r>
+                        <a:rPr kumimoji="0" lang="en-US" sz="800" b="0" i="0" u="none" strike="noStrike" kern="1200" cap="none" spc="0" normalizeH="0" baseline="0" dirty="0">
+                          <a:ln>
+                            <a:noFill/>
+                          </a:ln>
+                          <a:solidFill>
+                            <a:srgbClr val="D11960"/>
+                          </a:solidFill>
+                          <a:effectLst/>
+                          <a:uLnTx/>
+                          <a:uFillTx/>
+                          <a:latin typeface="Georgia"/>
+                          <a:ea typeface="+mn-ea"/>
+                          <a:cs typeface="+mn-cs"/>
+                        </a:rPr>
+                        <a:t> </a:t>
+                      </a:r>
+                      <a:r>
+                        <a:rPr kumimoji="0" lang="en-US" sz="800" b="0" i="0" u="none" strike="noStrike" kern="1200" cap="none" spc="0" normalizeH="0" baseline="0" dirty="0" err="1">
+                          <a:ln>
+                            <a:noFill/>
+                          </a:ln>
+                          <a:solidFill>
+                            <a:srgbClr val="D11960"/>
+                          </a:solidFill>
+                          <a:effectLst/>
+                          <a:uLnTx/>
+                          <a:uFillTx/>
+                          <a:latin typeface="Georgia"/>
+                          <a:ea typeface="+mn-ea"/>
+                          <a:cs typeface="+mn-cs"/>
+                        </a:rPr>
+                        <a:t>Dist</a:t>
+                      </a:r>
+                      <a:endParaRPr kumimoji="0" lang="en-US" sz="800" b="0" i="0" u="none" strike="noStrike" kern="1200" cap="none" spc="0" normalizeH="0" baseline="0" dirty="0">
+                        <a:ln>
+                          <a:noFill/>
+                        </a:ln>
+                        <a:solidFill>
+                          <a:srgbClr val="D11960"/>
+                        </a:solidFill>
+                        <a:effectLst/>
+                        <a:uLnTx/>
+                        <a:uFillTx/>
+                        <a:latin typeface="Georgia"/>
+                        <a:ea typeface="+mn-ea"/>
+                        <a:cs typeface="+mn-cs"/>
+                      </a:endParaRPr>
+                    </a:p>
+                  </a:txBody>
+                  <a:tcPr marL="12700" marR="12700" marT="12700" marB="63500" anchor="b"/>
+                </a:tc>
+                <a:tc>
+                  <a:txBody>
+                    <a:bodyPr/>
+                    <a:lstStyle/>
+                    <a:p>
+                      <a:pPr marL="0" marR="0" lvl="0" indent="0" algn="l" defTabSz="914400" rtl="0" eaLnBrk="1" fontAlgn="auto" latinLnBrk="0" hangingPunct="1">
+                        <a:lnSpc>
+                          <a:spcPct val="100000"/>
+                        </a:lnSpc>
+                        <a:spcBef>
+                          <a:spcPts val="0"/>
+                        </a:spcBef>
+                        <a:spcAft>
+                          <a:spcPts val="0"/>
+                        </a:spcAft>
+                        <a:buClrTx/>
+                        <a:buSzTx/>
+                        <a:buFontTx/>
+                        <a:buNone/>
+                        <a:tabLst/>
+                        <a:defRPr/>
+                      </a:pPr>
+                      <a:r>
+                        <a:rPr kumimoji="0" lang="en-US" sz="800" b="0" i="0" u="none" strike="noStrike" kern="1200" cap="none" spc="0" normalizeH="0" baseline="0">
+                          <a:ln>
+                            <a:noFill/>
+                          </a:ln>
+                          <a:solidFill>
+                            <a:srgbClr val="D11960"/>
+                          </a:solidFill>
+                          <a:effectLst/>
+                          <a:uLnTx/>
+                          <a:uFillTx/>
+                          <a:latin typeface="Georgia"/>
+                          <a:ea typeface="+mn-ea"/>
+                          <a:cs typeface="+mn-cs"/>
+                        </a:rPr>
+                        <a:t>21%</a:t>
+                      </a:r>
+                    </a:p>
+                  </a:txBody>
+                  <a:tcPr marL="12700" marR="12700" marT="12700" marB="63500" anchor="b"/>
+                </a:tc>
+                <a:extLst>
+                  <a:ext uri="{0D108BD9-81ED-4DB2-BD59-A6C34878D82A}">
+                    <a16:rowId xmlns:a16="http://schemas.microsoft.com/office/drawing/2014/main" val="106897695"/>
+                  </a:ext>
+                </a:extLst>
+              </a:tr>
+              <a:tr h="178325">
+                <a:tc>
+                  <a:txBody>
+                    <a:bodyPr/>
+                    <a:lstStyle/>
+                    <a:p>
+                      <a:pPr marL="0" marR="0" lvl="0" indent="0" algn="l" defTabSz="914400" rtl="0" eaLnBrk="1" fontAlgn="auto" latinLnBrk="0" hangingPunct="1">
+                        <a:lnSpc>
+                          <a:spcPct val="100000"/>
+                        </a:lnSpc>
+                        <a:spcBef>
+                          <a:spcPts val="0"/>
+                        </a:spcBef>
+                        <a:spcAft>
+                          <a:spcPts val="0"/>
+                        </a:spcAft>
+                        <a:buClrTx/>
+                        <a:buSzTx/>
+                        <a:buFontTx/>
+                        <a:buNone/>
+                        <a:tabLst/>
+                        <a:defRPr/>
+                      </a:pPr>
+                      <a:r>
+                        <a:rPr kumimoji="0" lang="en-US" sz="800" b="0" i="0" u="none" strike="noStrike" kern="1200" cap="none" spc="0" normalizeH="0" baseline="0">
+                          <a:ln>
+                            <a:noFill/>
+                          </a:ln>
+                          <a:solidFill>
+                            <a:srgbClr val="D11960"/>
+                          </a:solidFill>
+                          <a:effectLst/>
+                          <a:uLnTx/>
+                          <a:uFillTx/>
+                          <a:latin typeface="Georgia"/>
+                          <a:ea typeface="+mn-ea"/>
+                          <a:cs typeface="+mn-cs"/>
+                        </a:rPr>
+                        <a:t>Embedding</a:t>
+                      </a:r>
+                    </a:p>
+                  </a:txBody>
+                  <a:tcPr marL="25400" marR="25400" marT="25400" marB="25400" anchor="b"/>
+                </a:tc>
+                <a:tc>
+                  <a:txBody>
+                    <a:bodyPr/>
+                    <a:lstStyle/>
+                    <a:p>
+                      <a:pPr marL="0" marR="0" lvl="0" indent="0" algn="l" defTabSz="914400" rtl="0" eaLnBrk="1" fontAlgn="auto" latinLnBrk="0" hangingPunct="1">
+                        <a:lnSpc>
+                          <a:spcPct val="100000"/>
+                        </a:lnSpc>
+                        <a:spcBef>
+                          <a:spcPts val="0"/>
+                        </a:spcBef>
+                        <a:spcAft>
+                          <a:spcPts val="0"/>
+                        </a:spcAft>
+                        <a:buClrTx/>
+                        <a:buSzTx/>
+                        <a:buFontTx/>
+                        <a:buNone/>
+                        <a:tabLst/>
+                        <a:defRPr/>
+                      </a:pPr>
+                      <a:r>
+                        <a:rPr kumimoji="0" lang="en-US" sz="800" b="0" i="0" u="none" strike="noStrike" kern="1200" cap="none" spc="0" normalizeH="0" baseline="0" dirty="0">
+                          <a:ln>
+                            <a:noFill/>
+                          </a:ln>
+                          <a:solidFill>
+                            <a:srgbClr val="D11960"/>
+                          </a:solidFill>
+                          <a:effectLst/>
+                          <a:uLnTx/>
+                          <a:uFillTx/>
+                          <a:latin typeface="Georgia"/>
+                          <a:ea typeface="+mn-ea"/>
+                          <a:cs typeface="+mn-cs"/>
+                        </a:rPr>
+                        <a:t>Llama3.2_3B+Euclidean </a:t>
+                      </a:r>
+                      <a:r>
+                        <a:rPr kumimoji="0" lang="en-US" sz="800" b="0" i="0" u="none" strike="noStrike" kern="1200" cap="none" spc="0" normalizeH="0" baseline="0" dirty="0" err="1">
+                          <a:ln>
+                            <a:noFill/>
+                          </a:ln>
+                          <a:solidFill>
+                            <a:srgbClr val="D11960"/>
+                          </a:solidFill>
+                          <a:effectLst/>
+                          <a:uLnTx/>
+                          <a:uFillTx/>
+                          <a:latin typeface="Georgia"/>
+                          <a:ea typeface="+mn-ea"/>
+                          <a:cs typeface="+mn-cs"/>
+                        </a:rPr>
+                        <a:t>Dist</a:t>
+                      </a:r>
+                      <a:endParaRPr kumimoji="0" lang="en-US" sz="800" b="0" i="0" u="none" strike="noStrike" kern="1200" cap="none" spc="0" normalizeH="0" baseline="0" dirty="0">
+                        <a:ln>
+                          <a:noFill/>
+                        </a:ln>
+                        <a:solidFill>
+                          <a:srgbClr val="D11960"/>
+                        </a:solidFill>
+                        <a:effectLst/>
+                        <a:uLnTx/>
+                        <a:uFillTx/>
+                        <a:latin typeface="Georgia"/>
+                        <a:ea typeface="+mn-ea"/>
+                        <a:cs typeface="+mn-cs"/>
+                      </a:endParaRPr>
+                    </a:p>
+                  </a:txBody>
+                  <a:tcPr marL="12700" marR="12700" marT="12700" marB="63500" anchor="b"/>
+                </a:tc>
+                <a:tc>
+                  <a:txBody>
+                    <a:bodyPr/>
+                    <a:lstStyle/>
+                    <a:p>
+                      <a:pPr marL="0" marR="0" lvl="0" indent="0" algn="l" defTabSz="914400" rtl="0" eaLnBrk="1" fontAlgn="auto" latinLnBrk="0" hangingPunct="1">
+                        <a:lnSpc>
+                          <a:spcPct val="100000"/>
+                        </a:lnSpc>
+                        <a:spcBef>
+                          <a:spcPts val="0"/>
+                        </a:spcBef>
+                        <a:spcAft>
+                          <a:spcPts val="0"/>
+                        </a:spcAft>
+                        <a:buClrTx/>
+                        <a:buSzTx/>
+                        <a:buFontTx/>
+                        <a:buNone/>
+                        <a:tabLst/>
+                        <a:defRPr/>
+                      </a:pPr>
+                      <a:r>
+                        <a:rPr kumimoji="0" lang="en-US" sz="800" b="0" i="0" u="none" strike="noStrike" kern="1200" cap="none" spc="0" normalizeH="0" baseline="0">
+                          <a:ln>
+                            <a:noFill/>
+                          </a:ln>
+                          <a:solidFill>
+                            <a:srgbClr val="D11960"/>
+                          </a:solidFill>
+                          <a:effectLst/>
+                          <a:uLnTx/>
+                          <a:uFillTx/>
+                          <a:latin typeface="Georgia"/>
+                          <a:ea typeface="+mn-ea"/>
+                          <a:cs typeface="+mn-cs"/>
+                        </a:rPr>
+                        <a:t>20.5%</a:t>
+                      </a:r>
+                    </a:p>
+                  </a:txBody>
+                  <a:tcPr marL="12700" marR="12700" marT="12700" marB="63500" anchor="b"/>
+                </a:tc>
+                <a:extLst>
+                  <a:ext uri="{0D108BD9-81ED-4DB2-BD59-A6C34878D82A}">
+                    <a16:rowId xmlns:a16="http://schemas.microsoft.com/office/drawing/2014/main" val="2653439850"/>
+                  </a:ext>
+                </a:extLst>
+              </a:tr>
+              <a:tr h="178325">
+                <a:tc>
+                  <a:txBody>
+                    <a:bodyPr/>
+                    <a:lstStyle/>
+                    <a:p>
+                      <a:pPr marL="0" marR="0" lvl="0" indent="0" algn="l" defTabSz="914400" rtl="0" eaLnBrk="1" fontAlgn="auto" latinLnBrk="0" hangingPunct="1">
+                        <a:lnSpc>
+                          <a:spcPct val="100000"/>
+                        </a:lnSpc>
+                        <a:spcBef>
+                          <a:spcPts val="0"/>
+                        </a:spcBef>
+                        <a:spcAft>
+                          <a:spcPts val="0"/>
+                        </a:spcAft>
+                        <a:buClrTx/>
+                        <a:buSzTx/>
+                        <a:buFontTx/>
+                        <a:buNone/>
+                        <a:tabLst/>
+                        <a:defRPr/>
+                      </a:pPr>
+                      <a:r>
+                        <a:rPr kumimoji="0" lang="en-US" sz="800" b="0" i="0" u="none" strike="noStrike" kern="1200" cap="none" spc="0" normalizeH="0" baseline="0">
+                          <a:ln>
+                            <a:noFill/>
+                          </a:ln>
+                          <a:solidFill>
+                            <a:srgbClr val="D11960"/>
+                          </a:solidFill>
+                          <a:effectLst/>
+                          <a:uLnTx/>
+                          <a:uFillTx/>
+                          <a:latin typeface="Georgia"/>
+                          <a:ea typeface="+mn-ea"/>
+                          <a:cs typeface="+mn-cs"/>
+                        </a:rPr>
+                        <a:t>Embedding</a:t>
+                      </a:r>
+                    </a:p>
+                  </a:txBody>
+                  <a:tcPr marL="25400" marR="25400" marT="25400" marB="25400" anchor="b"/>
+                </a:tc>
+                <a:tc>
+                  <a:txBody>
+                    <a:bodyPr/>
+                    <a:lstStyle/>
+                    <a:p>
+                      <a:pPr marL="0" marR="0" lvl="0" indent="0" algn="l" defTabSz="914400" rtl="0" eaLnBrk="1" fontAlgn="auto" latinLnBrk="0" hangingPunct="1">
+                        <a:lnSpc>
+                          <a:spcPct val="100000"/>
+                        </a:lnSpc>
+                        <a:spcBef>
+                          <a:spcPts val="0"/>
+                        </a:spcBef>
+                        <a:spcAft>
+                          <a:spcPts val="0"/>
+                        </a:spcAft>
+                        <a:buClrTx/>
+                        <a:buSzTx/>
+                        <a:buFontTx/>
+                        <a:buNone/>
+                        <a:tabLst/>
+                        <a:defRPr/>
+                      </a:pPr>
+                      <a:r>
+                        <a:rPr kumimoji="0" lang="en-US" sz="800" b="0" i="0" u="none" strike="noStrike" kern="1200" cap="none" spc="0" normalizeH="0" baseline="0" dirty="0" err="1">
+                          <a:ln>
+                            <a:noFill/>
+                          </a:ln>
+                          <a:solidFill>
+                            <a:srgbClr val="D11960"/>
+                          </a:solidFill>
+                          <a:effectLst/>
+                          <a:uLnTx/>
+                          <a:uFillTx/>
+                          <a:latin typeface="Georgia"/>
+                          <a:ea typeface="+mn-ea"/>
+                          <a:cs typeface="+mn-cs"/>
+                        </a:rPr>
+                        <a:t>BioBERT+Euclidean</a:t>
+                      </a:r>
+                      <a:r>
+                        <a:rPr kumimoji="0" lang="en-US" sz="800" b="0" i="0" u="none" strike="noStrike" kern="1200" cap="none" spc="0" normalizeH="0" baseline="0" dirty="0">
+                          <a:ln>
+                            <a:noFill/>
+                          </a:ln>
+                          <a:solidFill>
+                            <a:srgbClr val="D11960"/>
+                          </a:solidFill>
+                          <a:effectLst/>
+                          <a:uLnTx/>
+                          <a:uFillTx/>
+                          <a:latin typeface="Georgia"/>
+                          <a:ea typeface="+mn-ea"/>
+                          <a:cs typeface="+mn-cs"/>
+                        </a:rPr>
+                        <a:t> </a:t>
+                      </a:r>
+                      <a:r>
+                        <a:rPr kumimoji="0" lang="en-US" sz="800" b="0" i="0" u="none" strike="noStrike" kern="1200" cap="none" spc="0" normalizeH="0" baseline="0" dirty="0" err="1">
+                          <a:ln>
+                            <a:noFill/>
+                          </a:ln>
+                          <a:solidFill>
+                            <a:srgbClr val="D11960"/>
+                          </a:solidFill>
+                          <a:effectLst/>
+                          <a:uLnTx/>
+                          <a:uFillTx/>
+                          <a:latin typeface="Georgia"/>
+                          <a:ea typeface="+mn-ea"/>
+                          <a:cs typeface="+mn-cs"/>
+                        </a:rPr>
+                        <a:t>Dist</a:t>
+                      </a:r>
+                      <a:endParaRPr kumimoji="0" lang="en-US" sz="800" b="0" i="0" u="none" strike="noStrike" kern="1200" cap="none" spc="0" normalizeH="0" baseline="0" dirty="0">
+                        <a:ln>
+                          <a:noFill/>
+                        </a:ln>
+                        <a:solidFill>
+                          <a:srgbClr val="D11960"/>
+                        </a:solidFill>
+                        <a:effectLst/>
+                        <a:uLnTx/>
+                        <a:uFillTx/>
+                        <a:latin typeface="Georgia"/>
+                        <a:ea typeface="+mn-ea"/>
+                        <a:cs typeface="+mn-cs"/>
+                      </a:endParaRPr>
+                    </a:p>
+                  </a:txBody>
+                  <a:tcPr marL="12700" marR="12700" marT="12700" marB="63500" anchor="b"/>
+                </a:tc>
+                <a:tc>
+                  <a:txBody>
+                    <a:bodyPr/>
+                    <a:lstStyle/>
+                    <a:p>
+                      <a:pPr marL="0" marR="0" lvl="0" indent="0" algn="l" defTabSz="914400" rtl="0" eaLnBrk="1" fontAlgn="auto" latinLnBrk="0" hangingPunct="1">
+                        <a:lnSpc>
+                          <a:spcPct val="100000"/>
+                        </a:lnSpc>
+                        <a:spcBef>
+                          <a:spcPts val="0"/>
+                        </a:spcBef>
+                        <a:spcAft>
+                          <a:spcPts val="0"/>
+                        </a:spcAft>
+                        <a:buClrTx/>
+                        <a:buSzTx/>
+                        <a:buFontTx/>
+                        <a:buNone/>
+                        <a:tabLst/>
+                        <a:defRPr/>
+                      </a:pPr>
+                      <a:r>
+                        <a:rPr kumimoji="0" lang="en-US" sz="800" b="0" i="0" u="none" strike="noStrike" kern="1200" cap="none" spc="0" normalizeH="0" baseline="0">
+                          <a:ln>
+                            <a:noFill/>
+                          </a:ln>
+                          <a:solidFill>
+                            <a:srgbClr val="D11960"/>
+                          </a:solidFill>
+                          <a:effectLst/>
+                          <a:uLnTx/>
+                          <a:uFillTx/>
+                          <a:latin typeface="Georgia"/>
+                          <a:ea typeface="+mn-ea"/>
+                          <a:cs typeface="+mn-cs"/>
+                        </a:rPr>
+                        <a:t>20%</a:t>
+                      </a:r>
+                    </a:p>
+                  </a:txBody>
+                  <a:tcPr marL="12700" marR="12700" marT="12700" marB="63500" anchor="b"/>
+                </a:tc>
+                <a:extLst>
+                  <a:ext uri="{0D108BD9-81ED-4DB2-BD59-A6C34878D82A}">
+                    <a16:rowId xmlns:a16="http://schemas.microsoft.com/office/drawing/2014/main" val="703844146"/>
+                  </a:ext>
+                </a:extLst>
+              </a:tr>
+              <a:tr h="178325">
+                <a:tc>
+                  <a:txBody>
+                    <a:bodyPr/>
+                    <a:lstStyle/>
+                    <a:p>
+                      <a:pPr marL="0" marR="0" lvl="0" indent="0" algn="l" defTabSz="914400" rtl="0" eaLnBrk="1" fontAlgn="auto" latinLnBrk="0" hangingPunct="1">
+                        <a:lnSpc>
+                          <a:spcPct val="100000"/>
+                        </a:lnSpc>
+                        <a:spcBef>
+                          <a:spcPts val="0"/>
+                        </a:spcBef>
+                        <a:spcAft>
+                          <a:spcPts val="0"/>
+                        </a:spcAft>
+                        <a:buClrTx/>
+                        <a:buSzTx/>
+                        <a:buFontTx/>
+                        <a:buNone/>
+                        <a:tabLst/>
+                        <a:defRPr/>
+                      </a:pPr>
+                      <a:r>
+                        <a:rPr kumimoji="0" lang="en-US" sz="800" b="0" i="0" u="none" strike="noStrike" kern="1200" cap="none" spc="0" normalizeH="0" baseline="0">
+                          <a:ln>
+                            <a:noFill/>
+                          </a:ln>
+                          <a:solidFill>
+                            <a:srgbClr val="D11960"/>
+                          </a:solidFill>
+                          <a:effectLst/>
+                          <a:uLnTx/>
+                          <a:uFillTx/>
+                          <a:latin typeface="Georgia"/>
+                          <a:ea typeface="+mn-ea"/>
+                          <a:cs typeface="+mn-cs"/>
+                        </a:rPr>
+                        <a:t>Embedding</a:t>
+                      </a:r>
+                    </a:p>
+                  </a:txBody>
+                  <a:tcPr marL="25400" marR="25400" marT="25400" marB="25400" anchor="b"/>
+                </a:tc>
+                <a:tc>
+                  <a:txBody>
+                    <a:bodyPr/>
+                    <a:lstStyle/>
+                    <a:p>
+                      <a:pPr marL="0" marR="0" lvl="0" indent="0" algn="l" defTabSz="914400" rtl="0" eaLnBrk="1" fontAlgn="auto" latinLnBrk="0" hangingPunct="1">
+                        <a:lnSpc>
+                          <a:spcPct val="100000"/>
+                        </a:lnSpc>
+                        <a:spcBef>
+                          <a:spcPts val="0"/>
+                        </a:spcBef>
+                        <a:spcAft>
+                          <a:spcPts val="0"/>
+                        </a:spcAft>
+                        <a:buClrTx/>
+                        <a:buSzTx/>
+                        <a:buFontTx/>
+                        <a:buNone/>
+                        <a:tabLst/>
+                        <a:defRPr/>
+                      </a:pPr>
+                      <a:r>
+                        <a:rPr kumimoji="0" lang="en-US" sz="800" b="0" i="0" u="none" strike="noStrike" kern="1200" cap="none" spc="0" normalizeH="0" baseline="0" dirty="0">
+                          <a:ln>
+                            <a:noFill/>
+                          </a:ln>
+                          <a:solidFill>
+                            <a:srgbClr val="D11960"/>
+                          </a:solidFill>
+                          <a:effectLst/>
+                          <a:uLnTx/>
+                          <a:uFillTx/>
+                          <a:latin typeface="Georgia"/>
+                          <a:ea typeface="+mn-ea"/>
+                          <a:cs typeface="+mn-cs"/>
+                        </a:rPr>
+                        <a:t>LLama3.0+Euclidean </a:t>
+                      </a:r>
+                      <a:r>
+                        <a:rPr kumimoji="0" lang="en-US" sz="800" b="0" i="0" u="none" strike="noStrike" kern="1200" cap="none" spc="0" normalizeH="0" baseline="0" dirty="0" err="1">
+                          <a:ln>
+                            <a:noFill/>
+                          </a:ln>
+                          <a:solidFill>
+                            <a:srgbClr val="D11960"/>
+                          </a:solidFill>
+                          <a:effectLst/>
+                          <a:uLnTx/>
+                          <a:uFillTx/>
+                          <a:latin typeface="Georgia"/>
+                          <a:ea typeface="+mn-ea"/>
+                          <a:cs typeface="+mn-cs"/>
+                        </a:rPr>
+                        <a:t>Dist</a:t>
+                      </a:r>
+                      <a:endParaRPr kumimoji="0" lang="en-US" sz="800" b="0" i="0" u="none" strike="noStrike" kern="1200" cap="none" spc="0" normalizeH="0" baseline="0" dirty="0">
+                        <a:ln>
+                          <a:noFill/>
+                        </a:ln>
+                        <a:solidFill>
+                          <a:srgbClr val="D11960"/>
+                        </a:solidFill>
+                        <a:effectLst/>
+                        <a:uLnTx/>
+                        <a:uFillTx/>
+                        <a:latin typeface="Georgia"/>
+                        <a:ea typeface="+mn-ea"/>
+                        <a:cs typeface="+mn-cs"/>
+                      </a:endParaRPr>
+                    </a:p>
+                  </a:txBody>
+                  <a:tcPr marL="12700" marR="12700" marT="12700" marB="63500" anchor="b"/>
+                </a:tc>
+                <a:tc>
+                  <a:txBody>
+                    <a:bodyPr/>
+                    <a:lstStyle/>
+                    <a:p>
+                      <a:pPr marL="0" marR="0" lvl="0" indent="0" algn="l" defTabSz="914400" rtl="0" eaLnBrk="1" fontAlgn="auto" latinLnBrk="0" hangingPunct="1">
+                        <a:lnSpc>
+                          <a:spcPct val="100000"/>
+                        </a:lnSpc>
+                        <a:spcBef>
+                          <a:spcPts val="0"/>
+                        </a:spcBef>
+                        <a:spcAft>
+                          <a:spcPts val="0"/>
+                        </a:spcAft>
+                        <a:buClrTx/>
+                        <a:buSzTx/>
+                        <a:buFontTx/>
+                        <a:buNone/>
+                        <a:tabLst/>
+                        <a:defRPr/>
+                      </a:pPr>
+                      <a:r>
+                        <a:rPr kumimoji="0" lang="en-US" sz="800" b="0" i="0" u="none" strike="noStrike" kern="1200" cap="none" spc="0" normalizeH="0" baseline="0">
+                          <a:ln>
+                            <a:noFill/>
+                          </a:ln>
+                          <a:solidFill>
+                            <a:srgbClr val="D11960"/>
+                          </a:solidFill>
+                          <a:effectLst/>
+                          <a:uLnTx/>
+                          <a:uFillTx/>
+                          <a:latin typeface="Georgia"/>
+                          <a:ea typeface="+mn-ea"/>
+                          <a:cs typeface="+mn-cs"/>
+                        </a:rPr>
+                        <a:t>19.8%</a:t>
+                      </a:r>
+                    </a:p>
+                  </a:txBody>
+                  <a:tcPr marL="12700" marR="12700" marT="12700" marB="63500" anchor="b"/>
+                </a:tc>
+                <a:extLst>
+                  <a:ext uri="{0D108BD9-81ED-4DB2-BD59-A6C34878D82A}">
+                    <a16:rowId xmlns:a16="http://schemas.microsoft.com/office/drawing/2014/main" val="3299077155"/>
+                  </a:ext>
+                </a:extLst>
+              </a:tr>
+              <a:tr h="178325">
+                <a:tc>
+                  <a:txBody>
+                    <a:bodyPr/>
+                    <a:lstStyle/>
+                    <a:p>
+                      <a:pPr marL="0" marR="0" lvl="0" indent="0" algn="l" defTabSz="914400" rtl="0" eaLnBrk="1" fontAlgn="auto" latinLnBrk="0" hangingPunct="1">
+                        <a:lnSpc>
+                          <a:spcPct val="100000"/>
+                        </a:lnSpc>
+                        <a:spcBef>
+                          <a:spcPts val="0"/>
+                        </a:spcBef>
+                        <a:spcAft>
+                          <a:spcPts val="0"/>
+                        </a:spcAft>
+                        <a:buClrTx/>
+                        <a:buSzTx/>
+                        <a:buFontTx/>
+                        <a:buNone/>
+                        <a:tabLst/>
+                        <a:defRPr/>
+                      </a:pPr>
+                      <a:r>
+                        <a:rPr kumimoji="0" lang="en-US" sz="800" b="0" i="0" u="none" strike="noStrike" kern="1200" cap="none" spc="0" normalizeH="0" baseline="0">
+                          <a:ln>
+                            <a:noFill/>
+                          </a:ln>
+                          <a:solidFill>
+                            <a:srgbClr val="D11960"/>
+                          </a:solidFill>
+                          <a:effectLst/>
+                          <a:uLnTx/>
+                          <a:uFillTx/>
+                          <a:latin typeface="Georgia"/>
+                          <a:ea typeface="+mn-ea"/>
+                          <a:cs typeface="+mn-cs"/>
+                        </a:rPr>
+                        <a:t>Embedding</a:t>
+                      </a:r>
+                    </a:p>
+                  </a:txBody>
+                  <a:tcPr marL="25400" marR="25400" marT="25400" marB="25400" anchor="b"/>
+                </a:tc>
+                <a:tc>
+                  <a:txBody>
+                    <a:bodyPr/>
+                    <a:lstStyle/>
+                    <a:p>
+                      <a:pPr marL="0" marR="0" lvl="0" indent="0" algn="l" defTabSz="914400" rtl="0" eaLnBrk="1" fontAlgn="auto" latinLnBrk="0" hangingPunct="1">
+                        <a:lnSpc>
+                          <a:spcPct val="100000"/>
+                        </a:lnSpc>
+                        <a:spcBef>
+                          <a:spcPts val="0"/>
+                        </a:spcBef>
+                        <a:spcAft>
+                          <a:spcPts val="0"/>
+                        </a:spcAft>
+                        <a:buClrTx/>
+                        <a:buSzTx/>
+                        <a:buFontTx/>
+                        <a:buNone/>
+                        <a:tabLst/>
+                        <a:defRPr/>
+                      </a:pPr>
+                      <a:r>
+                        <a:rPr kumimoji="0" lang="en-US" sz="800" b="0" i="0" u="none" strike="noStrike" kern="1200" cap="none" spc="0" normalizeH="0" baseline="0" dirty="0" err="1">
+                          <a:ln>
+                            <a:noFill/>
+                          </a:ln>
+                          <a:solidFill>
+                            <a:srgbClr val="D11960"/>
+                          </a:solidFill>
+                          <a:effectLst/>
+                          <a:uLnTx/>
+                          <a:uFillTx/>
+                          <a:latin typeface="Georgia"/>
+                          <a:ea typeface="+mn-ea"/>
+                          <a:cs typeface="+mn-cs"/>
+                        </a:rPr>
+                        <a:t>SciBERT+Euclidean</a:t>
+                      </a:r>
+                      <a:r>
+                        <a:rPr kumimoji="0" lang="en-US" sz="800" b="0" i="0" u="none" strike="noStrike" kern="1200" cap="none" spc="0" normalizeH="0" baseline="0" dirty="0">
+                          <a:ln>
+                            <a:noFill/>
+                          </a:ln>
+                          <a:solidFill>
+                            <a:srgbClr val="D11960"/>
+                          </a:solidFill>
+                          <a:effectLst/>
+                          <a:uLnTx/>
+                          <a:uFillTx/>
+                          <a:latin typeface="Georgia"/>
+                          <a:ea typeface="+mn-ea"/>
+                          <a:cs typeface="+mn-cs"/>
+                        </a:rPr>
+                        <a:t> </a:t>
+                      </a:r>
+                      <a:r>
+                        <a:rPr kumimoji="0" lang="en-US" sz="800" b="0" i="0" u="none" strike="noStrike" kern="1200" cap="none" spc="0" normalizeH="0" baseline="0" dirty="0" err="1">
+                          <a:ln>
+                            <a:noFill/>
+                          </a:ln>
+                          <a:solidFill>
+                            <a:srgbClr val="D11960"/>
+                          </a:solidFill>
+                          <a:effectLst/>
+                          <a:uLnTx/>
+                          <a:uFillTx/>
+                          <a:latin typeface="Georgia"/>
+                          <a:ea typeface="+mn-ea"/>
+                          <a:cs typeface="+mn-cs"/>
+                        </a:rPr>
+                        <a:t>Dist</a:t>
+                      </a:r>
+                      <a:endParaRPr kumimoji="0" lang="en-US" sz="800" b="0" i="0" u="none" strike="noStrike" kern="1200" cap="none" spc="0" normalizeH="0" baseline="0" dirty="0">
+                        <a:ln>
+                          <a:noFill/>
+                        </a:ln>
+                        <a:solidFill>
+                          <a:srgbClr val="D11960"/>
+                        </a:solidFill>
+                        <a:effectLst/>
+                        <a:uLnTx/>
+                        <a:uFillTx/>
+                        <a:latin typeface="Georgia"/>
+                        <a:ea typeface="+mn-ea"/>
+                        <a:cs typeface="+mn-cs"/>
+                      </a:endParaRPr>
+                    </a:p>
+                  </a:txBody>
+                  <a:tcPr marL="12700" marR="12700" marT="12700" marB="63500" anchor="b"/>
+                </a:tc>
+                <a:tc>
+                  <a:txBody>
+                    <a:bodyPr/>
+                    <a:lstStyle/>
+                    <a:p>
+                      <a:pPr marL="0" marR="0" lvl="0" indent="0" algn="l" defTabSz="914400" rtl="0" eaLnBrk="1" fontAlgn="auto" latinLnBrk="0" hangingPunct="1">
+                        <a:lnSpc>
+                          <a:spcPct val="100000"/>
+                        </a:lnSpc>
+                        <a:spcBef>
+                          <a:spcPts val="0"/>
+                        </a:spcBef>
+                        <a:spcAft>
+                          <a:spcPts val="0"/>
+                        </a:spcAft>
+                        <a:buClrTx/>
+                        <a:buSzTx/>
+                        <a:buFontTx/>
+                        <a:buNone/>
+                        <a:tabLst/>
+                        <a:defRPr/>
+                      </a:pPr>
+                      <a:r>
+                        <a:rPr kumimoji="0" lang="en-US" sz="800" b="0" i="0" u="none" strike="noStrike" kern="1200" cap="none" spc="0" normalizeH="0" baseline="0" dirty="0">
+                          <a:ln>
+                            <a:noFill/>
+                          </a:ln>
+                          <a:solidFill>
+                            <a:srgbClr val="D11960"/>
+                          </a:solidFill>
+                          <a:effectLst/>
+                          <a:uLnTx/>
+                          <a:uFillTx/>
+                          <a:latin typeface="Georgia"/>
+                          <a:ea typeface="+mn-ea"/>
+                          <a:cs typeface="+mn-cs"/>
+                        </a:rPr>
+                        <a:t>19.3%</a:t>
+                      </a:r>
+                    </a:p>
+                  </a:txBody>
+                  <a:tcPr marL="12700" marR="12700" marT="12700" marB="63500" anchor="b"/>
+                </a:tc>
+                <a:extLst>
+                  <a:ext uri="{0D108BD9-81ED-4DB2-BD59-A6C34878D82A}">
+                    <a16:rowId xmlns:a16="http://schemas.microsoft.com/office/drawing/2014/main" val="3525613323"/>
+                  </a:ext>
+                </a:extLst>
+              </a:tr>
+              <a:tr h="178325">
+                <a:tc>
+                  <a:txBody>
+                    <a:bodyPr/>
+                    <a:lstStyle/>
+                    <a:p>
+                      <a:pPr marL="0" marR="0" lvl="0" indent="0" algn="l" defTabSz="914400" rtl="0" eaLnBrk="1" fontAlgn="auto" latinLnBrk="0" hangingPunct="1">
+                        <a:lnSpc>
+                          <a:spcPct val="100000"/>
+                        </a:lnSpc>
+                        <a:spcBef>
+                          <a:spcPts val="0"/>
+                        </a:spcBef>
+                        <a:spcAft>
+                          <a:spcPts val="0"/>
+                        </a:spcAft>
+                        <a:buClrTx/>
+                        <a:buSzTx/>
+                        <a:buFontTx/>
+                        <a:buNone/>
+                        <a:tabLst/>
+                        <a:defRPr/>
+                      </a:pPr>
+                      <a:r>
+                        <a:rPr kumimoji="0" lang="en-US" sz="800" b="0" i="0" u="none" strike="noStrike" kern="1200" cap="none" spc="0" normalizeH="0" baseline="0">
+                          <a:ln>
+                            <a:noFill/>
+                          </a:ln>
+                          <a:solidFill>
+                            <a:srgbClr val="D11960"/>
+                          </a:solidFill>
+                          <a:effectLst/>
+                          <a:uLnTx/>
+                          <a:uFillTx/>
+                          <a:latin typeface="Georgia"/>
+                          <a:ea typeface="+mn-ea"/>
+                          <a:cs typeface="+mn-cs"/>
+                        </a:rPr>
+                        <a:t>Embedding</a:t>
+                      </a:r>
+                    </a:p>
+                  </a:txBody>
+                  <a:tcPr marL="25400" marR="25400" marT="25400" marB="25400" anchor="b"/>
+                </a:tc>
+                <a:tc>
+                  <a:txBody>
+                    <a:bodyPr/>
+                    <a:lstStyle/>
+                    <a:p>
+                      <a:pPr marL="0" marR="0" lvl="0" indent="0" algn="l" defTabSz="914400" rtl="0" eaLnBrk="1" fontAlgn="auto" latinLnBrk="0" hangingPunct="1">
+                        <a:lnSpc>
+                          <a:spcPct val="100000"/>
+                        </a:lnSpc>
+                        <a:spcBef>
+                          <a:spcPts val="0"/>
+                        </a:spcBef>
+                        <a:spcAft>
+                          <a:spcPts val="0"/>
+                        </a:spcAft>
+                        <a:buClrTx/>
+                        <a:buSzTx/>
+                        <a:buFontTx/>
+                        <a:buNone/>
+                        <a:tabLst/>
+                        <a:defRPr/>
+                      </a:pPr>
+                      <a:r>
+                        <a:rPr kumimoji="0" lang="en-US" sz="800" b="0" i="0" u="none" strike="noStrike" kern="1200" cap="none" spc="0" normalizeH="0" baseline="0">
+                          <a:ln>
+                            <a:noFill/>
+                          </a:ln>
+                          <a:solidFill>
+                            <a:srgbClr val="D11960"/>
+                          </a:solidFill>
+                          <a:effectLst/>
+                          <a:uLnTx/>
+                          <a:uFillTx/>
+                          <a:latin typeface="Georgia"/>
+                          <a:ea typeface="+mn-ea"/>
+                          <a:cs typeface="+mn-cs"/>
+                        </a:rPr>
+                        <a:t>ModernBERT+Euclidean Dist</a:t>
+                      </a:r>
+                    </a:p>
+                  </a:txBody>
+                  <a:tcPr marL="12700" marR="12700" marT="12700" marB="63500" anchor="b"/>
+                </a:tc>
+                <a:tc>
+                  <a:txBody>
+                    <a:bodyPr/>
+                    <a:lstStyle/>
+                    <a:p>
+                      <a:pPr marL="0" marR="0" lvl="0" indent="0" algn="l" defTabSz="914400" rtl="0" eaLnBrk="1" fontAlgn="auto" latinLnBrk="0" hangingPunct="1">
+                        <a:lnSpc>
+                          <a:spcPct val="100000"/>
+                        </a:lnSpc>
+                        <a:spcBef>
+                          <a:spcPts val="0"/>
+                        </a:spcBef>
+                        <a:spcAft>
+                          <a:spcPts val="0"/>
+                        </a:spcAft>
+                        <a:buClrTx/>
+                        <a:buSzTx/>
+                        <a:buFontTx/>
+                        <a:buNone/>
+                        <a:tabLst/>
+                        <a:defRPr/>
+                      </a:pPr>
+                      <a:r>
+                        <a:rPr kumimoji="0" lang="en-US" sz="800" b="0" i="0" u="none" strike="noStrike" kern="1200" cap="none" spc="0" normalizeH="0" baseline="0" dirty="0">
+                          <a:ln>
+                            <a:noFill/>
+                          </a:ln>
+                          <a:solidFill>
+                            <a:srgbClr val="D11960"/>
+                          </a:solidFill>
+                          <a:effectLst/>
+                          <a:uLnTx/>
+                          <a:uFillTx/>
+                          <a:latin typeface="Georgia"/>
+                          <a:ea typeface="+mn-ea"/>
+                          <a:cs typeface="+mn-cs"/>
+                        </a:rPr>
+                        <a:t>18.2%</a:t>
+                      </a:r>
+                    </a:p>
+                  </a:txBody>
+                  <a:tcPr marL="12700" marR="12700" marT="12700" marB="63500" anchor="b"/>
+                </a:tc>
+                <a:extLst>
+                  <a:ext uri="{0D108BD9-81ED-4DB2-BD59-A6C34878D82A}">
+                    <a16:rowId xmlns:a16="http://schemas.microsoft.com/office/drawing/2014/main" val="503051975"/>
+                  </a:ext>
+                </a:extLst>
+              </a:tr>
+              <a:tr h="178325">
+                <a:tc>
+                  <a:txBody>
+                    <a:bodyPr/>
+                    <a:lstStyle/>
+                    <a:p>
+                      <a:pPr marL="0" marR="0" lvl="0" indent="0" algn="l" defTabSz="914400" rtl="0" eaLnBrk="1" fontAlgn="auto" latinLnBrk="0" hangingPunct="1">
+                        <a:lnSpc>
+                          <a:spcPct val="100000"/>
+                        </a:lnSpc>
+                        <a:spcBef>
+                          <a:spcPts val="0"/>
+                        </a:spcBef>
+                        <a:spcAft>
+                          <a:spcPts val="0"/>
+                        </a:spcAft>
+                        <a:buClrTx/>
+                        <a:buSzTx/>
+                        <a:buFontTx/>
+                        <a:buNone/>
+                        <a:tabLst/>
+                        <a:defRPr/>
+                      </a:pPr>
+                      <a:r>
+                        <a:rPr kumimoji="0" lang="en-US" sz="800" b="0" i="0" u="none" strike="noStrike" kern="1200" cap="none" spc="0" normalizeH="0" baseline="0">
+                          <a:ln>
+                            <a:noFill/>
+                          </a:ln>
+                          <a:solidFill>
+                            <a:srgbClr val="D11960"/>
+                          </a:solidFill>
+                          <a:effectLst/>
+                          <a:uLnTx/>
+                          <a:uFillTx/>
+                          <a:latin typeface="Georgia"/>
+                          <a:ea typeface="+mn-ea"/>
+                          <a:cs typeface="+mn-cs"/>
+                        </a:rPr>
+                        <a:t>Embedding</a:t>
+                      </a:r>
+                    </a:p>
+                  </a:txBody>
+                  <a:tcPr marL="25400" marR="25400" marT="25400" marB="25400" anchor="b"/>
+                </a:tc>
+                <a:tc>
+                  <a:txBody>
+                    <a:bodyPr/>
+                    <a:lstStyle/>
+                    <a:p>
+                      <a:pPr marL="0" marR="0" lvl="0" indent="0" algn="l" defTabSz="914400" rtl="0" eaLnBrk="1" fontAlgn="auto" latinLnBrk="0" hangingPunct="1">
+                        <a:lnSpc>
+                          <a:spcPct val="100000"/>
+                        </a:lnSpc>
+                        <a:spcBef>
+                          <a:spcPts val="0"/>
+                        </a:spcBef>
+                        <a:spcAft>
+                          <a:spcPts val="0"/>
+                        </a:spcAft>
+                        <a:buClrTx/>
+                        <a:buSzTx/>
+                        <a:buFontTx/>
+                        <a:buNone/>
+                        <a:tabLst/>
+                        <a:defRPr/>
+                      </a:pPr>
+                      <a:r>
+                        <a:rPr kumimoji="0" lang="en-US" sz="800" b="0" i="0" u="none" strike="noStrike" kern="1200" cap="none" spc="0" normalizeH="0" baseline="0">
+                          <a:ln>
+                            <a:noFill/>
+                          </a:ln>
+                          <a:solidFill>
+                            <a:srgbClr val="D11960"/>
+                          </a:solidFill>
+                          <a:effectLst/>
+                          <a:uLnTx/>
+                          <a:uFillTx/>
+                          <a:latin typeface="Georgia"/>
+                          <a:ea typeface="+mn-ea"/>
+                          <a:cs typeface="+mn-cs"/>
+                        </a:rPr>
+                        <a:t>Phi-4+Euclidean Dist</a:t>
+                      </a:r>
+                    </a:p>
+                  </a:txBody>
+                  <a:tcPr marL="12700" marR="12700" marT="12700" marB="63500" anchor="b"/>
+                </a:tc>
+                <a:tc>
+                  <a:txBody>
+                    <a:bodyPr/>
+                    <a:lstStyle/>
+                    <a:p>
+                      <a:pPr marL="0" marR="0" lvl="0" indent="0" algn="l" defTabSz="914400" rtl="0" eaLnBrk="1" fontAlgn="auto" latinLnBrk="0" hangingPunct="1">
+                        <a:lnSpc>
+                          <a:spcPct val="100000"/>
+                        </a:lnSpc>
+                        <a:spcBef>
+                          <a:spcPts val="0"/>
+                        </a:spcBef>
+                        <a:spcAft>
+                          <a:spcPts val="0"/>
+                        </a:spcAft>
+                        <a:buClrTx/>
+                        <a:buSzTx/>
+                        <a:buFontTx/>
+                        <a:buNone/>
+                        <a:tabLst/>
+                        <a:defRPr/>
+                      </a:pPr>
+                      <a:r>
+                        <a:rPr kumimoji="0" lang="en-US" sz="800" b="0" i="0" u="none" strike="noStrike" kern="1200" cap="none" spc="0" normalizeH="0" baseline="0" dirty="0">
+                          <a:ln>
+                            <a:noFill/>
+                          </a:ln>
+                          <a:solidFill>
+                            <a:srgbClr val="D11960"/>
+                          </a:solidFill>
+                          <a:effectLst/>
+                          <a:uLnTx/>
+                          <a:uFillTx/>
+                          <a:latin typeface="Georgia"/>
+                          <a:ea typeface="+mn-ea"/>
+                          <a:cs typeface="+mn-cs"/>
+                        </a:rPr>
+                        <a:t>15.4%</a:t>
+                      </a:r>
+                    </a:p>
+                  </a:txBody>
+                  <a:tcPr marL="12700" marR="12700" marT="12700" marB="63500" anchor="b"/>
+                </a:tc>
+                <a:extLst>
+                  <a:ext uri="{0D108BD9-81ED-4DB2-BD59-A6C34878D82A}">
+                    <a16:rowId xmlns:a16="http://schemas.microsoft.com/office/drawing/2014/main" val="3890455292"/>
+                  </a:ext>
+                </a:extLst>
+              </a:tr>
+              <a:tr h="178325">
+                <a:tc>
+                  <a:txBody>
+                    <a:bodyPr/>
+                    <a:lstStyle/>
+                    <a:p>
+                      <a:pPr marL="0" marR="0" lvl="0" indent="0" algn="l" defTabSz="914400" rtl="0" eaLnBrk="1" fontAlgn="auto" latinLnBrk="0" hangingPunct="1">
+                        <a:lnSpc>
+                          <a:spcPct val="100000"/>
+                        </a:lnSpc>
+                        <a:spcBef>
+                          <a:spcPts val="0"/>
+                        </a:spcBef>
+                        <a:spcAft>
+                          <a:spcPts val="0"/>
+                        </a:spcAft>
+                        <a:buClrTx/>
+                        <a:buSzTx/>
+                        <a:buFontTx/>
+                        <a:buNone/>
+                        <a:tabLst/>
+                        <a:defRPr/>
+                      </a:pPr>
+                      <a:r>
+                        <a:rPr kumimoji="0" lang="en-US" sz="800" b="0" i="0" u="none" strike="noStrike" kern="1200" cap="none" spc="0" normalizeH="0" baseline="0">
+                          <a:ln>
+                            <a:noFill/>
+                          </a:ln>
+                          <a:solidFill>
+                            <a:srgbClr val="D11960"/>
+                          </a:solidFill>
+                          <a:effectLst/>
+                          <a:uLnTx/>
+                          <a:uFillTx/>
+                          <a:latin typeface="Georgia"/>
+                          <a:ea typeface="+mn-ea"/>
+                          <a:cs typeface="+mn-cs"/>
+                        </a:rPr>
+                        <a:t>Embedding</a:t>
+                      </a:r>
+                    </a:p>
+                  </a:txBody>
+                  <a:tcPr marL="25400" marR="25400" marT="25400" marB="25400" anchor="b"/>
+                </a:tc>
+                <a:tc>
+                  <a:txBody>
+                    <a:bodyPr/>
+                    <a:lstStyle/>
+                    <a:p>
+                      <a:pPr marL="0" marR="0" lvl="0" indent="0" algn="l" defTabSz="914400" rtl="0" eaLnBrk="1" fontAlgn="auto" latinLnBrk="0" hangingPunct="1">
+                        <a:lnSpc>
+                          <a:spcPct val="100000"/>
+                        </a:lnSpc>
+                        <a:spcBef>
+                          <a:spcPts val="0"/>
+                        </a:spcBef>
+                        <a:spcAft>
+                          <a:spcPts val="0"/>
+                        </a:spcAft>
+                        <a:buClrTx/>
+                        <a:buSzTx/>
+                        <a:buFontTx/>
+                        <a:buNone/>
+                        <a:tabLst/>
+                        <a:defRPr/>
+                      </a:pPr>
+                      <a:r>
+                        <a:rPr kumimoji="0" lang="en-US" sz="800" b="0" i="0" u="none" strike="noStrike" kern="1200" cap="none" spc="0" normalizeH="0" baseline="0">
+                          <a:ln>
+                            <a:noFill/>
+                          </a:ln>
+                          <a:solidFill>
+                            <a:srgbClr val="D11960"/>
+                          </a:solidFill>
+                          <a:effectLst/>
+                          <a:uLnTx/>
+                          <a:uFillTx/>
+                          <a:latin typeface="Georgia"/>
+                          <a:ea typeface="+mn-ea"/>
+                          <a:cs typeface="+mn-cs"/>
+                        </a:rPr>
+                        <a:t>MedLlama2+Euclidean Dist</a:t>
+                      </a:r>
+                    </a:p>
+                  </a:txBody>
+                  <a:tcPr marL="12700" marR="12700" marT="12700" marB="63500" anchor="b"/>
+                </a:tc>
+                <a:tc>
+                  <a:txBody>
+                    <a:bodyPr/>
+                    <a:lstStyle/>
+                    <a:p>
+                      <a:pPr marL="0" marR="0" lvl="0" indent="0" algn="l" defTabSz="914400" rtl="0" eaLnBrk="1" fontAlgn="auto" latinLnBrk="0" hangingPunct="1">
+                        <a:lnSpc>
+                          <a:spcPct val="100000"/>
+                        </a:lnSpc>
+                        <a:spcBef>
+                          <a:spcPts val="0"/>
+                        </a:spcBef>
+                        <a:spcAft>
+                          <a:spcPts val="0"/>
+                        </a:spcAft>
+                        <a:buClrTx/>
+                        <a:buSzTx/>
+                        <a:buFontTx/>
+                        <a:buNone/>
+                        <a:tabLst/>
+                        <a:defRPr/>
+                      </a:pPr>
+                      <a:r>
+                        <a:rPr kumimoji="0" lang="en-US" sz="800" b="0" i="0" u="none" strike="noStrike" kern="1200" cap="none" spc="0" normalizeH="0" baseline="0" dirty="0">
+                          <a:ln>
+                            <a:noFill/>
+                          </a:ln>
+                          <a:solidFill>
+                            <a:srgbClr val="D11960"/>
+                          </a:solidFill>
+                          <a:effectLst/>
+                          <a:uLnTx/>
+                          <a:uFillTx/>
+                          <a:latin typeface="Georgia"/>
+                          <a:ea typeface="+mn-ea"/>
+                          <a:cs typeface="+mn-cs"/>
+                        </a:rPr>
+                        <a:t>13.7%</a:t>
+                      </a:r>
+                    </a:p>
+                  </a:txBody>
+                  <a:tcPr marL="12700" marR="12700" marT="12700" marB="63500" anchor="b"/>
+                </a:tc>
+                <a:extLst>
+                  <a:ext uri="{0D108BD9-81ED-4DB2-BD59-A6C34878D82A}">
+                    <a16:rowId xmlns:a16="http://schemas.microsoft.com/office/drawing/2014/main" val="2091552044"/>
                   </a:ext>
                 </a:extLst>
               </a:tr>
@@ -13576,46 +17645,6 @@
           </a:graphicData>
         </a:graphic>
       </p:graphicFrame>
-      <p:sp>
-        <p:nvSpPr>
-          <p:cNvPr id="9" name="TextBox 8">
-            <a:extLst>
-              <a:ext uri="{FF2B5EF4-FFF2-40B4-BE49-F238E27FC236}">
-                <a16:creationId xmlns:a16="http://schemas.microsoft.com/office/drawing/2014/main" id="{9D89652D-4D39-17C9-E9B4-68249EE25AC9}"/>
-              </a:ext>
-            </a:extLst>
-          </p:cNvPr>
-          <p:cNvSpPr txBox="1"/>
-          <p:nvPr/>
-        </p:nvSpPr>
-        <p:spPr>
-          <a:xfrm>
-            <a:off x="91375" y="0"/>
-            <a:ext cx="6166756" cy="461665"/>
-          </a:xfrm>
-          <a:prstGeom prst="rect">
-            <a:avLst/>
-          </a:prstGeom>
-          <a:noFill/>
-        </p:spPr>
-        <p:txBody>
-          <a:bodyPr wrap="square">
-            <a:spAutoFit/>
-          </a:bodyPr>
-          <a:lstStyle/>
-          <a:p>
-            <a:r>
-              <a:rPr lang="en-US" sz="2400" b="1" dirty="0">
-                <a:solidFill>
-                  <a:schemeClr val="accent1"/>
-                </a:solidFill>
-                <a:latin typeface="+mj-lt"/>
-              </a:rPr>
-              <a:t>MODEL ACCURACY</a:t>
-            </a:r>
-          </a:p>
-        </p:txBody>
-      </p:sp>
     </p:spTree>
     <p:extLst>
       <p:ext uri="{BB962C8B-B14F-4D97-AF65-F5344CB8AC3E}">
@@ -13629,7 +17658,7 @@
 </p:sld>
 </file>
 
-<file path=ppt/slides/slide17.xml><?xml version="1.0" encoding="utf-8"?>
+<file path=ppt/slides/slide16.xml><?xml version="1.0" encoding="utf-8"?>
 <p:sld xmlns:a="http://schemas.openxmlformats.org/drawingml/2006/main" xmlns:r="http://schemas.openxmlformats.org/officeDocument/2006/relationships" xmlns:p="http://schemas.openxmlformats.org/presentationml/2006/main">
   <p:cSld>
     <p:spTree>
@@ -13670,7 +17699,7 @@
             <a:fld id="{AD40181A-01B0-4CB8-8614-1473649F6741}" type="slidenum">
               <a:rPr lang="en-US" smtClean="0"/>
               <a:pPr/>
-              <a:t>17</a:t>
+              <a:t>16</a:t>
             </a:fld>
             <a:endParaRPr lang="en-US" dirty="0"/>
           </a:p>
@@ -14136,6 +18165,921 @@
     <p:extLst>
       <p:ext uri="{BB962C8B-B14F-4D97-AF65-F5344CB8AC3E}">
         <p14:creationId xmlns:p14="http://schemas.microsoft.com/office/powerpoint/2010/main" val="2519774645"/>
+      </p:ext>
+    </p:extLst>
+  </p:cSld>
+  <p:clrMapOvr>
+    <a:masterClrMapping/>
+  </p:clrMapOvr>
+</p:sld>
+</file>
+
+<file path=ppt/slides/slide17.xml><?xml version="1.0" encoding="utf-8"?>
+<p:sld xmlns:a="http://schemas.openxmlformats.org/drawingml/2006/main" xmlns:r="http://schemas.openxmlformats.org/officeDocument/2006/relationships" xmlns:p="http://schemas.openxmlformats.org/presentationml/2006/main">
+  <p:cSld>
+    <p:spTree>
+      <p:nvGrpSpPr>
+        <p:cNvPr id="1" name=""/>
+        <p:cNvGrpSpPr/>
+        <p:nvPr/>
+      </p:nvGrpSpPr>
+      <p:grpSpPr>
+        <a:xfrm>
+          <a:off x="0" y="0"/>
+          <a:ext cx="0" cy="0"/>
+          <a:chOff x="0" y="0"/>
+          <a:chExt cx="0" cy="0"/>
+        </a:xfrm>
+      </p:grpSpPr>
+      <p:sp>
+        <p:nvSpPr>
+          <p:cNvPr id="2" name="Slide Number Placeholder 1">
+            <a:extLst>
+              <a:ext uri="{FF2B5EF4-FFF2-40B4-BE49-F238E27FC236}">
+                <a16:creationId xmlns:a16="http://schemas.microsoft.com/office/drawing/2014/main" id="{72D04672-E20B-8BCF-0BCF-5F2E037AEB1D}"/>
+              </a:ext>
+            </a:extLst>
+          </p:cNvPr>
+          <p:cNvSpPr>
+            <a:spLocks noGrp="1"/>
+          </p:cNvSpPr>
+          <p:nvPr>
+            <p:ph type="sldNum" sz="quarter" idx="12"/>
+          </p:nvPr>
+        </p:nvSpPr>
+        <p:spPr/>
+        <p:txBody>
+          <a:bodyPr/>
+          <a:lstStyle/>
+          <a:p>
+            <a:fld id="{AD40181A-01B0-4CB8-8614-1473649F6741}" type="slidenum">
+              <a:rPr lang="en-US" smtClean="0"/>
+              <a:pPr/>
+              <a:t>17</a:t>
+            </a:fld>
+            <a:endParaRPr lang="en-US" dirty="0"/>
+          </a:p>
+        </p:txBody>
+      </p:sp>
+      <p:sp>
+        <p:nvSpPr>
+          <p:cNvPr id="3" name="Title 2">
+            <a:extLst>
+              <a:ext uri="{FF2B5EF4-FFF2-40B4-BE49-F238E27FC236}">
+                <a16:creationId xmlns:a16="http://schemas.microsoft.com/office/drawing/2014/main" id="{D5E22544-6AD7-4FDE-B5B7-6A2B7A01D716}"/>
+              </a:ext>
+            </a:extLst>
+          </p:cNvPr>
+          <p:cNvSpPr>
+            <a:spLocks noGrp="1"/>
+          </p:cNvSpPr>
+          <p:nvPr>
+            <p:ph type="title"/>
+          </p:nvPr>
+        </p:nvSpPr>
+        <p:spPr/>
+        <p:txBody>
+          <a:bodyPr/>
+          <a:lstStyle/>
+          <a:p>
+            <a:r>
+              <a:rPr lang="en-US" dirty="0"/>
+              <a:t>END</a:t>
+            </a:r>
+          </a:p>
+        </p:txBody>
+      </p:sp>
+    </p:spTree>
+    <p:extLst>
+      <p:ext uri="{BB962C8B-B14F-4D97-AF65-F5344CB8AC3E}">
+        <p14:creationId xmlns:p14="http://schemas.microsoft.com/office/powerpoint/2010/main" val="904902939"/>
+      </p:ext>
+    </p:extLst>
+  </p:cSld>
+  <p:clrMapOvr>
+    <a:masterClrMapping/>
+  </p:clrMapOvr>
+</p:sld>
+</file>
+
+<file path=ppt/slides/slide18.xml><?xml version="1.0" encoding="utf-8"?>
+<p:sld xmlns:a="http://schemas.openxmlformats.org/drawingml/2006/main" xmlns:r="http://schemas.openxmlformats.org/officeDocument/2006/relationships" xmlns:p="http://schemas.openxmlformats.org/presentationml/2006/main">
+  <p:cSld>
+    <p:spTree>
+      <p:nvGrpSpPr>
+        <p:cNvPr id="1" name="">
+          <a:extLst>
+            <a:ext uri="{FF2B5EF4-FFF2-40B4-BE49-F238E27FC236}">
+              <a16:creationId xmlns:a16="http://schemas.microsoft.com/office/drawing/2014/main" id="{2A01996C-AEFF-C3A9-751E-CB258B5285F7}"/>
+            </a:ext>
+          </a:extLst>
+        </p:cNvPr>
+        <p:cNvGrpSpPr/>
+        <p:nvPr/>
+      </p:nvGrpSpPr>
+      <p:grpSpPr>
+        <a:xfrm>
+          <a:off x="0" y="0"/>
+          <a:ext cx="0" cy="0"/>
+          <a:chOff x="0" y="0"/>
+          <a:chExt cx="0" cy="0"/>
+        </a:xfrm>
+      </p:grpSpPr>
+      <p:sp>
+        <p:nvSpPr>
+          <p:cNvPr id="2" name="Title 1">
+            <a:extLst>
+              <a:ext uri="{FF2B5EF4-FFF2-40B4-BE49-F238E27FC236}">
+                <a16:creationId xmlns:a16="http://schemas.microsoft.com/office/drawing/2014/main" id="{273A313D-6D6A-BE2B-263D-27E5BA15AEB2}"/>
+              </a:ext>
+            </a:extLst>
+          </p:cNvPr>
+          <p:cNvSpPr>
+            <a:spLocks noGrp="1"/>
+          </p:cNvSpPr>
+          <p:nvPr>
+            <p:ph type="title"/>
+          </p:nvPr>
+        </p:nvSpPr>
+        <p:spPr>
+          <a:xfrm>
+            <a:off x="87086" y="21771"/>
+            <a:ext cx="10651402" cy="1143000"/>
+          </a:xfrm>
+        </p:spPr>
+        <p:txBody>
+          <a:bodyPr/>
+          <a:lstStyle/>
+          <a:p>
+            <a:r>
+              <a:rPr lang="en-US" dirty="0"/>
+              <a:t>Tumor Name Standardization		</a:t>
+            </a:r>
+          </a:p>
+        </p:txBody>
+      </p:sp>
+      <p:sp>
+        <p:nvSpPr>
+          <p:cNvPr id="3" name="Content Placeholder 2">
+            <a:extLst>
+              <a:ext uri="{FF2B5EF4-FFF2-40B4-BE49-F238E27FC236}">
+                <a16:creationId xmlns:a16="http://schemas.microsoft.com/office/drawing/2014/main" id="{7D082753-632D-7BBE-C9E9-F9AE285F5C75}"/>
+              </a:ext>
+            </a:extLst>
+          </p:cNvPr>
+          <p:cNvSpPr>
+            <a:spLocks noGrp="1"/>
+          </p:cNvSpPr>
+          <p:nvPr>
+            <p:ph idx="1"/>
+          </p:nvPr>
+        </p:nvSpPr>
+        <p:spPr>
+          <a:xfrm>
+            <a:off x="179670" y="1164771"/>
+            <a:ext cx="11261215" cy="4484914"/>
+          </a:xfrm>
+        </p:spPr>
+        <p:txBody>
+          <a:bodyPr>
+            <a:normAutofit/>
+          </a:bodyPr>
+          <a:lstStyle/>
+          <a:p>
+            <a:pPr algn="just"/>
+            <a:r>
+              <a:rPr lang="en-US" sz="1800" dirty="0">
+                <a:solidFill>
+                  <a:schemeClr val="tx1"/>
+                </a:solidFill>
+                <a:latin typeface="+mn-lt"/>
+                <a:cs typeface="+mn-cs"/>
+              </a:rPr>
+              <a:t> We aimed to standardize tumor names contained in CTR. Tumor names represent a significant proportion of condition names in CTR.</a:t>
+            </a:r>
+          </a:p>
+          <a:p>
+            <a:pPr algn="just"/>
+            <a:endParaRPr lang="en-US" sz="1800" dirty="0">
+              <a:solidFill>
+                <a:schemeClr val="tx1"/>
+              </a:solidFill>
+              <a:latin typeface="+mn-lt"/>
+              <a:cs typeface="+mn-cs"/>
+            </a:endParaRPr>
+          </a:p>
+          <a:p>
+            <a:pPr algn="just"/>
+            <a:r>
+              <a:rPr lang="en-US" sz="1800" dirty="0">
+                <a:solidFill>
+                  <a:schemeClr val="tx1"/>
+                </a:solidFill>
+                <a:latin typeface="+mn-lt"/>
+                <a:cs typeface="+mn-cs"/>
+              </a:rPr>
+              <a:t>Unlike other condition names, for tumor names , we have the WHO tumor classification system which is accepted as the gold standard for tumor nomenclature among clinicians. Also, other databases such as the </a:t>
+            </a:r>
+            <a:r>
+              <a:rPr lang="en-US" sz="1800" dirty="0" err="1">
+                <a:solidFill>
+                  <a:schemeClr val="tx1"/>
+                </a:solidFill>
+                <a:latin typeface="+mn-lt"/>
+                <a:cs typeface="+mn-cs"/>
+              </a:rPr>
+              <a:t>NCIt</a:t>
+            </a:r>
+            <a:r>
+              <a:rPr lang="en-US" sz="1800" dirty="0">
+                <a:solidFill>
+                  <a:schemeClr val="tx1"/>
+                </a:solidFill>
+                <a:latin typeface="+mn-lt"/>
+                <a:cs typeface="+mn-cs"/>
+              </a:rPr>
+              <a:t> (National Cancer Institute Thesaurus) have standardized tumor nomenclature. </a:t>
+            </a:r>
+          </a:p>
+          <a:p>
+            <a:pPr algn="just"/>
+            <a:endParaRPr lang="en-US" sz="1800" dirty="0">
+              <a:solidFill>
+                <a:schemeClr val="tx1"/>
+              </a:solidFill>
+              <a:latin typeface="+mn-lt"/>
+              <a:cs typeface="+mn-cs"/>
+            </a:endParaRPr>
+          </a:p>
+          <a:p>
+            <a:pPr algn="just"/>
+            <a:r>
+              <a:rPr lang="en-US" sz="1800" dirty="0">
+                <a:solidFill>
+                  <a:schemeClr val="tx1"/>
+                </a:solidFill>
+                <a:latin typeface="+mn-lt"/>
+                <a:cs typeface="+mn-cs"/>
+              </a:rPr>
+              <a:t>A standardized system for tumor nomenclature provides us with a reference for mapping unstandardized tumor names from CTR and a basis for evaluating any method that performs this mapping.</a:t>
+            </a:r>
+          </a:p>
+          <a:p>
+            <a:pPr algn="just"/>
+            <a:endParaRPr lang="en-US" sz="1800" dirty="0">
+              <a:solidFill>
+                <a:schemeClr val="tx1"/>
+              </a:solidFill>
+              <a:latin typeface="+mn-lt"/>
+              <a:cs typeface="+mn-cs"/>
+            </a:endParaRPr>
+          </a:p>
+          <a:p>
+            <a:pPr algn="just"/>
+            <a:r>
+              <a:rPr lang="en-US" sz="1800" dirty="0">
+                <a:solidFill>
+                  <a:schemeClr val="tx1"/>
+                </a:solidFill>
+                <a:latin typeface="+mn-lt"/>
+                <a:cs typeface="+mn-cs"/>
+              </a:rPr>
+              <a:t>To this end, we developed the CANTOS (Clinical trials Automated Nomenclature and Tumor Ontology Standardization) pipeline to extract tumor names from CTR and standardize them with respect to the WHO tumor classification system and </a:t>
+            </a:r>
+            <a:r>
+              <a:rPr lang="en-US" sz="1800" dirty="0" err="1">
+                <a:solidFill>
+                  <a:schemeClr val="tx1"/>
+                </a:solidFill>
+                <a:latin typeface="+mn-lt"/>
+                <a:cs typeface="+mn-cs"/>
+              </a:rPr>
+              <a:t>NCIt</a:t>
+            </a:r>
+            <a:r>
+              <a:rPr lang="en-US" sz="1800" dirty="0">
+                <a:solidFill>
+                  <a:schemeClr val="tx1"/>
+                </a:solidFill>
+                <a:latin typeface="+mn-lt"/>
+                <a:cs typeface="+mn-cs"/>
+              </a:rPr>
+              <a:t> database</a:t>
+            </a:r>
+            <a:r>
+              <a:rPr lang="en-US" sz="1800" dirty="0">
+                <a:solidFill>
+                  <a:srgbClr val="000000"/>
+                </a:solidFill>
+                <a:latin typeface="Times New Roman" panose="02020603050405020304" pitchFamily="18" charset="0"/>
+              </a:rPr>
+              <a:t>. </a:t>
+            </a:r>
+          </a:p>
+          <a:p>
+            <a:endParaRPr lang="en-US" sz="1800" dirty="0">
+              <a:solidFill>
+                <a:srgbClr val="000000"/>
+              </a:solidFill>
+              <a:latin typeface="Times New Roman" panose="02020603050405020304" pitchFamily="18" charset="0"/>
+            </a:endParaRPr>
+          </a:p>
+          <a:p>
+            <a:endParaRPr lang="en-US" sz="1800" dirty="0">
+              <a:solidFill>
+                <a:srgbClr val="000000"/>
+              </a:solidFill>
+              <a:latin typeface="Times New Roman" panose="02020603050405020304" pitchFamily="18" charset="0"/>
+            </a:endParaRPr>
+          </a:p>
+          <a:p>
+            <a:endParaRPr lang="en-US" dirty="0"/>
+          </a:p>
+        </p:txBody>
+      </p:sp>
+      <p:sp>
+        <p:nvSpPr>
+          <p:cNvPr id="4" name="Slide Number Placeholder 3">
+            <a:extLst>
+              <a:ext uri="{FF2B5EF4-FFF2-40B4-BE49-F238E27FC236}">
+                <a16:creationId xmlns:a16="http://schemas.microsoft.com/office/drawing/2014/main" id="{874865C2-BF25-6030-3F39-CD518B0D06B9}"/>
+              </a:ext>
+            </a:extLst>
+          </p:cNvPr>
+          <p:cNvSpPr>
+            <a:spLocks noGrp="1"/>
+          </p:cNvSpPr>
+          <p:nvPr>
+            <p:ph type="sldNum" sz="quarter" idx="12"/>
+          </p:nvPr>
+        </p:nvSpPr>
+        <p:spPr/>
+        <p:txBody>
+          <a:bodyPr/>
+          <a:lstStyle/>
+          <a:p>
+            <a:fld id="{AD40181A-01B0-4CB8-8614-1473649F6741}" type="slidenum">
+              <a:rPr lang="en-US" smtClean="0">
+                <a:solidFill>
+                  <a:schemeClr val="bg1"/>
+                </a:solidFill>
+              </a:rPr>
+              <a:t>18</a:t>
+            </a:fld>
+            <a:endParaRPr lang="en-US" dirty="0">
+              <a:solidFill>
+                <a:schemeClr val="bg1"/>
+              </a:solidFill>
+            </a:endParaRPr>
+          </a:p>
+        </p:txBody>
+      </p:sp>
+    </p:spTree>
+    <p:extLst>
+      <p:ext uri="{BB962C8B-B14F-4D97-AF65-F5344CB8AC3E}">
+        <p14:creationId xmlns:p14="http://schemas.microsoft.com/office/powerpoint/2010/main" val="579408319"/>
+      </p:ext>
+    </p:extLst>
+  </p:cSld>
+  <p:clrMapOvr>
+    <a:masterClrMapping/>
+  </p:clrMapOvr>
+</p:sld>
+</file>
+
+<file path=ppt/slides/slide19.xml><?xml version="1.0" encoding="utf-8"?>
+<p:sld xmlns:a="http://schemas.openxmlformats.org/drawingml/2006/main" xmlns:r="http://schemas.openxmlformats.org/officeDocument/2006/relationships" xmlns:p="http://schemas.openxmlformats.org/presentationml/2006/main">
+  <p:cSld>
+    <p:spTree>
+      <p:nvGrpSpPr>
+        <p:cNvPr id="1" name="">
+          <a:extLst>
+            <a:ext uri="{FF2B5EF4-FFF2-40B4-BE49-F238E27FC236}">
+              <a16:creationId xmlns:a16="http://schemas.microsoft.com/office/drawing/2014/main" id="{2A01996C-AEFF-C3A9-751E-CB258B5285F7}"/>
+            </a:ext>
+          </a:extLst>
+        </p:cNvPr>
+        <p:cNvGrpSpPr/>
+        <p:nvPr/>
+      </p:nvGrpSpPr>
+      <p:grpSpPr>
+        <a:xfrm>
+          <a:off x="0" y="0"/>
+          <a:ext cx="0" cy="0"/>
+          <a:chOff x="0" y="0"/>
+          <a:chExt cx="0" cy="0"/>
+        </a:xfrm>
+      </p:grpSpPr>
+      <p:sp>
+        <p:nvSpPr>
+          <p:cNvPr id="2" name="Title 1">
+            <a:extLst>
+              <a:ext uri="{FF2B5EF4-FFF2-40B4-BE49-F238E27FC236}">
+                <a16:creationId xmlns:a16="http://schemas.microsoft.com/office/drawing/2014/main" id="{273A313D-6D6A-BE2B-263D-27E5BA15AEB2}"/>
+              </a:ext>
+            </a:extLst>
+          </p:cNvPr>
+          <p:cNvSpPr>
+            <a:spLocks noGrp="1"/>
+          </p:cNvSpPr>
+          <p:nvPr>
+            <p:ph type="title"/>
+          </p:nvPr>
+        </p:nvSpPr>
+        <p:spPr>
+          <a:xfrm>
+            <a:off x="79054" y="0"/>
+            <a:ext cx="10651402" cy="1143000"/>
+          </a:xfrm>
+        </p:spPr>
+        <p:txBody>
+          <a:bodyPr/>
+          <a:lstStyle/>
+          <a:p>
+            <a:r>
+              <a:rPr lang="en-US" dirty="0"/>
+              <a:t>Unstandardized tumor names</a:t>
+            </a:r>
+          </a:p>
+        </p:txBody>
+      </p:sp>
+      <p:sp>
+        <p:nvSpPr>
+          <p:cNvPr id="4" name="Slide Number Placeholder 3">
+            <a:extLst>
+              <a:ext uri="{FF2B5EF4-FFF2-40B4-BE49-F238E27FC236}">
+                <a16:creationId xmlns:a16="http://schemas.microsoft.com/office/drawing/2014/main" id="{874865C2-BF25-6030-3F39-CD518B0D06B9}"/>
+              </a:ext>
+            </a:extLst>
+          </p:cNvPr>
+          <p:cNvSpPr>
+            <a:spLocks noGrp="1"/>
+          </p:cNvSpPr>
+          <p:nvPr>
+            <p:ph type="sldNum" sz="quarter" idx="12"/>
+          </p:nvPr>
+        </p:nvSpPr>
+        <p:spPr/>
+        <p:txBody>
+          <a:bodyPr/>
+          <a:lstStyle/>
+          <a:p>
+            <a:fld id="{AD40181A-01B0-4CB8-8614-1473649F6741}" type="slidenum">
+              <a:rPr lang="en-US" smtClean="0">
+                <a:solidFill>
+                  <a:schemeClr val="bg1"/>
+                </a:solidFill>
+              </a:rPr>
+              <a:t>19</a:t>
+            </a:fld>
+            <a:endParaRPr lang="en-US" dirty="0">
+              <a:solidFill>
+                <a:schemeClr val="bg1"/>
+              </a:solidFill>
+            </a:endParaRPr>
+          </a:p>
+        </p:txBody>
+      </p:sp>
+      <p:graphicFrame>
+        <p:nvGraphicFramePr>
+          <p:cNvPr id="7" name="Table 6">
+            <a:extLst>
+              <a:ext uri="{FF2B5EF4-FFF2-40B4-BE49-F238E27FC236}">
+                <a16:creationId xmlns:a16="http://schemas.microsoft.com/office/drawing/2014/main" id="{1782C44F-99F5-A0A7-BC97-FD48AD99745C}"/>
+              </a:ext>
+            </a:extLst>
+          </p:cNvPr>
+          <p:cNvGraphicFramePr>
+            <a:graphicFrameLocks noGrp="1"/>
+          </p:cNvGraphicFramePr>
+          <p:nvPr>
+            <p:extLst>
+              <p:ext uri="{D42A27DB-BD31-4B8C-83A1-F6EECF244321}">
+                <p14:modId xmlns:p14="http://schemas.microsoft.com/office/powerpoint/2010/main" val="1719294777"/>
+              </p:ext>
+            </p:extLst>
+          </p:nvPr>
+        </p:nvGraphicFramePr>
+        <p:xfrm>
+          <a:off x="1461544" y="1143000"/>
+          <a:ext cx="8994814" cy="3655156"/>
+        </p:xfrm>
+        <a:graphic>
+          <a:graphicData uri="http://schemas.openxmlformats.org/drawingml/2006/table">
+            <a:tbl>
+              <a:tblPr firstRow="1" bandRow="1">
+                <a:tableStyleId>{5C22544A-7EE6-4342-B048-85BDC9FD1C3A}</a:tableStyleId>
+              </a:tblPr>
+              <a:tblGrid>
+                <a:gridCol w="3087617">
+                  <a:extLst>
+                    <a:ext uri="{9D8B030D-6E8A-4147-A177-3AD203B41FA5}">
+                      <a16:colId xmlns:a16="http://schemas.microsoft.com/office/drawing/2014/main" val="1106209466"/>
+                    </a:ext>
+                  </a:extLst>
+                </a:gridCol>
+                <a:gridCol w="3019280">
+                  <a:extLst>
+                    <a:ext uri="{9D8B030D-6E8A-4147-A177-3AD203B41FA5}">
+                      <a16:colId xmlns:a16="http://schemas.microsoft.com/office/drawing/2014/main" val="1462595529"/>
+                    </a:ext>
+                  </a:extLst>
+                </a:gridCol>
+                <a:gridCol w="2887917">
+                  <a:extLst>
+                    <a:ext uri="{9D8B030D-6E8A-4147-A177-3AD203B41FA5}">
+                      <a16:colId xmlns:a16="http://schemas.microsoft.com/office/drawing/2014/main" val="242162575"/>
+                    </a:ext>
+                  </a:extLst>
+                </a:gridCol>
+              </a:tblGrid>
+              <a:tr h="472978">
+                <a:tc>
+                  <a:txBody>
+                    <a:bodyPr/>
+                    <a:lstStyle/>
+                    <a:p>
+                      <a:r>
+                        <a:rPr lang="en-US" dirty="0"/>
+                        <a:t>CT Tumor Names</a:t>
+                      </a:r>
+                    </a:p>
+                  </a:txBody>
+                  <a:tcPr/>
+                </a:tc>
+                <a:tc>
+                  <a:txBody>
+                    <a:bodyPr/>
+                    <a:lstStyle/>
+                    <a:p>
+                      <a:r>
+                        <a:rPr lang="en-US" dirty="0"/>
+                        <a:t>Issues</a:t>
+                      </a:r>
+                    </a:p>
+                  </a:txBody>
+                  <a:tcPr/>
+                </a:tc>
+                <a:tc>
+                  <a:txBody>
+                    <a:bodyPr/>
+                    <a:lstStyle/>
+                    <a:p>
+                      <a:r>
+                        <a:rPr lang="en-US" dirty="0"/>
+                        <a:t>WHO Standard Names</a:t>
+                      </a:r>
+                    </a:p>
+                  </a:txBody>
+                  <a:tcPr/>
+                </a:tc>
+                <a:extLst>
+                  <a:ext uri="{0D108BD9-81ED-4DB2-BD59-A6C34878D82A}">
+                    <a16:rowId xmlns:a16="http://schemas.microsoft.com/office/drawing/2014/main" val="1751357925"/>
+                  </a:ext>
+                </a:extLst>
+              </a:tr>
+              <a:tr h="457554">
+                <a:tc>
+                  <a:txBody>
+                    <a:bodyPr/>
+                    <a:lstStyle/>
+                    <a:p>
+                      <a:r>
+                        <a:rPr lang="en-US" sz="1400" dirty="0"/>
+                        <a:t>acute myeloid </a:t>
+                      </a:r>
+                      <a:r>
+                        <a:rPr lang="en-US" sz="1400" dirty="0" err="1"/>
+                        <a:t>leucaemia</a:t>
+                      </a:r>
+                      <a:endParaRPr lang="en-US" sz="1400" dirty="0"/>
+                    </a:p>
+                  </a:txBody>
+                  <a:tcPr/>
+                </a:tc>
+                <a:tc>
+                  <a:txBody>
+                    <a:bodyPr/>
+                    <a:lstStyle/>
+                    <a:p>
+                      <a:r>
+                        <a:rPr lang="en-US" sz="1400" dirty="0" err="1"/>
+                        <a:t>Leukaemia</a:t>
+                      </a:r>
+                      <a:r>
+                        <a:rPr lang="en-US" sz="1400" dirty="0"/>
+                        <a:t> not spelled correctly </a:t>
+                      </a:r>
+                    </a:p>
+                  </a:txBody>
+                  <a:tcPr/>
+                </a:tc>
+                <a:tc>
+                  <a:txBody>
+                    <a:bodyPr/>
+                    <a:lstStyle/>
+                    <a:p>
+                      <a:r>
+                        <a:rPr lang="en-US" sz="1400" dirty="0">
+                          <a:effectLst/>
+                        </a:rPr>
+                        <a:t>acute myeloid </a:t>
+                      </a:r>
+                      <a:r>
+                        <a:rPr lang="en-US" sz="1400" dirty="0" err="1">
+                          <a:effectLst/>
+                        </a:rPr>
+                        <a:t>leukaemia</a:t>
+                      </a:r>
+                      <a:endParaRPr lang="en-US" sz="1400" dirty="0">
+                        <a:effectLst/>
+                      </a:endParaRPr>
+                    </a:p>
+                  </a:txBody>
+                  <a:tcPr marL="47625" marR="47625" marT="38100" marB="38100" anchor="ctr"/>
+                </a:tc>
+                <a:extLst>
+                  <a:ext uri="{0D108BD9-81ED-4DB2-BD59-A6C34878D82A}">
+                    <a16:rowId xmlns:a16="http://schemas.microsoft.com/office/drawing/2014/main" val="65510083"/>
+                  </a:ext>
+                </a:extLst>
+              </a:tr>
+              <a:tr h="708487">
+                <a:tc>
+                  <a:txBody>
+                    <a:bodyPr/>
+                    <a:lstStyle/>
+                    <a:p>
+                      <a:r>
+                        <a:rPr lang="en-US" sz="1400" dirty="0"/>
+                        <a:t>glioblastoma or solid tumors, epidermal growth factor receptor (</a:t>
+                      </a:r>
+                      <a:r>
+                        <a:rPr lang="en-US" sz="1400" dirty="0" err="1"/>
+                        <a:t>egfr</a:t>
+                      </a:r>
+                      <a:r>
+                        <a:rPr lang="en-US" sz="1400" dirty="0"/>
+                        <a:t>) diagnosis</a:t>
+                      </a:r>
+                    </a:p>
+                    <a:p>
+                      <a:endParaRPr lang="en-US" sz="1400" dirty="0"/>
+                    </a:p>
+                  </a:txBody>
+                  <a:tcPr/>
+                </a:tc>
+                <a:tc>
+                  <a:txBody>
+                    <a:bodyPr/>
+                    <a:lstStyle/>
+                    <a:p>
+                      <a:r>
+                        <a:rPr lang="en-US" sz="1400" dirty="0"/>
+                        <a:t>Has two types of tumor: glioblastoma and solid tumors, extra information on  EGFR</a:t>
+                      </a:r>
+                    </a:p>
+                  </a:txBody>
+                  <a:tcPr/>
+                </a:tc>
+                <a:tc>
+                  <a:txBody>
+                    <a:bodyPr/>
+                    <a:lstStyle/>
+                    <a:p>
+                      <a:r>
+                        <a:rPr lang="en-US" sz="1400" dirty="0"/>
+                        <a:t>glioblastoma, </a:t>
+                      </a:r>
+                      <a:r>
+                        <a:rPr lang="en-US" sz="1400" dirty="0" err="1"/>
+                        <a:t>idh</a:t>
+                      </a:r>
+                      <a:r>
+                        <a:rPr lang="en-US" sz="1400" dirty="0"/>
+                        <a:t>-wildtype</a:t>
+                      </a:r>
+                    </a:p>
+                  </a:txBody>
+                  <a:tcPr/>
+                </a:tc>
+                <a:extLst>
+                  <a:ext uri="{0D108BD9-81ED-4DB2-BD59-A6C34878D82A}">
+                    <a16:rowId xmlns:a16="http://schemas.microsoft.com/office/drawing/2014/main" val="1041037533"/>
+                  </a:ext>
+                </a:extLst>
+              </a:tr>
+              <a:tr h="500866">
+                <a:tc>
+                  <a:txBody>
+                    <a:bodyPr/>
+                    <a:lstStyle/>
+                    <a:p>
+                      <a:r>
+                        <a:rPr lang="en-US" sz="1400" dirty="0">
+                          <a:effectLst/>
+                        </a:rPr>
+                        <a:t>pathologic stage </a:t>
+                      </a:r>
+                      <a:r>
+                        <a:rPr lang="en-US" sz="1400" dirty="0" err="1">
+                          <a:effectLst/>
+                        </a:rPr>
+                        <a:t>i</a:t>
+                      </a:r>
+                      <a:r>
+                        <a:rPr lang="en-US" sz="1400" dirty="0">
+                          <a:effectLst/>
+                        </a:rPr>
+                        <a:t> </a:t>
+                      </a:r>
+                      <a:r>
+                        <a:rPr lang="en-US" sz="1400" dirty="0" err="1">
+                          <a:effectLst/>
+                        </a:rPr>
+                        <a:t>merkel</a:t>
+                      </a:r>
+                      <a:r>
+                        <a:rPr lang="en-US" sz="1400" dirty="0">
+                          <a:effectLst/>
+                        </a:rPr>
+                        <a:t> cell carcinoma </a:t>
+                      </a:r>
+                      <a:r>
+                        <a:rPr lang="en-US" sz="1400" dirty="0" err="1">
+                          <a:effectLst/>
+                        </a:rPr>
+                        <a:t>ajcc</a:t>
+                      </a:r>
+                      <a:r>
+                        <a:rPr lang="en-US" sz="1400" dirty="0">
+                          <a:effectLst/>
+                        </a:rPr>
+                        <a:t> v8</a:t>
+                      </a:r>
+                    </a:p>
+                  </a:txBody>
+                  <a:tcPr marL="47625" marR="47625" marT="38100" marB="38100" anchor="ctr"/>
+                </a:tc>
+                <a:tc>
+                  <a:txBody>
+                    <a:bodyPr/>
+                    <a:lstStyle/>
+                    <a:p>
+                      <a:r>
+                        <a:rPr lang="en-US" sz="1400" dirty="0">
+                          <a:effectLst/>
+                        </a:rPr>
+                        <a:t>extra information on staging</a:t>
+                      </a:r>
+                    </a:p>
+                  </a:txBody>
+                  <a:tcPr marL="47625" marR="47625" marT="38100" marB="38100" anchor="ctr"/>
+                </a:tc>
+                <a:tc>
+                  <a:txBody>
+                    <a:bodyPr/>
+                    <a:lstStyle/>
+                    <a:p>
+                      <a:r>
+                        <a:rPr lang="en-US" sz="1400" dirty="0" err="1">
+                          <a:effectLst/>
+                        </a:rPr>
+                        <a:t>merkel</a:t>
+                      </a:r>
+                      <a:r>
+                        <a:rPr lang="en-US" sz="1400" dirty="0">
+                          <a:effectLst/>
+                        </a:rPr>
+                        <a:t> cell carcinoma</a:t>
+                      </a:r>
+                    </a:p>
+                  </a:txBody>
+                  <a:tcPr marL="47625" marR="47625" marT="38100" marB="38100" anchor="ctr"/>
+                </a:tc>
+                <a:extLst>
+                  <a:ext uri="{0D108BD9-81ED-4DB2-BD59-A6C34878D82A}">
+                    <a16:rowId xmlns:a16="http://schemas.microsoft.com/office/drawing/2014/main" val="3070337974"/>
+                  </a:ext>
+                </a:extLst>
+              </a:tr>
+              <a:tr h="545304">
+                <a:tc>
+                  <a:txBody>
+                    <a:bodyPr/>
+                    <a:lstStyle/>
+                    <a:p>
+                      <a:r>
+                        <a:rPr lang="en-US" sz="1400" dirty="0">
+                          <a:effectLst/>
+                        </a:rPr>
+                        <a:t>adrenocortical carcinoma (part g)</a:t>
+                      </a:r>
+                    </a:p>
+                  </a:txBody>
+                  <a:tcPr marL="47625" marR="47625" marT="38100" marB="38100" anchor="ctr"/>
+                </a:tc>
+                <a:tc>
+                  <a:txBody>
+                    <a:bodyPr/>
+                    <a:lstStyle/>
+                    <a:p>
+                      <a:r>
+                        <a:rPr lang="en-US" sz="1400" dirty="0">
+                          <a:effectLst/>
+                        </a:rPr>
+                        <a:t> Extra information in bracket</a:t>
+                      </a:r>
+                    </a:p>
+                  </a:txBody>
+                  <a:tcPr marL="47625" marR="47625" marT="38100" marB="38100" anchor="ctr"/>
+                </a:tc>
+                <a:tc>
+                  <a:txBody>
+                    <a:bodyPr/>
+                    <a:lstStyle/>
+                    <a:p>
+                      <a:r>
+                        <a:rPr lang="en-US" sz="1400" dirty="0">
+                          <a:effectLst/>
+                        </a:rPr>
+                        <a:t> adrenal cortical carcinoma</a:t>
+                      </a:r>
+                    </a:p>
+                  </a:txBody>
+                  <a:tcPr marL="47625" marR="47625" marT="38100" marB="38100" anchor="ctr"/>
+                </a:tc>
+                <a:extLst>
+                  <a:ext uri="{0D108BD9-81ED-4DB2-BD59-A6C34878D82A}">
+                    <a16:rowId xmlns:a16="http://schemas.microsoft.com/office/drawing/2014/main" val="2004295928"/>
+                  </a:ext>
+                </a:extLst>
+              </a:tr>
+              <a:tr h="708487">
+                <a:tc>
+                  <a:txBody>
+                    <a:bodyPr/>
+                    <a:lstStyle/>
+                    <a:p>
+                      <a:r>
+                        <a:rPr lang="en-US" sz="1400" dirty="0" err="1"/>
+                        <a:t>ann</a:t>
+                      </a:r>
+                      <a:r>
+                        <a:rPr lang="en-US" sz="1400" dirty="0"/>
+                        <a:t> arbor stage iii diffuse large b-cell lymphoma</a:t>
+                      </a:r>
+                    </a:p>
+                    <a:p>
+                      <a:endParaRPr lang="en-US" sz="1400" dirty="0"/>
+                    </a:p>
+                  </a:txBody>
+                  <a:tcPr/>
+                </a:tc>
+                <a:tc>
+                  <a:txBody>
+                    <a:bodyPr/>
+                    <a:lstStyle/>
+                    <a:p>
+                      <a:r>
+                        <a:rPr lang="en-US" sz="1400" dirty="0"/>
+                        <a:t> extra information on staging </a:t>
+                      </a:r>
+                    </a:p>
+                  </a:txBody>
+                  <a:tcPr/>
+                </a:tc>
+                <a:tc>
+                  <a:txBody>
+                    <a:bodyPr/>
+                    <a:lstStyle/>
+                    <a:p>
+                      <a:r>
+                        <a:rPr lang="en-US" sz="1400" dirty="0"/>
+                        <a:t>diffuse large b-cell lymphoma</a:t>
+                      </a:r>
+                    </a:p>
+                    <a:p>
+                      <a:endParaRPr lang="en-US" sz="1400" dirty="0"/>
+                    </a:p>
+                  </a:txBody>
+                  <a:tcPr/>
+                </a:tc>
+                <a:extLst>
+                  <a:ext uri="{0D108BD9-81ED-4DB2-BD59-A6C34878D82A}">
+                    <a16:rowId xmlns:a16="http://schemas.microsoft.com/office/drawing/2014/main" val="3939223885"/>
+                  </a:ext>
+                </a:extLst>
+              </a:tr>
+            </a:tbl>
+          </a:graphicData>
+        </a:graphic>
+      </p:graphicFrame>
+    </p:spTree>
+    <p:extLst>
+      <p:ext uri="{BB962C8B-B14F-4D97-AF65-F5344CB8AC3E}">
+        <p14:creationId xmlns:p14="http://schemas.microsoft.com/office/powerpoint/2010/main" val="1932369964"/>
       </p:ext>
     </p:extLst>
   </p:cSld>
@@ -16521,22 +21465,10 @@
           <a:lstStyle/>
           <a:p>
             <a:r>
-              <a:rPr lang="en-US" dirty="0" err="1">
-                <a:solidFill>
-                  <a:schemeClr val="bg2">
-                    <a:lumMod val="50000"/>
-                  </a:schemeClr>
-                </a:solidFill>
-              </a:rPr>
+              <a:rPr lang="en-US" dirty="0" err="1"/>
               <a:t>conditions.txt</a:t>
             </a:r>
-            <a:endParaRPr lang="en-US" dirty="0">
-              <a:solidFill>
-                <a:schemeClr val="bg2">
-                  <a:lumMod val="50000"/>
-                </a:schemeClr>
-              </a:solidFill>
-            </a:endParaRPr>
+            <a:endParaRPr lang="en-US" dirty="0"/>
           </a:p>
         </p:txBody>
       </p:sp>
@@ -16569,22 +21501,10 @@
           <a:lstStyle/>
           <a:p>
             <a:r>
-              <a:rPr lang="en-US" dirty="0" err="1">
-                <a:solidFill>
-                  <a:schemeClr val="bg2">
-                    <a:lumMod val="50000"/>
-                  </a:schemeClr>
-                </a:solidFill>
-              </a:rPr>
+              <a:rPr lang="en-US" dirty="0" err="1"/>
               <a:t>interventions.txt</a:t>
             </a:r>
-            <a:endParaRPr lang="en-US" dirty="0">
-              <a:solidFill>
-                <a:schemeClr val="bg2">
-                  <a:lumMod val="50000"/>
-                </a:schemeClr>
-              </a:solidFill>
-            </a:endParaRPr>
+            <a:endParaRPr lang="en-US" dirty="0"/>
           </a:p>
         </p:txBody>
       </p:sp>
@@ -16847,13 +21767,7 @@
           <a:lstStyle/>
           <a:p>
             <a:r>
-              <a:rPr lang="en-US" dirty="0">
-                <a:solidFill>
-                  <a:schemeClr val="bg2">
-                    <a:lumMod val="50000"/>
-                  </a:schemeClr>
-                </a:solidFill>
-              </a:rPr>
+              <a:rPr lang="en-US" dirty="0"/>
               <a:t>NCT-ID</a:t>
             </a:r>
           </a:p>
@@ -16919,7 +21833,7 @@
         <p:cNvPr id="1" name="">
           <a:extLst>
             <a:ext uri="{FF2B5EF4-FFF2-40B4-BE49-F238E27FC236}">
-              <a16:creationId xmlns:a16="http://schemas.microsoft.com/office/drawing/2014/main" id="{2A01996C-AEFF-C3A9-751E-CB258B5285F7}"/>
+              <a16:creationId xmlns:a16="http://schemas.microsoft.com/office/drawing/2014/main" id="{03EA0BC4-226F-1C7E-C03F-DB4EDB8B0FA5}"/>
             </a:ext>
           </a:extLst>
         </p:cNvPr>
@@ -16939,549 +21853,7 @@
           <p:cNvPr id="2" name="Title 1">
             <a:extLst>
               <a:ext uri="{FF2B5EF4-FFF2-40B4-BE49-F238E27FC236}">
-                <a16:creationId xmlns:a16="http://schemas.microsoft.com/office/drawing/2014/main" id="{273A313D-6D6A-BE2B-263D-27E5BA15AEB2}"/>
-              </a:ext>
-            </a:extLst>
-          </p:cNvPr>
-          <p:cNvSpPr>
-            <a:spLocks noGrp="1"/>
-          </p:cNvSpPr>
-          <p:nvPr>
-            <p:ph type="title"/>
-          </p:nvPr>
-        </p:nvSpPr>
-        <p:spPr>
-          <a:xfrm>
-            <a:off x="79054" y="0"/>
-            <a:ext cx="10651402" cy="1143000"/>
-          </a:xfrm>
-        </p:spPr>
-        <p:txBody>
-          <a:bodyPr/>
-          <a:lstStyle/>
-          <a:p>
-            <a:r>
-              <a:rPr lang="en-US" dirty="0"/>
-              <a:t>Unstandardized tumor names</a:t>
-            </a:r>
-          </a:p>
-        </p:txBody>
-      </p:sp>
-      <p:sp>
-        <p:nvSpPr>
-          <p:cNvPr id="4" name="Slide Number Placeholder 3">
-            <a:extLst>
-              <a:ext uri="{FF2B5EF4-FFF2-40B4-BE49-F238E27FC236}">
-                <a16:creationId xmlns:a16="http://schemas.microsoft.com/office/drawing/2014/main" id="{874865C2-BF25-6030-3F39-CD518B0D06B9}"/>
-              </a:ext>
-            </a:extLst>
-          </p:cNvPr>
-          <p:cNvSpPr>
-            <a:spLocks noGrp="1"/>
-          </p:cNvSpPr>
-          <p:nvPr>
-            <p:ph type="sldNum" sz="quarter" idx="12"/>
-          </p:nvPr>
-        </p:nvSpPr>
-        <p:spPr/>
-        <p:txBody>
-          <a:bodyPr/>
-          <a:lstStyle/>
-          <a:p>
-            <a:fld id="{AD40181A-01B0-4CB8-8614-1473649F6741}" type="slidenum">
-              <a:rPr lang="en-US" smtClean="0">
-                <a:solidFill>
-                  <a:schemeClr val="bg1"/>
-                </a:solidFill>
-              </a:rPr>
-              <a:t>7</a:t>
-            </a:fld>
-            <a:endParaRPr lang="en-US" dirty="0">
-              <a:solidFill>
-                <a:schemeClr val="bg1"/>
-              </a:solidFill>
-            </a:endParaRPr>
-          </a:p>
-        </p:txBody>
-      </p:sp>
-      <p:graphicFrame>
-        <p:nvGraphicFramePr>
-          <p:cNvPr id="7" name="Table 6">
-            <a:extLst>
-              <a:ext uri="{FF2B5EF4-FFF2-40B4-BE49-F238E27FC236}">
-                <a16:creationId xmlns:a16="http://schemas.microsoft.com/office/drawing/2014/main" id="{1782C44F-99F5-A0A7-BC97-FD48AD99745C}"/>
-              </a:ext>
-            </a:extLst>
-          </p:cNvPr>
-          <p:cNvGraphicFramePr>
-            <a:graphicFrameLocks noGrp="1"/>
-          </p:cNvGraphicFramePr>
-          <p:nvPr>
-            <p:extLst>
-              <p:ext uri="{D42A27DB-BD31-4B8C-83A1-F6EECF244321}">
-                <p14:modId xmlns:p14="http://schemas.microsoft.com/office/powerpoint/2010/main" val="1719294777"/>
-              </p:ext>
-            </p:extLst>
-          </p:nvPr>
-        </p:nvGraphicFramePr>
-        <p:xfrm>
-          <a:off x="1461544" y="1143000"/>
-          <a:ext cx="8994814" cy="3655156"/>
-        </p:xfrm>
-        <a:graphic>
-          <a:graphicData uri="http://schemas.openxmlformats.org/drawingml/2006/table">
-            <a:tbl>
-              <a:tblPr firstRow="1" bandRow="1">
-                <a:tableStyleId>{5C22544A-7EE6-4342-B048-85BDC9FD1C3A}</a:tableStyleId>
-              </a:tblPr>
-              <a:tblGrid>
-                <a:gridCol w="3087617">
-                  <a:extLst>
-                    <a:ext uri="{9D8B030D-6E8A-4147-A177-3AD203B41FA5}">
-                      <a16:colId xmlns:a16="http://schemas.microsoft.com/office/drawing/2014/main" val="1106209466"/>
-                    </a:ext>
-                  </a:extLst>
-                </a:gridCol>
-                <a:gridCol w="3019280">
-                  <a:extLst>
-                    <a:ext uri="{9D8B030D-6E8A-4147-A177-3AD203B41FA5}">
-                      <a16:colId xmlns:a16="http://schemas.microsoft.com/office/drawing/2014/main" val="1462595529"/>
-                    </a:ext>
-                  </a:extLst>
-                </a:gridCol>
-                <a:gridCol w="2887917">
-                  <a:extLst>
-                    <a:ext uri="{9D8B030D-6E8A-4147-A177-3AD203B41FA5}">
-                      <a16:colId xmlns:a16="http://schemas.microsoft.com/office/drawing/2014/main" val="242162575"/>
-                    </a:ext>
-                  </a:extLst>
-                </a:gridCol>
-              </a:tblGrid>
-              <a:tr h="472978">
-                <a:tc>
-                  <a:txBody>
-                    <a:bodyPr/>
-                    <a:lstStyle/>
-                    <a:p>
-                      <a:r>
-                        <a:rPr lang="en-US" dirty="0"/>
-                        <a:t>CT Tumor Names</a:t>
-                      </a:r>
-                    </a:p>
-                  </a:txBody>
-                  <a:tcPr/>
-                </a:tc>
-                <a:tc>
-                  <a:txBody>
-                    <a:bodyPr/>
-                    <a:lstStyle/>
-                    <a:p>
-                      <a:r>
-                        <a:rPr lang="en-US" dirty="0"/>
-                        <a:t>Issues</a:t>
-                      </a:r>
-                    </a:p>
-                  </a:txBody>
-                  <a:tcPr/>
-                </a:tc>
-                <a:tc>
-                  <a:txBody>
-                    <a:bodyPr/>
-                    <a:lstStyle/>
-                    <a:p>
-                      <a:r>
-                        <a:rPr lang="en-US" dirty="0"/>
-                        <a:t>WHO Standard Names</a:t>
-                      </a:r>
-                    </a:p>
-                  </a:txBody>
-                  <a:tcPr/>
-                </a:tc>
-                <a:extLst>
-                  <a:ext uri="{0D108BD9-81ED-4DB2-BD59-A6C34878D82A}">
-                    <a16:rowId xmlns:a16="http://schemas.microsoft.com/office/drawing/2014/main" val="1751357925"/>
-                  </a:ext>
-                </a:extLst>
-              </a:tr>
-              <a:tr h="457554">
-                <a:tc>
-                  <a:txBody>
-                    <a:bodyPr/>
-                    <a:lstStyle/>
-                    <a:p>
-                      <a:r>
-                        <a:rPr lang="en-US" sz="1400" dirty="0"/>
-                        <a:t>acute myeloid </a:t>
-                      </a:r>
-                      <a:r>
-                        <a:rPr lang="en-US" sz="1400" dirty="0" err="1"/>
-                        <a:t>leucaemia</a:t>
-                      </a:r>
-                      <a:endParaRPr lang="en-US" sz="1400" dirty="0"/>
-                    </a:p>
-                  </a:txBody>
-                  <a:tcPr/>
-                </a:tc>
-                <a:tc>
-                  <a:txBody>
-                    <a:bodyPr/>
-                    <a:lstStyle/>
-                    <a:p>
-                      <a:r>
-                        <a:rPr lang="en-US" sz="1400" dirty="0" err="1"/>
-                        <a:t>Leukaemia</a:t>
-                      </a:r>
-                      <a:r>
-                        <a:rPr lang="en-US" sz="1400" dirty="0"/>
-                        <a:t> not spelled correctly </a:t>
-                      </a:r>
-                    </a:p>
-                  </a:txBody>
-                  <a:tcPr/>
-                </a:tc>
-                <a:tc>
-                  <a:txBody>
-                    <a:bodyPr/>
-                    <a:lstStyle/>
-                    <a:p>
-                      <a:r>
-                        <a:rPr lang="en-US" sz="1400" dirty="0">
-                          <a:effectLst/>
-                        </a:rPr>
-                        <a:t>acute myeloid </a:t>
-                      </a:r>
-                      <a:r>
-                        <a:rPr lang="en-US" sz="1400" dirty="0" err="1">
-                          <a:effectLst/>
-                        </a:rPr>
-                        <a:t>leukaemia</a:t>
-                      </a:r>
-                      <a:endParaRPr lang="en-US" sz="1400" dirty="0">
-                        <a:effectLst/>
-                      </a:endParaRPr>
-                    </a:p>
-                  </a:txBody>
-                  <a:tcPr marL="47625" marR="47625" marT="38100" marB="38100" anchor="ctr"/>
-                </a:tc>
-                <a:extLst>
-                  <a:ext uri="{0D108BD9-81ED-4DB2-BD59-A6C34878D82A}">
-                    <a16:rowId xmlns:a16="http://schemas.microsoft.com/office/drawing/2014/main" val="65510083"/>
-                  </a:ext>
-                </a:extLst>
-              </a:tr>
-              <a:tr h="708487">
-                <a:tc>
-                  <a:txBody>
-                    <a:bodyPr/>
-                    <a:lstStyle/>
-                    <a:p>
-                      <a:r>
-                        <a:rPr lang="en-US" sz="1400" dirty="0"/>
-                        <a:t>glioblastoma or solid tumors, epidermal growth factor receptor (</a:t>
-                      </a:r>
-                      <a:r>
-                        <a:rPr lang="en-US" sz="1400" dirty="0" err="1"/>
-                        <a:t>egfr</a:t>
-                      </a:r>
-                      <a:r>
-                        <a:rPr lang="en-US" sz="1400" dirty="0"/>
-                        <a:t>) diagnosis</a:t>
-                      </a:r>
-                    </a:p>
-                    <a:p>
-                      <a:endParaRPr lang="en-US" sz="1400" dirty="0"/>
-                    </a:p>
-                  </a:txBody>
-                  <a:tcPr/>
-                </a:tc>
-                <a:tc>
-                  <a:txBody>
-                    <a:bodyPr/>
-                    <a:lstStyle/>
-                    <a:p>
-                      <a:r>
-                        <a:rPr lang="en-US" sz="1400" dirty="0"/>
-                        <a:t>Has two types of tumor: glioblastoma and solid tumors, extra information on  EGFR</a:t>
-                      </a:r>
-                    </a:p>
-                  </a:txBody>
-                  <a:tcPr/>
-                </a:tc>
-                <a:tc>
-                  <a:txBody>
-                    <a:bodyPr/>
-                    <a:lstStyle/>
-                    <a:p>
-                      <a:r>
-                        <a:rPr lang="en-US" sz="1400" dirty="0"/>
-                        <a:t>glioblastoma, </a:t>
-                      </a:r>
-                      <a:r>
-                        <a:rPr lang="en-US" sz="1400" dirty="0" err="1"/>
-                        <a:t>idh</a:t>
-                      </a:r>
-                      <a:r>
-                        <a:rPr lang="en-US" sz="1400" dirty="0"/>
-                        <a:t>-wildtype</a:t>
-                      </a:r>
-                    </a:p>
-                  </a:txBody>
-                  <a:tcPr/>
-                </a:tc>
-                <a:extLst>
-                  <a:ext uri="{0D108BD9-81ED-4DB2-BD59-A6C34878D82A}">
-                    <a16:rowId xmlns:a16="http://schemas.microsoft.com/office/drawing/2014/main" val="1041037533"/>
-                  </a:ext>
-                </a:extLst>
-              </a:tr>
-              <a:tr h="500866">
-                <a:tc>
-                  <a:txBody>
-                    <a:bodyPr/>
-                    <a:lstStyle/>
-                    <a:p>
-                      <a:r>
-                        <a:rPr lang="en-US" sz="1400" dirty="0">
-                          <a:effectLst/>
-                        </a:rPr>
-                        <a:t>pathologic stage </a:t>
-                      </a:r>
-                      <a:r>
-                        <a:rPr lang="en-US" sz="1400" dirty="0" err="1">
-                          <a:effectLst/>
-                        </a:rPr>
-                        <a:t>i</a:t>
-                      </a:r>
-                      <a:r>
-                        <a:rPr lang="en-US" sz="1400" dirty="0">
-                          <a:effectLst/>
-                        </a:rPr>
-                        <a:t> </a:t>
-                      </a:r>
-                      <a:r>
-                        <a:rPr lang="en-US" sz="1400" dirty="0" err="1">
-                          <a:effectLst/>
-                        </a:rPr>
-                        <a:t>merkel</a:t>
-                      </a:r>
-                      <a:r>
-                        <a:rPr lang="en-US" sz="1400" dirty="0">
-                          <a:effectLst/>
-                        </a:rPr>
-                        <a:t> cell carcinoma </a:t>
-                      </a:r>
-                      <a:r>
-                        <a:rPr lang="en-US" sz="1400" dirty="0" err="1">
-                          <a:effectLst/>
-                        </a:rPr>
-                        <a:t>ajcc</a:t>
-                      </a:r>
-                      <a:r>
-                        <a:rPr lang="en-US" sz="1400" dirty="0">
-                          <a:effectLst/>
-                        </a:rPr>
-                        <a:t> v8</a:t>
-                      </a:r>
-                    </a:p>
-                  </a:txBody>
-                  <a:tcPr marL="47625" marR="47625" marT="38100" marB="38100" anchor="ctr"/>
-                </a:tc>
-                <a:tc>
-                  <a:txBody>
-                    <a:bodyPr/>
-                    <a:lstStyle/>
-                    <a:p>
-                      <a:r>
-                        <a:rPr lang="en-US" sz="1400" dirty="0">
-                          <a:effectLst/>
-                        </a:rPr>
-                        <a:t>extra information on staging</a:t>
-                      </a:r>
-                    </a:p>
-                  </a:txBody>
-                  <a:tcPr marL="47625" marR="47625" marT="38100" marB="38100" anchor="ctr"/>
-                </a:tc>
-                <a:tc>
-                  <a:txBody>
-                    <a:bodyPr/>
-                    <a:lstStyle/>
-                    <a:p>
-                      <a:r>
-                        <a:rPr lang="en-US" sz="1400" dirty="0" err="1">
-                          <a:effectLst/>
-                        </a:rPr>
-                        <a:t>merkel</a:t>
-                      </a:r>
-                      <a:r>
-                        <a:rPr lang="en-US" sz="1400" dirty="0">
-                          <a:effectLst/>
-                        </a:rPr>
-                        <a:t> cell carcinoma</a:t>
-                      </a:r>
-                    </a:p>
-                  </a:txBody>
-                  <a:tcPr marL="47625" marR="47625" marT="38100" marB="38100" anchor="ctr"/>
-                </a:tc>
-                <a:extLst>
-                  <a:ext uri="{0D108BD9-81ED-4DB2-BD59-A6C34878D82A}">
-                    <a16:rowId xmlns:a16="http://schemas.microsoft.com/office/drawing/2014/main" val="3070337974"/>
-                  </a:ext>
-                </a:extLst>
-              </a:tr>
-              <a:tr h="545304">
-                <a:tc>
-                  <a:txBody>
-                    <a:bodyPr/>
-                    <a:lstStyle/>
-                    <a:p>
-                      <a:r>
-                        <a:rPr lang="en-US" sz="1400" dirty="0">
-                          <a:effectLst/>
-                        </a:rPr>
-                        <a:t>adrenocortical carcinoma (part g)</a:t>
-                      </a:r>
-                    </a:p>
-                  </a:txBody>
-                  <a:tcPr marL="47625" marR="47625" marT="38100" marB="38100" anchor="ctr"/>
-                </a:tc>
-                <a:tc>
-                  <a:txBody>
-                    <a:bodyPr/>
-                    <a:lstStyle/>
-                    <a:p>
-                      <a:r>
-                        <a:rPr lang="en-US" sz="1400" dirty="0">
-                          <a:effectLst/>
-                        </a:rPr>
-                        <a:t> Extra information in bracket</a:t>
-                      </a:r>
-                    </a:p>
-                  </a:txBody>
-                  <a:tcPr marL="47625" marR="47625" marT="38100" marB="38100" anchor="ctr"/>
-                </a:tc>
-                <a:tc>
-                  <a:txBody>
-                    <a:bodyPr/>
-                    <a:lstStyle/>
-                    <a:p>
-                      <a:r>
-                        <a:rPr lang="en-US" sz="1400" dirty="0">
-                          <a:effectLst/>
-                        </a:rPr>
-                        <a:t> adrenal cortical carcinoma</a:t>
-                      </a:r>
-                    </a:p>
-                  </a:txBody>
-                  <a:tcPr marL="47625" marR="47625" marT="38100" marB="38100" anchor="ctr"/>
-                </a:tc>
-                <a:extLst>
-                  <a:ext uri="{0D108BD9-81ED-4DB2-BD59-A6C34878D82A}">
-                    <a16:rowId xmlns:a16="http://schemas.microsoft.com/office/drawing/2014/main" val="2004295928"/>
-                  </a:ext>
-                </a:extLst>
-              </a:tr>
-              <a:tr h="708487">
-                <a:tc>
-                  <a:txBody>
-                    <a:bodyPr/>
-                    <a:lstStyle/>
-                    <a:p>
-                      <a:r>
-                        <a:rPr lang="en-US" sz="1400" dirty="0" err="1"/>
-                        <a:t>ann</a:t>
-                      </a:r>
-                      <a:r>
-                        <a:rPr lang="en-US" sz="1400" dirty="0"/>
-                        <a:t> arbor stage iii diffuse large b-cell lymphoma</a:t>
-                      </a:r>
-                    </a:p>
-                    <a:p>
-                      <a:endParaRPr lang="en-US" sz="1400" dirty="0"/>
-                    </a:p>
-                  </a:txBody>
-                  <a:tcPr/>
-                </a:tc>
-                <a:tc>
-                  <a:txBody>
-                    <a:bodyPr/>
-                    <a:lstStyle/>
-                    <a:p>
-                      <a:r>
-                        <a:rPr lang="en-US" sz="1400" dirty="0"/>
-                        <a:t> extra information on staging </a:t>
-                      </a:r>
-                    </a:p>
-                  </a:txBody>
-                  <a:tcPr/>
-                </a:tc>
-                <a:tc>
-                  <a:txBody>
-                    <a:bodyPr/>
-                    <a:lstStyle/>
-                    <a:p>
-                      <a:r>
-                        <a:rPr lang="en-US" sz="1400" dirty="0"/>
-                        <a:t>diffuse large b-cell lymphoma</a:t>
-                      </a:r>
-                    </a:p>
-                    <a:p>
-                      <a:endParaRPr lang="en-US" sz="1400" dirty="0"/>
-                    </a:p>
-                  </a:txBody>
-                  <a:tcPr/>
-                </a:tc>
-                <a:extLst>
-                  <a:ext uri="{0D108BD9-81ED-4DB2-BD59-A6C34878D82A}">
-                    <a16:rowId xmlns:a16="http://schemas.microsoft.com/office/drawing/2014/main" val="3939223885"/>
-                  </a:ext>
-                </a:extLst>
-              </a:tr>
-            </a:tbl>
-          </a:graphicData>
-        </a:graphic>
-      </p:graphicFrame>
-    </p:spTree>
-    <p:extLst>
-      <p:ext uri="{BB962C8B-B14F-4D97-AF65-F5344CB8AC3E}">
-        <p14:creationId xmlns:p14="http://schemas.microsoft.com/office/powerpoint/2010/main" val="1932369964"/>
-      </p:ext>
-    </p:extLst>
-  </p:cSld>
-  <p:clrMapOvr>
-    <a:masterClrMapping/>
-  </p:clrMapOvr>
-</p:sld>
-</file>
-
-<file path=ppt/slides/slide8.xml><?xml version="1.0" encoding="utf-8"?>
-<p:sld xmlns:a="http://schemas.openxmlformats.org/drawingml/2006/main" xmlns:r="http://schemas.openxmlformats.org/officeDocument/2006/relationships" xmlns:p="http://schemas.openxmlformats.org/presentationml/2006/main">
-  <p:cSld>
-    <p:spTree>
-      <p:nvGrpSpPr>
-        <p:cNvPr id="1" name="">
-          <a:extLst>
-            <a:ext uri="{FF2B5EF4-FFF2-40B4-BE49-F238E27FC236}">
-              <a16:creationId xmlns:a16="http://schemas.microsoft.com/office/drawing/2014/main" id="{2A01996C-AEFF-C3A9-751E-CB258B5285F7}"/>
-            </a:ext>
-          </a:extLst>
-        </p:cNvPr>
-        <p:cNvGrpSpPr/>
-        <p:nvPr/>
-      </p:nvGrpSpPr>
-      <p:grpSpPr>
-        <a:xfrm>
-          <a:off x="0" y="0"/>
-          <a:ext cx="0" cy="0"/>
-          <a:chOff x="0" y="0"/>
-          <a:chExt cx="0" cy="0"/>
-        </a:xfrm>
-      </p:grpSpPr>
-      <p:sp>
-        <p:nvSpPr>
-          <p:cNvPr id="2" name="Title 1">
-            <a:extLst>
-              <a:ext uri="{FF2B5EF4-FFF2-40B4-BE49-F238E27FC236}">
-                <a16:creationId xmlns:a16="http://schemas.microsoft.com/office/drawing/2014/main" id="{273A313D-6D6A-BE2B-263D-27E5BA15AEB2}"/>
+                <a16:creationId xmlns:a16="http://schemas.microsoft.com/office/drawing/2014/main" id="{11E62623-4BFD-F401-CF0F-6BA335860E7F}"/>
               </a:ext>
             </a:extLst>
           </p:cNvPr>
@@ -17514,7 +21886,7 @@
           <p:cNvPr id="3" name="Content Placeholder 2">
             <a:extLst>
               <a:ext uri="{FF2B5EF4-FFF2-40B4-BE49-F238E27FC236}">
-                <a16:creationId xmlns:a16="http://schemas.microsoft.com/office/drawing/2014/main" id="{7D082753-632D-7BBE-C9E9-F9AE285F5C75}"/>
+                <a16:creationId xmlns:a16="http://schemas.microsoft.com/office/drawing/2014/main" id="{74DAA777-9AE5-7322-5281-E39DFE489E1E}"/>
               </a:ext>
             </a:extLst>
           </p:cNvPr>
@@ -17546,7 +21918,27 @@
                 <a:latin typeface="+mn-lt"/>
                 <a:cs typeface="+mn-cs"/>
               </a:rPr>
-              <a:t> We aimed to standardize tumor names contained in CTR. Tumor names represent a significant proportion of condition names in CTR.</a:t>
+              <a:t> We aimed to standardize tumor names contained in CTR, with respect to the WHO tumor classification system and </a:t>
+            </a:r>
+            <a:r>
+              <a:rPr lang="en-US" sz="1800" dirty="0" err="1">
+                <a:solidFill>
+                  <a:schemeClr val="tx1"/>
+                </a:solidFill>
+                <a:latin typeface="+mn-lt"/>
+                <a:cs typeface="+mn-cs"/>
+              </a:rPr>
+              <a:t>NCIt</a:t>
+            </a:r>
+            <a:r>
+              <a:rPr lang="en-US" sz="1800" dirty="0">
+                <a:solidFill>
+                  <a:schemeClr val="tx1"/>
+                </a:solidFill>
+                <a:latin typeface="+mn-lt"/>
+                <a:cs typeface="+mn-cs"/>
+              </a:rPr>
+              <a:t> (National Cancer Institute Thesaurus)  database.</a:t>
             </a:r>
           </a:p>
           <a:p>
@@ -17569,54 +21961,13 @@
                 <a:latin typeface="+mn-lt"/>
                 <a:cs typeface="+mn-cs"/>
               </a:rPr>
-              <a:t>Unlike other condition names, for tumor names , we have the WHO tumor classification system which is accepted as the gold standard for tumor nomenclature among clinicians. Also, other databases such as the </a:t>
-            </a:r>
-            <a:r>
-              <a:rPr lang="en-US" sz="1800" dirty="0" err="1">
-                <a:solidFill>
-                  <a:schemeClr val="tx1"/>
-                </a:solidFill>
-                <a:latin typeface="+mn-lt"/>
-                <a:cs typeface="+mn-cs"/>
-              </a:rPr>
-              <a:t>NCIt</a:t>
-            </a:r>
-            <a:r>
-              <a:rPr lang="en-US" sz="1800" dirty="0">
-                <a:solidFill>
-                  <a:schemeClr val="tx1"/>
-                </a:solidFill>
-                <a:latin typeface="+mn-lt"/>
-                <a:cs typeface="+mn-cs"/>
-              </a:rPr>
-              <a:t> (National Cancer Institute Thesaurus) have standardized tumor nomenclature. </a:t>
+              <a:t>Unlike other condition names, for tumor names , we have the WHO tumor classification system which is accepted as the gold standard for tumor nomenclature among clinicians. So we evaluate standardization accuracies with respect to only the WHO tumor classification system. </a:t>
             </a:r>
           </a:p>
           <a:p>
-            <a:pPr algn="just"/>
-            <a:endParaRPr lang="en-US" sz="1800" dirty="0">
-              <a:solidFill>
-                <a:schemeClr val="tx1"/>
-              </a:solidFill>
-              <a:latin typeface="+mn-lt"/>
-              <a:cs typeface="+mn-cs"/>
-            </a:endParaRPr>
-          </a:p>
-          <a:p>
-            <a:pPr algn="just"/>
-            <a:r>
-              <a:rPr lang="en-US" sz="1800" dirty="0">
-                <a:solidFill>
-                  <a:schemeClr val="tx1"/>
-                </a:solidFill>
-                <a:latin typeface="+mn-lt"/>
-                <a:cs typeface="+mn-cs"/>
-              </a:rPr>
-              <a:t>A standardized system for tumor nomenclature provides us with a reference for mapping unstandardized tumor names from CTR and a basis for evaluating any method that performs this mapping.</a:t>
-            </a:r>
-          </a:p>
-          <a:p>
-            <a:pPr algn="just"/>
+            <a:pPr marL="0" indent="0" algn="just">
+              <a:buNone/>
+            </a:pPr>
             <a:endParaRPr lang="en-US" sz="1800" dirty="0">
               <a:solidFill>
                 <a:schemeClr val="tx1"/>
@@ -17693,7 +22044,7 @@
           <p:cNvPr id="4" name="Slide Number Placeholder 3">
             <a:extLst>
               <a:ext uri="{FF2B5EF4-FFF2-40B4-BE49-F238E27FC236}">
-                <a16:creationId xmlns:a16="http://schemas.microsoft.com/office/drawing/2014/main" id="{874865C2-BF25-6030-3F39-CD518B0D06B9}"/>
+                <a16:creationId xmlns:a16="http://schemas.microsoft.com/office/drawing/2014/main" id="{7570F7BE-2DA3-DA00-140C-40720C4A2B3B}"/>
               </a:ext>
             </a:extLst>
           </p:cNvPr>
@@ -17715,7 +22066,7 @@
                   <a:schemeClr val="bg1"/>
                 </a:solidFill>
               </a:rPr>
-              <a:t>8</a:t>
+              <a:t>7</a:t>
             </a:fld>
             <a:endParaRPr lang="en-US" dirty="0">
               <a:solidFill>
@@ -17728,7 +22079,7 @@
     </p:spTree>
     <p:extLst>
       <p:ext uri="{BB962C8B-B14F-4D97-AF65-F5344CB8AC3E}">
-        <p14:creationId xmlns:p14="http://schemas.microsoft.com/office/powerpoint/2010/main" val="579408319"/>
+        <p14:creationId xmlns:p14="http://schemas.microsoft.com/office/powerpoint/2010/main" val="198146261"/>
       </p:ext>
     </p:extLst>
   </p:cSld>
@@ -17738,7 +22089,7 @@
 </p:sld>
 </file>
 
-<file path=ppt/slides/slide9.xml><?xml version="1.0" encoding="utf-8"?>
+<file path=ppt/slides/slide8.xml><?xml version="1.0" encoding="utf-8"?>
 <p:sld xmlns:a="http://schemas.openxmlformats.org/drawingml/2006/main" xmlns:r="http://schemas.openxmlformats.org/officeDocument/2006/relationships" xmlns:p="http://schemas.openxmlformats.org/presentationml/2006/main">
   <p:cSld>
     <p:spTree>
@@ -17776,7 +22127,7 @@
                   <a:srgbClr val="FFFFFE"/>
                 </a:solidFill>
               </a:rPr>
-              <a:t>9</a:t>
+              <a:t>8</a:t>
             </a:fld>
             <a:endParaRPr lang="en-US" dirty="0">
               <a:solidFill>
@@ -18581,6 +22932,223 @@
 </p:sld>
 </file>
 
+<file path=ppt/slides/slide9.xml><?xml version="1.0" encoding="utf-8"?>
+<p:sld xmlns:a="http://schemas.openxmlformats.org/drawingml/2006/main" xmlns:r="http://schemas.openxmlformats.org/officeDocument/2006/relationships" xmlns:p="http://schemas.openxmlformats.org/presentationml/2006/main">
+  <p:cSld>
+    <p:spTree>
+      <p:nvGrpSpPr>
+        <p:cNvPr id="1" name="">
+          <a:extLst>
+            <a:ext uri="{FF2B5EF4-FFF2-40B4-BE49-F238E27FC236}">
+              <a16:creationId xmlns:a16="http://schemas.microsoft.com/office/drawing/2014/main" id="{E9CE722E-3FCD-FD45-A0E6-12A95F208F4A}"/>
+            </a:ext>
+          </a:extLst>
+        </p:cNvPr>
+        <p:cNvGrpSpPr/>
+        <p:nvPr/>
+      </p:nvGrpSpPr>
+      <p:grpSpPr>
+        <a:xfrm>
+          <a:off x="0" y="0"/>
+          <a:ext cx="0" cy="0"/>
+          <a:chOff x="0" y="0"/>
+          <a:chExt cx="0" cy="0"/>
+        </a:xfrm>
+      </p:grpSpPr>
+      <p:sp>
+        <p:nvSpPr>
+          <p:cNvPr id="2" name="Title 1">
+            <a:extLst>
+              <a:ext uri="{FF2B5EF4-FFF2-40B4-BE49-F238E27FC236}">
+                <a16:creationId xmlns:a16="http://schemas.microsoft.com/office/drawing/2014/main" id="{C95D30D7-FC81-7A2E-2D28-63AA04393E7F}"/>
+              </a:ext>
+            </a:extLst>
+          </p:cNvPr>
+          <p:cNvSpPr>
+            <a:spLocks noGrp="1"/>
+          </p:cNvSpPr>
+          <p:nvPr>
+            <p:ph type="title"/>
+          </p:nvPr>
+        </p:nvSpPr>
+        <p:spPr>
+          <a:xfrm>
+            <a:off x="87086" y="21771"/>
+            <a:ext cx="10651402" cy="1143000"/>
+          </a:xfrm>
+        </p:spPr>
+        <p:txBody>
+          <a:bodyPr/>
+          <a:lstStyle/>
+          <a:p>
+            <a:r>
+              <a:rPr lang="en-US" dirty="0"/>
+              <a:t>Tumor Name Standardization		</a:t>
+            </a:r>
+          </a:p>
+        </p:txBody>
+      </p:sp>
+      <p:sp>
+        <p:nvSpPr>
+          <p:cNvPr id="3" name="Content Placeholder 2">
+            <a:extLst>
+              <a:ext uri="{FF2B5EF4-FFF2-40B4-BE49-F238E27FC236}">
+                <a16:creationId xmlns:a16="http://schemas.microsoft.com/office/drawing/2014/main" id="{03E5FCE7-F75E-2327-9C5F-55E00B34D11D}"/>
+              </a:ext>
+            </a:extLst>
+          </p:cNvPr>
+          <p:cNvSpPr>
+            <a:spLocks noGrp="1"/>
+          </p:cNvSpPr>
+          <p:nvPr>
+            <p:ph idx="1"/>
+          </p:nvPr>
+        </p:nvSpPr>
+        <p:spPr>
+          <a:xfrm>
+            <a:off x="179670" y="1164771"/>
+            <a:ext cx="11261215" cy="4484914"/>
+          </a:xfrm>
+        </p:spPr>
+        <p:txBody>
+          <a:bodyPr>
+            <a:normAutofit/>
+          </a:bodyPr>
+          <a:lstStyle/>
+          <a:p>
+            <a:pPr algn="just"/>
+            <a:r>
+              <a:rPr lang="en-US" sz="1800" dirty="0">
+                <a:solidFill>
+                  <a:schemeClr val="tx1"/>
+                </a:solidFill>
+                <a:latin typeface="+mn-lt"/>
+                <a:cs typeface="+mn-cs"/>
+              </a:rPr>
+              <a:t>Text matching (edit distances): edit distances are a way of measuring how different two strings (sequences of characters) are. The edit distance is the minimum number of operations needed to transform one string into another. E.g. </a:t>
+            </a:r>
+            <a:r>
+              <a:rPr lang="en-US" sz="1800" dirty="0" err="1">
+                <a:solidFill>
+                  <a:schemeClr val="tx1"/>
+                </a:solidFill>
+                <a:latin typeface="+mn-lt"/>
+                <a:cs typeface="+mn-cs"/>
+              </a:rPr>
+              <a:t>Levenshtein</a:t>
+            </a:r>
+            <a:r>
+              <a:rPr lang="en-US" sz="1800" dirty="0">
+                <a:solidFill>
+                  <a:schemeClr val="tx1"/>
+                </a:solidFill>
+                <a:latin typeface="+mn-lt"/>
+                <a:cs typeface="+mn-cs"/>
+              </a:rPr>
+              <a:t> , cosine, </a:t>
+            </a:r>
+            <a:r>
+              <a:rPr lang="en-US" sz="1800" dirty="0" err="1">
+                <a:solidFill>
+                  <a:schemeClr val="tx1"/>
+                </a:solidFill>
+                <a:latin typeface="+mn-lt"/>
+                <a:cs typeface="+mn-cs"/>
+              </a:rPr>
+              <a:t>Jarro</a:t>
+            </a:r>
+            <a:r>
+              <a:rPr lang="en-US" sz="1800" dirty="0">
+                <a:solidFill>
+                  <a:schemeClr val="tx1"/>
+                </a:solidFill>
+                <a:latin typeface="+mn-lt"/>
+                <a:cs typeface="+mn-cs"/>
+              </a:rPr>
+              <a:t>-Winkler etc. </a:t>
+            </a:r>
+          </a:p>
+          <a:p>
+            <a:pPr algn="just"/>
+            <a:endParaRPr lang="en-US" sz="1800" dirty="0">
+              <a:solidFill>
+                <a:schemeClr val="tx1"/>
+              </a:solidFill>
+              <a:latin typeface="+mn-lt"/>
+              <a:cs typeface="+mn-cs"/>
+            </a:endParaRPr>
+          </a:p>
+          <a:p>
+            <a:endParaRPr lang="en-US" sz="1800" dirty="0">
+              <a:solidFill>
+                <a:srgbClr val="000000"/>
+              </a:solidFill>
+              <a:latin typeface="Times New Roman" panose="02020603050405020304" pitchFamily="18" charset="0"/>
+            </a:endParaRPr>
+          </a:p>
+          <a:p>
+            <a:endParaRPr lang="en-US" sz="1800" dirty="0">
+              <a:solidFill>
+                <a:srgbClr val="000000"/>
+              </a:solidFill>
+              <a:latin typeface="Times New Roman" panose="02020603050405020304" pitchFamily="18" charset="0"/>
+            </a:endParaRPr>
+          </a:p>
+          <a:p>
+            <a:endParaRPr lang="en-US" dirty="0"/>
+          </a:p>
+        </p:txBody>
+      </p:sp>
+      <p:sp>
+        <p:nvSpPr>
+          <p:cNvPr id="4" name="Slide Number Placeholder 3">
+            <a:extLst>
+              <a:ext uri="{FF2B5EF4-FFF2-40B4-BE49-F238E27FC236}">
+                <a16:creationId xmlns:a16="http://schemas.microsoft.com/office/drawing/2014/main" id="{79537068-5C1D-29E8-6A44-3E3880B225DF}"/>
+              </a:ext>
+            </a:extLst>
+          </p:cNvPr>
+          <p:cNvSpPr>
+            <a:spLocks noGrp="1"/>
+          </p:cNvSpPr>
+          <p:nvPr>
+            <p:ph type="sldNum" sz="quarter" idx="12"/>
+          </p:nvPr>
+        </p:nvSpPr>
+        <p:spPr/>
+        <p:txBody>
+          <a:bodyPr/>
+          <a:lstStyle/>
+          <a:p>
+            <a:fld id="{AD40181A-01B0-4CB8-8614-1473649F6741}" type="slidenum">
+              <a:rPr lang="en-US" smtClean="0">
+                <a:solidFill>
+                  <a:schemeClr val="bg1"/>
+                </a:solidFill>
+              </a:rPr>
+              <a:t>9</a:t>
+            </a:fld>
+            <a:endParaRPr lang="en-US" dirty="0">
+              <a:solidFill>
+                <a:schemeClr val="bg1"/>
+              </a:solidFill>
+            </a:endParaRPr>
+          </a:p>
+        </p:txBody>
+      </p:sp>
+    </p:spTree>
+    <p:extLst>
+      <p:ext uri="{BB962C8B-B14F-4D97-AF65-F5344CB8AC3E}">
+        <p14:creationId xmlns:p14="http://schemas.microsoft.com/office/powerpoint/2010/main" val="2648807902"/>
+      </p:ext>
+    </p:extLst>
+  </p:cSld>
+  <p:clrMapOvr>
+    <a:masterClrMapping/>
+  </p:clrMapOvr>
+</p:sld>
+</file>
+
 <file path=ppt/theme/theme1.xml><?xml version="1.0" encoding="utf-8"?>
 <a:theme xmlns:a="http://schemas.openxmlformats.org/drawingml/2006/main" name="RIS_LabArchives_Template">
   <a:themeElements>

--- a/presentations/CANTOS_PPT.pptx
+++ b/presentations/CANTOS_PPT.pptx
@@ -1803,8 +1803,8 @@
         </p:nvSpPr>
         <p:spPr>
           <a:xfrm>
-            <a:off x="0" y="-294409"/>
-            <a:ext cx="11874374" cy="1279750"/>
+            <a:off x="-1" y="-294409"/>
+            <a:ext cx="12398829" cy="1262474"/>
           </a:xfrm>
         </p:spPr>
         <p:txBody>
@@ -1813,7 +1813,7 @@
           <a:p>
             <a:r>
               <a:rPr lang="en-US" dirty="0"/>
-              <a:t>CANTOS : Tumor Name Standardization phase</a:t>
+              <a:t>CANTOS Phase 2: Tumor Name Standardization</a:t>
             </a:r>
           </a:p>
         </p:txBody>
@@ -2435,7 +2435,7 @@
         <p:spPr>
           <a:xfrm>
             <a:off x="0" y="-294409"/>
-            <a:ext cx="11874374" cy="1279750"/>
+            <a:ext cx="12192000" cy="1316304"/>
           </a:xfrm>
         </p:spPr>
         <p:txBody>
@@ -2444,7 +2444,7 @@
           <a:p>
             <a:r>
               <a:rPr lang="en-US" dirty="0"/>
-              <a:t>CANTOS : Tumor Name Standardization phase</a:t>
+              <a:t>CANTOS Phase 2: Tumor Name Standardization</a:t>
             </a:r>
           </a:p>
         </p:txBody>
@@ -2684,7 +2684,7 @@
             <a:pPr algn="ctr"/>
             <a:r>
               <a:rPr lang="en-US" dirty="0"/>
-              <a:t>Compute edit distance: Cosine, </a:t>
+              <a:t>Compute edit distance matrices: Cosine, </a:t>
             </a:r>
             <a:r>
               <a:rPr lang="en-US" dirty="0" err="1"/>
@@ -3454,7 +3454,7 @@
         <p:spPr>
           <a:xfrm>
             <a:off x="87086" y="21771"/>
-            <a:ext cx="10651402" cy="1143000"/>
+            <a:ext cx="12104914" cy="892629"/>
           </a:xfrm>
         </p:spPr>
         <p:txBody>
@@ -3463,7 +3463,7 @@
           <a:p>
             <a:r>
               <a:rPr lang="en-US" dirty="0"/>
-              <a:t>Tumor Name Standardization		</a:t>
+              <a:t>CANTOS Phase 2: Tumor Name Standardization</a:t>
             </a:r>
           </a:p>
         </p:txBody>
@@ -3547,6 +3547,83 @@
               </a:rPr>
               <a:t> etc. </a:t>
             </a:r>
+          </a:p>
+          <a:p>
+            <a:pPr lvl="1" algn="just"/>
+            <a:r>
+              <a:rPr lang="en-US" sz="1400" dirty="0">
+                <a:solidFill>
+                  <a:schemeClr val="tx1"/>
+                </a:solidFill>
+                <a:latin typeface="+mn-lt"/>
+              </a:rPr>
+              <a:t>Example : Lung Cancer  and Liver Cancer :  </a:t>
+            </a:r>
+            <a:r>
+              <a:rPr lang="en-US" sz="1400" dirty="0" err="1">
+                <a:solidFill>
+                  <a:schemeClr val="tx1"/>
+                </a:solidFill>
+                <a:latin typeface="+mn-lt"/>
+              </a:rPr>
+              <a:t>Levenshtein</a:t>
+            </a:r>
+            <a:r>
+              <a:rPr lang="en-US" sz="1400" dirty="0">
+                <a:solidFill>
+                  <a:schemeClr val="tx1"/>
+                </a:solidFill>
+                <a:latin typeface="+mn-lt"/>
+              </a:rPr>
+              <a:t> Distance =4</a:t>
+            </a:r>
+          </a:p>
+          <a:p>
+            <a:pPr lvl="1" algn="just"/>
+            <a:r>
+              <a:rPr lang="en-US" sz="1400" dirty="0">
+                <a:solidFill>
+                  <a:schemeClr val="tx1"/>
+                </a:solidFill>
+                <a:latin typeface="+mn-lt"/>
+                <a:cs typeface="+mn-cs"/>
+              </a:rPr>
+              <a:t>Example:  Lung Cancer and Non Smal</a:t>
+            </a:r>
+            <a:r>
+              <a:rPr lang="en-US" sz="1400" dirty="0">
+                <a:solidFill>
+                  <a:schemeClr val="tx1"/>
+                </a:solidFill>
+                <a:latin typeface="+mn-lt"/>
+              </a:rPr>
+              <a:t>l Cell Lung Cancer:  </a:t>
+            </a:r>
+            <a:r>
+              <a:rPr lang="en-US" sz="1400" dirty="0" err="1">
+                <a:solidFill>
+                  <a:schemeClr val="tx1"/>
+                </a:solidFill>
+                <a:latin typeface="+mn-lt"/>
+              </a:rPr>
+              <a:t>Levenshtein</a:t>
+            </a:r>
+            <a:r>
+              <a:rPr lang="en-US" sz="1400" dirty="0">
+                <a:solidFill>
+                  <a:schemeClr val="tx1"/>
+                </a:solidFill>
+                <a:latin typeface="+mn-lt"/>
+              </a:rPr>
+              <a:t> Distance =14</a:t>
+            </a:r>
+            <a:endParaRPr lang="en-US" sz="1400" dirty="0">
+              <a:solidFill>
+                <a:schemeClr val="tx1"/>
+              </a:solidFill>
+              <a:latin typeface="+mn-lt"/>
+              <a:cs typeface="+mn-cs"/>
+            </a:endParaRPr>
           </a:p>
           <a:p>
             <a:pPr algn="just"/>
@@ -3842,8 +3919,8 @@
         </p:nvSpPr>
         <p:spPr>
           <a:xfrm>
-            <a:off x="0" y="-294409"/>
-            <a:ext cx="11874374" cy="1279750"/>
+            <a:off x="0" y="-294410"/>
+            <a:ext cx="12192000" cy="1414237"/>
           </a:xfrm>
         </p:spPr>
         <p:txBody>
@@ -3852,7 +3929,7 @@
           <a:p>
             <a:r>
               <a:rPr lang="en-US" dirty="0"/>
-              <a:t>CANTOS : Tumor Name Standardization phase</a:t>
+              <a:t>CANTOS phase 2: Tumor Name Standardization</a:t>
             </a:r>
           </a:p>
         </p:txBody>
@@ -4092,7 +4169,7 @@
             <a:pPr algn="ctr"/>
             <a:r>
               <a:rPr lang="en-US" dirty="0"/>
-              <a:t>Compute embedding distance distance</a:t>
+              <a:t>Compute embedding distance matrices</a:t>
             </a:r>
           </a:p>
         </p:txBody>
@@ -5050,14 +5127,14 @@
           <p:nvPr>
             <p:extLst>
               <p:ext uri="{D42A27DB-BD31-4B8C-83A1-F6EECF244321}">
-                <p14:modId xmlns:p14="http://schemas.microsoft.com/office/powerpoint/2010/main" val="1053260055"/>
+                <p14:modId xmlns:p14="http://schemas.microsoft.com/office/powerpoint/2010/main" val="2949739579"/>
               </p:ext>
             </p:extLst>
           </p:nvPr>
         </p:nvGraphicFramePr>
         <p:xfrm>
-          <a:off x="1801585" y="2409242"/>
-          <a:ext cx="8588829" cy="3566160"/>
+          <a:off x="1217259" y="2420128"/>
+          <a:ext cx="10657115" cy="3566160"/>
         </p:xfrm>
         <a:graphic>
           <a:graphicData uri="http://schemas.openxmlformats.org/drawingml/2006/table">
@@ -5066,21 +5143,21 @@
                 <a:tableStyleId>{5C22544A-7EE6-4342-B048-85BDC9FD1C3A}</a:tableStyleId>
               </a:tblPr>
               <a:tblGrid>
-                <a:gridCol w="3493581">
+                <a:gridCol w="4334875">
                   <a:extLst>
                     <a:ext uri="{9D8B030D-6E8A-4147-A177-3AD203B41FA5}">
                       <a16:colId xmlns:a16="http://schemas.microsoft.com/office/drawing/2014/main" val="4253658004"/>
                     </a:ext>
                   </a:extLst>
                 </a:gridCol>
-                <a:gridCol w="2547624">
+                <a:gridCol w="3161120">
                   <a:extLst>
                     <a:ext uri="{9D8B030D-6E8A-4147-A177-3AD203B41FA5}">
                       <a16:colId xmlns:a16="http://schemas.microsoft.com/office/drawing/2014/main" val="987428443"/>
                     </a:ext>
                   </a:extLst>
                 </a:gridCol>
-                <a:gridCol w="2547624">
+                <a:gridCol w="3161120">
                   <a:extLst>
                     <a:ext uri="{9D8B030D-6E8A-4147-A177-3AD203B41FA5}">
                       <a16:colId xmlns:a16="http://schemas.microsoft.com/office/drawing/2014/main" val="544761200"/>
@@ -6307,6 +6384,13 @@
                         <a:rPr lang="en-US" sz="1000" dirty="0" err="1"/>
                         <a:t>clinicalBERT</a:t>
                       </a:r>
+                      <a:endParaRPr lang="en-US" sz="1000" dirty="0"/>
+                    </a:p>
+                    <a:p>
+                      <a:pPr marL="171450" indent="-171450" algn="l">
+                        <a:buFont typeface="Arial" panose="020B0604020202020204" pitchFamily="34" charset="0"/>
+                        <a:buChar char="•"/>
+                      </a:pPr>
                       <a:endParaRPr lang="en-US" sz="1000" dirty="0"/>
                     </a:p>
                   </a:txBody>
@@ -6759,7 +6843,7 @@
           <p:nvPr>
             <p:extLst>
               <p:ext uri="{D42A27DB-BD31-4B8C-83A1-F6EECF244321}">
-                <p14:modId xmlns:p14="http://schemas.microsoft.com/office/powerpoint/2010/main" val="1524688020"/>
+                <p14:modId xmlns:p14="http://schemas.microsoft.com/office/powerpoint/2010/main" val="3961978129"/>
               </p:ext>
             </p:extLst>
           </p:nvPr>
@@ -9691,11 +9775,11 @@
                           <a:effectLst/>
                           <a:uLnTx/>
                           <a:uFillTx/>
-                          <a:latin typeface="Georgia"/>
-                          <a:ea typeface="+mn-ea"/>
-                          <a:cs typeface="+mn-cs"/>
-                        </a:rPr>
-                        <a:t>Text-Matching</a:t>
+                          <a:latin typeface="+mn-lt"/>
+                          <a:ea typeface="+mn-ea"/>
+                          <a:cs typeface="+mn-cs"/>
+                        </a:rPr>
+                        <a:t>Edit Distance</a:t>
                       </a:r>
                     </a:p>
                   </a:txBody>
@@ -10239,7 +10323,7 @@
                         <a:defRPr/>
                       </a:pPr>
                       <a:r>
-                        <a:rPr kumimoji="0" lang="en-US" sz="800" b="0" i="0" u="none" strike="noStrike" kern="1200" cap="none" spc="0" normalizeH="0" baseline="0">
+                        <a:rPr kumimoji="0" lang="en-US" sz="800" b="0" i="0" u="none" strike="noStrike" kern="1200" cap="none" spc="0" normalizeH="0" baseline="0" dirty="0">
                           <a:ln>
                             <a:noFill/>
                           </a:ln>
@@ -10249,11 +10333,11 @@
                           <a:effectLst/>
                           <a:uLnTx/>
                           <a:uFillTx/>
-                          <a:latin typeface="Georgia"/>
-                          <a:ea typeface="+mn-ea"/>
-                          <a:cs typeface="+mn-cs"/>
-                        </a:rPr>
-                        <a:t>Text-Matching</a:t>
+                          <a:latin typeface="+mn-lt"/>
+                          <a:ea typeface="+mn-ea"/>
+                          <a:cs typeface="+mn-cs"/>
+                        </a:rPr>
+                        <a:t>Edit Distance</a:t>
                       </a:r>
                     </a:p>
                   </a:txBody>
@@ -10375,7 +10459,7 @@
                         <a:defRPr/>
                       </a:pPr>
                       <a:r>
-                        <a:rPr kumimoji="0" lang="en-US" sz="800" b="0" i="0" u="none" strike="noStrike" kern="1200" cap="none" spc="0" normalizeH="0" baseline="0">
+                        <a:rPr kumimoji="0" lang="en-US" sz="800" b="0" i="0" u="none" strike="noStrike" kern="1200" cap="none" spc="0" normalizeH="0" baseline="0" dirty="0">
                           <a:ln>
                             <a:noFill/>
                           </a:ln>
@@ -10385,11 +10469,11 @@
                           <a:effectLst/>
                           <a:uLnTx/>
                           <a:uFillTx/>
-                          <a:latin typeface="Georgia"/>
-                          <a:ea typeface="+mn-ea"/>
-                          <a:cs typeface="+mn-cs"/>
-                        </a:rPr>
-                        <a:t>Text-Matching</a:t>
+                          <a:latin typeface="+mn-lt"/>
+                          <a:ea typeface="+mn-ea"/>
+                          <a:cs typeface="+mn-cs"/>
+                        </a:rPr>
+                        <a:t>Edit Distance</a:t>
                       </a:r>
                     </a:p>
                   </a:txBody>
@@ -10559,7 +10643,7 @@
                         <a:defRPr/>
                       </a:pPr>
                       <a:r>
-                        <a:rPr kumimoji="0" lang="en-US" sz="800" b="0" i="0" u="none" strike="noStrike" kern="1200" cap="none" spc="0" normalizeH="0" baseline="0">
+                        <a:rPr kumimoji="0" lang="en-US" sz="800" b="0" i="0" u="none" strike="noStrike" kern="1200" cap="none" spc="0" normalizeH="0" baseline="0" dirty="0">
                           <a:ln>
                             <a:noFill/>
                           </a:ln>
@@ -10569,11 +10653,11 @@
                           <a:effectLst/>
                           <a:uLnTx/>
                           <a:uFillTx/>
-                          <a:latin typeface="Georgia"/>
-                          <a:ea typeface="+mn-ea"/>
-                          <a:cs typeface="+mn-cs"/>
-                        </a:rPr>
-                        <a:t>Text-Matching</a:t>
+                          <a:latin typeface="+mn-lt"/>
+                          <a:ea typeface="+mn-ea"/>
+                          <a:cs typeface="+mn-cs"/>
+                        </a:rPr>
+                        <a:t>Edit Distance</a:t>
                       </a:r>
                     </a:p>
                   </a:txBody>
@@ -10872,11 +10956,11 @@
                           <a:effectLst/>
                           <a:uLnTx/>
                           <a:uFillTx/>
-                          <a:latin typeface="Georgia"/>
-                          <a:ea typeface="+mn-ea"/>
-                          <a:cs typeface="+mn-cs"/>
-                        </a:rPr>
-                        <a:t>Text-Matching</a:t>
+                          <a:latin typeface="+mn-lt"/>
+                          <a:ea typeface="+mn-ea"/>
+                          <a:cs typeface="+mn-cs"/>
+                        </a:rPr>
+                        <a:t>Edit Distance</a:t>
                       </a:r>
                     </a:p>
                   </a:txBody>
@@ -12208,7 +12292,7 @@
           <p:nvPr>
             <p:extLst>
               <p:ext uri="{D42A27DB-BD31-4B8C-83A1-F6EECF244321}">
-                <p14:modId xmlns:p14="http://schemas.microsoft.com/office/powerpoint/2010/main" val="3933766387"/>
+                <p14:modId xmlns:p14="http://schemas.microsoft.com/office/powerpoint/2010/main" val="4223216739"/>
               </p:ext>
             </p:extLst>
           </p:nvPr>
@@ -15252,7 +15336,7 @@
                         <a:defRPr/>
                       </a:pPr>
                       <a:r>
-                        <a:rPr kumimoji="0" lang="en-US" sz="800" b="0" i="0" u="none" strike="noStrike" kern="1200" cap="none" spc="0" normalizeH="0" baseline="0">
+                        <a:rPr kumimoji="0" lang="en-US" sz="800" b="0" i="0" u="none" strike="noStrike" kern="1200" cap="none" spc="0" normalizeH="0" baseline="0" dirty="0">
                           <a:ln>
                             <a:noFill/>
                           </a:ln>
@@ -15266,7 +15350,7 @@
                           <a:ea typeface="+mn-ea"/>
                           <a:cs typeface="+mn-cs"/>
                         </a:rPr>
-                        <a:t>Text-Matching</a:t>
+                        <a:t>Edit Distance</a:t>
                       </a:r>
                     </a:p>
                   </a:txBody>
@@ -15388,7 +15472,7 @@
                         <a:defRPr/>
                       </a:pPr>
                       <a:r>
-                        <a:rPr kumimoji="0" lang="en-US" sz="800" b="0" i="0" u="none" strike="noStrike" kern="1200" cap="none" spc="0" normalizeH="0" baseline="0">
+                        <a:rPr kumimoji="0" lang="en-US" sz="800" b="0" i="0" u="none" strike="noStrike" kern="1200" cap="none" spc="0" normalizeH="0" baseline="0" dirty="0">
                           <a:ln>
                             <a:noFill/>
                           </a:ln>
@@ -15398,11 +15482,11 @@
                           <a:effectLst/>
                           <a:uLnTx/>
                           <a:uFillTx/>
-                          <a:latin typeface="Georgia"/>
-                          <a:ea typeface="+mn-ea"/>
-                          <a:cs typeface="+mn-cs"/>
-                        </a:rPr>
-                        <a:t>Text-Matching</a:t>
+                          <a:latin typeface="+mn-lt"/>
+                          <a:ea typeface="+mn-ea"/>
+                          <a:cs typeface="+mn-cs"/>
+                        </a:rPr>
+                        <a:t>Edit Distance</a:t>
                       </a:r>
                     </a:p>
                   </a:txBody>
@@ -15660,7 +15744,7 @@
                         <a:defRPr/>
                       </a:pPr>
                       <a:r>
-                        <a:rPr kumimoji="0" lang="en-US" sz="800" b="0" i="0" u="none" strike="noStrike" kern="1200" cap="none" spc="0" normalizeH="0" baseline="0">
+                        <a:rPr kumimoji="0" lang="en-US" sz="800" b="0" i="0" u="none" strike="noStrike" kern="1200" cap="none" spc="0" normalizeH="0" baseline="0" dirty="0">
                           <a:ln>
                             <a:noFill/>
                           </a:ln>
@@ -15670,11 +15754,11 @@
                           <a:effectLst/>
                           <a:uLnTx/>
                           <a:uFillTx/>
-                          <a:latin typeface="Georgia"/>
-                          <a:ea typeface="+mn-ea"/>
-                          <a:cs typeface="+mn-cs"/>
-                        </a:rPr>
-                        <a:t>Text-Matching</a:t>
+                          <a:latin typeface="+mn-lt"/>
+                          <a:ea typeface="+mn-ea"/>
+                          <a:cs typeface="+mn-cs"/>
+                        </a:rPr>
+                        <a:t>Edit Distance</a:t>
                       </a:r>
                     </a:p>
                   </a:txBody>
@@ -15796,7 +15880,7 @@
                         <a:defRPr/>
                       </a:pPr>
                       <a:r>
-                        <a:rPr kumimoji="0" lang="en-US" sz="800" b="0" i="0" u="none" strike="noStrike" kern="1200" cap="none" spc="0" normalizeH="0" baseline="0">
+                        <a:rPr kumimoji="0" lang="en-US" sz="800" b="0" i="0" u="none" strike="noStrike" kern="1200" cap="none" spc="0" normalizeH="0" baseline="0" dirty="0">
                           <a:ln>
                             <a:noFill/>
                           </a:ln>
@@ -15806,11 +15890,11 @@
                           <a:effectLst/>
                           <a:uLnTx/>
                           <a:uFillTx/>
-                          <a:latin typeface="Georgia"/>
-                          <a:ea typeface="+mn-ea"/>
-                          <a:cs typeface="+mn-cs"/>
-                        </a:rPr>
-                        <a:t>Text-Matching</a:t>
+                          <a:latin typeface="+mn-lt"/>
+                          <a:ea typeface="+mn-ea"/>
+                          <a:cs typeface="+mn-cs"/>
+                        </a:rPr>
+                        <a:t>Edit Distance</a:t>
                       </a:r>
                     </a:p>
                   </a:txBody>
@@ -15932,7 +16016,7 @@
                         <a:defRPr/>
                       </a:pPr>
                       <a:r>
-                        <a:rPr kumimoji="0" lang="en-US" sz="800" b="0" i="0" u="none" strike="noStrike" kern="1200" cap="none" spc="0" normalizeH="0" baseline="0">
+                        <a:rPr kumimoji="0" lang="en-US" sz="800" b="0" i="0" u="none" strike="noStrike" kern="1200" cap="none" spc="0" normalizeH="0" baseline="0" dirty="0">
                           <a:ln>
                             <a:noFill/>
                           </a:ln>
@@ -15942,11 +16026,11 @@
                           <a:effectLst/>
                           <a:uLnTx/>
                           <a:uFillTx/>
-                          <a:latin typeface="Georgia"/>
-                          <a:ea typeface="+mn-ea"/>
-                          <a:cs typeface="+mn-cs"/>
-                        </a:rPr>
-                        <a:t>Text-Matching</a:t>
+                          <a:latin typeface="+mn-lt"/>
+                          <a:ea typeface="+mn-ea"/>
+                          <a:cs typeface="+mn-cs"/>
+                        </a:rPr>
+                        <a:t>Edit Distance</a:t>
                       </a:r>
                     </a:p>
                   </a:txBody>
@@ -16068,7 +16152,7 @@
                         <a:defRPr/>
                       </a:pPr>
                       <a:r>
-                        <a:rPr kumimoji="0" lang="en-US" sz="800" b="0" i="0" u="none" strike="noStrike" kern="1200" cap="none" spc="0" normalizeH="0" baseline="0">
+                        <a:rPr kumimoji="0" lang="en-US" sz="800" b="0" i="0" u="none" strike="noStrike" kern="1200" cap="none" spc="0" normalizeH="0" baseline="0" dirty="0">
                           <a:ln>
                             <a:noFill/>
                           </a:ln>
@@ -16078,11 +16162,11 @@
                           <a:effectLst/>
                           <a:uLnTx/>
                           <a:uFillTx/>
-                          <a:latin typeface="Georgia"/>
-                          <a:ea typeface="+mn-ea"/>
-                          <a:cs typeface="+mn-cs"/>
-                        </a:rPr>
-                        <a:t>Text-Matching</a:t>
+                          <a:latin typeface="+mn-lt"/>
+                          <a:ea typeface="+mn-ea"/>
+                          <a:cs typeface="+mn-cs"/>
+                        </a:rPr>
+                        <a:t>Edit Distance</a:t>
                       </a:r>
                     </a:p>
                   </a:txBody>
@@ -18087,8 +18171,47 @@
                 </a:solidFill>
                 <a:latin typeface="Times New Roman" panose="02020603050405020304" pitchFamily="18" charset="0"/>
               </a:rPr>
-              <a:t>As CTR updates with new tumor names, CANTOS must be rerun and validated repeatedly. Additionally, the pipeline is computationally expensive and should not be used in clinical or diagnostic settings due to potential model biases and lack of regulatory validation.</a:t>
+              <a:t>As CTR updates with new tumor names, CANTOS must be rerun and validated repeatedly. </a:t>
             </a:r>
+          </a:p>
+          <a:p>
+            <a:pPr lvl="1"/>
+            <a:endParaRPr lang="en-US" sz="1400" dirty="0">
+              <a:solidFill>
+                <a:schemeClr val="tx1"/>
+              </a:solidFill>
+              <a:latin typeface="Times New Roman" panose="02020603050405020304" pitchFamily="18" charset="0"/>
+            </a:endParaRPr>
+          </a:p>
+          <a:p>
+            <a:pPr lvl="1"/>
+            <a:r>
+              <a:rPr lang="en-US" sz="1400" dirty="0">
+                <a:solidFill>
+                  <a:schemeClr val="tx1"/>
+                </a:solidFill>
+                <a:latin typeface="Times New Roman" panose="02020603050405020304" pitchFamily="18" charset="0"/>
+              </a:rPr>
+              <a:t>Standardization accuracy is not very high and thus CANTOS is solely for research analysis purposes and should not be applied in clinical or diagnostic settings.</a:t>
+            </a:r>
+          </a:p>
+          <a:p>
+            <a:pPr lvl="1"/>
+            <a:endParaRPr lang="en-US" sz="1400" dirty="0">
+              <a:solidFill>
+                <a:schemeClr val="tx1"/>
+              </a:solidFill>
+              <a:latin typeface="Times New Roman" panose="02020603050405020304" pitchFamily="18" charset="0"/>
+            </a:endParaRPr>
+          </a:p>
+          <a:p>
+            <a:pPr lvl="1"/>
+            <a:endParaRPr lang="en-US" sz="1400" dirty="0">
+              <a:solidFill>
+                <a:schemeClr val="tx1"/>
+              </a:solidFill>
+              <a:latin typeface="Times New Roman" panose="02020603050405020304" pitchFamily="18" charset="0"/>
+            </a:endParaRPr>
           </a:p>
           <a:p>
             <a:endParaRPr lang="en-US" sz="1400" b="0" i="0" u="none" strike="noStrike" dirty="0">
@@ -18237,7 +18360,12 @@
             <p:ph type="title"/>
           </p:nvPr>
         </p:nvSpPr>
-        <p:spPr/>
+        <p:spPr>
+          <a:xfrm>
+            <a:off x="0" y="-174171"/>
+            <a:ext cx="9753600" cy="1444752"/>
+          </a:xfrm>
+        </p:spPr>
         <p:txBody>
           <a:bodyPr/>
           <a:lstStyle/>
@@ -22159,7 +22287,7 @@
           <a:p>
             <a:r>
               <a:rPr lang="en-US" dirty="0"/>
-              <a:t>CANTOS : Tumor identification phase</a:t>
+              <a:t>CANTOS phase 1: Tumor identification</a:t>
             </a:r>
           </a:p>
         </p:txBody>
@@ -22973,8 +23101,8 @@
         </p:nvSpPr>
         <p:spPr>
           <a:xfrm>
-            <a:off x="87086" y="21771"/>
-            <a:ext cx="10651402" cy="1143000"/>
+            <a:off x="87085" y="21771"/>
+            <a:ext cx="12279086" cy="925286"/>
           </a:xfrm>
         </p:spPr>
         <p:txBody>
@@ -22983,7 +23111,7 @@
           <a:p>
             <a:r>
               <a:rPr lang="en-US" dirty="0"/>
-              <a:t>Tumor Name Standardization		</a:t>
+              <a:t>CANTOS PHASE 2: Tumor Name Standardization		</a:t>
             </a:r>
           </a:p>
         </p:txBody>
@@ -23067,6 +23195,92 @@
               </a:rPr>
               <a:t>-Winkler etc. </a:t>
             </a:r>
+          </a:p>
+          <a:p>
+            <a:pPr lvl="1" algn="just"/>
+            <a:endParaRPr lang="en-US" sz="1400" dirty="0">
+              <a:solidFill>
+                <a:schemeClr val="tx1"/>
+              </a:solidFill>
+              <a:latin typeface="+mn-lt"/>
+            </a:endParaRPr>
+          </a:p>
+          <a:p>
+            <a:pPr lvl="1" algn="just"/>
+            <a:r>
+              <a:rPr lang="en-US" sz="1400" dirty="0">
+                <a:solidFill>
+                  <a:schemeClr val="tx1"/>
+                </a:solidFill>
+                <a:latin typeface="+mn-lt"/>
+              </a:rPr>
+              <a:t>Example : Lung Cancer  and Liver Cancer :  </a:t>
+            </a:r>
+            <a:r>
+              <a:rPr lang="en-US" sz="1400" dirty="0" err="1">
+                <a:solidFill>
+                  <a:schemeClr val="tx1"/>
+                </a:solidFill>
+                <a:latin typeface="+mn-lt"/>
+              </a:rPr>
+              <a:t>Levenshtein</a:t>
+            </a:r>
+            <a:r>
+              <a:rPr lang="en-US" sz="1400" dirty="0">
+                <a:solidFill>
+                  <a:schemeClr val="tx1"/>
+                </a:solidFill>
+                <a:latin typeface="+mn-lt"/>
+              </a:rPr>
+              <a:t> Distance =4</a:t>
+            </a:r>
+          </a:p>
+          <a:p>
+            <a:pPr lvl="1" algn="just"/>
+            <a:r>
+              <a:rPr lang="en-US" sz="1400" dirty="0">
+                <a:solidFill>
+                  <a:schemeClr val="tx1"/>
+                </a:solidFill>
+                <a:latin typeface="+mn-lt"/>
+                <a:cs typeface="+mn-cs"/>
+              </a:rPr>
+              <a:t>Example:  Lung Cancer and Non Smal</a:t>
+            </a:r>
+            <a:r>
+              <a:rPr lang="en-US" sz="1400" dirty="0">
+                <a:solidFill>
+                  <a:schemeClr val="tx1"/>
+                </a:solidFill>
+                <a:latin typeface="+mn-lt"/>
+              </a:rPr>
+              <a:t>l Cell Lung Cancer:  </a:t>
+            </a:r>
+            <a:r>
+              <a:rPr lang="en-US" sz="1400" dirty="0" err="1">
+                <a:solidFill>
+                  <a:schemeClr val="tx1"/>
+                </a:solidFill>
+                <a:latin typeface="+mn-lt"/>
+              </a:rPr>
+              <a:t>Levenshtein</a:t>
+            </a:r>
+            <a:r>
+              <a:rPr lang="en-US" sz="1400" dirty="0">
+                <a:solidFill>
+                  <a:schemeClr val="tx1"/>
+                </a:solidFill>
+                <a:latin typeface="+mn-lt"/>
+              </a:rPr>
+              <a:t> Distance =14</a:t>
+            </a:r>
+            <a:endParaRPr lang="en-US" sz="1400" dirty="0">
+              <a:solidFill>
+                <a:schemeClr val="tx1"/>
+              </a:solidFill>
+              <a:latin typeface="+mn-lt"/>
+              <a:cs typeface="+mn-cs"/>
+            </a:endParaRPr>
           </a:p>
           <a:p>
             <a:pPr algn="just"/>

--- a/presentations/CANTOS_PPT.pptx
+++ b/presentations/CANTOS_PPT.pptx
@@ -5127,7 +5127,7 @@
           <p:nvPr>
             <p:extLst>
               <p:ext uri="{D42A27DB-BD31-4B8C-83A1-F6EECF244321}">
-                <p14:modId xmlns:p14="http://schemas.microsoft.com/office/powerpoint/2010/main" val="2949739579"/>
+                <p14:modId xmlns:p14="http://schemas.microsoft.com/office/powerpoint/2010/main" val="3056054854"/>
               </p:ext>
             </p:extLst>
           </p:nvPr>
@@ -18171,7 +18171,7 @@
                 </a:solidFill>
                 <a:latin typeface="Times New Roman" panose="02020603050405020304" pitchFamily="18" charset="0"/>
               </a:rPr>
-              <a:t>As CTR updates with new tumor names, CANTOS must be rerun and validated repeatedly. </a:t>
+              <a:t>As CTR updates with new tumor names, CANTOS must be rerun and validated repeatedly.</a:t>
             </a:r>
           </a:p>
           <a:p>
@@ -22089,7 +22089,7 @@
                 <a:latin typeface="+mn-lt"/>
                 <a:cs typeface="+mn-cs"/>
               </a:rPr>
-              <a:t>Unlike other condition names, for tumor names , we have the WHO tumor classification system which is accepted as the gold standard for tumor nomenclature among clinicians. So we evaluate standardization accuracies with respect to only the WHO tumor classification system. </a:t>
+              <a:t>Unlike other condition names, for tumor names , we have the WHO tumor classification system which is accepted as the gold standard for tumor nomenclature among clinicians. We evaluate standardization accuracies with respect to only the WHO tumor classification system. </a:t>
             </a:r>
           </a:p>
           <a:p>
